--- a/decks/ikea-retail-bi.pptx
+++ b/decks/ikea-retail-bi.pptx
@@ -12,9 +12,16 @@
     <p:sldId id="260" r:id="rId6"/>
     <p:sldId id="261" r:id="rId7"/>
     <p:sldId id="262" r:id="rId8"/>
+    <p:sldId id="263" r:id="rId9"/>
+    <p:sldId id="264" r:id="rId10"/>
+    <p:sldId id="265" r:id="rId11"/>
+    <p:sldId id="266" r:id="rId12"/>
+    <p:sldId id="267" r:id="rId13"/>
+    <p:sldId id="268" r:id="rId14"/>
+    <p:sldId id="269" r:id="rId15"/>
   </p:sldIdLst>
   <p:notesMasterIdLst>
-    <p:notesMasterId r:id="rId9"/>
+    <p:notesMasterId r:id="rId16"/>
   </p:notesMasterIdLst>
   <p:sldSz cx="12191695" cy="6858000"/>
   <p:notesSz cx="6858000" cy="12191695"/>
@@ -111,6 +118,900 @@
     </a:lvl9pPr>
   </p:defaultTextStyle>
 </p:presentation>
+</file>
+
+<file path=ppt/charts/chart22.xml><?xml version="1.0" encoding="utf-8"?>
+<c:chartSpace xmlns:c="http://schemas.openxmlformats.org/drawingml/2006/chart" xmlns:a="http://schemas.openxmlformats.org/drawingml/2006/main" xmlns:r="http://schemas.openxmlformats.org/officeDocument/2006/relationships">
+  <c:date1904 val="0"/>
+  <c:roundedCorners val="1"/>
+  <c:chart>
+    <c:autoTitleDeleted val="1"/>
+    <c:plotArea>
+      <c:layout/>
+      <c:barChart>
+        <c:barDir val="col"/>
+        <c:grouping val="clustered"/>
+        <c:varyColors val="0"/>
+        <c:ser>
+          <c:idx val="0"/>
+          <c:order val="0"/>
+          <c:tx>
+            <c:strRef>
+              <c:f>Sheet1!$B$1</c:f>
+              <c:strCache>
+                <c:ptCount val="1"/>
+                <c:pt idx="0">
+                  <c:v>Share of incidents (%)</c:v>
+                </c:pt>
+              </c:strCache>
+            </c:strRef>
+          </c:tx>
+          <c:spPr>
+            <a:solidFill>
+              <a:srgbClr val="3B82F6"/>
+            </a:solidFill>
+            <a:effectLst/>
+          </c:spPr>
+          <c:invertIfNegative val="0"/>
+          <c:dLbls>
+            <c:numFmt formatCode="#,##0" sourceLinked="0"/>
+            <c:txPr>
+              <a:bodyPr/>
+              <a:lstStyle/>
+              <a:p>
+                <a:pPr>
+                  <a:defRPr b="0" i="0" strike="noStrike" sz="1000" u="none">
+                    <a:solidFill>
+                      <a:srgbClr val="E2E8F0"/>
+                    </a:solidFill>
+                    <a:latin typeface="Segoe UI"/>
+                  </a:defRPr>
+                </a:pPr>
+              </a:p>
+            </c:txPr>
+            <c:showLegendKey val="0"/>
+            <c:showVal val="1"/>
+            <c:showCatName val="0"/>
+            <c:showSerName val="0"/>
+            <c:showPercent val="0"/>
+            <c:showBubbleSize val="0"/>
+            <c:showLeaderLines val="0"/>
+          </c:dLbls>
+          <c:dPt>
+            <c:idx val="0"/>
+            <c:invertIfNegative val="0"/>
+            <c:bubble3D val="0"/>
+            <c:spPr>
+              <a:solidFill>
+                <a:srgbClr val="3B82F6"/>
+              </a:solidFill>
+              <a:effectLst/>
+            </c:spPr>
+          </c:dPt>
+          <c:dPt>
+            <c:idx val="1"/>
+            <c:invertIfNegative val="0"/>
+            <c:bubble3D val="0"/>
+            <c:spPr>
+              <a:solidFill>
+                <a:srgbClr val="06B6D4"/>
+              </a:solidFill>
+              <a:effectLst/>
+            </c:spPr>
+          </c:dPt>
+          <c:dPt>
+            <c:idx val="2"/>
+            <c:invertIfNegative val="0"/>
+            <c:bubble3D val="0"/>
+            <c:spPr>
+              <a:solidFill>
+                <a:srgbClr val="22D3A0"/>
+              </a:solidFill>
+              <a:effectLst/>
+            </c:spPr>
+          </c:dPt>
+          <c:dPt>
+            <c:idx val="3"/>
+            <c:invertIfNegative val="0"/>
+            <c:bubble3D val="0"/>
+            <c:spPr>
+              <a:solidFill>
+                <a:srgbClr val="F59E0B"/>
+              </a:solidFill>
+              <a:effectLst/>
+            </c:spPr>
+          </c:dPt>
+          <c:dPt>
+            <c:idx val="4"/>
+            <c:invertIfNegative val="0"/>
+            <c:bubble3D val="0"/>
+            <c:spPr>
+              <a:solidFill>
+                <a:srgbClr val="3B82F6"/>
+              </a:solidFill>
+              <a:effectLst/>
+            </c:spPr>
+          </c:dPt>
+          <c:cat>
+            <c:multiLvlStrRef>
+              <c:f>Sheet1!$A$2:$A$6</c:f>
+              <c:multiLvlStrCache>
+                <c:ptCount val="5"/>
+                <c:lvl>
+                  <c:pt idx="0">
+                    <c:v>Silent schedule failures</c:v>
+                  </c:pt>
+                  <c:pt idx="1">
+                    <c:v>Definition mismatches</c:v>
+                  </c:pt>
+                  <c:pt idx="2">
+                    <c:v>Source quirks</c:v>
+                  </c:pt>
+                  <c:pt idx="3">
+                    <c:v>Load discrepancies</c:v>
+                  </c:pt>
+                  <c:pt idx="4">
+                    <c:v>Logic bugs</c:v>
+                  </c:pt>
+                </c:lvl>
+              </c:multiLvlStrCache>
+            </c:multiLvlStrRef>
+          </c:cat>
+          <c:val>
+            <c:numRef>
+              <c:f>Sheet1!$B$2:$B$6</c:f>
+              <c:numCache>
+                <c:formatCode>General</c:formatCode>
+                <c:ptCount val="5"/>
+                <c:pt idx="0">
+                  <c:v>30</c:v>
+                </c:pt>
+                <c:pt idx="1">
+                  <c:v>25</c:v>
+                </c:pt>
+                <c:pt idx="2">
+                  <c:v>20</c:v>
+                </c:pt>
+                <c:pt idx="3">
+                  <c:v>15</c:v>
+                </c:pt>
+                <c:pt idx="4">
+                  <c:v>10</c:v>
+                </c:pt>
+              </c:numCache>
+            </c:numRef>
+          </c:val>
+        </c:ser>
+        <c:dLbls>
+          <c:numFmt formatCode="#,##0" sourceLinked="0"/>
+          <c:txPr>
+            <a:bodyPr/>
+            <a:lstStyle/>
+            <a:p>
+              <a:pPr>
+                <a:defRPr b="0" i="0" strike="noStrike" sz="1000" u="none">
+                  <a:solidFill>
+                    <a:srgbClr val="E2E8F0"/>
+                  </a:solidFill>
+                  <a:latin typeface="Segoe UI"/>
+                </a:defRPr>
+              </a:pPr>
+            </a:p>
+          </c:txPr>
+          <c:showLegendKey val="0"/>
+          <c:showVal val="1"/>
+          <c:showCatName val="0"/>
+          <c:showSerName val="0"/>
+          <c:showPercent val="0"/>
+          <c:showBubbleSize val="0"/>
+          <c:showLeaderLines val="0"/>
+        </c:dLbls>
+        <c:gapWidth val="55"/>
+        <c:overlap val="0"/>
+        <c:axId val="2094734554"/>
+        <c:axId val="2094734552"/>
+        <c:axId val="2094734556"/>
+      </c:barChart>
+      <c:catAx>
+        <c:axId val="2094734554"/>
+        <c:scaling>
+          <c:orientation val="minMax"/>
+        </c:scaling>
+        <c:delete val="0"/>
+        <c:axPos val="b"/>
+        <c:numFmt formatCode="General" sourceLinked="1"/>
+        <c:majorTickMark val="out"/>
+        <c:minorTickMark val="none"/>
+        <c:tickLblPos val="low"/>
+        <c:spPr>
+          <a:ln w="12700" cap="flat">
+            <a:solidFill>
+              <a:srgbClr val="24365A"/>
+            </a:solidFill>
+            <a:prstDash val="solid"/>
+            <a:round/>
+          </a:ln>
+        </c:spPr>
+        <c:txPr>
+          <a:bodyPr/>
+          <a:lstStyle/>
+          <a:p>
+            <a:pPr>
+              <a:defRPr sz="1100" b="0" i="0" u="none" strike="noStrike">
+                <a:solidFill>
+                  <a:srgbClr val="94A3B8"/>
+                </a:solidFill>
+                <a:latin typeface="Segoe UI"/>
+              </a:defRPr>
+            </a:pPr>
+            <a:endParaRPr lang="en-US"/>
+          </a:p>
+        </c:txPr>
+        <c:crossAx val="2094734552"/>
+        <c:crosses val="autoZero"/>
+        <c:auto val="1"/>
+        <c:lblAlgn val="ctr"/>
+        <c:noMultiLvlLbl val="1"/>
+      </c:catAx>
+      <c:valAx>
+        <c:axId val="2094734552"/>
+        <c:scaling>
+          <c:orientation val="minMax"/>
+        </c:scaling>
+        <c:delete val="0"/>
+        <c:axPos val="l"/>
+        <c:majorGridlines>
+          <c:spPr>
+            <a:ln w="12700" cap="flat">
+              <a:solidFill>
+                <a:srgbClr val="18243D"/>
+              </a:solidFill>
+              <a:prstDash val="solid"/>
+              <a:round/>
+            </a:ln>
+          </c:spPr>
+        </c:majorGridlines>
+        <c:numFmt formatCode="General" sourceLinked="0"/>
+        <c:majorTickMark val="out"/>
+        <c:minorTickMark val="none"/>
+        <c:tickLblPos val="nextTo"/>
+        <c:spPr>
+          <a:ln w="12700" cap="flat">
+            <a:solidFill>
+              <a:srgbClr val="24365A"/>
+            </a:solidFill>
+            <a:prstDash val="solid"/>
+            <a:round/>
+          </a:ln>
+        </c:spPr>
+        <c:txPr>
+          <a:bodyPr/>
+          <a:lstStyle/>
+          <a:p>
+            <a:pPr>
+              <a:defRPr sz="1000" b="0" i="0" u="none" strike="noStrike">
+                <a:solidFill>
+                  <a:srgbClr val="94A3B8"/>
+                </a:solidFill>
+                <a:latin typeface="Segoe UI"/>
+              </a:defRPr>
+            </a:pPr>
+            <a:endParaRPr lang="en-US"/>
+          </a:p>
+        </c:txPr>
+        <c:crossAx val="2094734554"/>
+        <c:crosses val="autoZero"/>
+        <c:crossBetween val="between"/>
+      </c:valAx>
+      <c:spPr>
+        <a:solidFill>
+          <a:srgbClr val="0D1420"/>
+        </a:solidFill>
+        <a:ln>
+          <a:noFill/>
+        </a:ln>
+        <a:effectLst/>
+      </c:spPr>
+    </c:plotArea>
+    <c:plotVisOnly val="1"/>
+    <c:dispBlanksAs val="span"/>
+  </c:chart>
+  <c:spPr>
+    <a:solidFill>
+      <a:srgbClr val="0D1420"/>
+    </a:solidFill>
+    <a:ln w="12700" cap="flat">
+      <a:solidFill>
+        <a:srgbClr val="24365A"/>
+      </a:solidFill>
+    </a:ln>
+    <a:effectLst/>
+  </c:spPr>
+  <c:externalData r:id="rId1">
+    <c:autoUpdate val="0"/>
+  </c:externalData>
+</c:chartSpace>
+</file>
+
+<file path=ppt/charts/chart23.xml><?xml version="1.0" encoding="utf-8"?>
+<c:chartSpace xmlns:c="http://schemas.openxmlformats.org/drawingml/2006/chart" xmlns:a="http://schemas.openxmlformats.org/drawingml/2006/main" xmlns:r="http://schemas.openxmlformats.org/officeDocument/2006/relationships">
+  <c:date1904 val="0"/>
+  <c:roundedCorners val="1"/>
+  <c:chart>
+    <c:autoTitleDeleted val="1"/>
+    <c:plotArea>
+      <c:layout/>
+      <c:lineChart>
+        <c:varyColors val="0"/>
+        <c:ser>
+          <c:idx val="0"/>
+          <c:order val="0"/>
+          <c:tx>
+            <c:strRef>
+              <c:f>Sheet1!$B$1</c:f>
+              <c:strCache>
+                <c:ptCount val="1"/>
+                <c:pt idx="0">
+                  <c:v>Unexplained seam mismatches</c:v>
+                </c:pt>
+              </c:strCache>
+            </c:strRef>
+          </c:tx>
+          <c:spPr>
+            <a:solidFill>
+              <a:srgbClr val="3B82F6"/>
+            </a:solidFill>
+            <a:ln w="31750" cap="flat">
+              <a:solidFill>
+                <a:srgbClr val="3B82F6"/>
+              </a:solidFill>
+              <a:prstDash val="solid"/>
+              <a:round/>
+            </a:ln>
+            <a:effectLst/>
+          </c:spPr>
+          <c:invertIfNegative val="0"/>
+          <c:dLbls>
+            <c:numFmt formatCode="#,##0" sourceLinked="0"/>
+            <c:txPr>
+              <a:bodyPr/>
+              <a:lstStyle/>
+              <a:p>
+                <a:pPr>
+                  <a:defRPr b="0" i="0" strike="noStrike" sz="1200" u="none">
+                    <a:solidFill>
+                      <a:srgbClr val="000000"/>
+                    </a:solidFill>
+                    <a:latin typeface="Arial"/>
+                  </a:defRPr>
+                </a:pPr>
+              </a:p>
+            </c:txPr>
+            <c:showLegendKey val="0"/>
+            <c:showVal val="0"/>
+            <c:showCatName val="0"/>
+            <c:showSerName val="0"/>
+            <c:showPercent val="0"/>
+            <c:showBubbleSize val="0"/>
+            <c:showLeaderLines val="0"/>
+          </c:dLbls>
+          <c:marker>
+            <c:symbol val="circle"/>
+            <c:size val="6"/>
+            <c:spPr>
+              <a:solidFill>
+                <a:srgbClr val="3B82F6"/>
+              </a:solidFill>
+              <a:ln w="9525" cap="flat">
+                <a:solidFill>
+                  <a:srgbClr val="3B82F6"/>
+                </a:solidFill>
+                <a:prstDash val="solid"/>
+                <a:round/>
+              </a:ln>
+              <a:effectLst/>
+            </c:spPr>
+          </c:marker>
+          <c:cat>
+            <c:multiLvlStrRef>
+              <c:f>Sheet1!$A$2:$A$7</c:f>
+              <c:multiLvlStrCache>
+                <c:ptCount val="6"/>
+                <c:lvl>
+                  <c:pt idx="0">
+                    <c:v>W1</c:v>
+                  </c:pt>
+                  <c:pt idx="1">
+                    <c:v>W2</c:v>
+                  </c:pt>
+                  <c:pt idx="2">
+                    <c:v>W3</c:v>
+                  </c:pt>
+                  <c:pt idx="3">
+                    <c:v>W4</c:v>
+                  </c:pt>
+                  <c:pt idx="4">
+                    <c:v>W5</c:v>
+                  </c:pt>
+                  <c:pt idx="5">
+                    <c:v>W6</c:v>
+                  </c:pt>
+                </c:lvl>
+              </c:multiLvlStrCache>
+            </c:multiLvlStrRef>
+          </c:cat>
+          <c:val>
+            <c:numRef>
+              <c:f>Sheet1!$B$2:$B$7</c:f>
+              <c:numCache>
+                <c:formatCode>General</c:formatCode>
+                <c:ptCount val="6"/>
+                <c:pt idx="0">
+                  <c:v>14</c:v>
+                </c:pt>
+                <c:pt idx="1">
+                  <c:v>11</c:v>
+                </c:pt>
+                <c:pt idx="2">
+                  <c:v>9</c:v>
+                </c:pt>
+                <c:pt idx="3">
+                  <c:v>7</c:v>
+                </c:pt>
+                <c:pt idx="4">
+                  <c:v>5</c:v>
+                </c:pt>
+                <c:pt idx="5">
+                  <c:v>4</c:v>
+                </c:pt>
+              </c:numCache>
+            </c:numRef>
+          </c:val>
+          <c:smooth val="0"/>
+        </c:ser>
+        <c:dLbls>
+          <c:numFmt formatCode="#,##0" sourceLinked="0"/>
+          <c:txPr>
+            <a:bodyPr/>
+            <a:lstStyle/>
+            <a:p>
+              <a:pPr>
+                <a:defRPr b="0" i="0" strike="noStrike" sz="1200" u="none">
+                  <a:solidFill>
+                    <a:srgbClr val="000000"/>
+                  </a:solidFill>
+                  <a:latin typeface="Arial"/>
+                </a:defRPr>
+              </a:pPr>
+            </a:p>
+          </c:txPr>
+          <c:showLegendKey val="0"/>
+          <c:showVal val="0"/>
+          <c:showCatName val="0"/>
+          <c:showSerName val="0"/>
+          <c:showPercent val="0"/>
+          <c:showBubbleSize val="0"/>
+          <c:showLeaderLines val="0"/>
+        </c:dLbls>
+        <c:marker val="1"/>
+        <c:axId val="2094734554"/>
+        <c:axId val="2094734552"/>
+        <c:axId val="2094734556"/>
+      </c:lineChart>
+      <c:catAx>
+        <c:axId val="2094734554"/>
+        <c:scaling>
+          <c:orientation val="minMax"/>
+        </c:scaling>
+        <c:delete val="0"/>
+        <c:axPos val="b"/>
+        <c:numFmt formatCode="General" sourceLinked="1"/>
+        <c:majorTickMark val="out"/>
+        <c:minorTickMark val="none"/>
+        <c:tickLblPos val="low"/>
+        <c:spPr>
+          <a:ln w="12700" cap="flat">
+            <a:solidFill>
+              <a:srgbClr val="24365A"/>
+            </a:solidFill>
+            <a:prstDash val="solid"/>
+            <a:round/>
+          </a:ln>
+        </c:spPr>
+        <c:txPr>
+          <a:bodyPr/>
+          <a:lstStyle/>
+          <a:p>
+            <a:pPr>
+              <a:defRPr sz="1100" b="0" i="0" u="none" strike="noStrike">
+                <a:solidFill>
+                  <a:srgbClr val="94A3B8"/>
+                </a:solidFill>
+                <a:latin typeface="Segoe UI"/>
+              </a:defRPr>
+            </a:pPr>
+            <a:endParaRPr lang="en-US"/>
+          </a:p>
+        </c:txPr>
+        <c:crossAx val="2094734552"/>
+        <c:crosses val="autoZero"/>
+        <c:auto val="1"/>
+        <c:lblAlgn val="ctr"/>
+        <c:noMultiLvlLbl val="1"/>
+      </c:catAx>
+      <c:valAx>
+        <c:axId val="2094734552"/>
+        <c:scaling>
+          <c:orientation val="minMax"/>
+        </c:scaling>
+        <c:delete val="0"/>
+        <c:axPos val="l"/>
+        <c:majorGridlines>
+          <c:spPr>
+            <a:ln w="12700" cap="flat">
+              <a:solidFill>
+                <a:srgbClr val="18243D"/>
+              </a:solidFill>
+              <a:prstDash val="solid"/>
+              <a:round/>
+            </a:ln>
+          </c:spPr>
+        </c:majorGridlines>
+        <c:numFmt formatCode="General" sourceLinked="0"/>
+        <c:majorTickMark val="out"/>
+        <c:minorTickMark val="none"/>
+        <c:tickLblPos val="nextTo"/>
+        <c:spPr>
+          <a:ln w="12700" cap="flat">
+            <a:solidFill>
+              <a:srgbClr val="24365A"/>
+            </a:solidFill>
+            <a:prstDash val="solid"/>
+            <a:round/>
+          </a:ln>
+        </c:spPr>
+        <c:txPr>
+          <a:bodyPr/>
+          <a:lstStyle/>
+          <a:p>
+            <a:pPr>
+              <a:defRPr sz="1000" b="0" i="0" u="none" strike="noStrike">
+                <a:solidFill>
+                  <a:srgbClr val="94A3B8"/>
+                </a:solidFill>
+                <a:latin typeface="Segoe UI"/>
+              </a:defRPr>
+            </a:pPr>
+            <a:endParaRPr lang="en-US"/>
+          </a:p>
+        </c:txPr>
+        <c:crossAx val="2094734554"/>
+        <c:crosses val="autoZero"/>
+        <c:crossBetween val="between"/>
+      </c:valAx>
+      <c:spPr>
+        <a:solidFill>
+          <a:srgbClr val="0D1420"/>
+        </a:solidFill>
+        <a:ln>
+          <a:noFill/>
+        </a:ln>
+        <a:effectLst/>
+      </c:spPr>
+    </c:plotArea>
+    <c:plotVisOnly val="1"/>
+    <c:dispBlanksAs val="span"/>
+  </c:chart>
+  <c:spPr>
+    <a:solidFill>
+      <a:srgbClr val="0D1420"/>
+    </a:solidFill>
+    <a:ln w="12700" cap="flat">
+      <a:solidFill>
+        <a:srgbClr val="24365A"/>
+      </a:solidFill>
+    </a:ln>
+    <a:effectLst/>
+  </c:spPr>
+  <c:externalData r:id="rId1">
+    <c:autoUpdate val="0"/>
+  </c:externalData>
+</c:chartSpace>
+</file>
+
+<file path=ppt/charts/chart24.xml><?xml version="1.0" encoding="utf-8"?>
+<c:chartSpace xmlns:c="http://schemas.openxmlformats.org/drawingml/2006/chart" xmlns:a="http://schemas.openxmlformats.org/drawingml/2006/main" xmlns:r="http://schemas.openxmlformats.org/officeDocument/2006/relationships">
+  <c:date1904 val="0"/>
+  <c:roundedCorners val="1"/>
+  <c:chart>
+    <c:autoTitleDeleted val="1"/>
+    <c:plotArea>
+      <c:layout/>
+      <c:doughnutChart>
+        <c:varyColors val="1"/>
+        <c:ser>
+          <c:idx val="0"/>
+          <c:order val="0"/>
+          <c:tx>
+            <c:strRef>
+              <c:f>Sheet1!$B$1</c:f>
+              <c:strCache>
+                <c:ptCount val="1"/>
+                <c:pt idx="0">
+                  <c:v>Breakdown</c:v>
+                </c:pt>
+              </c:strCache>
+            </c:strRef>
+          </c:tx>
+          <c:spPr>
+            <a:solidFill>
+              <a:schemeClr val="accent1"/>
+            </a:solidFill>
+            <a:ln w="9525" cap="flat">
+              <a:solidFill>
+                <a:srgbClr val="F9F9F9"/>
+              </a:solidFill>
+              <a:prstDash val="solid"/>
+              <a:round/>
+            </a:ln>
+            <a:effectLst/>
+          </c:spPr>
+          <c:dPt>
+            <c:idx val="0"/>
+            <c:bubble3D val="0"/>
+            <c:spPr>
+              <a:solidFill>
+                <a:srgbClr val="3B82F6"/>
+              </a:solidFill>
+              <a:effectLst/>
+            </c:spPr>
+          </c:dPt>
+          <c:dPt>
+            <c:idx val="1"/>
+            <c:bubble3D val="0"/>
+            <c:spPr>
+              <a:solidFill>
+                <a:srgbClr val="06B6D4"/>
+              </a:solidFill>
+              <a:effectLst/>
+            </c:spPr>
+          </c:dPt>
+          <c:dPt>
+            <c:idx val="2"/>
+            <c:bubble3D val="0"/>
+            <c:spPr>
+              <a:solidFill>
+                <a:srgbClr val="22D3A0"/>
+              </a:solidFill>
+              <a:effectLst/>
+            </c:spPr>
+          </c:dPt>
+          <c:dPt>
+            <c:idx val="3"/>
+            <c:bubble3D val="0"/>
+            <c:spPr>
+              <a:solidFill>
+                <a:srgbClr val="F59E0B"/>
+              </a:solidFill>
+              <a:effectLst/>
+            </c:spPr>
+          </c:dPt>
+          <c:dLbls>
+            <c:dLbl>
+              <c:idx val="0"/>
+              <c:numFmt formatCode="0%" sourceLinked="0"/>
+              <c:spPr/>
+              <c:txPr>
+                <a:bodyPr/>
+                <a:lstStyle/>
+                <a:p>
+                  <a:pPr>
+                    <a:defRPr sz="1000" b="0" i="0" u="none" strike="noStrike">
+                      <a:solidFill>
+                        <a:srgbClr val="E2E8F0"/>
+                      </a:solidFill>
+                      <a:latin typeface="Segoe UI"/>
+                    </a:defRPr>
+                  </a:pPr>
+                </a:p>
+              </c:txPr>
+              <c:showLegendKey val="0"/>
+              <c:showVal val="0"/>
+              <c:showCatName val="0"/>
+              <c:showSerName val="0"/>
+              <c:showPercent val="1"/>
+              <c:showBubbleSize val="0"/>
+            </c:dLbl>
+            <c:dLbl>
+              <c:idx val="1"/>
+              <c:numFmt formatCode="0%" sourceLinked="0"/>
+              <c:spPr/>
+              <c:txPr>
+                <a:bodyPr/>
+                <a:lstStyle/>
+                <a:p>
+                  <a:pPr>
+                    <a:defRPr sz="1000" b="0" i="0" u="none" strike="noStrike">
+                      <a:solidFill>
+                        <a:srgbClr val="E2E8F0"/>
+                      </a:solidFill>
+                      <a:latin typeface="Segoe UI"/>
+                    </a:defRPr>
+                  </a:pPr>
+                </a:p>
+              </c:txPr>
+              <c:showLegendKey val="0"/>
+              <c:showVal val="0"/>
+              <c:showCatName val="0"/>
+              <c:showSerName val="0"/>
+              <c:showPercent val="1"/>
+              <c:showBubbleSize val="0"/>
+            </c:dLbl>
+            <c:dLbl>
+              <c:idx val="2"/>
+              <c:numFmt formatCode="0%" sourceLinked="0"/>
+              <c:spPr/>
+              <c:txPr>
+                <a:bodyPr/>
+                <a:lstStyle/>
+                <a:p>
+                  <a:pPr>
+                    <a:defRPr sz="1000" b="0" i="0" u="none" strike="noStrike">
+                      <a:solidFill>
+                        <a:srgbClr val="E2E8F0"/>
+                      </a:solidFill>
+                      <a:latin typeface="Segoe UI"/>
+                    </a:defRPr>
+                  </a:pPr>
+                </a:p>
+              </c:txPr>
+              <c:showLegendKey val="0"/>
+              <c:showVal val="0"/>
+              <c:showCatName val="0"/>
+              <c:showSerName val="0"/>
+              <c:showPercent val="1"/>
+              <c:showBubbleSize val="0"/>
+            </c:dLbl>
+            <c:dLbl>
+              <c:idx val="3"/>
+              <c:numFmt formatCode="0%" sourceLinked="0"/>
+              <c:spPr/>
+              <c:txPr>
+                <a:bodyPr/>
+                <a:lstStyle/>
+                <a:p>
+                  <a:pPr>
+                    <a:defRPr sz="1000" b="0" i="0" u="none" strike="noStrike">
+                      <a:solidFill>
+                        <a:srgbClr val="E2E8F0"/>
+                      </a:solidFill>
+                      <a:latin typeface="Segoe UI"/>
+                    </a:defRPr>
+                  </a:pPr>
+                </a:p>
+              </c:txPr>
+              <c:showLegendKey val="0"/>
+              <c:showVal val="0"/>
+              <c:showCatName val="0"/>
+              <c:showSerName val="0"/>
+              <c:showPercent val="1"/>
+              <c:showBubbleSize val="0"/>
+            </c:dLbl>
+            <c:numFmt formatCode="0%" sourceLinked="0"/>
+            <c:txPr>
+              <a:bodyPr/>
+              <a:lstStyle/>
+              <a:p>
+                <a:pPr>
+                  <a:defRPr sz="1800" b="0" i="0" u="none" strike="noStrike">
+                    <a:solidFill>
+                      <a:srgbClr val="000000"/>
+                    </a:solidFill>
+                    <a:latin typeface="Arial"/>
+                  </a:defRPr>
+                </a:pPr>
+              </a:p>
+            </c:txPr>
+            <c:showLegendKey val="0"/>
+            <c:showVal val="0"/>
+            <c:showCatName val="1"/>
+            <c:showSerName val="0"/>
+            <c:showPercent val="1"/>
+            <c:showBubbleSize val="0"/>
+            <c:showLeaderLines val="0"/>
+          </c:dLbls>
+          <c:cat>
+            <c:strRef>
+              <c:f>Sheet1!$A$2:$A$5</c:f>
+              <c:strCache>
+                <c:ptCount val="4"/>
+                <c:pt idx="0">
+                  <c:v>Metric definitions</c:v>
+                </c:pt>
+                <c:pt idx="1">
+                  <c:v>Source behavior and quirks</c:v>
+                </c:pt>
+                <c:pt idx="2">
+                  <c:v>Pipeline failures</c:v>
+                </c:pt>
+                <c:pt idx="3">
+                  <c:v>Genuine data errors</c:v>
+                </c:pt>
+              </c:strCache>
+            </c:strRef>
+          </c:cat>
+          <c:val>
+            <c:numRef>
+              <c:f>Sheet1!$B$2:$B$5</c:f>
+              <c:numCache>
+                <c:ptCount val="4"/>
+                <c:pt idx="0">
+                  <c:v>45</c:v>
+                </c:pt>
+                <c:pt idx="1">
+                  <c:v>25</c:v>
+                </c:pt>
+                <c:pt idx="2">
+                  <c:v>20</c:v>
+                </c:pt>
+                <c:pt idx="3">
+                  <c:v>10</c:v>
+                </c:pt>
+              </c:numCache>
+            </c:numRef>
+          </c:val>
+        </c:ser>
+        <c:firstSliceAng val="0"/>
+        <c:holeSize val="62"/>
+      </c:doughnutChart>
+      <c:spPr>
+        <a:solidFill>
+          <a:srgbClr val="0D1420"/>
+        </a:solidFill>
+        <a:ln>
+          <a:noFill/>
+        </a:ln>
+        <a:effectLst/>
+      </c:spPr>
+    </c:plotArea>
+    <c:legend>
+      <c:legendPos val="r"/>
+      <c:overlay val="0"/>
+      <c:txPr>
+        <a:bodyPr/>
+        <a:lstStyle/>
+        <a:p>
+          <a:pPr>
+            <a:defRPr sz="1100">
+              <a:solidFill>
+                <a:srgbClr val="CBD5E1"/>
+              </a:solidFill>
+              <a:latin typeface="Segoe UI"/>
+              <a:cs typeface="Segoe UI"/>
+            </a:defRPr>
+          </a:pPr>
+          <a:endParaRPr lang="en-US"/>
+        </a:p>
+      </c:txPr>
+    </c:legend>
+    <c:plotVisOnly val="1"/>
+    <c:dispBlanksAs val="span"/>
+  </c:chart>
+  <c:spPr>
+    <a:solidFill>
+      <a:srgbClr val="0D1420"/>
+    </a:solidFill>
+    <a:ln w="12700" cap="flat">
+      <a:solidFill>
+        <a:srgbClr val="24365A"/>
+      </a:solidFill>
+    </a:ln>
+    <a:effectLst/>
+  </c:spPr>
+  <c:externalData r:id="rId1">
+    <c:autoUpdate val="0"/>
+  </c:externalData>
+</c:chartSpace>
 </file>
 
 <file path=ppt/notesMasters/notesMaster1.xml><?xml version="1.0" encoding="utf-8"?>
@@ -550,6 +1451,446 @@
 </p:notes>
 </file>
 
+<file path=ppt/notesSlides/notesSlide10.xml><?xml version="1.0" encoding="utf-8"?>
+<p:notes xmlns:a="http://schemas.openxmlformats.org/drawingml/2006/main" xmlns:r="http://schemas.openxmlformats.org/officeDocument/2006/relationships" xmlns:p="http://schemas.openxmlformats.org/presentationml/2006/main">
+  <p:cSld>
+    <p:spTree>
+      <p:nvGrpSpPr>
+        <p:cNvPr id="1" name=""/>
+        <p:cNvGrpSpPr/>
+        <p:nvPr/>
+      </p:nvGrpSpPr>
+      <p:grpSpPr>
+        <a:xfrm>
+          <a:off x="0" y="0"/>
+          <a:ext cx="0" cy="0"/>
+          <a:chOff x="0" y="0"/>
+          <a:chExt cx="0" cy="0"/>
+        </a:xfrm>
+      </p:grpSpPr>
+      <p:sp>
+        <p:nvSpPr>
+          <p:cNvPr id="2" name="Slide Image Placeholder 1"/>
+          <p:cNvSpPr>
+            <a:spLocks noGrp="1" noRot="1" noChangeAspect="1"/>
+          </p:cNvSpPr>
+          <p:nvPr>
+            <p:ph type="sldImg"/>
+          </p:nvPr>
+        </p:nvSpPr>
+        <p:spPr/>
+      </p:sp>
+      <p:sp>
+        <p:nvSpPr>
+          <p:cNvPr id="3" name="Notes Placeholder 2"/>
+          <p:cNvSpPr>
+            <a:spLocks noGrp="1"/>
+          </p:cNvSpPr>
+          <p:nvPr>
+            <p:ph type="body" idx="1"/>
+          </p:nvPr>
+        </p:nvSpPr>
+        <p:spPr/>
+        <p:txBody>
+          <a:bodyPr/>
+          <a:lstStyle/>
+          <a:p>
+            <a:r>
+              <a:rPr lang="en-US" dirty="0"/>
+              <a:t/>
+            </a:r>
+            <a:endParaRPr lang="en-US" dirty="0"/>
+          </a:p>
+        </p:txBody>
+      </p:sp>
+      <p:sp>
+        <p:nvSpPr>
+          <p:cNvPr id="4" name="Slide Number Placeholder 3"/>
+          <p:cNvSpPr>
+            <a:spLocks noGrp="1"/>
+          </p:cNvSpPr>
+          <p:nvPr>
+            <p:ph type="sldNum" sz="quarter" idx="10"/>
+          </p:nvPr>
+        </p:nvSpPr>
+        <p:spPr/>
+        <p:txBody>
+          <a:bodyPr/>
+          <a:lstStyle/>
+          <a:p>
+            <a:fld id="{F7021451-1387-4CA6-816F-3879F97B5CBC}" type="slidenum">
+              <a:rPr lang="en-US"/>
+              <a:t>10</a:t>
+            </a:fld>
+            <a:endParaRPr lang="en-US"/>
+          </a:p>
+        </p:txBody>
+      </p:sp>
+    </p:spTree>
+    <p:extLst>
+      <p:ext uri="{BB962C8B-B14F-4D97-AF65-F5344CB8AC3E}">
+        <p14:creationId xmlns:p14="http://schemas.microsoft.com/office/powerpoint/2010/main" val="1024086991"/>
+      </p:ext>
+    </p:extLst>
+  </p:cSld>
+  <p:clrMapOvr>
+    <a:masterClrMapping/>
+  </p:clrMapOvr>
+</p:notes>
+</file>
+
+<file path=ppt/notesSlides/notesSlide11.xml><?xml version="1.0" encoding="utf-8"?>
+<p:notes xmlns:a="http://schemas.openxmlformats.org/drawingml/2006/main" xmlns:r="http://schemas.openxmlformats.org/officeDocument/2006/relationships" xmlns:p="http://schemas.openxmlformats.org/presentationml/2006/main">
+  <p:cSld>
+    <p:spTree>
+      <p:nvGrpSpPr>
+        <p:cNvPr id="1" name=""/>
+        <p:cNvGrpSpPr/>
+        <p:nvPr/>
+      </p:nvGrpSpPr>
+      <p:grpSpPr>
+        <a:xfrm>
+          <a:off x="0" y="0"/>
+          <a:ext cx="0" cy="0"/>
+          <a:chOff x="0" y="0"/>
+          <a:chExt cx="0" cy="0"/>
+        </a:xfrm>
+      </p:grpSpPr>
+      <p:sp>
+        <p:nvSpPr>
+          <p:cNvPr id="2" name="Slide Image Placeholder 1"/>
+          <p:cNvSpPr>
+            <a:spLocks noGrp="1" noRot="1" noChangeAspect="1"/>
+          </p:cNvSpPr>
+          <p:nvPr>
+            <p:ph type="sldImg"/>
+          </p:nvPr>
+        </p:nvSpPr>
+        <p:spPr/>
+      </p:sp>
+      <p:sp>
+        <p:nvSpPr>
+          <p:cNvPr id="3" name="Notes Placeholder 2"/>
+          <p:cNvSpPr>
+            <a:spLocks noGrp="1"/>
+          </p:cNvSpPr>
+          <p:nvPr>
+            <p:ph type="body" idx="1"/>
+          </p:nvPr>
+        </p:nvSpPr>
+        <p:spPr/>
+        <p:txBody>
+          <a:bodyPr/>
+          <a:lstStyle/>
+          <a:p>
+            <a:r>
+              <a:rPr lang="en-US" dirty="0"/>
+              <a:t/>
+            </a:r>
+            <a:endParaRPr lang="en-US" dirty="0"/>
+          </a:p>
+        </p:txBody>
+      </p:sp>
+      <p:sp>
+        <p:nvSpPr>
+          <p:cNvPr id="4" name="Slide Number Placeholder 3"/>
+          <p:cNvSpPr>
+            <a:spLocks noGrp="1"/>
+          </p:cNvSpPr>
+          <p:nvPr>
+            <p:ph type="sldNum" sz="quarter" idx="10"/>
+          </p:nvPr>
+        </p:nvSpPr>
+        <p:spPr/>
+        <p:txBody>
+          <a:bodyPr/>
+          <a:lstStyle/>
+          <a:p>
+            <a:fld id="{F7021451-1387-4CA6-816F-3879F97B5CBC}" type="slidenum">
+              <a:rPr lang="en-US"/>
+              <a:t>11</a:t>
+            </a:fld>
+            <a:endParaRPr lang="en-US"/>
+          </a:p>
+        </p:txBody>
+      </p:sp>
+    </p:spTree>
+    <p:extLst>
+      <p:ext uri="{BB962C8B-B14F-4D97-AF65-F5344CB8AC3E}">
+        <p14:creationId xmlns:p14="http://schemas.microsoft.com/office/powerpoint/2010/main" val="1024086991"/>
+      </p:ext>
+    </p:extLst>
+  </p:cSld>
+  <p:clrMapOvr>
+    <a:masterClrMapping/>
+  </p:clrMapOvr>
+</p:notes>
+</file>
+
+<file path=ppt/notesSlides/notesSlide12.xml><?xml version="1.0" encoding="utf-8"?>
+<p:notes xmlns:a="http://schemas.openxmlformats.org/drawingml/2006/main" xmlns:r="http://schemas.openxmlformats.org/officeDocument/2006/relationships" xmlns:p="http://schemas.openxmlformats.org/presentationml/2006/main">
+  <p:cSld>
+    <p:spTree>
+      <p:nvGrpSpPr>
+        <p:cNvPr id="1" name=""/>
+        <p:cNvGrpSpPr/>
+        <p:nvPr/>
+      </p:nvGrpSpPr>
+      <p:grpSpPr>
+        <a:xfrm>
+          <a:off x="0" y="0"/>
+          <a:ext cx="0" cy="0"/>
+          <a:chOff x="0" y="0"/>
+          <a:chExt cx="0" cy="0"/>
+        </a:xfrm>
+      </p:grpSpPr>
+      <p:sp>
+        <p:nvSpPr>
+          <p:cNvPr id="2" name="Slide Image Placeholder 1"/>
+          <p:cNvSpPr>
+            <a:spLocks noGrp="1" noRot="1" noChangeAspect="1"/>
+          </p:cNvSpPr>
+          <p:nvPr>
+            <p:ph type="sldImg"/>
+          </p:nvPr>
+        </p:nvSpPr>
+        <p:spPr/>
+      </p:sp>
+      <p:sp>
+        <p:nvSpPr>
+          <p:cNvPr id="3" name="Notes Placeholder 2"/>
+          <p:cNvSpPr>
+            <a:spLocks noGrp="1"/>
+          </p:cNvSpPr>
+          <p:nvPr>
+            <p:ph type="body" idx="1"/>
+          </p:nvPr>
+        </p:nvSpPr>
+        <p:spPr/>
+        <p:txBody>
+          <a:bodyPr/>
+          <a:lstStyle/>
+          <a:p>
+            <a:r>
+              <a:rPr lang="en-US" dirty="0"/>
+              <a:t/>
+            </a:r>
+            <a:endParaRPr lang="en-US" dirty="0"/>
+          </a:p>
+        </p:txBody>
+      </p:sp>
+      <p:sp>
+        <p:nvSpPr>
+          <p:cNvPr id="4" name="Slide Number Placeholder 3"/>
+          <p:cNvSpPr>
+            <a:spLocks noGrp="1"/>
+          </p:cNvSpPr>
+          <p:nvPr>
+            <p:ph type="sldNum" sz="quarter" idx="10"/>
+          </p:nvPr>
+        </p:nvSpPr>
+        <p:spPr/>
+        <p:txBody>
+          <a:bodyPr/>
+          <a:lstStyle/>
+          <a:p>
+            <a:fld id="{F7021451-1387-4CA6-816F-3879F97B5CBC}" type="slidenum">
+              <a:rPr lang="en-US"/>
+              <a:t>12</a:t>
+            </a:fld>
+            <a:endParaRPr lang="en-US"/>
+          </a:p>
+        </p:txBody>
+      </p:sp>
+    </p:spTree>
+    <p:extLst>
+      <p:ext uri="{BB962C8B-B14F-4D97-AF65-F5344CB8AC3E}">
+        <p14:creationId xmlns:p14="http://schemas.microsoft.com/office/powerpoint/2010/main" val="1024086991"/>
+      </p:ext>
+    </p:extLst>
+  </p:cSld>
+  <p:clrMapOvr>
+    <a:masterClrMapping/>
+  </p:clrMapOvr>
+</p:notes>
+</file>
+
+<file path=ppt/notesSlides/notesSlide13.xml><?xml version="1.0" encoding="utf-8"?>
+<p:notes xmlns:a="http://schemas.openxmlformats.org/drawingml/2006/main" xmlns:r="http://schemas.openxmlformats.org/officeDocument/2006/relationships" xmlns:p="http://schemas.openxmlformats.org/presentationml/2006/main">
+  <p:cSld>
+    <p:spTree>
+      <p:nvGrpSpPr>
+        <p:cNvPr id="1" name=""/>
+        <p:cNvGrpSpPr/>
+        <p:nvPr/>
+      </p:nvGrpSpPr>
+      <p:grpSpPr>
+        <a:xfrm>
+          <a:off x="0" y="0"/>
+          <a:ext cx="0" cy="0"/>
+          <a:chOff x="0" y="0"/>
+          <a:chExt cx="0" cy="0"/>
+        </a:xfrm>
+      </p:grpSpPr>
+      <p:sp>
+        <p:nvSpPr>
+          <p:cNvPr id="2" name="Slide Image Placeholder 1"/>
+          <p:cNvSpPr>
+            <a:spLocks noGrp="1" noRot="1" noChangeAspect="1"/>
+          </p:cNvSpPr>
+          <p:nvPr>
+            <p:ph type="sldImg"/>
+          </p:nvPr>
+        </p:nvSpPr>
+        <p:spPr/>
+      </p:sp>
+      <p:sp>
+        <p:nvSpPr>
+          <p:cNvPr id="3" name="Notes Placeholder 2"/>
+          <p:cNvSpPr>
+            <a:spLocks noGrp="1"/>
+          </p:cNvSpPr>
+          <p:nvPr>
+            <p:ph type="body" idx="1"/>
+          </p:nvPr>
+        </p:nvSpPr>
+        <p:spPr/>
+        <p:txBody>
+          <a:bodyPr/>
+          <a:lstStyle/>
+          <a:p>
+            <a:r>
+              <a:rPr lang="en-US" dirty="0"/>
+              <a:t/>
+            </a:r>
+            <a:endParaRPr lang="en-US" dirty="0"/>
+          </a:p>
+        </p:txBody>
+      </p:sp>
+      <p:sp>
+        <p:nvSpPr>
+          <p:cNvPr id="4" name="Slide Number Placeholder 3"/>
+          <p:cNvSpPr>
+            <a:spLocks noGrp="1"/>
+          </p:cNvSpPr>
+          <p:nvPr>
+            <p:ph type="sldNum" sz="quarter" idx="10"/>
+          </p:nvPr>
+        </p:nvSpPr>
+        <p:spPr/>
+        <p:txBody>
+          <a:bodyPr/>
+          <a:lstStyle/>
+          <a:p>
+            <a:fld id="{F7021451-1387-4CA6-816F-3879F97B5CBC}" type="slidenum">
+              <a:rPr lang="en-US"/>
+              <a:t>13</a:t>
+            </a:fld>
+            <a:endParaRPr lang="en-US"/>
+          </a:p>
+        </p:txBody>
+      </p:sp>
+    </p:spTree>
+    <p:extLst>
+      <p:ext uri="{BB962C8B-B14F-4D97-AF65-F5344CB8AC3E}">
+        <p14:creationId xmlns:p14="http://schemas.microsoft.com/office/powerpoint/2010/main" val="1024086991"/>
+      </p:ext>
+    </p:extLst>
+  </p:cSld>
+  <p:clrMapOvr>
+    <a:masterClrMapping/>
+  </p:clrMapOvr>
+</p:notes>
+</file>
+
+<file path=ppt/notesSlides/notesSlide14.xml><?xml version="1.0" encoding="utf-8"?>
+<p:notes xmlns:a="http://schemas.openxmlformats.org/drawingml/2006/main" xmlns:r="http://schemas.openxmlformats.org/officeDocument/2006/relationships" xmlns:p="http://schemas.openxmlformats.org/presentationml/2006/main">
+  <p:cSld>
+    <p:spTree>
+      <p:nvGrpSpPr>
+        <p:cNvPr id="1" name=""/>
+        <p:cNvGrpSpPr/>
+        <p:nvPr/>
+      </p:nvGrpSpPr>
+      <p:grpSpPr>
+        <a:xfrm>
+          <a:off x="0" y="0"/>
+          <a:ext cx="0" cy="0"/>
+          <a:chOff x="0" y="0"/>
+          <a:chExt cx="0" cy="0"/>
+        </a:xfrm>
+      </p:grpSpPr>
+      <p:sp>
+        <p:nvSpPr>
+          <p:cNvPr id="2" name="Slide Image Placeholder 1"/>
+          <p:cNvSpPr>
+            <a:spLocks noGrp="1" noRot="1" noChangeAspect="1"/>
+          </p:cNvSpPr>
+          <p:nvPr>
+            <p:ph type="sldImg"/>
+          </p:nvPr>
+        </p:nvSpPr>
+        <p:spPr/>
+      </p:sp>
+      <p:sp>
+        <p:nvSpPr>
+          <p:cNvPr id="3" name="Notes Placeholder 2"/>
+          <p:cNvSpPr>
+            <a:spLocks noGrp="1"/>
+          </p:cNvSpPr>
+          <p:nvPr>
+            <p:ph type="body" idx="1"/>
+          </p:nvPr>
+        </p:nvSpPr>
+        <p:spPr/>
+        <p:txBody>
+          <a:bodyPr/>
+          <a:lstStyle/>
+          <a:p>
+            <a:r>
+              <a:rPr lang="en-US" dirty="0"/>
+              <a:t/>
+            </a:r>
+            <a:endParaRPr lang="en-US" dirty="0"/>
+          </a:p>
+        </p:txBody>
+      </p:sp>
+      <p:sp>
+        <p:nvSpPr>
+          <p:cNvPr id="4" name="Slide Number Placeholder 3"/>
+          <p:cNvSpPr>
+            <a:spLocks noGrp="1"/>
+          </p:cNvSpPr>
+          <p:nvPr>
+            <p:ph type="sldNum" sz="quarter" idx="10"/>
+          </p:nvPr>
+        </p:nvSpPr>
+        <p:spPr/>
+        <p:txBody>
+          <a:bodyPr/>
+          <a:lstStyle/>
+          <a:p>
+            <a:fld id="{F7021451-1387-4CA6-816F-3879F97B5CBC}" type="slidenum">
+              <a:rPr lang="en-US"/>
+              <a:t>14</a:t>
+            </a:fld>
+            <a:endParaRPr lang="en-US"/>
+          </a:p>
+        </p:txBody>
+      </p:sp>
+    </p:spTree>
+    <p:extLst>
+      <p:ext uri="{BB962C8B-B14F-4D97-AF65-F5344CB8AC3E}">
+        <p14:creationId xmlns:p14="http://schemas.microsoft.com/office/powerpoint/2010/main" val="1024086991"/>
+      </p:ext>
+    </p:extLst>
+  </p:cSld>
+  <p:clrMapOvr>
+    <a:masterClrMapping/>
+  </p:clrMapOvr>
+</p:notes>
+</file>
+
 <file path=ppt/notesSlides/notesSlide2.xml><?xml version="1.0" encoding="utf-8"?>
 <p:notes xmlns:a="http://schemas.openxmlformats.org/drawingml/2006/main" xmlns:r="http://schemas.openxmlformats.org/officeDocument/2006/relationships" xmlns:p="http://schemas.openxmlformats.org/presentationml/2006/main">
   <p:cSld>
@@ -1060,6 +2401,182 @@
             <a:fld id="{F7021451-1387-4CA6-816F-3879F97B5CBC}" type="slidenum">
               <a:rPr lang="en-US"/>
               <a:t>7</a:t>
+            </a:fld>
+            <a:endParaRPr lang="en-US"/>
+          </a:p>
+        </p:txBody>
+      </p:sp>
+    </p:spTree>
+    <p:extLst>
+      <p:ext uri="{BB962C8B-B14F-4D97-AF65-F5344CB8AC3E}">
+        <p14:creationId xmlns:p14="http://schemas.microsoft.com/office/powerpoint/2010/main" val="1024086991"/>
+      </p:ext>
+    </p:extLst>
+  </p:cSld>
+  <p:clrMapOvr>
+    <a:masterClrMapping/>
+  </p:clrMapOvr>
+</p:notes>
+</file>
+
+<file path=ppt/notesSlides/notesSlide8.xml><?xml version="1.0" encoding="utf-8"?>
+<p:notes xmlns:a="http://schemas.openxmlformats.org/drawingml/2006/main" xmlns:r="http://schemas.openxmlformats.org/officeDocument/2006/relationships" xmlns:p="http://schemas.openxmlformats.org/presentationml/2006/main">
+  <p:cSld>
+    <p:spTree>
+      <p:nvGrpSpPr>
+        <p:cNvPr id="1" name=""/>
+        <p:cNvGrpSpPr/>
+        <p:nvPr/>
+      </p:nvGrpSpPr>
+      <p:grpSpPr>
+        <a:xfrm>
+          <a:off x="0" y="0"/>
+          <a:ext cx="0" cy="0"/>
+          <a:chOff x="0" y="0"/>
+          <a:chExt cx="0" cy="0"/>
+        </a:xfrm>
+      </p:grpSpPr>
+      <p:sp>
+        <p:nvSpPr>
+          <p:cNvPr id="2" name="Slide Image Placeholder 1"/>
+          <p:cNvSpPr>
+            <a:spLocks noGrp="1" noRot="1" noChangeAspect="1"/>
+          </p:cNvSpPr>
+          <p:nvPr>
+            <p:ph type="sldImg"/>
+          </p:nvPr>
+        </p:nvSpPr>
+        <p:spPr/>
+      </p:sp>
+      <p:sp>
+        <p:nvSpPr>
+          <p:cNvPr id="3" name="Notes Placeholder 2"/>
+          <p:cNvSpPr>
+            <a:spLocks noGrp="1"/>
+          </p:cNvSpPr>
+          <p:nvPr>
+            <p:ph type="body" idx="1"/>
+          </p:nvPr>
+        </p:nvSpPr>
+        <p:spPr/>
+        <p:txBody>
+          <a:bodyPr/>
+          <a:lstStyle/>
+          <a:p>
+            <a:r>
+              <a:rPr lang="en-US" dirty="0"/>
+              <a:t/>
+            </a:r>
+            <a:endParaRPr lang="en-US" dirty="0"/>
+          </a:p>
+        </p:txBody>
+      </p:sp>
+      <p:sp>
+        <p:nvSpPr>
+          <p:cNvPr id="4" name="Slide Number Placeholder 3"/>
+          <p:cNvSpPr>
+            <a:spLocks noGrp="1"/>
+          </p:cNvSpPr>
+          <p:nvPr>
+            <p:ph type="sldNum" sz="quarter" idx="10"/>
+          </p:nvPr>
+        </p:nvSpPr>
+        <p:spPr/>
+        <p:txBody>
+          <a:bodyPr/>
+          <a:lstStyle/>
+          <a:p>
+            <a:fld id="{F7021451-1387-4CA6-816F-3879F97B5CBC}" type="slidenum">
+              <a:rPr lang="en-US"/>
+              <a:t>8</a:t>
+            </a:fld>
+            <a:endParaRPr lang="en-US"/>
+          </a:p>
+        </p:txBody>
+      </p:sp>
+    </p:spTree>
+    <p:extLst>
+      <p:ext uri="{BB962C8B-B14F-4D97-AF65-F5344CB8AC3E}">
+        <p14:creationId xmlns:p14="http://schemas.microsoft.com/office/powerpoint/2010/main" val="1024086991"/>
+      </p:ext>
+    </p:extLst>
+  </p:cSld>
+  <p:clrMapOvr>
+    <a:masterClrMapping/>
+  </p:clrMapOvr>
+</p:notes>
+</file>
+
+<file path=ppt/notesSlides/notesSlide9.xml><?xml version="1.0" encoding="utf-8"?>
+<p:notes xmlns:a="http://schemas.openxmlformats.org/drawingml/2006/main" xmlns:r="http://schemas.openxmlformats.org/officeDocument/2006/relationships" xmlns:p="http://schemas.openxmlformats.org/presentationml/2006/main">
+  <p:cSld>
+    <p:spTree>
+      <p:nvGrpSpPr>
+        <p:cNvPr id="1" name=""/>
+        <p:cNvGrpSpPr/>
+        <p:nvPr/>
+      </p:nvGrpSpPr>
+      <p:grpSpPr>
+        <a:xfrm>
+          <a:off x="0" y="0"/>
+          <a:ext cx="0" cy="0"/>
+          <a:chOff x="0" y="0"/>
+          <a:chExt cx="0" cy="0"/>
+        </a:xfrm>
+      </p:grpSpPr>
+      <p:sp>
+        <p:nvSpPr>
+          <p:cNvPr id="2" name="Slide Image Placeholder 1"/>
+          <p:cNvSpPr>
+            <a:spLocks noGrp="1" noRot="1" noChangeAspect="1"/>
+          </p:cNvSpPr>
+          <p:nvPr>
+            <p:ph type="sldImg"/>
+          </p:nvPr>
+        </p:nvSpPr>
+        <p:spPr/>
+      </p:sp>
+      <p:sp>
+        <p:nvSpPr>
+          <p:cNvPr id="3" name="Notes Placeholder 2"/>
+          <p:cNvSpPr>
+            <a:spLocks noGrp="1"/>
+          </p:cNvSpPr>
+          <p:nvPr>
+            <p:ph type="body" idx="1"/>
+          </p:nvPr>
+        </p:nvSpPr>
+        <p:spPr/>
+        <p:txBody>
+          <a:bodyPr/>
+          <a:lstStyle/>
+          <a:p>
+            <a:r>
+              <a:rPr lang="en-US" dirty="0"/>
+              <a:t/>
+            </a:r>
+            <a:endParaRPr lang="en-US" dirty="0"/>
+          </a:p>
+        </p:txBody>
+      </p:sp>
+      <p:sp>
+        <p:nvSpPr>
+          <p:cNvPr id="4" name="Slide Number Placeholder 3"/>
+          <p:cNvSpPr>
+            <a:spLocks noGrp="1"/>
+          </p:cNvSpPr>
+          <p:nvPr>
+            <p:ph type="sldNum" sz="quarter" idx="10"/>
+          </p:nvPr>
+        </p:nvSpPr>
+        <p:spPr/>
+        <p:txBody>
+          <a:bodyPr/>
+          <a:lstStyle/>
+          <a:p>
+            <a:fld id="{F7021451-1387-4CA6-816F-3879F97B5CBC}" type="slidenum">
+              <a:rPr lang="en-US"/>
+              <a:t>9</a:t>
             </a:fld>
             <a:endParaRPr lang="en-US"/>
           </a:p>
@@ -1457,7 +2974,7 @@
         </p:nvSpPr>
         <p:spPr>
           <a:xfrm>
-            <a:off x="822960" y="1554480"/>
+            <a:off x="822960" y="1783080"/>
             <a:ext cx="10515600" cy="457200"/>
           </a:xfrm>
           <a:prstGeom prst="rect">
@@ -1497,7 +3014,7 @@
         <p:spPr>
           <a:xfrm>
             <a:off x="822960" y="2286000"/>
-            <a:ext cx="10515600" cy="1737360"/>
+            <a:ext cx="10607040" cy="1691640"/>
           </a:xfrm>
           <a:prstGeom prst="rect">
             <a:avLst/>
@@ -1513,7 +3030,7 @@
               <a:buNone/>
             </a:pPr>
             <a:r>
-              <a:rPr lang="en-US" sz="4400" b="1" dirty="0">
+              <a:rPr lang="en-US" sz="4100" b="1" dirty="0">
                 <a:solidFill>
                   <a:srgbClr val="FFFFFF"/>
                 </a:solidFill>
@@ -1521,9 +3038,9 @@
                 <a:ea typeface="Segoe UI" pitchFamily="34" charset="-122"/>
                 <a:cs typeface="Segoe UI" pitchFamily="34" charset="-120"/>
               </a:rPr>
-              <a:t>Four countries, one datalake</a:t>
-            </a:r>
-            <a:endParaRPr lang="en-US" sz="4400" dirty="0"/>
+              <a:t>Retail BI at Scale: Four Countries, One Datalake</a:t>
+            </a:r>
+            <a:endParaRPr lang="en-US" sz="4100" dirty="0"/>
           </a:p>
         </p:txBody>
       </p:sp>
@@ -1535,8 +3052,8 @@
         </p:nvSpPr>
         <p:spPr>
           <a:xfrm>
-            <a:off x="822960" y="4206240"/>
-            <a:ext cx="10515600" cy="914400"/>
+            <a:off x="822960" y="4023360"/>
+            <a:ext cx="10058400" cy="777240"/>
           </a:xfrm>
           <a:prstGeom prst="rect">
             <a:avLst/>
@@ -1552,7 +3069,7 @@
               <a:buNone/>
             </a:pPr>
             <a:r>
-              <a:rPr lang="en-US" sz="1600" dirty="0">
+              <a:rPr lang="en-US" sz="1700" dirty="0">
                 <a:solidFill>
                   <a:srgbClr val="94A3B8"/>
                 </a:solidFill>
@@ -1560,21 +3077,83 @@
                 <a:ea typeface="Segoe UI" pitchFamily="34" charset="-122"/>
                 <a:cs typeface="Segoe UI" pitchFamily="34" charset="-120"/>
               </a:rPr>
-              <a:t>Regional BI Specialist - IKEA Indonesia (PT Rumah Mebel Nusantara) · Rezalian Vatiady</a:t>
-            </a:r>
-            <a:endParaRPr lang="en-US" sz="1600" dirty="0"/>
-          </a:p>
-        </p:txBody>
-      </p:sp>
-      <p:sp>
-        <p:nvSpPr>
-          <p:cNvPr id="7" name="Text 5"/>
-          <p:cNvSpPr/>
-          <p:nvPr/>
-        </p:nvSpPr>
-        <p:spPr>
-          <a:xfrm>
-            <a:off x="10698480" y="6355080"/>
+              <a:t>Four markets, one datalake, zero tolerance for numbers that quietly disagree</a:t>
+            </a:r>
+            <a:endParaRPr lang="en-US" sz="1700" dirty="0"/>
+          </a:p>
+        </p:txBody>
+      </p:sp>
+      <p:sp>
+        <p:nvSpPr>
+          <p:cNvPr id="7" name="Shape 5"/>
+          <p:cNvSpPr/>
+          <p:nvPr/>
+        </p:nvSpPr>
+        <p:spPr>
+          <a:xfrm>
+            <a:off x="822960" y="5440680"/>
+            <a:ext cx="4114800" cy="0"/>
+          </a:xfrm>
+          <a:prstGeom prst="line">
+            <a:avLst/>
+          </a:prstGeom>
+          <a:noFill/>
+          <a:ln w="31750">
+            <a:solidFill>
+              <a:srgbClr val="3B82F6"/>
+            </a:solidFill>
+            <a:prstDash val="solid"/>
+          </a:ln>
+        </p:spPr>
+      </p:sp>
+      <p:sp>
+        <p:nvSpPr>
+          <p:cNvPr id="8" name="Text 6"/>
+          <p:cNvSpPr/>
+          <p:nvPr/>
+        </p:nvSpPr>
+        <p:spPr>
+          <a:xfrm>
+            <a:off x="822960" y="5596128"/>
+            <a:ext cx="10058400" cy="457200"/>
+          </a:xfrm>
+          <a:prstGeom prst="rect">
+            <a:avLst/>
+          </a:prstGeom>
+          <a:noFill/>
+          <a:ln/>
+        </p:spPr>
+        <p:txBody>
+          <a:bodyPr wrap="square" rtlCol="0" anchor="ctr"/>
+          <a:lstStyle/>
+          <a:p>
+            <a:pPr indent="0" marL="0">
+              <a:buNone/>
+            </a:pPr>
+            <a:r>
+              <a:rPr lang="en-US" sz="1250" dirty="0">
+                <a:solidFill>
+                  <a:srgbClr val="64748B"/>
+                </a:solidFill>
+                <a:latin typeface="Segoe UI" pitchFamily="34" charset="0"/>
+                <a:ea typeface="Segoe UI" pitchFamily="34" charset="-122"/>
+                <a:cs typeface="Segoe UI" pitchFamily="34" charset="-120"/>
+              </a:rPr>
+              <a:t>Rezalian Vatiady · Zalin Labs · 2026</a:t>
+            </a:r>
+            <a:endParaRPr lang="en-US" sz="1250" dirty="0"/>
+          </a:p>
+        </p:txBody>
+      </p:sp>
+      <p:sp>
+        <p:nvSpPr>
+          <p:cNvPr id="9" name="Text 7"/>
+          <p:cNvSpPr/>
+          <p:nvPr/>
+        </p:nvSpPr>
+        <p:spPr>
+          <a:xfrm>
+            <a:off x="10698480" y="6382512"/>
             <a:ext cx="1188720" cy="365760"/>
           </a:xfrm>
           <a:prstGeom prst="rect">
@@ -1599,7 +3178,1870 @@
                 <a:ea typeface="Consolas" pitchFamily="34" charset="-122"/>
                 <a:cs typeface="Consolas" pitchFamily="34" charset="-120"/>
               </a:rPr>
-              <a:t>1 / 7</a:t>
+              <a:t>1 / 14</a:t>
+            </a:r>
+            <a:endParaRPr lang="en-US" sz="1000" dirty="0"/>
+          </a:p>
+        </p:txBody>
+      </p:sp>
+    </p:spTree>
+  </p:cSld>
+  <p:clrMapOvr>
+    <a:masterClrMapping/>
+  </p:clrMapOvr>
+</p:sld>
+</file>
+
+<file path=ppt/slides/slide10.xml><?xml version="1.0" encoding="utf-8"?>
+<p:sld xmlns:a="http://schemas.openxmlformats.org/drawingml/2006/main" xmlns:r="http://schemas.openxmlformats.org/officeDocument/2006/relationships" xmlns:p="http://schemas.openxmlformats.org/presentationml/2006/main">
+  <p:cSld name="Slide 10">
+    <p:bg>
+      <p:bgPr>
+        <a:solidFill>
+          <a:srgbClr val="0A0C12"/>
+        </a:solidFill>
+      </p:bgPr>
+    </p:bg>
+    <p:spTree>
+      <p:nvGrpSpPr>
+        <p:cNvPr id="1" name=""/>
+        <p:cNvGrpSpPr/>
+        <p:nvPr/>
+      </p:nvGrpSpPr>
+      <p:grpSpPr>
+        <a:xfrm>
+          <a:off x="0" y="0"/>
+          <a:ext cx="0" cy="0"/>
+          <a:chOff x="0" y="0"/>
+          <a:chExt cx="0" cy="0"/>
+        </a:xfrm>
+      </p:grpSpPr>
+      <p:sp>
+        <p:nvSpPr>
+          <p:cNvPr id="2" name="Shape 0"/>
+          <p:cNvSpPr/>
+          <p:nvPr/>
+        </p:nvSpPr>
+        <p:spPr>
+          <a:xfrm>
+            <a:off x="0" y="0"/>
+            <a:ext cx="7680960" cy="64008"/>
+          </a:xfrm>
+          <a:prstGeom prst="rect">
+            <a:avLst/>
+          </a:prstGeom>
+          <a:solidFill>
+            <a:srgbClr val="3B82F6"/>
+          </a:solidFill>
+          <a:ln/>
+        </p:spPr>
+      </p:sp>
+      <p:sp>
+        <p:nvSpPr>
+          <p:cNvPr id="3" name="Shape 1"/>
+          <p:cNvSpPr/>
+          <p:nvPr/>
+        </p:nvSpPr>
+        <p:spPr>
+          <a:xfrm>
+            <a:off x="7680960" y="0"/>
+            <a:ext cx="4510735" cy="64008"/>
+          </a:xfrm>
+          <a:prstGeom prst="rect">
+            <a:avLst/>
+          </a:prstGeom>
+          <a:solidFill>
+            <a:srgbClr val="06B6D4"/>
+          </a:solidFill>
+          <a:ln/>
+        </p:spPr>
+      </p:sp>
+      <p:sp>
+        <p:nvSpPr>
+          <p:cNvPr id="4" name="Text 2"/>
+          <p:cNvSpPr/>
+          <p:nvPr/>
+        </p:nvSpPr>
+        <p:spPr>
+          <a:xfrm>
+            <a:off x="822960" y="502920"/>
+            <a:ext cx="10515600" cy="365760"/>
+          </a:xfrm>
+          <a:prstGeom prst="rect">
+            <a:avLst/>
+          </a:prstGeom>
+          <a:noFill/>
+          <a:ln/>
+        </p:spPr>
+        <p:txBody>
+          <a:bodyPr wrap="square" rtlCol="0" anchor="ctr"/>
+          <a:lstStyle/>
+          <a:p>
+            <a:pPr indent="0" marL="0">
+              <a:buNone/>
+            </a:pPr>
+            <a:r>
+              <a:rPr lang="en-US" sz="1200" spc="300" kern="0" dirty="0">
+                <a:solidFill>
+                  <a:srgbClr val="06B6D4"/>
+                </a:solidFill>
+                <a:latin typeface="Consolas" pitchFamily="34" charset="0"/>
+                <a:ea typeface="Consolas" pitchFamily="34" charset="-122"/>
+                <a:cs typeface="Consolas" pitchFamily="34" charset="-120"/>
+              </a:rPr>
+              <a:t>QUALITY DRIFT</a:t>
+            </a:r>
+            <a:endParaRPr lang="en-US" sz="1200" dirty="0"/>
+          </a:p>
+        </p:txBody>
+      </p:sp>
+      <p:sp>
+        <p:nvSpPr>
+          <p:cNvPr id="5" name="Text 3"/>
+          <p:cNvSpPr/>
+          <p:nvPr/>
+        </p:nvSpPr>
+        <p:spPr>
+          <a:xfrm>
+            <a:off x="822960" y="914400"/>
+            <a:ext cx="10561320" cy="868680"/>
+          </a:xfrm>
+          <a:prstGeom prst="rect">
+            <a:avLst/>
+          </a:prstGeom>
+          <a:noFill/>
+          <a:ln/>
+        </p:spPr>
+        <p:txBody>
+          <a:bodyPr wrap="square" rtlCol="0" anchor="ctr"/>
+          <a:lstStyle/>
+          <a:p>
+            <a:pPr indent="0" marL="0">
+              <a:buNone/>
+            </a:pPr>
+            <a:r>
+              <a:rPr lang="en-US" sz="2700" b="1" dirty="0">
+                <a:solidFill>
+                  <a:srgbClr val="FFFFFF"/>
+                </a:solidFill>
+                <a:latin typeface="Segoe UI" pitchFamily="34" charset="0"/>
+                <a:ea typeface="Segoe UI" pitchFamily="34" charset="-122"/>
+                <a:cs typeface="Segoe UI" pitchFamily="34" charset="-120"/>
+              </a:rPr>
+              <a:t>Reconciliation catches drift before leadership does</a:t>
+            </a:r>
+            <a:endParaRPr lang="en-US" sz="2700" dirty="0"/>
+          </a:p>
+        </p:txBody>
+      </p:sp>
+      <p:graphicFrame>
+        <p:nvGraphicFramePr>
+          <p:cNvPr id="6" name="Chart 0" descr=""/>
+          <p:cNvGraphicFramePr/>
+          <p:nvPr/>
+        </p:nvGraphicFramePr>
+        <p:xfrm>
+          <a:off x="822960" y="1874520"/>
+          <a:ext cx="10515600" cy="3337560"/>
+        </p:xfrm>
+        <a:graphic xmlns:a="http://schemas.openxmlformats.org/drawingml/2006/main">
+          <a:graphicData uri="http://schemas.openxmlformats.org/drawingml/2006/chart">
+            <c:chart xmlns:c="http://schemas.openxmlformats.org/drawingml/2006/chart" r:id="rId1"/>
+          </a:graphicData>
+        </a:graphic>
+      </p:graphicFrame>
+      <p:sp>
+        <p:nvSpPr>
+          <p:cNvPr id="7" name="Shape 4"/>
+          <p:cNvSpPr/>
+          <p:nvPr/>
+        </p:nvSpPr>
+        <p:spPr>
+          <a:xfrm>
+            <a:off x="822960" y="5413248"/>
+            <a:ext cx="10515600" cy="0"/>
+          </a:xfrm>
+          <a:prstGeom prst="line">
+            <a:avLst/>
+          </a:prstGeom>
+          <a:noFill/>
+          <a:ln w="12700">
+            <a:solidFill>
+              <a:srgbClr val="1E2D45"/>
+            </a:solidFill>
+            <a:prstDash val="solid"/>
+          </a:ln>
+        </p:spPr>
+      </p:sp>
+      <p:sp>
+        <p:nvSpPr>
+          <p:cNvPr id="8" name="Text 5"/>
+          <p:cNvSpPr/>
+          <p:nvPr/>
+        </p:nvSpPr>
+        <p:spPr>
+          <a:xfrm>
+            <a:off x="822960" y="5504688"/>
+            <a:ext cx="10424160" cy="411480"/>
+          </a:xfrm>
+          <a:prstGeom prst="rect">
+            <a:avLst/>
+          </a:prstGeom>
+          <a:noFill/>
+          <a:ln/>
+        </p:spPr>
+        <p:txBody>
+          <a:bodyPr wrap="square" rtlCol="0" anchor="ctr"/>
+          <a:lstStyle/>
+          <a:p>
+            <a:pPr indent="0" marL="0">
+              <a:buNone/>
+            </a:pPr>
+            <a:r>
+              <a:rPr lang="en-US" sz="1300" i="1" dirty="0">
+                <a:solidFill>
+                  <a:srgbClr val="06B6D4"/>
+                </a:solidFill>
+                <a:latin typeface="Segoe UI" pitchFamily="34" charset="0"/>
+                <a:ea typeface="Segoe UI" pitchFamily="34" charset="-122"/>
+                <a:cs typeface="Segoe UI" pitchFamily="34" charset="-120"/>
+              </a:rPr>
+              <a:t>→  Reconciliation on every load drove unexplained mismatches steadily toward zero.</a:t>
+            </a:r>
+            <a:endParaRPr lang="en-US" sz="1300" dirty="0"/>
+          </a:p>
+        </p:txBody>
+      </p:sp>
+      <p:sp>
+        <p:nvSpPr>
+          <p:cNvPr id="9" name="Shape 6"/>
+          <p:cNvSpPr/>
+          <p:nvPr/>
+        </p:nvSpPr>
+        <p:spPr>
+          <a:xfrm>
+            <a:off x="822960" y="5961888"/>
+            <a:ext cx="10515600" cy="0"/>
+          </a:xfrm>
+          <a:prstGeom prst="line">
+            <a:avLst/>
+          </a:prstGeom>
+          <a:noFill/>
+          <a:ln w="12700">
+            <a:solidFill>
+              <a:srgbClr val="1E2D45"/>
+            </a:solidFill>
+            <a:prstDash val="solid"/>
+          </a:ln>
+        </p:spPr>
+      </p:sp>
+      <p:sp>
+        <p:nvSpPr>
+          <p:cNvPr id="10" name="Text 7"/>
+          <p:cNvSpPr/>
+          <p:nvPr/>
+        </p:nvSpPr>
+        <p:spPr>
+          <a:xfrm>
+            <a:off x="822960" y="6053328"/>
+            <a:ext cx="9692640" cy="457200"/>
+          </a:xfrm>
+          <a:prstGeom prst="rect">
+            <a:avLst/>
+          </a:prstGeom>
+          <a:noFill/>
+          <a:ln/>
+        </p:spPr>
+        <p:txBody>
+          <a:bodyPr wrap="square" rtlCol="0" anchor="ctr"/>
+          <a:lstStyle/>
+          <a:p>
+            <a:pPr indent="0" marL="0">
+              <a:buNone/>
+            </a:pPr>
+            <a:r>
+              <a:rPr lang="en-US" sz="1150" dirty="0">
+                <a:solidFill>
+                  <a:srgbClr val="64748B"/>
+                </a:solidFill>
+                <a:latin typeface="Segoe UI" pitchFamily="34" charset="0"/>
+                <a:ea typeface="Segoe UI" pitchFamily="34" charset="-122"/>
+                <a:cs typeface="Segoe UI" pitchFamily="34" charset="-120"/>
+              </a:rPr>
+              <a:t>Illustrative weekly trend of unexplained mismatches at reconciliation seams.</a:t>
+            </a:r>
+            <a:endParaRPr lang="en-US" sz="1150" dirty="0"/>
+          </a:p>
+        </p:txBody>
+      </p:sp>
+      <p:sp>
+        <p:nvSpPr>
+          <p:cNvPr id="11" name="Text 8"/>
+          <p:cNvSpPr/>
+          <p:nvPr/>
+        </p:nvSpPr>
+        <p:spPr>
+          <a:xfrm>
+            <a:off x="10698480" y="6382512"/>
+            <a:ext cx="1188720" cy="365760"/>
+          </a:xfrm>
+          <a:prstGeom prst="rect">
+            <a:avLst/>
+          </a:prstGeom>
+          <a:noFill/>
+          <a:ln/>
+        </p:spPr>
+        <p:txBody>
+          <a:bodyPr wrap="square" rtlCol="0" anchor="ctr"/>
+          <a:lstStyle/>
+          <a:p>
+            <a:pPr algn="r" indent="0" marL="0">
+              <a:buNone/>
+            </a:pPr>
+            <a:r>
+              <a:rPr lang="en-US" sz="1000" dirty="0">
+                <a:solidFill>
+                  <a:srgbClr val="64748B"/>
+                </a:solidFill>
+                <a:latin typeface="Consolas" pitchFamily="34" charset="0"/>
+                <a:ea typeface="Consolas" pitchFamily="34" charset="-122"/>
+                <a:cs typeface="Consolas" pitchFamily="34" charset="-120"/>
+              </a:rPr>
+              <a:t>10 / 14</a:t>
+            </a:r>
+            <a:endParaRPr lang="en-US" sz="1000" dirty="0"/>
+          </a:p>
+        </p:txBody>
+      </p:sp>
+    </p:spTree>
+  </p:cSld>
+  <p:clrMapOvr>
+    <a:masterClrMapping/>
+  </p:clrMapOvr>
+</p:sld>
+</file>
+
+<file path=ppt/slides/slide11.xml><?xml version="1.0" encoding="utf-8"?>
+<p:sld xmlns:a="http://schemas.openxmlformats.org/drawingml/2006/main" xmlns:r="http://schemas.openxmlformats.org/officeDocument/2006/relationships" xmlns:p="http://schemas.openxmlformats.org/presentationml/2006/main">
+  <p:cSld name="Slide 11">
+    <p:bg>
+      <p:bgPr>
+        <a:solidFill>
+          <a:srgbClr val="0A0C12"/>
+        </a:solidFill>
+      </p:bgPr>
+    </p:bg>
+    <p:spTree>
+      <p:nvGrpSpPr>
+        <p:cNvPr id="1" name=""/>
+        <p:cNvGrpSpPr/>
+        <p:nvPr/>
+      </p:nvGrpSpPr>
+      <p:grpSpPr>
+        <a:xfrm>
+          <a:off x="0" y="0"/>
+          <a:ext cx="0" cy="0"/>
+          <a:chOff x="0" y="0"/>
+          <a:chExt cx="0" cy="0"/>
+        </a:xfrm>
+      </p:grpSpPr>
+      <p:sp>
+        <p:nvSpPr>
+          <p:cNvPr id="2" name="Shape 0"/>
+          <p:cNvSpPr/>
+          <p:nvPr/>
+        </p:nvSpPr>
+        <p:spPr>
+          <a:xfrm>
+            <a:off x="0" y="0"/>
+            <a:ext cx="7680960" cy="64008"/>
+          </a:xfrm>
+          <a:prstGeom prst="rect">
+            <a:avLst/>
+          </a:prstGeom>
+          <a:solidFill>
+            <a:srgbClr val="3B82F6"/>
+          </a:solidFill>
+          <a:ln/>
+        </p:spPr>
+      </p:sp>
+      <p:sp>
+        <p:nvSpPr>
+          <p:cNvPr id="3" name="Shape 1"/>
+          <p:cNvSpPr/>
+          <p:nvPr/>
+        </p:nvSpPr>
+        <p:spPr>
+          <a:xfrm>
+            <a:off x="7680960" y="0"/>
+            <a:ext cx="4510735" cy="64008"/>
+          </a:xfrm>
+          <a:prstGeom prst="rect">
+            <a:avLst/>
+          </a:prstGeom>
+          <a:solidFill>
+            <a:srgbClr val="06B6D4"/>
+          </a:solidFill>
+          <a:ln/>
+        </p:spPr>
+      </p:sp>
+      <p:sp>
+        <p:nvSpPr>
+          <p:cNvPr id="4" name="Text 2"/>
+          <p:cNvSpPr/>
+          <p:nvPr/>
+        </p:nvSpPr>
+        <p:spPr>
+          <a:xfrm>
+            <a:off x="822960" y="502920"/>
+            <a:ext cx="10515600" cy="365760"/>
+          </a:xfrm>
+          <a:prstGeom prst="rect">
+            <a:avLst/>
+          </a:prstGeom>
+          <a:noFill/>
+          <a:ln/>
+        </p:spPr>
+        <p:txBody>
+          <a:bodyPr wrap="square" rtlCol="0" anchor="ctr"/>
+          <a:lstStyle/>
+          <a:p>
+            <a:pPr indent="0" marL="0">
+              <a:buNone/>
+            </a:pPr>
+            <a:r>
+              <a:rPr lang="en-US" sz="1200" spc="300" kern="0" dirty="0">
+                <a:solidFill>
+                  <a:srgbClr val="06B6D4"/>
+                </a:solidFill>
+                <a:latin typeface="Consolas" pitchFamily="34" charset="0"/>
+                <a:ea typeface="Consolas" pitchFamily="34" charset="-122"/>
+                <a:cs typeface="Consolas" pitchFamily="34" charset="-120"/>
+              </a:rPr>
+              <a:t>WHERE DISAGREEMENTS CAME FROM</a:t>
+            </a:r>
+            <a:endParaRPr lang="en-US" sz="1200" dirty="0"/>
+          </a:p>
+        </p:txBody>
+      </p:sp>
+      <p:sp>
+        <p:nvSpPr>
+          <p:cNvPr id="5" name="Text 3"/>
+          <p:cNvSpPr/>
+          <p:nvPr/>
+        </p:nvSpPr>
+        <p:spPr>
+          <a:xfrm>
+            <a:off x="822960" y="914400"/>
+            <a:ext cx="10561320" cy="868680"/>
+          </a:xfrm>
+          <a:prstGeom prst="rect">
+            <a:avLst/>
+          </a:prstGeom>
+          <a:noFill/>
+          <a:ln/>
+        </p:spPr>
+        <p:txBody>
+          <a:bodyPr wrap="square" rtlCol="0" anchor="ctr"/>
+          <a:lstStyle/>
+          <a:p>
+            <a:pPr indent="0" marL="0">
+              <a:buNone/>
+            </a:pPr>
+            <a:r>
+              <a:rPr lang="en-US" sz="2700" b="1" dirty="0">
+                <a:solidFill>
+                  <a:srgbClr val="FFFFFF"/>
+                </a:solidFill>
+                <a:latin typeface="Segoe UI" pitchFamily="34" charset="0"/>
+                <a:ea typeface="Segoe UI" pitchFamily="34" charset="-122"/>
+                <a:cs typeface="Segoe UI" pitchFamily="34" charset="-120"/>
+              </a:rPr>
+              <a:t>Most cross-market fights were definitions, not data</a:t>
+            </a:r>
+            <a:endParaRPr lang="en-US" sz="2700" dirty="0"/>
+          </a:p>
+        </p:txBody>
+      </p:sp>
+      <p:graphicFrame>
+        <p:nvGraphicFramePr>
+          <p:cNvPr id="6" name="Chart 0" descr=""/>
+          <p:cNvGraphicFramePr/>
+          <p:nvPr/>
+        </p:nvGraphicFramePr>
+        <p:xfrm>
+          <a:off x="822960" y="1874520"/>
+          <a:ext cx="10515600" cy="3337560"/>
+        </p:xfrm>
+        <a:graphic xmlns:a="http://schemas.openxmlformats.org/drawingml/2006/main">
+          <a:graphicData uri="http://schemas.openxmlformats.org/drawingml/2006/chart">
+            <c:chart xmlns:c="http://schemas.openxmlformats.org/drawingml/2006/chart" r:id="rId1"/>
+          </a:graphicData>
+        </a:graphic>
+      </p:graphicFrame>
+      <p:sp>
+        <p:nvSpPr>
+          <p:cNvPr id="7" name="Shape 4"/>
+          <p:cNvSpPr/>
+          <p:nvPr/>
+        </p:nvSpPr>
+        <p:spPr>
+          <a:xfrm>
+            <a:off x="822960" y="5413248"/>
+            <a:ext cx="10515600" cy="0"/>
+          </a:xfrm>
+          <a:prstGeom prst="line">
+            <a:avLst/>
+          </a:prstGeom>
+          <a:noFill/>
+          <a:ln w="12700">
+            <a:solidFill>
+              <a:srgbClr val="1E2D45"/>
+            </a:solidFill>
+            <a:prstDash val="solid"/>
+          </a:ln>
+        </p:spPr>
+      </p:sp>
+      <p:sp>
+        <p:nvSpPr>
+          <p:cNvPr id="8" name="Text 5"/>
+          <p:cNvSpPr/>
+          <p:nvPr/>
+        </p:nvSpPr>
+        <p:spPr>
+          <a:xfrm>
+            <a:off x="822960" y="5504688"/>
+            <a:ext cx="10424160" cy="411480"/>
+          </a:xfrm>
+          <a:prstGeom prst="rect">
+            <a:avLst/>
+          </a:prstGeom>
+          <a:noFill/>
+          <a:ln/>
+        </p:spPr>
+        <p:txBody>
+          <a:bodyPr wrap="square" rtlCol="0" anchor="ctr"/>
+          <a:lstStyle/>
+          <a:p>
+            <a:pPr indent="0" marL="0">
+              <a:buNone/>
+            </a:pPr>
+            <a:r>
+              <a:rPr lang="en-US" sz="1300" i="1" dirty="0">
+                <a:solidFill>
+                  <a:srgbClr val="06B6D4"/>
+                </a:solidFill>
+                <a:latin typeface="Segoe UI" pitchFamily="34" charset="0"/>
+                <a:ea typeface="Segoe UI" pitchFamily="34" charset="-122"/>
+                <a:cs typeface="Segoe UI" pitchFamily="34" charset="-120"/>
+              </a:rPr>
+              <a:t>→  The fix for most disputes was a registry entry, not a code change.</a:t>
+            </a:r>
+            <a:endParaRPr lang="en-US" sz="1300" dirty="0"/>
+          </a:p>
+        </p:txBody>
+      </p:sp>
+      <p:sp>
+        <p:nvSpPr>
+          <p:cNvPr id="9" name="Shape 6"/>
+          <p:cNvSpPr/>
+          <p:nvPr/>
+        </p:nvSpPr>
+        <p:spPr>
+          <a:xfrm>
+            <a:off x="822960" y="5961888"/>
+            <a:ext cx="10515600" cy="0"/>
+          </a:xfrm>
+          <a:prstGeom prst="line">
+            <a:avLst/>
+          </a:prstGeom>
+          <a:noFill/>
+          <a:ln w="12700">
+            <a:solidFill>
+              <a:srgbClr val="1E2D45"/>
+            </a:solidFill>
+            <a:prstDash val="solid"/>
+          </a:ln>
+        </p:spPr>
+      </p:sp>
+      <p:sp>
+        <p:nvSpPr>
+          <p:cNvPr id="10" name="Text 7"/>
+          <p:cNvSpPr/>
+          <p:nvPr/>
+        </p:nvSpPr>
+        <p:spPr>
+          <a:xfrm>
+            <a:off x="822960" y="6053328"/>
+            <a:ext cx="9692640" cy="457200"/>
+          </a:xfrm>
+          <a:prstGeom prst="rect">
+            <a:avLst/>
+          </a:prstGeom>
+          <a:noFill/>
+          <a:ln/>
+        </p:spPr>
+        <p:txBody>
+          <a:bodyPr wrap="square" rtlCol="0" anchor="ctr"/>
+          <a:lstStyle/>
+          <a:p>
+            <a:pPr indent="0" marL="0">
+              <a:buNone/>
+            </a:pPr>
+            <a:r>
+              <a:rPr lang="en-US" sz="1150" dirty="0">
+                <a:solidFill>
+                  <a:srgbClr val="64748B"/>
+                </a:solidFill>
+                <a:latin typeface="Segoe UI" pitchFamily="34" charset="0"/>
+                <a:ea typeface="Segoe UI" pitchFamily="34" charset="-122"/>
+                <a:cs typeface="Segoe UI" pitchFamily="34" charset="-120"/>
+              </a:rPr>
+              <a:t>Illustrative breakdown of cross-market data disagreements.</a:t>
+            </a:r>
+            <a:endParaRPr lang="en-US" sz="1150" dirty="0"/>
+          </a:p>
+        </p:txBody>
+      </p:sp>
+      <p:sp>
+        <p:nvSpPr>
+          <p:cNvPr id="11" name="Text 8"/>
+          <p:cNvSpPr/>
+          <p:nvPr/>
+        </p:nvSpPr>
+        <p:spPr>
+          <a:xfrm>
+            <a:off x="10698480" y="6382512"/>
+            <a:ext cx="1188720" cy="365760"/>
+          </a:xfrm>
+          <a:prstGeom prst="rect">
+            <a:avLst/>
+          </a:prstGeom>
+          <a:noFill/>
+          <a:ln/>
+        </p:spPr>
+        <p:txBody>
+          <a:bodyPr wrap="square" rtlCol="0" anchor="ctr"/>
+          <a:lstStyle/>
+          <a:p>
+            <a:pPr algn="r" indent="0" marL="0">
+              <a:buNone/>
+            </a:pPr>
+            <a:r>
+              <a:rPr lang="en-US" sz="1000" dirty="0">
+                <a:solidFill>
+                  <a:srgbClr val="64748B"/>
+                </a:solidFill>
+                <a:latin typeface="Consolas" pitchFamily="34" charset="0"/>
+                <a:ea typeface="Consolas" pitchFamily="34" charset="-122"/>
+                <a:cs typeface="Consolas" pitchFamily="34" charset="-120"/>
+              </a:rPr>
+              <a:t>11 / 14</a:t>
+            </a:r>
+            <a:endParaRPr lang="en-US" sz="1000" dirty="0"/>
+          </a:p>
+        </p:txBody>
+      </p:sp>
+    </p:spTree>
+  </p:cSld>
+  <p:clrMapOvr>
+    <a:masterClrMapping/>
+  </p:clrMapOvr>
+</p:sld>
+</file>
+
+<file path=ppt/slides/slide12.xml><?xml version="1.0" encoding="utf-8"?>
+<p:sld xmlns:a="http://schemas.openxmlformats.org/drawingml/2006/main" xmlns:r="http://schemas.openxmlformats.org/officeDocument/2006/relationships" xmlns:p="http://schemas.openxmlformats.org/presentationml/2006/main">
+  <p:cSld name="Slide 12">
+    <p:bg>
+      <p:bgPr>
+        <a:solidFill>
+          <a:srgbClr val="0A0C12"/>
+        </a:solidFill>
+      </p:bgPr>
+    </p:bg>
+    <p:spTree>
+      <p:nvGrpSpPr>
+        <p:cNvPr id="1" name=""/>
+        <p:cNvGrpSpPr/>
+        <p:nvPr/>
+      </p:nvGrpSpPr>
+      <p:grpSpPr>
+        <a:xfrm>
+          <a:off x="0" y="0"/>
+          <a:ext cx="0" cy="0"/>
+          <a:chOff x="0" y="0"/>
+          <a:chExt cx="0" cy="0"/>
+        </a:xfrm>
+      </p:grpSpPr>
+      <p:sp>
+        <p:nvSpPr>
+          <p:cNvPr id="2" name="Shape 0"/>
+          <p:cNvSpPr/>
+          <p:nvPr/>
+        </p:nvSpPr>
+        <p:spPr>
+          <a:xfrm>
+            <a:off x="0" y="0"/>
+            <a:ext cx="7680960" cy="64008"/>
+          </a:xfrm>
+          <a:prstGeom prst="rect">
+            <a:avLst/>
+          </a:prstGeom>
+          <a:solidFill>
+            <a:srgbClr val="3B82F6"/>
+          </a:solidFill>
+          <a:ln/>
+        </p:spPr>
+      </p:sp>
+      <p:sp>
+        <p:nvSpPr>
+          <p:cNvPr id="3" name="Shape 1"/>
+          <p:cNvSpPr/>
+          <p:nvPr/>
+        </p:nvSpPr>
+        <p:spPr>
+          <a:xfrm>
+            <a:off x="7680960" y="0"/>
+            <a:ext cx="4510735" cy="64008"/>
+          </a:xfrm>
+          <a:prstGeom prst="rect">
+            <a:avLst/>
+          </a:prstGeom>
+          <a:solidFill>
+            <a:srgbClr val="06B6D4"/>
+          </a:solidFill>
+          <a:ln/>
+        </p:spPr>
+      </p:sp>
+      <p:sp>
+        <p:nvSpPr>
+          <p:cNvPr id="4" name="Text 2"/>
+          <p:cNvSpPr/>
+          <p:nvPr/>
+        </p:nvSpPr>
+        <p:spPr>
+          <a:xfrm>
+            <a:off x="822960" y="502920"/>
+            <a:ext cx="10515600" cy="365760"/>
+          </a:xfrm>
+          <a:prstGeom prst="rect">
+            <a:avLst/>
+          </a:prstGeom>
+          <a:noFill/>
+          <a:ln/>
+        </p:spPr>
+        <p:txBody>
+          <a:bodyPr wrap="square" rtlCol="0" anchor="ctr"/>
+          <a:lstStyle/>
+          <a:p>
+            <a:pPr indent="0" marL="0">
+              <a:buNone/>
+            </a:pPr>
+            <a:r>
+              <a:rPr lang="en-US" sz="1200" spc="300" kern="0" dirty="0">
+                <a:solidFill>
+                  <a:srgbClr val="06B6D4"/>
+                </a:solidFill>
+                <a:latin typeface="Consolas" pitchFamily="34" charset="0"/>
+                <a:ea typeface="Consolas" pitchFamily="34" charset="-122"/>
+                <a:cs typeface="Consolas" pitchFamily="34" charset="-120"/>
+              </a:rPr>
+              <a:t>THE PLAYBOOK</a:t>
+            </a:r>
+            <a:endParaRPr lang="en-US" sz="1200" dirty="0"/>
+          </a:p>
+        </p:txBody>
+      </p:sp>
+      <p:sp>
+        <p:nvSpPr>
+          <p:cNvPr id="5" name="Text 3"/>
+          <p:cNvSpPr/>
+          <p:nvPr/>
+        </p:nvSpPr>
+        <p:spPr>
+          <a:xfrm>
+            <a:off x="822960" y="914400"/>
+            <a:ext cx="10561320" cy="868680"/>
+          </a:xfrm>
+          <a:prstGeom prst="rect">
+            <a:avLst/>
+          </a:prstGeom>
+          <a:noFill/>
+          <a:ln/>
+        </p:spPr>
+        <p:txBody>
+          <a:bodyPr wrap="square" rtlCol="0" anchor="ctr"/>
+          <a:lstStyle/>
+          <a:p>
+            <a:pPr indent="0" marL="0">
+              <a:buNone/>
+            </a:pPr>
+            <a:r>
+              <a:rPr lang="en-US" sz="2700" b="1" dirty="0">
+                <a:solidFill>
+                  <a:srgbClr val="FFFFFF"/>
+                </a:solidFill>
+                <a:latin typeface="Segoe UI" pitchFamily="34" charset="0"/>
+                <a:ea typeface="Segoe UI" pitchFamily="34" charset="-122"/>
+                <a:cs typeface="Segoe UI" pitchFamily="34" charset="-120"/>
+              </a:rPr>
+              <a:t>Scale breaks definitions before pipelines</a:t>
+            </a:r>
+            <a:endParaRPr lang="en-US" sz="2700" dirty="0"/>
+          </a:p>
+        </p:txBody>
+      </p:sp>
+      <p:sp>
+        <p:nvSpPr>
+          <p:cNvPr id="6" name="Shape 4"/>
+          <p:cNvSpPr/>
+          <p:nvPr/>
+        </p:nvSpPr>
+        <p:spPr>
+          <a:xfrm>
+            <a:off x="822960" y="2011680"/>
+            <a:ext cx="5074920" cy="3611880"/>
+          </a:xfrm>
+          <a:prstGeom prst="roundRect">
+            <a:avLst>
+              <a:gd name="adj" fmla="val 2025"/>
+            </a:avLst>
+          </a:prstGeom>
+          <a:solidFill>
+            <a:srgbClr val="111A2E"/>
+          </a:solidFill>
+          <a:ln w="12700">
+            <a:solidFill>
+              <a:srgbClr val="1E2D45"/>
+            </a:solidFill>
+            <a:prstDash val="solid"/>
+          </a:ln>
+        </p:spPr>
+      </p:sp>
+      <p:sp>
+        <p:nvSpPr>
+          <p:cNvPr id="7" name="Text 5"/>
+          <p:cNvSpPr/>
+          <p:nvPr/>
+        </p:nvSpPr>
+        <p:spPr>
+          <a:xfrm>
+            <a:off x="1097280" y="2240280"/>
+            <a:ext cx="4526280" cy="502920"/>
+          </a:xfrm>
+          <a:prstGeom prst="rect">
+            <a:avLst/>
+          </a:prstGeom>
+          <a:noFill/>
+          <a:ln/>
+        </p:spPr>
+        <p:txBody>
+          <a:bodyPr wrap="square" rtlCol="0" anchor="ctr"/>
+          <a:lstStyle/>
+          <a:p>
+            <a:pPr indent="0" marL="0">
+              <a:buNone/>
+            </a:pPr>
+            <a:r>
+              <a:rPr lang="en-US" sz="1650" b="1" dirty="0">
+                <a:solidFill>
+                  <a:srgbClr val="06B6D4"/>
+                </a:solidFill>
+                <a:latin typeface="Segoe UI" pitchFamily="34" charset="0"/>
+                <a:ea typeface="Segoe UI" pitchFamily="34" charset="-122"/>
+                <a:cs typeface="Segoe UI" pitchFamily="34" charset="-120"/>
+              </a:rPr>
+              <a:t>Without a quality playbook</a:t>
+            </a:r>
+            <a:endParaRPr lang="en-US" sz="1650" dirty="0"/>
+          </a:p>
+        </p:txBody>
+      </p:sp>
+      <p:sp>
+        <p:nvSpPr>
+          <p:cNvPr id="8" name="Text 6"/>
+          <p:cNvSpPr/>
+          <p:nvPr/>
+        </p:nvSpPr>
+        <p:spPr>
+          <a:xfrm>
+            <a:off x="1097280" y="2834640"/>
+            <a:ext cx="4553712" cy="2651760"/>
+          </a:xfrm>
+          <a:prstGeom prst="rect">
+            <a:avLst/>
+          </a:prstGeom>
+          <a:noFill/>
+          <a:ln/>
+        </p:spPr>
+        <p:txBody>
+          <a:bodyPr wrap="square" rtlCol="0" anchor="t"/>
+          <a:lstStyle/>
+          <a:p>
+            <a:pPr marL="342900" indent="-342900">
+              <a:lnSpc>
+                <a:spcPct val="112000"/>
+              </a:lnSpc>
+              <a:spcAft>
+                <a:spcPts val="900"/>
+              </a:spcAft>
+              <a:buSzPct val="100000"/>
+              <a:buChar char="▸"/>
+            </a:pPr>
+            <a:r>
+              <a:rPr lang="en-US" sz="1280" dirty="0">
+                <a:solidFill>
+                  <a:srgbClr val="CBD5E1"/>
+                </a:solidFill>
+                <a:latin typeface="Segoe UI" pitchFamily="34" charset="0"/>
+                <a:ea typeface="Segoe UI" pitchFamily="34" charset="-122"/>
+                <a:cs typeface="Segoe UI" pitchFamily="34" charset="-120"/>
+              </a:rPr>
+              <a:t>Numbers drift between datalake and store systems until someone notices in a meeting</a:t>
+            </a:r>
+            <a:endParaRPr lang="en-US" sz="1280" dirty="0"/>
+          </a:p>
+          <a:p>
+            <a:pPr marL="342900" indent="-342900">
+              <a:lnSpc>
+                <a:spcPct val="112000"/>
+              </a:lnSpc>
+              <a:spcAft>
+                <a:spcPts val="900"/>
+              </a:spcAft>
+              <a:buSzPct val="100000"/>
+              <a:buChar char="▸"/>
+            </a:pPr>
+            <a:r>
+              <a:rPr lang="en-US" sz="1280" dirty="0">
+                <a:solidFill>
+                  <a:srgbClr val="CBD5E1"/>
+                </a:solidFill>
+                <a:latin typeface="Segoe UI" pitchFamily="34" charset="0"/>
+                <a:ea typeface="Segoe UI" pitchFamily="34" charset="-122"/>
+                <a:cs typeface="Segoe UI" pitchFamily="34" charset="-120"/>
+              </a:rPr>
+              <a:t>Schedules die silently and reports quietly show stale data</a:t>
+            </a:r>
+            <a:endParaRPr lang="en-US" sz="1280" dirty="0"/>
+          </a:p>
+          <a:p>
+            <a:pPr marL="342900" indent="-342900">
+              <a:lnSpc>
+                <a:spcPct val="112000"/>
+              </a:lnSpc>
+              <a:spcAft>
+                <a:spcPts val="900"/>
+              </a:spcAft>
+              <a:buSzPct val="100000"/>
+              <a:buChar char="▸"/>
+            </a:pPr>
+            <a:r>
+              <a:rPr lang="en-US" sz="1280" dirty="0">
+                <a:solidFill>
+                  <a:srgbClr val="CBD5E1"/>
+                </a:solidFill>
+                <a:latin typeface="Segoe UI" pitchFamily="34" charset="0"/>
+                <a:ea typeface="Segoe UI" pitchFamily="34" charset="-122"/>
+                <a:cs typeface="Segoe UI" pitchFamily="34" charset="-120"/>
+              </a:rPr>
+              <a:t>Discrepancies float as tickets with no accountable owner</a:t>
+            </a:r>
+            <a:endParaRPr lang="en-US" sz="1280" dirty="0"/>
+          </a:p>
+        </p:txBody>
+      </p:sp>
+      <p:sp>
+        <p:nvSpPr>
+          <p:cNvPr id="9" name="Shape 7"/>
+          <p:cNvSpPr/>
+          <p:nvPr/>
+        </p:nvSpPr>
+        <p:spPr>
+          <a:xfrm>
+            <a:off x="6291072" y="2011680"/>
+            <a:ext cx="5074920" cy="3611880"/>
+          </a:xfrm>
+          <a:prstGeom prst="roundRect">
+            <a:avLst>
+              <a:gd name="adj" fmla="val 2025"/>
+            </a:avLst>
+          </a:prstGeom>
+          <a:solidFill>
+            <a:srgbClr val="111A2E"/>
+          </a:solidFill>
+          <a:ln w="12700">
+            <a:solidFill>
+              <a:srgbClr val="1E2D45"/>
+            </a:solidFill>
+            <a:prstDash val="solid"/>
+          </a:ln>
+        </p:spPr>
+      </p:sp>
+      <p:sp>
+        <p:nvSpPr>
+          <p:cNvPr id="10" name="Text 8"/>
+          <p:cNvSpPr/>
+          <p:nvPr/>
+        </p:nvSpPr>
+        <p:spPr>
+          <a:xfrm>
+            <a:off x="6565392" y="2240280"/>
+            <a:ext cx="4526280" cy="502920"/>
+          </a:xfrm>
+          <a:prstGeom prst="rect">
+            <a:avLst/>
+          </a:prstGeom>
+          <a:noFill/>
+          <a:ln/>
+        </p:spPr>
+        <p:txBody>
+          <a:bodyPr wrap="square" rtlCol="0" anchor="ctr"/>
+          <a:lstStyle/>
+          <a:p>
+            <a:pPr indent="0" marL="0">
+              <a:buNone/>
+            </a:pPr>
+            <a:r>
+              <a:rPr lang="en-US" sz="1650" b="1" dirty="0">
+                <a:solidFill>
+                  <a:srgbClr val="93C5FD"/>
+                </a:solidFill>
+                <a:latin typeface="Segoe UI" pitchFamily="34" charset="0"/>
+                <a:ea typeface="Segoe UI" pitchFamily="34" charset="-122"/>
+                <a:cs typeface="Segoe UI" pitchFamily="34" charset="-120"/>
+              </a:rPr>
+              <a:t>With the playbook I ran</a:t>
+            </a:r>
+            <a:endParaRPr lang="en-US" sz="1650" dirty="0"/>
+          </a:p>
+        </p:txBody>
+      </p:sp>
+      <p:sp>
+        <p:nvSpPr>
+          <p:cNvPr id="11" name="Text 9"/>
+          <p:cNvSpPr/>
+          <p:nvPr/>
+        </p:nvSpPr>
+        <p:spPr>
+          <a:xfrm>
+            <a:off x="6565392" y="2834640"/>
+            <a:ext cx="4553712" cy="2651760"/>
+          </a:xfrm>
+          <a:prstGeom prst="rect">
+            <a:avLst/>
+          </a:prstGeom>
+          <a:noFill/>
+          <a:ln/>
+        </p:spPr>
+        <p:txBody>
+          <a:bodyPr wrap="square" rtlCol="0" anchor="t"/>
+          <a:lstStyle/>
+          <a:p>
+            <a:pPr marL="342900" indent="-342900">
+              <a:lnSpc>
+                <a:spcPct val="112000"/>
+              </a:lnSpc>
+              <a:spcAft>
+                <a:spcPts val="900"/>
+              </a:spcAft>
+              <a:buSzPct val="100000"/>
+              <a:buChar char="▸"/>
+            </a:pPr>
+            <a:r>
+              <a:rPr lang="en-US" sz="1280" dirty="0">
+                <a:solidFill>
+                  <a:srgbClr val="CBD5E1"/>
+                </a:solidFill>
+                <a:latin typeface="Segoe UI" pitchFamily="34" charset="0"/>
+                <a:ea typeface="Segoe UI" pitchFamily="34" charset="-122"/>
+                <a:cs typeface="Segoe UI" pitchFamily="34" charset="-120"/>
+              </a:rPr>
+              <a:t>Reconciliation at every load, with named owners on both sides of every mismatch</a:t>
+            </a:r>
+            <a:endParaRPr lang="en-US" sz="1280" dirty="0"/>
+          </a:p>
+          <a:p>
+            <a:pPr marL="342900" indent="-342900">
+              <a:lnSpc>
+                <a:spcPct val="112000"/>
+              </a:lnSpc>
+              <a:spcAft>
+                <a:spcPts val="900"/>
+              </a:spcAft>
+              <a:buSzPct val="100000"/>
+              <a:buChar char="▸"/>
+            </a:pPr>
+            <a:r>
+              <a:rPr lang="en-US" sz="1280" dirty="0">
+                <a:solidFill>
+                  <a:srgbClr val="CBD5E1"/>
+                </a:solidFill>
+                <a:latin typeface="Segoe UI" pitchFamily="34" charset="0"/>
+                <a:ea typeface="Segoe UI" pitchFamily="34" charset="-122"/>
+                <a:cs typeface="Segoe UI" pitchFamily="34" charset="-120"/>
+              </a:rPr>
+              <a:t>Freshness alarms fire before stale numbers reach leadership</a:t>
+            </a:r>
+            <a:endParaRPr lang="en-US" sz="1280" dirty="0"/>
+          </a:p>
+          <a:p>
+            <a:pPr marL="342900" indent="-342900">
+              <a:lnSpc>
+                <a:spcPct val="112000"/>
+              </a:lnSpc>
+              <a:spcAft>
+                <a:spcPts val="900"/>
+              </a:spcAft>
+              <a:buSzPct val="100000"/>
+              <a:buChar char="▸"/>
+            </a:pPr>
+            <a:r>
+              <a:rPr lang="en-US" sz="1280" dirty="0">
+                <a:solidFill>
+                  <a:srgbClr val="CBD5E1"/>
+                </a:solidFill>
+                <a:latin typeface="Segoe UI" pitchFamily="34" charset="0"/>
+                <a:ea typeface="Segoe UI" pitchFamily="34" charset="-122"/>
+                <a:cs typeface="Segoe UI" pitchFamily="34" charset="-120"/>
+              </a:rPr>
+              <a:t>Quirks and runbooks documented where the work actually happens</a:t>
+            </a:r>
+            <a:endParaRPr lang="en-US" sz="1280" dirty="0"/>
+          </a:p>
+        </p:txBody>
+      </p:sp>
+      <p:sp>
+        <p:nvSpPr>
+          <p:cNvPr id="12" name="Shape 10"/>
+          <p:cNvSpPr/>
+          <p:nvPr/>
+        </p:nvSpPr>
+        <p:spPr>
+          <a:xfrm>
+            <a:off x="822960" y="5961888"/>
+            <a:ext cx="10515600" cy="0"/>
+          </a:xfrm>
+          <a:prstGeom prst="line">
+            <a:avLst/>
+          </a:prstGeom>
+          <a:noFill/>
+          <a:ln w="12700">
+            <a:solidFill>
+              <a:srgbClr val="1E2D45"/>
+            </a:solidFill>
+            <a:prstDash val="solid"/>
+          </a:ln>
+        </p:spPr>
+      </p:sp>
+      <p:sp>
+        <p:nvSpPr>
+          <p:cNvPr id="13" name="Text 11"/>
+          <p:cNvSpPr/>
+          <p:nvPr/>
+        </p:nvSpPr>
+        <p:spPr>
+          <a:xfrm>
+            <a:off x="822960" y="6053328"/>
+            <a:ext cx="9692640" cy="457200"/>
+          </a:xfrm>
+          <a:prstGeom prst="rect">
+            <a:avLst/>
+          </a:prstGeom>
+          <a:noFill/>
+          <a:ln/>
+        </p:spPr>
+        <p:txBody>
+          <a:bodyPr wrap="square" rtlCol="0" anchor="ctr"/>
+          <a:lstStyle/>
+          <a:p>
+            <a:pPr indent="0" marL="0">
+              <a:buNone/>
+            </a:pPr>
+            <a:r>
+              <a:rPr lang="en-US" sz="1150" dirty="0">
+                <a:solidFill>
+                  <a:srgbClr val="64748B"/>
+                </a:solidFill>
+                <a:latin typeface="Segoe UI" pitchFamily="34" charset="0"/>
+                <a:ea typeface="Segoe UI" pitchFamily="34" charset="-122"/>
+                <a:cs typeface="Segoe UI" pitchFamily="34" charset="-120"/>
+              </a:rPr>
+              <a:t>Multi-market BI is an agreement problem wearing a technology costume.</a:t>
+            </a:r>
+            <a:endParaRPr lang="en-US" sz="1150" dirty="0"/>
+          </a:p>
+        </p:txBody>
+      </p:sp>
+      <p:sp>
+        <p:nvSpPr>
+          <p:cNvPr id="14" name="Text 12"/>
+          <p:cNvSpPr/>
+          <p:nvPr/>
+        </p:nvSpPr>
+        <p:spPr>
+          <a:xfrm>
+            <a:off x="10698480" y="6382512"/>
+            <a:ext cx="1188720" cy="365760"/>
+          </a:xfrm>
+          <a:prstGeom prst="rect">
+            <a:avLst/>
+          </a:prstGeom>
+          <a:noFill/>
+          <a:ln/>
+        </p:spPr>
+        <p:txBody>
+          <a:bodyPr wrap="square" rtlCol="0" anchor="ctr"/>
+          <a:lstStyle/>
+          <a:p>
+            <a:pPr algn="r" indent="0" marL="0">
+              <a:buNone/>
+            </a:pPr>
+            <a:r>
+              <a:rPr lang="en-US" sz="1000" dirty="0">
+                <a:solidFill>
+                  <a:srgbClr val="64748B"/>
+                </a:solidFill>
+                <a:latin typeface="Consolas" pitchFamily="34" charset="0"/>
+                <a:ea typeface="Consolas" pitchFamily="34" charset="-122"/>
+                <a:cs typeface="Consolas" pitchFamily="34" charset="-120"/>
+              </a:rPr>
+              <a:t>12 / 14</a:t>
+            </a:r>
+            <a:endParaRPr lang="en-US" sz="1000" dirty="0"/>
+          </a:p>
+        </p:txBody>
+      </p:sp>
+    </p:spTree>
+  </p:cSld>
+  <p:clrMapOvr>
+    <a:masterClrMapping/>
+  </p:clrMapOvr>
+</p:sld>
+</file>
+
+<file path=ppt/slides/slide13.xml><?xml version="1.0" encoding="utf-8"?>
+<p:sld xmlns:a="http://schemas.openxmlformats.org/drawingml/2006/main" xmlns:r="http://schemas.openxmlformats.org/officeDocument/2006/relationships" xmlns:p="http://schemas.openxmlformats.org/presentationml/2006/main">
+  <p:cSld name="Slide 13">
+    <p:bg>
+      <p:bgPr>
+        <a:solidFill>
+          <a:srgbClr val="0A0C12"/>
+        </a:solidFill>
+      </p:bgPr>
+    </p:bg>
+    <p:spTree>
+      <p:nvGrpSpPr>
+        <p:cNvPr id="1" name=""/>
+        <p:cNvGrpSpPr/>
+        <p:nvPr/>
+      </p:nvGrpSpPr>
+      <p:grpSpPr>
+        <a:xfrm>
+          <a:off x="0" y="0"/>
+          <a:ext cx="0" cy="0"/>
+          <a:chOff x="0" y="0"/>
+          <a:chExt cx="0" cy="0"/>
+        </a:xfrm>
+      </p:grpSpPr>
+      <p:sp>
+        <p:nvSpPr>
+          <p:cNvPr id="2" name="Shape 0"/>
+          <p:cNvSpPr/>
+          <p:nvPr/>
+        </p:nvSpPr>
+        <p:spPr>
+          <a:xfrm>
+            <a:off x="0" y="0"/>
+            <a:ext cx="7680960" cy="64008"/>
+          </a:xfrm>
+          <a:prstGeom prst="rect">
+            <a:avLst/>
+          </a:prstGeom>
+          <a:solidFill>
+            <a:srgbClr val="3B82F6"/>
+          </a:solidFill>
+          <a:ln/>
+        </p:spPr>
+      </p:sp>
+      <p:sp>
+        <p:nvSpPr>
+          <p:cNvPr id="3" name="Shape 1"/>
+          <p:cNvSpPr/>
+          <p:nvPr/>
+        </p:nvSpPr>
+        <p:spPr>
+          <a:xfrm>
+            <a:off x="7680960" y="0"/>
+            <a:ext cx="4510735" cy="64008"/>
+          </a:xfrm>
+          <a:prstGeom prst="rect">
+            <a:avLst/>
+          </a:prstGeom>
+          <a:solidFill>
+            <a:srgbClr val="06B6D4"/>
+          </a:solidFill>
+          <a:ln/>
+        </p:spPr>
+      </p:sp>
+      <p:sp>
+        <p:nvSpPr>
+          <p:cNvPr id="4" name="Text 2"/>
+          <p:cNvSpPr/>
+          <p:nvPr/>
+        </p:nvSpPr>
+        <p:spPr>
+          <a:xfrm>
+            <a:off x="822960" y="502920"/>
+            <a:ext cx="10515600" cy="365760"/>
+          </a:xfrm>
+          <a:prstGeom prst="rect">
+            <a:avLst/>
+          </a:prstGeom>
+          <a:noFill/>
+          <a:ln/>
+        </p:spPr>
+        <p:txBody>
+          <a:bodyPr wrap="square" rtlCol="0" anchor="ctr"/>
+          <a:lstStyle/>
+          <a:p>
+            <a:pPr indent="0" marL="0">
+              <a:buNone/>
+            </a:pPr>
+            <a:r>
+              <a:rPr lang="en-US" sz="1200" spc="300" kern="0" dirty="0">
+                <a:solidFill>
+                  <a:srgbClr val="06B6D4"/>
+                </a:solidFill>
+                <a:latin typeface="Consolas" pitchFamily="34" charset="0"/>
+                <a:ea typeface="Consolas" pitchFamily="34" charset="-122"/>
+                <a:cs typeface="Consolas" pitchFamily="34" charset="-120"/>
+              </a:rPr>
+              <a:t>LESSONS</a:t>
+            </a:r>
+            <a:endParaRPr lang="en-US" sz="1200" dirty="0"/>
+          </a:p>
+        </p:txBody>
+      </p:sp>
+      <p:sp>
+        <p:nvSpPr>
+          <p:cNvPr id="5" name="Text 3"/>
+          <p:cNvSpPr/>
+          <p:nvPr/>
+        </p:nvSpPr>
+        <p:spPr>
+          <a:xfrm>
+            <a:off x="822960" y="914400"/>
+            <a:ext cx="10561320" cy="868680"/>
+          </a:xfrm>
+          <a:prstGeom prst="rect">
+            <a:avLst/>
+          </a:prstGeom>
+          <a:noFill/>
+          <a:ln/>
+        </p:spPr>
+        <p:txBody>
+          <a:bodyPr wrap="square" rtlCol="0" anchor="ctr"/>
+          <a:lstStyle/>
+          <a:p>
+            <a:pPr indent="0" marL="0">
+              <a:buNone/>
+            </a:pPr>
+            <a:r>
+              <a:rPr lang="en-US" sz="2700" b="1" dirty="0">
+                <a:solidFill>
+                  <a:srgbClr val="FFFFFF"/>
+                </a:solidFill>
+                <a:latin typeface="Segoe UI" pitchFamily="34" charset="0"/>
+                <a:ea typeface="Segoe UI" pitchFamily="34" charset="-122"/>
+                <a:cs typeface="Segoe UI" pitchFamily="34" charset="-120"/>
+              </a:rPr>
+              <a:t>What four countries taught me about BI at scale</a:t>
+            </a:r>
+            <a:endParaRPr lang="en-US" sz="2700" dirty="0"/>
+          </a:p>
+        </p:txBody>
+      </p:sp>
+      <p:sp>
+        <p:nvSpPr>
+          <p:cNvPr id="6" name="Text 4"/>
+          <p:cNvSpPr/>
+          <p:nvPr/>
+        </p:nvSpPr>
+        <p:spPr>
+          <a:xfrm>
+            <a:off x="868680" y="2011680"/>
+            <a:ext cx="10424160" cy="3566160"/>
+          </a:xfrm>
+          <a:prstGeom prst="rect">
+            <a:avLst/>
+          </a:prstGeom>
+          <a:noFill/>
+          <a:ln/>
+        </p:spPr>
+        <p:txBody>
+          <a:bodyPr wrap="square" rtlCol="0" anchor="t"/>
+          <a:lstStyle/>
+          <a:p>
+            <a:pPr marL="342900" indent="-342900">
+              <a:lnSpc>
+                <a:spcPct val="112000"/>
+              </a:lnSpc>
+              <a:spcAft>
+                <a:spcPts val="900"/>
+              </a:spcAft>
+              <a:buSzPct val="100000"/>
+              <a:buChar char="▸"/>
+            </a:pPr>
+            <a:r>
+              <a:rPr lang="en-US" sz="1600" dirty="0">
+                <a:solidFill>
+                  <a:srgbClr val="CBD5E1"/>
+                </a:solidFill>
+                <a:latin typeface="Segoe UI" pitchFamily="34" charset="0"/>
+                <a:ea typeface="Segoe UI" pitchFamily="34" charset="-122"/>
+                <a:cs typeface="Segoe UI" pitchFamily="34" charset="-120"/>
+              </a:rPr>
+              <a:t>One number, one definition - governance outvalues every technical optimization</a:t>
+            </a:r>
+            <a:endParaRPr lang="en-US" sz="1600" dirty="0"/>
+          </a:p>
+          <a:p>
+            <a:pPr marL="342900" indent="-342900">
+              <a:lnSpc>
+                <a:spcPct val="112000"/>
+              </a:lnSpc>
+              <a:spcAft>
+                <a:spcPts val="900"/>
+              </a:spcAft>
+              <a:buSzPct val="100000"/>
+              <a:buChar char="▸"/>
+            </a:pPr>
+            <a:r>
+              <a:rPr lang="en-US" sz="1600" dirty="0">
+                <a:solidFill>
+                  <a:srgbClr val="CBD5E1"/>
+                </a:solidFill>
+                <a:latin typeface="Segoe UI" pitchFamily="34" charset="0"/>
+                <a:ea typeface="Segoe UI" pitchFamily="34" charset="-122"/>
+                <a:cs typeface="Segoe UI" pitchFamily="34" charset="-120"/>
+              </a:rPr>
+              <a:t>Instrument pipelines, because silent failure is the default state</a:t>
+            </a:r>
+            <a:endParaRPr lang="en-US" sz="1600" dirty="0"/>
+          </a:p>
+          <a:p>
+            <a:pPr marL="342900" indent="-342900">
+              <a:lnSpc>
+                <a:spcPct val="112000"/>
+              </a:lnSpc>
+              <a:spcAft>
+                <a:spcPts val="900"/>
+              </a:spcAft>
+              <a:buSzPct val="100000"/>
+              <a:buChar char="▸"/>
+            </a:pPr>
+            <a:r>
+              <a:rPr lang="en-US" sz="1600" dirty="0">
+                <a:solidFill>
+                  <a:srgbClr val="CBD5E1"/>
+                </a:solidFill>
+                <a:latin typeface="Segoe UI" pitchFamily="34" charset="0"/>
+                <a:ea typeface="Segoe UI" pitchFamily="34" charset="-122"/>
+                <a:cs typeface="Segoe UI" pitchFamily="34" charset="-120"/>
+              </a:rPr>
+              <a:t>Collaboration with Regional IT is a feature of the system, not overhead</a:t>
+            </a:r>
+            <a:endParaRPr lang="en-US" sz="1600" dirty="0"/>
+          </a:p>
+          <a:p>
+            <a:pPr marL="342900" indent="-342900">
+              <a:lnSpc>
+                <a:spcPct val="112000"/>
+              </a:lnSpc>
+              <a:spcAft>
+                <a:spcPts val="900"/>
+              </a:spcAft>
+              <a:buSzPct val="100000"/>
+              <a:buChar char="▸"/>
+            </a:pPr>
+            <a:r>
+              <a:rPr lang="en-US" sz="1600" dirty="0">
+                <a:solidFill>
+                  <a:srgbClr val="CBD5E1"/>
+                </a:solidFill>
+                <a:latin typeface="Segoe UI" pitchFamily="34" charset="0"/>
+                <a:ea typeface="Segoe UI" pitchFamily="34" charset="-122"/>
+                <a:cs typeface="Segoe UI" pitchFamily="34" charset="-120"/>
+              </a:rPr>
+              <a:t>Standardize definitions across markets; respect the cultures that use them</a:t>
+            </a:r>
+            <a:endParaRPr lang="en-US" sz="1600" dirty="0"/>
+          </a:p>
+        </p:txBody>
+      </p:sp>
+      <p:sp>
+        <p:nvSpPr>
+          <p:cNvPr id="7" name="Text 5"/>
+          <p:cNvSpPr/>
+          <p:nvPr/>
+        </p:nvSpPr>
+        <p:spPr>
+          <a:xfrm>
+            <a:off x="10698480" y="6382512"/>
+            <a:ext cx="1188720" cy="365760"/>
+          </a:xfrm>
+          <a:prstGeom prst="rect">
+            <a:avLst/>
+          </a:prstGeom>
+          <a:noFill/>
+          <a:ln/>
+        </p:spPr>
+        <p:txBody>
+          <a:bodyPr wrap="square" rtlCol="0" anchor="ctr"/>
+          <a:lstStyle/>
+          <a:p>
+            <a:pPr algn="r" indent="0" marL="0">
+              <a:buNone/>
+            </a:pPr>
+            <a:r>
+              <a:rPr lang="en-US" sz="1000" dirty="0">
+                <a:solidFill>
+                  <a:srgbClr val="64748B"/>
+                </a:solidFill>
+                <a:latin typeface="Consolas" pitchFamily="34" charset="0"/>
+                <a:ea typeface="Consolas" pitchFamily="34" charset="-122"/>
+                <a:cs typeface="Consolas" pitchFamily="34" charset="-120"/>
+              </a:rPr>
+              <a:t>13 / 14</a:t>
+            </a:r>
+            <a:endParaRPr lang="en-US" sz="1000" dirty="0"/>
+          </a:p>
+        </p:txBody>
+      </p:sp>
+    </p:spTree>
+  </p:cSld>
+  <p:clrMapOvr>
+    <a:masterClrMapping/>
+  </p:clrMapOvr>
+</p:sld>
+</file>
+
+<file path=ppt/slides/slide14.xml><?xml version="1.0" encoding="utf-8"?>
+<p:sld xmlns:a="http://schemas.openxmlformats.org/drawingml/2006/main" xmlns:r="http://schemas.openxmlformats.org/officeDocument/2006/relationships" xmlns:p="http://schemas.openxmlformats.org/presentationml/2006/main">
+  <p:cSld name="Slide 14">
+    <p:bg>
+      <p:bgPr>
+        <a:solidFill>
+          <a:srgbClr val="0A0C12"/>
+        </a:solidFill>
+      </p:bgPr>
+    </p:bg>
+    <p:spTree>
+      <p:nvGrpSpPr>
+        <p:cNvPr id="1" name=""/>
+        <p:cNvGrpSpPr/>
+        <p:nvPr/>
+      </p:nvGrpSpPr>
+      <p:grpSpPr>
+        <a:xfrm>
+          <a:off x="0" y="0"/>
+          <a:ext cx="0" cy="0"/>
+          <a:chOff x="0" y="0"/>
+          <a:chExt cx="0" cy="0"/>
+        </a:xfrm>
+      </p:grpSpPr>
+      <p:sp>
+        <p:nvSpPr>
+          <p:cNvPr id="2" name="Shape 0"/>
+          <p:cNvSpPr/>
+          <p:nvPr/>
+        </p:nvSpPr>
+        <p:spPr>
+          <a:xfrm>
+            <a:off x="0" y="0"/>
+            <a:ext cx="7680960" cy="64008"/>
+          </a:xfrm>
+          <a:prstGeom prst="rect">
+            <a:avLst/>
+          </a:prstGeom>
+          <a:solidFill>
+            <a:srgbClr val="3B82F6"/>
+          </a:solidFill>
+          <a:ln/>
+        </p:spPr>
+      </p:sp>
+      <p:sp>
+        <p:nvSpPr>
+          <p:cNvPr id="3" name="Shape 1"/>
+          <p:cNvSpPr/>
+          <p:nvPr/>
+        </p:nvSpPr>
+        <p:spPr>
+          <a:xfrm>
+            <a:off x="7680960" y="0"/>
+            <a:ext cx="4510735" cy="64008"/>
+          </a:xfrm>
+          <a:prstGeom prst="rect">
+            <a:avLst/>
+          </a:prstGeom>
+          <a:solidFill>
+            <a:srgbClr val="06B6D4"/>
+          </a:solidFill>
+          <a:ln/>
+        </p:spPr>
+      </p:sp>
+      <p:sp>
+        <p:nvSpPr>
+          <p:cNvPr id="4" name="Text 2"/>
+          <p:cNvSpPr/>
+          <p:nvPr/>
+        </p:nvSpPr>
+        <p:spPr>
+          <a:xfrm>
+            <a:off x="822960" y="1417320"/>
+            <a:ext cx="10515600" cy="411480"/>
+          </a:xfrm>
+          <a:prstGeom prst="rect">
+            <a:avLst/>
+          </a:prstGeom>
+          <a:noFill/>
+          <a:ln/>
+        </p:spPr>
+        <p:txBody>
+          <a:bodyPr wrap="square" rtlCol="0" anchor="ctr"/>
+          <a:lstStyle/>
+          <a:p>
+            <a:pPr algn="ctr" indent="0" marL="0">
+              <a:buNone/>
+            </a:pPr>
+            <a:r>
+              <a:rPr lang="en-US" sz="1300" spc="400" kern="0" dirty="0">
+                <a:solidFill>
+                  <a:srgbClr val="06B6D4"/>
+                </a:solidFill>
+                <a:latin typeface="Consolas" pitchFamily="34" charset="0"/>
+                <a:ea typeface="Consolas" pitchFamily="34" charset="-122"/>
+                <a:cs typeface="Consolas" pitchFamily="34" charset="-120"/>
+              </a:rPr>
+              <a:t>WORK WITH ME</a:t>
+            </a:r>
+            <a:endParaRPr lang="en-US" sz="1300" dirty="0"/>
+          </a:p>
+        </p:txBody>
+      </p:sp>
+      <p:sp>
+        <p:nvSpPr>
+          <p:cNvPr id="5" name="Text 3"/>
+          <p:cNvSpPr/>
+          <p:nvPr/>
+        </p:nvSpPr>
+        <p:spPr>
+          <a:xfrm>
+            <a:off x="822960" y="1920240"/>
+            <a:ext cx="10515600" cy="1371600"/>
+          </a:xfrm>
+          <a:prstGeom prst="rect">
+            <a:avLst/>
+          </a:prstGeom>
+          <a:noFill/>
+          <a:ln/>
+        </p:spPr>
+        <p:txBody>
+          <a:bodyPr wrap="square" rtlCol="0" anchor="ctr"/>
+          <a:lstStyle/>
+          <a:p>
+            <a:pPr algn="ctr" indent="0" marL="0">
+              <a:buNone/>
+            </a:pPr>
+            <a:r>
+              <a:rPr lang="en-US" sz="3200" b="1" dirty="0">
+                <a:solidFill>
+                  <a:srgbClr val="FFFFFF"/>
+                </a:solidFill>
+                <a:latin typeface="Segoe UI" pitchFamily="34" charset="0"/>
+                <a:ea typeface="Segoe UI" pitchFamily="34" charset="-122"/>
+                <a:cs typeface="Segoe UI" pitchFamily="34" charset="-120"/>
+              </a:rPr>
+              <a:t>Need BI your whole region can trust?</a:t>
+            </a:r>
+            <a:endParaRPr lang="en-US" sz="3200" dirty="0"/>
+          </a:p>
+        </p:txBody>
+      </p:sp>
+      <p:sp>
+        <p:nvSpPr>
+          <p:cNvPr id="6" name="Text 4"/>
+          <p:cNvSpPr/>
+          <p:nvPr/>
+        </p:nvSpPr>
+        <p:spPr>
+          <a:xfrm>
+            <a:off x="2011680" y="3429000"/>
+            <a:ext cx="8183880" cy="1554480"/>
+          </a:xfrm>
+          <a:prstGeom prst="rect">
+            <a:avLst/>
+          </a:prstGeom>
+          <a:noFill/>
+          <a:ln/>
+        </p:spPr>
+        <p:txBody>
+          <a:bodyPr wrap="square" rtlCol="0" anchor="t"/>
+          <a:lstStyle/>
+          <a:p>
+            <a:pPr algn="ctr" indent="0" marL="0">
+              <a:spcAft>
+                <a:spcPts val="800"/>
+              </a:spcAft>
+              <a:buNone/>
+            </a:pPr>
+            <a:r>
+              <a:rPr lang="en-US" sz="1500" dirty="0">
+                <a:solidFill>
+                  <a:srgbClr val="CBD5E1"/>
+                </a:solidFill>
+                <a:latin typeface="Segoe UI" pitchFamily="34" charset="0"/>
+                <a:ea typeface="Segoe UI" pitchFamily="34" charset="-122"/>
+                <a:cs typeface="Segoe UI" pitchFamily="34" charset="-120"/>
+              </a:rPr>
+              <a:t>I run regional BI where data quality and definitions are engineered, not hoped for</a:t>
+            </a:r>
+            <a:pPr algn="ctr" indent="0" marL="0">
+              <a:spcAft>
+                <a:spcPts val="800"/>
+              </a:spcAft>
+              <a:buNone/>
+            </a:pPr>
+            <a:r>
+              <a:rPr lang="en-US" sz="1500" dirty="0">
+                <a:solidFill>
+                  <a:srgbClr val="CBD5E1"/>
+                </a:solidFill>
+                <a:latin typeface="Segoe UI" pitchFamily="34" charset="0"/>
+                <a:ea typeface="Segoe UI" pitchFamily="34" charset="-122"/>
+                <a:cs typeface="Segoe UI" pitchFamily="34" charset="-120"/>
+              </a:rPr>
+              <a:t>From Alteryx pipelines to Qlik dashboards: operations that survive four markets of scrutiny</a:t>
+            </a:r>
+            <a:pPr algn="ctr" indent="0" marL="0">
+              <a:spcAft>
+                <a:spcPts val="800"/>
+              </a:spcAft>
+              <a:buNone/>
+            </a:pPr>
+            <a:r>
+              <a:rPr lang="en-US" sz="1500" dirty="0">
+                <a:solidFill>
+                  <a:srgbClr val="CBD5E1"/>
+                </a:solidFill>
+                <a:latin typeface="Segoe UI" pitchFamily="34" charset="0"/>
+                <a:ea typeface="Segoe UI" pitchFamily="34" charset="-122"/>
+                <a:cs typeface="Segoe UI" pitchFamily="34" charset="-120"/>
+              </a:rPr>
+              <a:t>Available for freelance and contract engagements worldwide</a:t>
+            </a:r>
+            <a:endParaRPr lang="en-US" sz="1500" dirty="0"/>
+          </a:p>
+        </p:txBody>
+      </p:sp>
+      <p:sp>
+        <p:nvSpPr>
+          <p:cNvPr id="7" name="Shape 5"/>
+          <p:cNvSpPr/>
+          <p:nvPr/>
+        </p:nvSpPr>
+        <p:spPr>
+          <a:xfrm>
+            <a:off x="3566160" y="5212080"/>
+            <a:ext cx="5074920" cy="0"/>
+          </a:xfrm>
+          <a:prstGeom prst="line">
+            <a:avLst/>
+          </a:prstGeom>
+          <a:noFill/>
+          <a:ln w="25400">
+            <a:solidFill>
+              <a:srgbClr val="3B82F6"/>
+            </a:solidFill>
+            <a:prstDash val="solid"/>
+          </a:ln>
+        </p:spPr>
+      </p:sp>
+      <p:sp>
+        <p:nvSpPr>
+          <p:cNvPr id="8" name="Text 6"/>
+          <p:cNvSpPr/>
+          <p:nvPr/>
+        </p:nvSpPr>
+        <p:spPr>
+          <a:xfrm>
+            <a:off x="822960" y="5376672"/>
+            <a:ext cx="10515600" cy="457200"/>
+          </a:xfrm>
+          <a:prstGeom prst="rect">
+            <a:avLst/>
+          </a:prstGeom>
+          <a:noFill/>
+          <a:ln/>
+        </p:spPr>
+        <p:txBody>
+          <a:bodyPr wrap="square" rtlCol="0" anchor="ctr"/>
+          <a:lstStyle/>
+          <a:p>
+            <a:pPr algn="ctr" indent="0" marL="0">
+              <a:buNone/>
+            </a:pPr>
+            <a:r>
+              <a:rPr lang="en-US" sz="1350" b="1" dirty="0">
+                <a:solidFill>
+                  <a:srgbClr val="06B6D4"/>
+                </a:solidFill>
+                <a:latin typeface="Consolas" pitchFamily="34" charset="0"/>
+                <a:ea typeface="Consolas" pitchFamily="34" charset="-122"/>
+                <a:cs typeface="Consolas" pitchFamily="34" charset="-120"/>
+              </a:rPr>
+              <a:t>rezalianvatiady.github.io · github.com/rezalianvatiady</a:t>
+            </a:r>
+            <a:endParaRPr lang="en-US" sz="1350" dirty="0"/>
+          </a:p>
+        </p:txBody>
+      </p:sp>
+      <p:sp>
+        <p:nvSpPr>
+          <p:cNvPr id="9" name="Text 7"/>
+          <p:cNvSpPr/>
+          <p:nvPr/>
+        </p:nvSpPr>
+        <p:spPr>
+          <a:xfrm>
+            <a:off x="10698480" y="6382512"/>
+            <a:ext cx="1188720" cy="365760"/>
+          </a:xfrm>
+          <a:prstGeom prst="rect">
+            <a:avLst/>
+          </a:prstGeom>
+          <a:noFill/>
+          <a:ln/>
+        </p:spPr>
+        <p:txBody>
+          <a:bodyPr wrap="square" rtlCol="0" anchor="ctr"/>
+          <a:lstStyle/>
+          <a:p>
+            <a:pPr algn="r" indent="0" marL="0">
+              <a:buNone/>
+            </a:pPr>
+            <a:r>
+              <a:rPr lang="en-US" sz="1000" dirty="0">
+                <a:solidFill>
+                  <a:srgbClr val="64748B"/>
+                </a:solidFill>
+                <a:latin typeface="Consolas" pitchFamily="34" charset="0"/>
+                <a:ea typeface="Consolas" pitchFamily="34" charset="-122"/>
+                <a:cs typeface="Consolas" pitchFamily="34" charset="-120"/>
+              </a:rPr>
+              <a:t>14 / 14</a:t>
             </a:r>
             <a:endParaRPr lang="en-US" sz="1000" dirty="0"/>
           </a:p>
@@ -1710,7 +5152,7 @@
                 <a:ea typeface="Consolas" pitchFamily="34" charset="-122"/>
                 <a:cs typeface="Consolas" pitchFamily="34" charset="-120"/>
               </a:rPr>
-              <a:t>SCOPE</a:t>
+              <a:t>AGENDA</a:t>
             </a:r>
             <a:endParaRPr lang="en-US" sz="1200" dirty="0"/>
           </a:p>
@@ -1724,8 +5166,8 @@
         </p:nvSpPr>
         <p:spPr>
           <a:xfrm>
-            <a:off x="822960" y="960120"/>
-            <a:ext cx="10515600" cy="868680"/>
+            <a:off x="822960" y="914400"/>
+            <a:ext cx="10561320" cy="868680"/>
           </a:xfrm>
           <a:prstGeom prst="rect">
             <a:avLst/>
@@ -1741,7 +5183,7 @@
               <a:buNone/>
             </a:pPr>
             <a:r>
-              <a:rPr lang="en-US" sz="3000" b="1" dirty="0">
+              <a:rPr lang="en-US" sz="2700" b="1" dirty="0">
                 <a:solidFill>
                   <a:srgbClr val="FFFFFF"/>
                 </a:solidFill>
@@ -1749,45 +5191,102 @@
                 <a:ea typeface="Segoe UI" pitchFamily="34" charset="-122"/>
                 <a:cs typeface="Segoe UI" pitchFamily="34" charset="-120"/>
               </a:rPr>
-              <a:t>The operation</a:t>
-            </a:r>
-            <a:endParaRPr lang="en-US" sz="3000" dirty="0"/>
-          </a:p>
-        </p:txBody>
-      </p:sp>
-      <p:sp>
-        <p:nvSpPr>
-          <p:cNvPr id="6" name="Text 4"/>
-          <p:cNvSpPr/>
-          <p:nvPr/>
-        </p:nvSpPr>
-        <p:spPr>
-          <a:xfrm>
-            <a:off x="868680" y="2057400"/>
-            <a:ext cx="10424160" cy="3566160"/>
-          </a:xfrm>
-          <a:prstGeom prst="rect">
-            <a:avLst/>
-          </a:prstGeom>
-          <a:noFill/>
-          <a:ln/>
-        </p:spPr>
-        <p:txBody>
-          <a:bodyPr wrap="square" rtlCol="0" anchor="t"/>
-          <a:lstStyle/>
-          <a:p>
-            <a:pPr marL="342900" indent="-342900">
-              <a:lnSpc>
-                <a:spcPct val="115000"/>
-              </a:lnSpc>
-              <a:spcAft>
-                <a:spcPts val="1000"/>
-              </a:spcAft>
-              <a:buSzPct val="100000"/>
-              <a:buChar char="▸"/>
-            </a:pPr>
-            <a:r>
-              <a:rPr lang="en-US" sz="1600" dirty="0">
+              <a:t>What this deck covers</a:t>
+            </a:r>
+            <a:endParaRPr lang="en-US" sz="2700" dirty="0"/>
+          </a:p>
+        </p:txBody>
+      </p:sp>
+      <p:sp>
+        <p:nvSpPr>
+          <p:cNvPr id="6" name="Shape 4"/>
+          <p:cNvSpPr/>
+          <p:nvPr/>
+        </p:nvSpPr>
+        <p:spPr>
+          <a:xfrm>
+            <a:off x="868680" y="2112264"/>
+            <a:ext cx="420624" cy="420624"/>
+          </a:xfrm>
+          <a:prstGeom prst="ellipse">
+            <a:avLst/>
+          </a:prstGeom>
+          <a:solidFill>
+            <a:srgbClr val="111A2E"/>
+          </a:solidFill>
+          <a:ln w="19050">
+            <a:solidFill>
+              <a:srgbClr val="3B82F6"/>
+            </a:solidFill>
+            <a:prstDash val="solid"/>
+          </a:ln>
+        </p:spPr>
+      </p:sp>
+      <p:sp>
+        <p:nvSpPr>
+          <p:cNvPr id="7" name="Text 5"/>
+          <p:cNvSpPr/>
+          <p:nvPr/>
+        </p:nvSpPr>
+        <p:spPr>
+          <a:xfrm>
+            <a:off x="868680" y="2112264"/>
+            <a:ext cx="420624" cy="420624"/>
+          </a:xfrm>
+          <a:prstGeom prst="rect">
+            <a:avLst/>
+          </a:prstGeom>
+          <a:noFill/>
+          <a:ln/>
+        </p:spPr>
+        <p:txBody>
+          <a:bodyPr wrap="square" rtlCol="0" anchor="ctr"/>
+          <a:lstStyle/>
+          <a:p>
+            <a:pPr algn="ctr" indent="0" marL="0">
+              <a:buNone/>
+            </a:pPr>
+            <a:r>
+              <a:rPr lang="en-US" sz="1300" b="1" dirty="0">
+                <a:solidFill>
+                  <a:srgbClr val="3B82F6"/>
+                </a:solidFill>
+                <a:latin typeface="Consolas" pitchFamily="34" charset="0"/>
+                <a:ea typeface="Consolas" pitchFamily="34" charset="-122"/>
+                <a:cs typeface="Consolas" pitchFamily="34" charset="-120"/>
+              </a:rPr>
+              <a:t>1</a:t>
+            </a:r>
+            <a:endParaRPr lang="en-US" sz="1300" dirty="0"/>
+          </a:p>
+        </p:txBody>
+      </p:sp>
+      <p:sp>
+        <p:nvSpPr>
+          <p:cNvPr id="8" name="Text 6"/>
+          <p:cNvSpPr/>
+          <p:nvPr/>
+        </p:nvSpPr>
+        <p:spPr>
+          <a:xfrm>
+            <a:off x="1435608" y="2057400"/>
+            <a:ext cx="4480560" cy="822960"/>
+          </a:xfrm>
+          <a:prstGeom prst="rect">
+            <a:avLst/>
+          </a:prstGeom>
+          <a:noFill/>
+          <a:ln/>
+        </p:spPr>
+        <p:txBody>
+          <a:bodyPr wrap="square" rtlCol="0" anchor="ctr"/>
+          <a:lstStyle/>
+          <a:p>
+            <a:pPr indent="0" marL="0">
+              <a:buNone/>
+            </a:pPr>
+            <a:r>
+              <a:rPr lang="en-US" sz="1450" dirty="0">
                 <a:solidFill>
                   <a:srgbClr val="CBD5E1"/>
                 </a:solidFill>
@@ -1795,23 +5294,102 @@
                 <a:ea typeface="Segoe UI" pitchFamily="34" charset="-122"/>
                 <a:cs typeface="Segoe UI" pitchFamily="34" charset="-120"/>
               </a:rPr>
-              <a:t>BI operations across Indonesia, Taiwan, Hong Kong, and Macau</a:t>
-            </a:r>
-            <a:endParaRPr lang="en-US" sz="1600" dirty="0"/>
-          </a:p>
-          <a:p>
-            <a:pPr marL="342900" indent="-342900">
-              <a:lnSpc>
-                <a:spcPct val="115000"/>
-              </a:lnSpc>
-              <a:spcAft>
-                <a:spcPts val="1000"/>
-              </a:spcAft>
-              <a:buSzPct val="100000"/>
-              <a:buChar char="▸"/>
-            </a:pPr>
-            <a:r>
-              <a:rPr lang="en-US" sz="1600" dirty="0">
+              <a:t>The operation: regional BI across Indonesia, Taiwan, Hong Kong, and Macau</a:t>
+            </a:r>
+            <a:endParaRPr lang="en-US" sz="1450" dirty="0"/>
+          </a:p>
+        </p:txBody>
+      </p:sp>
+      <p:sp>
+        <p:nvSpPr>
+          <p:cNvPr id="9" name="Shape 7"/>
+          <p:cNvSpPr/>
+          <p:nvPr/>
+        </p:nvSpPr>
+        <p:spPr>
+          <a:xfrm>
+            <a:off x="868680" y="3044952"/>
+            <a:ext cx="420624" cy="420624"/>
+          </a:xfrm>
+          <a:prstGeom prst="ellipse">
+            <a:avLst/>
+          </a:prstGeom>
+          <a:solidFill>
+            <a:srgbClr val="111A2E"/>
+          </a:solidFill>
+          <a:ln w="19050">
+            <a:solidFill>
+              <a:srgbClr val="06B6D4"/>
+            </a:solidFill>
+            <a:prstDash val="solid"/>
+          </a:ln>
+        </p:spPr>
+      </p:sp>
+      <p:sp>
+        <p:nvSpPr>
+          <p:cNvPr id="10" name="Text 8"/>
+          <p:cNvSpPr/>
+          <p:nvPr/>
+        </p:nvSpPr>
+        <p:spPr>
+          <a:xfrm>
+            <a:off x="868680" y="3044952"/>
+            <a:ext cx="420624" cy="420624"/>
+          </a:xfrm>
+          <a:prstGeom prst="rect">
+            <a:avLst/>
+          </a:prstGeom>
+          <a:noFill/>
+          <a:ln/>
+        </p:spPr>
+        <p:txBody>
+          <a:bodyPr wrap="square" rtlCol="0" anchor="ctr"/>
+          <a:lstStyle/>
+          <a:p>
+            <a:pPr algn="ctr" indent="0" marL="0">
+              <a:buNone/>
+            </a:pPr>
+            <a:r>
+              <a:rPr lang="en-US" sz="1300" b="1" dirty="0">
+                <a:solidFill>
+                  <a:srgbClr val="06B6D4"/>
+                </a:solidFill>
+                <a:latin typeface="Consolas" pitchFamily="34" charset="0"/>
+                <a:ea typeface="Consolas" pitchFamily="34" charset="-122"/>
+                <a:cs typeface="Consolas" pitchFamily="34" charset="-120"/>
+              </a:rPr>
+              <a:t>2</a:t>
+            </a:r>
+            <a:endParaRPr lang="en-US" sz="1300" dirty="0"/>
+          </a:p>
+        </p:txBody>
+      </p:sp>
+      <p:sp>
+        <p:nvSpPr>
+          <p:cNvPr id="11" name="Text 9"/>
+          <p:cNvSpPr/>
+          <p:nvPr/>
+        </p:nvSpPr>
+        <p:spPr>
+          <a:xfrm>
+            <a:off x="1435608" y="2990088"/>
+            <a:ext cx="4480560" cy="822960"/>
+          </a:xfrm>
+          <a:prstGeom prst="rect">
+            <a:avLst/>
+          </a:prstGeom>
+          <a:noFill/>
+          <a:ln/>
+        </p:spPr>
+        <p:txBody>
+          <a:bodyPr wrap="square" rtlCol="0" anchor="ctr"/>
+          <a:lstStyle/>
+          <a:p>
+            <a:pPr indent="0" marL="0">
+              <a:buNone/>
+            </a:pPr>
+            <a:r>
+              <a:rPr lang="en-US" sz="1450" dirty="0">
                 <a:solidFill>
                   <a:srgbClr val="CBD5E1"/>
                 </a:solidFill>
@@ -1819,23 +5397,102 @@
                 <a:ea typeface="Segoe UI" pitchFamily="34" charset="-122"/>
                 <a:cs typeface="Segoe UI" pitchFamily="34" charset="-120"/>
               </a:rPr>
-              <a:t>Role: Regional Business Intelligence Specialist, Oct 2023 - Mar 2024</a:t>
-            </a:r>
-            <a:endParaRPr lang="en-US" sz="1600" dirty="0"/>
-          </a:p>
-          <a:p>
-            <a:pPr marL="342900" indent="-342900">
-              <a:lnSpc>
-                <a:spcPct val="115000"/>
-              </a:lnSpc>
-              <a:spcAft>
-                <a:spcPts val="1000"/>
-              </a:spcAft>
-              <a:buSzPct val="100000"/>
-              <a:buChar char="▸"/>
-            </a:pPr>
-            <a:r>
-              <a:rPr lang="en-US" sz="1600" dirty="0">
+              <a:t>The stack: Alteryx pipelines, a SQL Server datalake, and Qlik Sense dashboards</a:t>
+            </a:r>
+            <a:endParaRPr lang="en-US" sz="1450" dirty="0"/>
+          </a:p>
+        </p:txBody>
+      </p:sp>
+      <p:sp>
+        <p:nvSpPr>
+          <p:cNvPr id="12" name="Shape 10"/>
+          <p:cNvSpPr/>
+          <p:nvPr/>
+        </p:nvSpPr>
+        <p:spPr>
+          <a:xfrm>
+            <a:off x="868680" y="3977640"/>
+            <a:ext cx="420624" cy="420624"/>
+          </a:xfrm>
+          <a:prstGeom prst="ellipse">
+            <a:avLst/>
+          </a:prstGeom>
+          <a:solidFill>
+            <a:srgbClr val="111A2E"/>
+          </a:solidFill>
+          <a:ln w="19050">
+            <a:solidFill>
+              <a:srgbClr val="3B82F6"/>
+            </a:solidFill>
+            <a:prstDash val="solid"/>
+          </a:ln>
+        </p:spPr>
+      </p:sp>
+      <p:sp>
+        <p:nvSpPr>
+          <p:cNvPr id="13" name="Text 11"/>
+          <p:cNvSpPr/>
+          <p:nvPr/>
+        </p:nvSpPr>
+        <p:spPr>
+          <a:xfrm>
+            <a:off x="868680" y="3977640"/>
+            <a:ext cx="420624" cy="420624"/>
+          </a:xfrm>
+          <a:prstGeom prst="rect">
+            <a:avLst/>
+          </a:prstGeom>
+          <a:noFill/>
+          <a:ln/>
+        </p:spPr>
+        <p:txBody>
+          <a:bodyPr wrap="square" rtlCol="0" anchor="ctr"/>
+          <a:lstStyle/>
+          <a:p>
+            <a:pPr algn="ctr" indent="0" marL="0">
+              <a:buNone/>
+            </a:pPr>
+            <a:r>
+              <a:rPr lang="en-US" sz="1300" b="1" dirty="0">
+                <a:solidFill>
+                  <a:srgbClr val="3B82F6"/>
+                </a:solidFill>
+                <a:latin typeface="Consolas" pitchFamily="34" charset="0"/>
+                <a:ea typeface="Consolas" pitchFamily="34" charset="-122"/>
+                <a:cs typeface="Consolas" pitchFamily="34" charset="-120"/>
+              </a:rPr>
+              <a:t>3</a:t>
+            </a:r>
+            <a:endParaRPr lang="en-US" sz="1300" dirty="0"/>
+          </a:p>
+        </p:txBody>
+      </p:sp>
+      <p:sp>
+        <p:nvSpPr>
+          <p:cNvPr id="14" name="Text 12"/>
+          <p:cNvSpPr/>
+          <p:nvPr/>
+        </p:nvSpPr>
+        <p:spPr>
+          <a:xfrm>
+            <a:off x="1435608" y="3922776"/>
+            <a:ext cx="4480560" cy="822960"/>
+          </a:xfrm>
+          <a:prstGeom prst="rect">
+            <a:avLst/>
+          </a:prstGeom>
+          <a:noFill/>
+          <a:ln/>
+        </p:spPr>
+        <p:txBody>
+          <a:bodyPr wrap="square" rtlCol="0" anchor="ctr"/>
+          <a:lstStyle/>
+          <a:p>
+            <a:pPr indent="0" marL="0">
+              <a:buNone/>
+            </a:pPr>
+            <a:r>
+              <a:rPr lang="en-US" sz="1450" dirty="0">
                 <a:solidFill>
                   <a:srgbClr val="CBD5E1"/>
                 </a:solidFill>
@@ -1843,23 +5500,102 @@
                 <a:ea typeface="Segoe UI" pitchFamily="34" charset="-122"/>
                 <a:cs typeface="Segoe UI" pitchFamily="34" charset="-120"/>
               </a:rPr>
-              <a:t>Business: PT Rumah Mebel Nusantara (IKEA Indonesia)</a:t>
-            </a:r>
-            <a:endParaRPr lang="en-US" sz="1600" dirty="0"/>
-          </a:p>
-          <a:p>
-            <a:pPr marL="342900" indent="-342900">
-              <a:lnSpc>
-                <a:spcPct val="115000"/>
-              </a:lnSpc>
-              <a:spcAft>
-                <a:spcPts val="1000"/>
-              </a:spcAft>
-              <a:buSzPct val="100000"/>
-              <a:buChar char="▸"/>
-            </a:pPr>
-            <a:r>
-              <a:rPr lang="en-US" sz="1600" dirty="0">
+              <a:t>The quality playbook: reconciliation at every seam, alarms on every source</a:t>
+            </a:r>
+            <a:endParaRPr lang="en-US" sz="1450" dirty="0"/>
+          </a:p>
+        </p:txBody>
+      </p:sp>
+      <p:sp>
+        <p:nvSpPr>
+          <p:cNvPr id="15" name="Shape 13"/>
+          <p:cNvSpPr/>
+          <p:nvPr/>
+        </p:nvSpPr>
+        <p:spPr>
+          <a:xfrm>
+            <a:off x="6355080" y="2112264"/>
+            <a:ext cx="420624" cy="420624"/>
+          </a:xfrm>
+          <a:prstGeom prst="ellipse">
+            <a:avLst/>
+          </a:prstGeom>
+          <a:solidFill>
+            <a:srgbClr val="111A2E"/>
+          </a:solidFill>
+          <a:ln w="19050">
+            <a:solidFill>
+              <a:srgbClr val="06B6D4"/>
+            </a:solidFill>
+            <a:prstDash val="solid"/>
+          </a:ln>
+        </p:spPr>
+      </p:sp>
+      <p:sp>
+        <p:nvSpPr>
+          <p:cNvPr id="16" name="Text 14"/>
+          <p:cNvSpPr/>
+          <p:nvPr/>
+        </p:nvSpPr>
+        <p:spPr>
+          <a:xfrm>
+            <a:off x="6355080" y="2112264"/>
+            <a:ext cx="420624" cy="420624"/>
+          </a:xfrm>
+          <a:prstGeom prst="rect">
+            <a:avLst/>
+          </a:prstGeom>
+          <a:noFill/>
+          <a:ln/>
+        </p:spPr>
+        <p:txBody>
+          <a:bodyPr wrap="square" rtlCol="0" anchor="ctr"/>
+          <a:lstStyle/>
+          <a:p>
+            <a:pPr algn="ctr" indent="0" marL="0">
+              <a:buNone/>
+            </a:pPr>
+            <a:r>
+              <a:rPr lang="en-US" sz="1300" b="1" dirty="0">
+                <a:solidFill>
+                  <a:srgbClr val="06B6D4"/>
+                </a:solidFill>
+                <a:latin typeface="Consolas" pitchFamily="34" charset="0"/>
+                <a:ea typeface="Consolas" pitchFamily="34" charset="-122"/>
+                <a:cs typeface="Consolas" pitchFamily="34" charset="-120"/>
+              </a:rPr>
+              <a:t>4</a:t>
+            </a:r>
+            <a:endParaRPr lang="en-US" sz="1300" dirty="0"/>
+          </a:p>
+        </p:txBody>
+      </p:sp>
+      <p:sp>
+        <p:nvSpPr>
+          <p:cNvPr id="17" name="Text 15"/>
+          <p:cNvSpPr/>
+          <p:nvPr/>
+        </p:nvSpPr>
+        <p:spPr>
+          <a:xfrm>
+            <a:off x="6922008" y="2057400"/>
+            <a:ext cx="4480560" cy="822960"/>
+          </a:xfrm>
+          <a:prstGeom prst="rect">
+            <a:avLst/>
+          </a:prstGeom>
+          <a:noFill/>
+          <a:ln/>
+        </p:spPr>
+        <p:txBody>
+          <a:bodyPr wrap="square" rtlCol="0" anchor="ctr"/>
+          <a:lstStyle/>
+          <a:p>
+            <a:pPr indent="0" marL="0">
+              <a:buNone/>
+            </a:pPr>
+            <a:r>
+              <a:rPr lang="en-US" sz="1450" dirty="0">
                 <a:solidFill>
                   <a:srgbClr val="CBD5E1"/>
                 </a:solidFill>
@@ -1867,22 +5603,47 @@
                 <a:ea typeface="Segoe UI" pitchFamily="34" charset="-122"/>
                 <a:cs typeface="Segoe UI" pitchFamily="34" charset="-120"/>
               </a:rPr>
-              <a:t>Audience: regional leadership, country teams, operations</a:t>
-            </a:r>
-            <a:endParaRPr lang="en-US" sz="1600" dirty="0"/>
-          </a:p>
-        </p:txBody>
-      </p:sp>
-      <p:sp>
-        <p:nvSpPr>
-          <p:cNvPr id="7" name="Text 5"/>
-          <p:cNvSpPr/>
-          <p:nvPr/>
-        </p:nvSpPr>
-        <p:spPr>
-          <a:xfrm>
-            <a:off x="10698480" y="6355080"/>
-            <a:ext cx="1188720" cy="365760"/>
+              <a:t>Governance: one number, one definition, one owner</a:t>
+            </a:r>
+            <a:endParaRPr lang="en-US" sz="1450" dirty="0"/>
+          </a:p>
+        </p:txBody>
+      </p:sp>
+      <p:sp>
+        <p:nvSpPr>
+          <p:cNvPr id="18" name="Shape 16"/>
+          <p:cNvSpPr/>
+          <p:nvPr/>
+        </p:nvSpPr>
+        <p:spPr>
+          <a:xfrm>
+            <a:off x="6355080" y="3044952"/>
+            <a:ext cx="420624" cy="420624"/>
+          </a:xfrm>
+          <a:prstGeom prst="ellipse">
+            <a:avLst/>
+          </a:prstGeom>
+          <a:solidFill>
+            <a:srgbClr val="111A2E"/>
+          </a:solidFill>
+          <a:ln w="19050">
+            <a:solidFill>
+              <a:srgbClr val="3B82F6"/>
+            </a:solidFill>
+            <a:prstDash val="solid"/>
+          </a:ln>
+        </p:spPr>
+      </p:sp>
+      <p:sp>
+        <p:nvSpPr>
+          <p:cNvPr id="19" name="Text 17"/>
+          <p:cNvSpPr/>
+          <p:nvPr/>
+        </p:nvSpPr>
+        <p:spPr>
+          <a:xfrm>
+            <a:off x="6355080" y="3044952"/>
+            <a:ext cx="420624" cy="420624"/>
           </a:xfrm>
           <a:prstGeom prst="rect">
             <a:avLst/>
@@ -1894,19 +5655,97 @@
           <a:bodyPr wrap="square" rtlCol="0" anchor="ctr"/>
           <a:lstStyle/>
           <a:p>
-            <a:pPr algn="r" indent="0" marL="0">
+            <a:pPr algn="ctr" indent="0" marL="0">
               <a:buNone/>
             </a:pPr>
             <a:r>
-              <a:rPr lang="en-US" sz="1000" dirty="0">
-                <a:solidFill>
-                  <a:srgbClr val="64748B"/>
+              <a:rPr lang="en-US" sz="1300" b="1" dirty="0">
+                <a:solidFill>
+                  <a:srgbClr val="3B82F6"/>
                 </a:solidFill>
                 <a:latin typeface="Consolas" pitchFamily="34" charset="0"/>
                 <a:ea typeface="Consolas" pitchFamily="34" charset="-122"/>
                 <a:cs typeface="Consolas" pitchFamily="34" charset="-120"/>
               </a:rPr>
-              <a:t>2 / 7</a:t>
+              <a:t>5</a:t>
+            </a:r>
+            <a:endParaRPr lang="en-US" sz="1300" dirty="0"/>
+          </a:p>
+        </p:txBody>
+      </p:sp>
+      <p:sp>
+        <p:nvSpPr>
+          <p:cNvPr id="20" name="Text 18"/>
+          <p:cNvSpPr/>
+          <p:nvPr/>
+        </p:nvSpPr>
+        <p:spPr>
+          <a:xfrm>
+            <a:off x="6922008" y="2990088"/>
+            <a:ext cx="4480560" cy="822960"/>
+          </a:xfrm>
+          <a:prstGeom prst="rect">
+            <a:avLst/>
+          </a:prstGeom>
+          <a:noFill/>
+          <a:ln/>
+        </p:spPr>
+        <p:txBody>
+          <a:bodyPr wrap="square" rtlCol="0" anchor="ctr"/>
+          <a:lstStyle/>
+          <a:p>
+            <a:pPr indent="0" marL="0">
+              <a:buNone/>
+            </a:pPr>
+            <a:r>
+              <a:rPr lang="en-US" sz="1450" dirty="0">
+                <a:solidFill>
+                  <a:srgbClr val="CBD5E1"/>
+                </a:solidFill>
+                <a:latin typeface="Segoe UI" pitchFamily="34" charset="0"/>
+                <a:ea typeface="Segoe UI" pitchFamily="34" charset="-122"/>
+                <a:cs typeface="Segoe UI" pitchFamily="34" charset="-120"/>
+              </a:rPr>
+              <a:t>What four countries teach about scale</a:t>
+            </a:r>
+            <a:endParaRPr lang="en-US" sz="1450" dirty="0"/>
+          </a:p>
+        </p:txBody>
+      </p:sp>
+      <p:sp>
+        <p:nvSpPr>
+          <p:cNvPr id="21" name="Text 19"/>
+          <p:cNvSpPr/>
+          <p:nvPr/>
+        </p:nvSpPr>
+        <p:spPr>
+          <a:xfrm>
+            <a:off x="10698480" y="6382512"/>
+            <a:ext cx="1188720" cy="365760"/>
+          </a:xfrm>
+          <a:prstGeom prst="rect">
+            <a:avLst/>
+          </a:prstGeom>
+          <a:noFill/>
+          <a:ln/>
+        </p:spPr>
+        <p:txBody>
+          <a:bodyPr wrap="square" rtlCol="0" anchor="ctr"/>
+          <a:lstStyle/>
+          <a:p>
+            <a:pPr algn="r" indent="0" marL="0">
+              <a:buNone/>
+            </a:pPr>
+            <a:r>
+              <a:rPr lang="en-US" sz="1000" dirty="0">
+                <a:solidFill>
+                  <a:srgbClr val="64748B"/>
+                </a:solidFill>
+                <a:latin typeface="Consolas" pitchFamily="34" charset="0"/>
+                <a:ea typeface="Consolas" pitchFamily="34" charset="-122"/>
+                <a:cs typeface="Consolas" pitchFamily="34" charset="-120"/>
+              </a:rPr>
+              <a:t>2 / 14</a:t>
             </a:r>
             <a:endParaRPr lang="en-US" sz="1000" dirty="0"/>
           </a:p>
@@ -2017,7 +5856,7 @@
                 <a:ea typeface="Consolas" pitchFamily="34" charset="-122"/>
                 <a:cs typeface="Consolas" pitchFamily="34" charset="-120"/>
               </a:rPr>
-              <a:t>THE STACK</a:t>
+              <a:t>THE OPERATION</a:t>
             </a:r>
             <a:endParaRPr lang="en-US" sz="1200" dirty="0"/>
           </a:p>
@@ -2031,8 +5870,8 @@
         </p:nvSpPr>
         <p:spPr>
           <a:xfrm>
-            <a:off x="822960" y="960120"/>
-            <a:ext cx="10515600" cy="868680"/>
+            <a:off x="822960" y="914400"/>
+            <a:ext cx="10561320" cy="868680"/>
           </a:xfrm>
           <a:prstGeom prst="rect">
             <a:avLst/>
@@ -2048,7 +5887,7 @@
               <a:buNone/>
             </a:pPr>
             <a:r>
-              <a:rPr lang="en-US" sz="3000" b="1" dirty="0">
+              <a:rPr lang="en-US" sz="2700" b="1" dirty="0">
                 <a:solidFill>
                   <a:srgbClr val="FFFFFF"/>
                 </a:solidFill>
@@ -2056,9 +5895,9 @@
                 <a:ea typeface="Segoe UI" pitchFamily="34" charset="-122"/>
                 <a:cs typeface="Segoe UI" pitchFamily="34" charset="-120"/>
               </a:rPr>
-              <a:t>Enterprise BI, operated in anger</a:t>
-            </a:r>
-            <a:endParaRPr lang="en-US" sz="3000" dirty="0"/>
+              <a:t>Four markets, one datalake, daily decisions</a:t>
+            </a:r>
+            <a:endParaRPr lang="en-US" sz="2700" dirty="0"/>
           </a:p>
         </p:txBody>
       </p:sp>
@@ -2070,7 +5909,7 @@
         </p:nvSpPr>
         <p:spPr>
           <a:xfrm>
-            <a:off x="868680" y="2057400"/>
+            <a:off x="868680" y="2011680"/>
             <a:ext cx="10424160" cy="3566160"/>
           </a:xfrm>
           <a:prstGeom prst="rect">
@@ -2085,10 +5924,10 @@
           <a:p>
             <a:pPr marL="342900" indent="-342900">
               <a:lnSpc>
-                <a:spcPct val="115000"/>
+                <a:spcPct val="112000"/>
               </a:lnSpc>
               <a:spcAft>
-                <a:spcPts val="1000"/>
+                <a:spcPts val="900"/>
               </a:spcAft>
               <a:buSzPct val="100000"/>
               <a:buChar char="▸"/>
@@ -2102,17 +5941,17 @@
                 <a:ea typeface="Segoe UI" pitchFamily="34" charset="-122"/>
                 <a:cs typeface="Segoe UI" pitchFamily="34" charset="-120"/>
               </a:rPr>
-              <a:t>Qlik Sense - regional dashboards and Management Console</a:t>
+              <a:t>Regional BI operations across Indonesia, Taiwan, Hong Kong, and Macau</a:t>
             </a:r>
             <a:endParaRPr lang="en-US" sz="1600" dirty="0"/>
           </a:p>
           <a:p>
             <a:pPr marL="342900" indent="-342900">
               <a:lnSpc>
-                <a:spcPct val="115000"/>
+                <a:spcPct val="112000"/>
               </a:lnSpc>
               <a:spcAft>
-                <a:spcPts val="1000"/>
+                <a:spcPts val="900"/>
               </a:spcAft>
               <a:buSzPct val="100000"/>
               <a:buChar char="▸"/>
@@ -2126,17 +5965,17 @@
                 <a:ea typeface="Segoe UI" pitchFamily="34" charset="-122"/>
                 <a:cs typeface="Segoe UI" pitchFamily="34" charset="-120"/>
               </a:rPr>
-              <a:t>Alteryx - scheduling pipelines feeding the datalake</a:t>
+              <a:t>Role: Regional Business Intelligence Specialist, Oct 2023 - Mar 2024, IKEA Indonesia (PT Rumah Mebel Nusantara)</a:t>
             </a:r>
             <a:endParaRPr lang="en-US" sz="1600" dirty="0"/>
           </a:p>
           <a:p>
             <a:pPr marL="342900" indent="-342900">
               <a:lnSpc>
-                <a:spcPct val="115000"/>
+                <a:spcPct val="112000"/>
               </a:lnSpc>
               <a:spcAft>
-                <a:spcPts val="1000"/>
+                <a:spcPts val="900"/>
               </a:spcAft>
               <a:buSzPct val="100000"/>
               <a:buChar char="▸"/>
@@ -2150,17 +5989,17 @@
                 <a:ea typeface="Segoe UI" pitchFamily="34" charset="-122"/>
                 <a:cs typeface="Segoe UI" pitchFamily="34" charset="-120"/>
               </a:rPr>
-              <a:t>MS SQL Server - the foundation</a:t>
+              <a:t>Audience: regional leadership, country teams, and store operations</a:t>
             </a:r>
             <a:endParaRPr lang="en-US" sz="1600" dirty="0"/>
           </a:p>
           <a:p>
             <a:pPr marL="342900" indent="-342900">
               <a:lnSpc>
-                <a:spcPct val="115000"/>
+                <a:spcPct val="112000"/>
               </a:lnSpc>
               <a:spcAft>
-                <a:spcPts val="1000"/>
+                <a:spcPts val="900"/>
               </a:spcAft>
               <a:buSzPct val="100000"/>
               <a:buChar char="▸"/>
@@ -2174,7 +6013,7 @@
                 <a:ea typeface="Segoe UI" pitchFamily="34" charset="-122"/>
                 <a:cs typeface="Segoe UI" pitchFamily="34" charset="-120"/>
               </a:rPr>
-              <a:t>Datalake - the single source every market argues with</a:t>
+              <a:t>One datalake served every market - and every market argued with it</a:t>
             </a:r>
             <a:endParaRPr lang="en-US" sz="1600" dirty="0"/>
           </a:p>
@@ -2188,7 +6027,7 @@
         </p:nvSpPr>
         <p:spPr>
           <a:xfrm>
-            <a:off x="10698480" y="6355080"/>
+            <a:off x="10698480" y="6382512"/>
             <a:ext cx="1188720" cy="365760"/>
           </a:xfrm>
           <a:prstGeom prst="rect">
@@ -2213,7 +6052,7 @@
                 <a:ea typeface="Consolas" pitchFamily="34" charset="-122"/>
                 <a:cs typeface="Consolas" pitchFamily="34" charset="-120"/>
               </a:rPr>
-              <a:t>3 / 7</a:t>
+              <a:t>3 / 14</a:t>
             </a:r>
             <a:endParaRPr lang="en-US" sz="1000" dirty="0"/>
           </a:p>
@@ -2324,7 +6163,7 @@
                 <a:ea typeface="Consolas" pitchFamily="34" charset="-122"/>
                 <a:cs typeface="Consolas" pitchFamily="34" charset="-120"/>
               </a:rPr>
-              <a:t>RESPONSIBILITIES</a:t>
+              <a:t>SCALE</a:t>
             </a:r>
             <a:endParaRPr lang="en-US" sz="1200" dirty="0"/>
           </a:p>
@@ -2338,8 +6177,8 @@
         </p:nvSpPr>
         <p:spPr>
           <a:xfrm>
-            <a:off x="822960" y="960120"/>
-            <a:ext cx="10515600" cy="868680"/>
+            <a:off x="822960" y="914400"/>
+            <a:ext cx="10561320" cy="868680"/>
           </a:xfrm>
           <a:prstGeom prst="rect">
             <a:avLst/>
@@ -2355,7 +6194,7 @@
               <a:buNone/>
             </a:pPr>
             <a:r>
-              <a:rPr lang="en-US" sz="3000" b="1" dirty="0">
+              <a:rPr lang="en-US" sz="2700" b="1" dirty="0">
                 <a:solidFill>
                   <a:srgbClr val="FFFFFF"/>
                 </a:solidFill>
@@ -2363,139 +6202,659 @@
                 <a:ea typeface="Segoe UI" pitchFamily="34" charset="-122"/>
                 <a:cs typeface="Segoe UI" pitchFamily="34" charset="-120"/>
               </a:rPr>
-              <a:t>What I owned</a:t>
-            </a:r>
-            <a:endParaRPr lang="en-US" sz="3000" dirty="0"/>
-          </a:p>
-        </p:txBody>
-      </p:sp>
-      <p:sp>
-        <p:nvSpPr>
-          <p:cNvPr id="6" name="Text 4"/>
-          <p:cNvSpPr/>
-          <p:nvPr/>
-        </p:nvSpPr>
-        <p:spPr>
-          <a:xfrm>
-            <a:off x="868680" y="2057400"/>
-            <a:ext cx="10424160" cy="3566160"/>
-          </a:xfrm>
-          <a:prstGeom prst="rect">
-            <a:avLst/>
-          </a:prstGeom>
-          <a:noFill/>
-          <a:ln/>
-        </p:spPr>
-        <p:txBody>
-          <a:bodyPr wrap="square" rtlCol="0" anchor="t"/>
-          <a:lstStyle/>
-          <a:p>
-            <a:pPr marL="342900" indent="-342900">
-              <a:lnSpc>
-                <a:spcPct val="115000"/>
-              </a:lnSpc>
-              <a:spcAft>
-                <a:spcPts val="1000"/>
-              </a:spcAft>
-              <a:buSzPct val="100000"/>
-              <a:buChar char="▸"/>
-            </a:pPr>
-            <a:r>
-              <a:rPr lang="en-US" sz="1600" dirty="0">
-                <a:solidFill>
-                  <a:srgbClr val="CBD5E1"/>
+              <a:t>The operation in numbers</a:t>
+            </a:r>
+            <a:endParaRPr lang="en-US" sz="2700" dirty="0"/>
+          </a:p>
+        </p:txBody>
+      </p:sp>
+      <p:sp>
+        <p:nvSpPr>
+          <p:cNvPr id="6" name="Shape 4"/>
+          <p:cNvSpPr/>
+          <p:nvPr/>
+        </p:nvSpPr>
+        <p:spPr>
+          <a:xfrm>
+            <a:off x="822960" y="2194560"/>
+            <a:ext cx="2423160" cy="2697480"/>
+          </a:xfrm>
+          <a:prstGeom prst="roundRect">
+            <a:avLst>
+              <a:gd name="adj" fmla="val 3019"/>
+            </a:avLst>
+          </a:prstGeom>
+          <a:solidFill>
+            <a:srgbClr val="111A2E"/>
+          </a:solidFill>
+          <a:ln w="12700">
+            <a:solidFill>
+              <a:srgbClr val="1E2D45"/>
+            </a:solidFill>
+            <a:prstDash val="solid"/>
+          </a:ln>
+        </p:spPr>
+      </p:sp>
+      <p:sp>
+        <p:nvSpPr>
+          <p:cNvPr id="7" name="Text 5"/>
+          <p:cNvSpPr/>
+          <p:nvPr/>
+        </p:nvSpPr>
+        <p:spPr>
+          <a:xfrm>
+            <a:off x="960120" y="2514600"/>
+            <a:ext cx="2148840" cy="914400"/>
+          </a:xfrm>
+          <a:prstGeom prst="rect">
+            <a:avLst/>
+          </a:prstGeom>
+          <a:noFill/>
+          <a:ln/>
+        </p:spPr>
+        <p:txBody>
+          <a:bodyPr wrap="square" rtlCol="0" anchor="ctr"/>
+          <a:lstStyle/>
+          <a:p>
+            <a:pPr algn="ctr" indent="0" marL="0">
+              <a:buNone/>
+            </a:pPr>
+            <a:r>
+              <a:rPr lang="en-US" sz="3800" b="1" dirty="0">
+                <a:solidFill>
+                  <a:srgbClr val="3B82F6"/>
                 </a:solidFill>
                 <a:latin typeface="Segoe UI" pitchFamily="34" charset="0"/>
                 <a:ea typeface="Segoe UI" pitchFamily="34" charset="-122"/>
                 <a:cs typeface="Segoe UI" pitchFamily="34" charset="-120"/>
               </a:rPr>
-              <a:t>Alteryx scheduling pipelines and their health</a:t>
-            </a:r>
-            <a:endParaRPr lang="en-US" sz="1600" dirty="0"/>
-          </a:p>
-          <a:p>
-            <a:pPr marL="342900" indent="-342900">
-              <a:lnSpc>
-                <a:spcPct val="115000"/>
-              </a:lnSpc>
-              <a:spcAft>
-                <a:spcPts val="1000"/>
-              </a:spcAft>
-              <a:buSzPct val="100000"/>
-              <a:buChar char="▸"/>
-            </a:pPr>
-            <a:r>
-              <a:rPr lang="en-US" sz="1600" dirty="0">
-                <a:solidFill>
-                  <a:srgbClr val="CBD5E1"/>
+              <a:t>4</a:t>
+            </a:r>
+            <a:endParaRPr lang="en-US" sz="3800" dirty="0"/>
+          </a:p>
+        </p:txBody>
+      </p:sp>
+      <p:sp>
+        <p:nvSpPr>
+          <p:cNvPr id="8" name="Text 6"/>
+          <p:cNvSpPr/>
+          <p:nvPr/>
+        </p:nvSpPr>
+        <p:spPr>
+          <a:xfrm>
+            <a:off x="960120" y="3520440"/>
+            <a:ext cx="2148840" cy="502920"/>
+          </a:xfrm>
+          <a:prstGeom prst="rect">
+            <a:avLst/>
+          </a:prstGeom>
+          <a:noFill/>
+          <a:ln/>
+        </p:spPr>
+        <p:txBody>
+          <a:bodyPr wrap="square" rtlCol="0" anchor="ctr"/>
+          <a:lstStyle/>
+          <a:p>
+            <a:pPr algn="ctr" indent="0" marL="0">
+              <a:buNone/>
+            </a:pPr>
+            <a:r>
+              <a:rPr lang="en-US" sz="1450" b="1" dirty="0">
+                <a:solidFill>
+                  <a:srgbClr val="FFFFFF"/>
                 </a:solidFill>
                 <a:latin typeface="Segoe UI" pitchFamily="34" charset="0"/>
                 <a:ea typeface="Segoe UI" pitchFamily="34" charset="-122"/>
                 <a:cs typeface="Segoe UI" pitchFamily="34" charset="-120"/>
               </a:rPr>
-              <a:t>Qlik Management Console administration</a:t>
-            </a:r>
-            <a:endParaRPr lang="en-US" sz="1600" dirty="0"/>
-          </a:p>
-          <a:p>
-            <a:pPr marL="342900" indent="-342900">
-              <a:lnSpc>
-                <a:spcPct val="115000"/>
-              </a:lnSpc>
-              <a:spcAft>
-                <a:spcPts val="1000"/>
-              </a:spcAft>
-              <a:buSzPct val="100000"/>
-              <a:buChar char="▸"/>
-            </a:pPr>
-            <a:r>
-              <a:rPr lang="en-US" sz="1600" dirty="0">
-                <a:solidFill>
-                  <a:srgbClr val="CBD5E1"/>
+              <a:t>Markets served</a:t>
+            </a:r>
+            <a:endParaRPr lang="en-US" sz="1450" dirty="0"/>
+          </a:p>
+        </p:txBody>
+      </p:sp>
+      <p:sp>
+        <p:nvSpPr>
+          <p:cNvPr id="9" name="Text 7"/>
+          <p:cNvSpPr/>
+          <p:nvPr/>
+        </p:nvSpPr>
+        <p:spPr>
+          <a:xfrm>
+            <a:off x="1005840" y="4069080"/>
+            <a:ext cx="2057400" cy="685800"/>
+          </a:xfrm>
+          <a:prstGeom prst="rect">
+            <a:avLst/>
+          </a:prstGeom>
+          <a:noFill/>
+          <a:ln/>
+        </p:spPr>
+        <p:txBody>
+          <a:bodyPr wrap="square" rtlCol="0" anchor="ctr"/>
+          <a:lstStyle/>
+          <a:p>
+            <a:pPr algn="ctr" indent="0" marL="0">
+              <a:buNone/>
+            </a:pPr>
+            <a:r>
+              <a:rPr lang="en-US" sz="1050" dirty="0">
+                <a:solidFill>
+                  <a:srgbClr val="94A3B8"/>
                 </a:solidFill>
                 <a:latin typeface="Segoe UI" pitchFamily="34" charset="0"/>
                 <a:ea typeface="Segoe UI" pitchFamily="34" charset="-122"/>
                 <a:cs typeface="Segoe UI" pitchFamily="34" charset="-120"/>
               </a:rPr>
-              <a:t>Data quality assurance between datalake and store systems</a:t>
-            </a:r>
-            <a:endParaRPr lang="en-US" sz="1600" dirty="0"/>
-          </a:p>
-          <a:p>
-            <a:pPr marL="342900" indent="-342900">
-              <a:lnSpc>
-                <a:spcPct val="115000"/>
-              </a:lnSpc>
-              <a:spcAft>
-                <a:spcPts val="1000"/>
-              </a:spcAft>
-              <a:buSzPct val="100000"/>
-              <a:buChar char="▸"/>
-            </a:pPr>
-            <a:r>
-              <a:rPr lang="en-US" sz="1600" dirty="0">
-                <a:solidFill>
-                  <a:srgbClr val="CBD5E1"/>
+              <a:t>Indonesia, Taiwan, Hong Kong, and Macau reported from one shared datalake</a:t>
+            </a:r>
+            <a:endParaRPr lang="en-US" sz="1050" dirty="0"/>
+          </a:p>
+        </p:txBody>
+      </p:sp>
+      <p:sp>
+        <p:nvSpPr>
+          <p:cNvPr id="10" name="Shape 8"/>
+          <p:cNvSpPr/>
+          <p:nvPr/>
+        </p:nvSpPr>
+        <p:spPr>
+          <a:xfrm>
+            <a:off x="3520440" y="2194560"/>
+            <a:ext cx="2423160" cy="2697480"/>
+          </a:xfrm>
+          <a:prstGeom prst="roundRect">
+            <a:avLst>
+              <a:gd name="adj" fmla="val 3019"/>
+            </a:avLst>
+          </a:prstGeom>
+          <a:solidFill>
+            <a:srgbClr val="111A2E"/>
+          </a:solidFill>
+          <a:ln w="12700">
+            <a:solidFill>
+              <a:srgbClr val="1E2D45"/>
+            </a:solidFill>
+            <a:prstDash val="solid"/>
+          </a:ln>
+        </p:spPr>
+      </p:sp>
+      <p:sp>
+        <p:nvSpPr>
+          <p:cNvPr id="11" name="Text 9"/>
+          <p:cNvSpPr/>
+          <p:nvPr/>
+        </p:nvSpPr>
+        <p:spPr>
+          <a:xfrm>
+            <a:off x="3657600" y="2514600"/>
+            <a:ext cx="2148840" cy="914400"/>
+          </a:xfrm>
+          <a:prstGeom prst="rect">
+            <a:avLst/>
+          </a:prstGeom>
+          <a:noFill/>
+          <a:ln/>
+        </p:spPr>
+        <p:txBody>
+          <a:bodyPr wrap="square" rtlCol="0" anchor="ctr"/>
+          <a:lstStyle/>
+          <a:p>
+            <a:pPr algn="ctr" indent="0" marL="0">
+              <a:buNone/>
+            </a:pPr>
+            <a:r>
+              <a:rPr lang="en-US" sz="3800" b="1" dirty="0">
+                <a:solidFill>
+                  <a:srgbClr val="06B6D4"/>
                 </a:solidFill>
                 <a:latin typeface="Segoe UI" pitchFamily="34" charset="0"/>
                 <a:ea typeface="Segoe UI" pitchFamily="34" charset="-122"/>
                 <a:cs typeface="Segoe UI" pitchFamily="34" charset="-120"/>
               </a:rPr>
-              <a:t>Collaboration with BI, Regional IT, and business teams</a:t>
-            </a:r>
-            <a:endParaRPr lang="en-US" sz="1600" dirty="0"/>
-          </a:p>
-        </p:txBody>
-      </p:sp>
-      <p:sp>
-        <p:nvSpPr>
-          <p:cNvPr id="7" name="Text 5"/>
-          <p:cNvSpPr/>
-          <p:nvPr/>
-        </p:nvSpPr>
-        <p:spPr>
-          <a:xfrm>
-            <a:off x="10698480" y="6355080"/>
+              <a:t>3</a:t>
+            </a:r>
+            <a:endParaRPr lang="en-US" sz="3800" dirty="0"/>
+          </a:p>
+        </p:txBody>
+      </p:sp>
+      <p:sp>
+        <p:nvSpPr>
+          <p:cNvPr id="12" name="Text 10"/>
+          <p:cNvSpPr/>
+          <p:nvPr/>
+        </p:nvSpPr>
+        <p:spPr>
+          <a:xfrm>
+            <a:off x="3657600" y="3520440"/>
+            <a:ext cx="2148840" cy="502920"/>
+          </a:xfrm>
+          <a:prstGeom prst="rect">
+            <a:avLst/>
+          </a:prstGeom>
+          <a:noFill/>
+          <a:ln/>
+        </p:spPr>
+        <p:txBody>
+          <a:bodyPr wrap="square" rtlCol="0" anchor="ctr"/>
+          <a:lstStyle/>
+          <a:p>
+            <a:pPr algn="ctr" indent="0" marL="0">
+              <a:buNone/>
+            </a:pPr>
+            <a:r>
+              <a:rPr lang="en-US" sz="1450" b="1" dirty="0">
+                <a:solidFill>
+                  <a:srgbClr val="FFFFFF"/>
+                </a:solidFill>
+                <a:latin typeface="Segoe UI" pitchFamily="34" charset="0"/>
+                <a:ea typeface="Segoe UI" pitchFamily="34" charset="-122"/>
+                <a:cs typeface="Segoe UI" pitchFamily="34" charset="-120"/>
+              </a:rPr>
+              <a:t>Core BI tools</a:t>
+            </a:r>
+            <a:endParaRPr lang="en-US" sz="1450" dirty="0"/>
+          </a:p>
+        </p:txBody>
+      </p:sp>
+      <p:sp>
+        <p:nvSpPr>
+          <p:cNvPr id="13" name="Text 11"/>
+          <p:cNvSpPr/>
+          <p:nvPr/>
+        </p:nvSpPr>
+        <p:spPr>
+          <a:xfrm>
+            <a:off x="3703320" y="4069080"/>
+            <a:ext cx="2057400" cy="685800"/>
+          </a:xfrm>
+          <a:prstGeom prst="rect">
+            <a:avLst/>
+          </a:prstGeom>
+          <a:noFill/>
+          <a:ln/>
+        </p:spPr>
+        <p:txBody>
+          <a:bodyPr wrap="square" rtlCol="0" anchor="ctr"/>
+          <a:lstStyle/>
+          <a:p>
+            <a:pPr algn="ctr" indent="0" marL="0">
+              <a:buNone/>
+            </a:pPr>
+            <a:r>
+              <a:rPr lang="en-US" sz="1050" dirty="0">
+                <a:solidFill>
+                  <a:srgbClr val="94A3B8"/>
+                </a:solidFill>
+                <a:latin typeface="Segoe UI" pitchFamily="34" charset="0"/>
+                <a:ea typeface="Segoe UI" pitchFamily="34" charset="-122"/>
+                <a:cs typeface="Segoe UI" pitchFamily="34" charset="-120"/>
+              </a:rPr>
+              <a:t>Qlik Sense, Alteryx, and MS SQL Server operated as one pipeline</a:t>
+            </a:r>
+            <a:endParaRPr lang="en-US" sz="1050" dirty="0"/>
+          </a:p>
+        </p:txBody>
+      </p:sp>
+      <p:sp>
+        <p:nvSpPr>
+          <p:cNvPr id="14" name="Shape 12"/>
+          <p:cNvSpPr/>
+          <p:nvPr/>
+        </p:nvSpPr>
+        <p:spPr>
+          <a:xfrm>
+            <a:off x="6217920" y="2194560"/>
+            <a:ext cx="2423160" cy="2697480"/>
+          </a:xfrm>
+          <a:prstGeom prst="roundRect">
+            <a:avLst>
+              <a:gd name="adj" fmla="val 3019"/>
+            </a:avLst>
+          </a:prstGeom>
+          <a:solidFill>
+            <a:srgbClr val="111A2E"/>
+          </a:solidFill>
+          <a:ln w="12700">
+            <a:solidFill>
+              <a:srgbClr val="1E2D45"/>
+            </a:solidFill>
+            <a:prstDash val="solid"/>
+          </a:ln>
+        </p:spPr>
+      </p:sp>
+      <p:sp>
+        <p:nvSpPr>
+          <p:cNvPr id="15" name="Text 13"/>
+          <p:cNvSpPr/>
+          <p:nvPr/>
+        </p:nvSpPr>
+        <p:spPr>
+          <a:xfrm>
+            <a:off x="6355080" y="2514600"/>
+            <a:ext cx="2148840" cy="914400"/>
+          </a:xfrm>
+          <a:prstGeom prst="rect">
+            <a:avLst/>
+          </a:prstGeom>
+          <a:noFill/>
+          <a:ln/>
+        </p:spPr>
+        <p:txBody>
+          <a:bodyPr wrap="square" rtlCol="0" anchor="ctr"/>
+          <a:lstStyle/>
+          <a:p>
+            <a:pPr algn="ctr" indent="0" marL="0">
+              <a:buNone/>
+            </a:pPr>
+            <a:r>
+              <a:rPr lang="en-US" sz="3800" b="1" dirty="0">
+                <a:solidFill>
+                  <a:srgbClr val="22D3A0"/>
+                </a:solidFill>
+                <a:latin typeface="Segoe UI" pitchFamily="34" charset="0"/>
+                <a:ea typeface="Segoe UI" pitchFamily="34" charset="-122"/>
+                <a:cs typeface="Segoe UI" pitchFamily="34" charset="-120"/>
+              </a:rPr>
+              <a:t>100%</a:t>
+            </a:r>
+            <a:endParaRPr lang="en-US" sz="3800" dirty="0"/>
+          </a:p>
+        </p:txBody>
+      </p:sp>
+      <p:sp>
+        <p:nvSpPr>
+          <p:cNvPr id="16" name="Text 14"/>
+          <p:cNvSpPr/>
+          <p:nvPr/>
+        </p:nvSpPr>
+        <p:spPr>
+          <a:xfrm>
+            <a:off x="6355080" y="3520440"/>
+            <a:ext cx="2148840" cy="502920"/>
+          </a:xfrm>
+          <a:prstGeom prst="rect">
+            <a:avLst/>
+          </a:prstGeom>
+          <a:noFill/>
+          <a:ln/>
+        </p:spPr>
+        <p:txBody>
+          <a:bodyPr wrap="square" rtlCol="0" anchor="ctr"/>
+          <a:lstStyle/>
+          <a:p>
+            <a:pPr algn="ctr" indent="0" marL="0">
+              <a:buNone/>
+            </a:pPr>
+            <a:r>
+              <a:rPr lang="en-US" sz="1450" b="1" dirty="0">
+                <a:solidFill>
+                  <a:srgbClr val="FFFFFF"/>
+                </a:solidFill>
+                <a:latin typeface="Segoe UI" pitchFamily="34" charset="0"/>
+                <a:ea typeface="Segoe UI" pitchFamily="34" charset="-122"/>
+                <a:cs typeface="Segoe UI" pitchFamily="34" charset="-120"/>
+              </a:rPr>
+              <a:t>Loads reconciled</a:t>
+            </a:r>
+            <a:endParaRPr lang="en-US" sz="1450" dirty="0"/>
+          </a:p>
+        </p:txBody>
+      </p:sp>
+      <p:sp>
+        <p:nvSpPr>
+          <p:cNvPr id="17" name="Text 15"/>
+          <p:cNvSpPr/>
+          <p:nvPr/>
+        </p:nvSpPr>
+        <p:spPr>
+          <a:xfrm>
+            <a:off x="6400800" y="4069080"/>
+            <a:ext cx="2057400" cy="685800"/>
+          </a:xfrm>
+          <a:prstGeom prst="rect">
+            <a:avLst/>
+          </a:prstGeom>
+          <a:noFill/>
+          <a:ln/>
+        </p:spPr>
+        <p:txBody>
+          <a:bodyPr wrap="square" rtlCol="0" anchor="ctr"/>
+          <a:lstStyle/>
+          <a:p>
+            <a:pPr algn="ctr" indent="0" marL="0">
+              <a:buNone/>
+            </a:pPr>
+            <a:r>
+              <a:rPr lang="en-US" sz="1050" dirty="0">
+                <a:solidFill>
+                  <a:srgbClr val="94A3B8"/>
+                </a:solidFill>
+                <a:latin typeface="Segoe UI" pitchFamily="34" charset="0"/>
+                <a:ea typeface="Segoe UI" pitchFamily="34" charset="-122"/>
+                <a:cs typeface="Segoe UI" pitchFamily="34" charset="-120"/>
+              </a:rPr>
+              <a:t>Row counts, sum checks, and sampled comparisons on every load - not quarterly</a:t>
+            </a:r>
+            <a:endParaRPr lang="en-US" sz="1050" dirty="0"/>
+          </a:p>
+        </p:txBody>
+      </p:sp>
+      <p:sp>
+        <p:nvSpPr>
+          <p:cNvPr id="18" name="Shape 16"/>
+          <p:cNvSpPr/>
+          <p:nvPr/>
+        </p:nvSpPr>
+        <p:spPr>
+          <a:xfrm>
+            <a:off x="8915400" y="2194560"/>
+            <a:ext cx="2423160" cy="2697480"/>
+          </a:xfrm>
+          <a:prstGeom prst="roundRect">
+            <a:avLst>
+              <a:gd name="adj" fmla="val 3019"/>
+            </a:avLst>
+          </a:prstGeom>
+          <a:solidFill>
+            <a:srgbClr val="111A2E"/>
+          </a:solidFill>
+          <a:ln w="12700">
+            <a:solidFill>
+              <a:srgbClr val="1E2D45"/>
+            </a:solidFill>
+            <a:prstDash val="solid"/>
+          </a:ln>
+        </p:spPr>
+      </p:sp>
+      <p:sp>
+        <p:nvSpPr>
+          <p:cNvPr id="19" name="Text 17"/>
+          <p:cNvSpPr/>
+          <p:nvPr/>
+        </p:nvSpPr>
+        <p:spPr>
+          <a:xfrm>
+            <a:off x="9052560" y="2514600"/>
+            <a:ext cx="2148840" cy="914400"/>
+          </a:xfrm>
+          <a:prstGeom prst="rect">
+            <a:avLst/>
+          </a:prstGeom>
+          <a:noFill/>
+          <a:ln/>
+        </p:spPr>
+        <p:txBody>
+          <a:bodyPr wrap="square" rtlCol="0" anchor="ctr"/>
+          <a:lstStyle/>
+          <a:p>
+            <a:pPr algn="ctr" indent="0" marL="0">
+              <a:buNone/>
+            </a:pPr>
+            <a:r>
+              <a:rPr lang="en-US" sz="3800" b="1" dirty="0">
+                <a:solidFill>
+                  <a:srgbClr val="F59E0B"/>
+                </a:solidFill>
+                <a:latin typeface="Segoe UI" pitchFamily="34" charset="0"/>
+                <a:ea typeface="Segoe UI" pitchFamily="34" charset="-122"/>
+                <a:cs typeface="Segoe UI" pitchFamily="34" charset="-120"/>
+              </a:rPr>
+              <a:t>0</a:t>
+            </a:r>
+            <a:endParaRPr lang="en-US" sz="3800" dirty="0"/>
+          </a:p>
+        </p:txBody>
+      </p:sp>
+      <p:sp>
+        <p:nvSpPr>
+          <p:cNvPr id="20" name="Text 18"/>
+          <p:cNvSpPr/>
+          <p:nvPr/>
+        </p:nvSpPr>
+        <p:spPr>
+          <a:xfrm>
+            <a:off x="9052560" y="3520440"/>
+            <a:ext cx="2148840" cy="502920"/>
+          </a:xfrm>
+          <a:prstGeom prst="rect">
+            <a:avLst/>
+          </a:prstGeom>
+          <a:noFill/>
+          <a:ln/>
+        </p:spPr>
+        <p:txBody>
+          <a:bodyPr wrap="square" rtlCol="0" anchor="ctr"/>
+          <a:lstStyle/>
+          <a:p>
+            <a:pPr algn="ctr" indent="0" marL="0">
+              <a:buNone/>
+            </a:pPr>
+            <a:r>
+              <a:rPr lang="en-US" sz="1450" b="1" dirty="0">
+                <a:solidFill>
+                  <a:srgbClr val="FFFFFF"/>
+                </a:solidFill>
+                <a:latin typeface="Segoe UI" pitchFamily="34" charset="0"/>
+                <a:ea typeface="Segoe UI" pitchFamily="34" charset="-122"/>
+                <a:cs typeface="Segoe UI" pitchFamily="34" charset="-120"/>
+              </a:rPr>
+              <a:t>Silent failures tolerated</a:t>
+            </a:r>
+            <a:endParaRPr lang="en-US" sz="1450" dirty="0"/>
+          </a:p>
+        </p:txBody>
+      </p:sp>
+      <p:sp>
+        <p:nvSpPr>
+          <p:cNvPr id="21" name="Text 19"/>
+          <p:cNvSpPr/>
+          <p:nvPr/>
+        </p:nvSpPr>
+        <p:spPr>
+          <a:xfrm>
+            <a:off x="9098280" y="4069080"/>
+            <a:ext cx="2057400" cy="685800"/>
+          </a:xfrm>
+          <a:prstGeom prst="rect">
+            <a:avLst/>
+          </a:prstGeom>
+          <a:noFill/>
+          <a:ln/>
+        </p:spPr>
+        <p:txBody>
+          <a:bodyPr wrap="square" rtlCol="0" anchor="ctr"/>
+          <a:lstStyle/>
+          <a:p>
+            <a:pPr algn="ctr" indent="0" marL="0">
+              <a:buNone/>
+            </a:pPr>
+            <a:r>
+              <a:rPr lang="en-US" sz="1050" dirty="0">
+                <a:solidFill>
+                  <a:srgbClr val="94A3B8"/>
+                </a:solidFill>
+                <a:latin typeface="Segoe UI" pitchFamily="34" charset="0"/>
+                <a:ea typeface="Segoe UI" pitchFamily="34" charset="-122"/>
+                <a:cs typeface="Segoe UI" pitchFamily="34" charset="-120"/>
+              </a:rPr>
+              <a:t>Freshness alarms meant late data was escalated before it was reported</a:t>
+            </a:r>
+            <a:endParaRPr lang="en-US" sz="1050" dirty="0"/>
+          </a:p>
+        </p:txBody>
+      </p:sp>
+      <p:sp>
+        <p:nvSpPr>
+          <p:cNvPr id="22" name="Shape 20"/>
+          <p:cNvSpPr/>
+          <p:nvPr/>
+        </p:nvSpPr>
+        <p:spPr>
+          <a:xfrm>
+            <a:off x="822960" y="5413248"/>
+            <a:ext cx="10515600" cy="0"/>
+          </a:xfrm>
+          <a:prstGeom prst="line">
+            <a:avLst/>
+          </a:prstGeom>
+          <a:noFill/>
+          <a:ln w="12700">
+            <a:solidFill>
+              <a:srgbClr val="1E2D45"/>
+            </a:solidFill>
+            <a:prstDash val="solid"/>
+          </a:ln>
+        </p:spPr>
+      </p:sp>
+      <p:sp>
+        <p:nvSpPr>
+          <p:cNvPr id="23" name="Text 21"/>
+          <p:cNvSpPr/>
+          <p:nvPr/>
+        </p:nvSpPr>
+        <p:spPr>
+          <a:xfrm>
+            <a:off x="822960" y="5504688"/>
+            <a:ext cx="10424160" cy="411480"/>
+          </a:xfrm>
+          <a:prstGeom prst="rect">
+            <a:avLst/>
+          </a:prstGeom>
+          <a:noFill/>
+          <a:ln/>
+        </p:spPr>
+        <p:txBody>
+          <a:bodyPr wrap="square" rtlCol="0" anchor="ctr"/>
+          <a:lstStyle/>
+          <a:p>
+            <a:pPr indent="0" marL="0">
+              <a:buNone/>
+            </a:pPr>
+            <a:r>
+              <a:rPr lang="en-US" sz="1300" i="1" dirty="0">
+                <a:solidFill>
+                  <a:srgbClr val="06B6D4"/>
+                </a:solidFill>
+                <a:latin typeface="Segoe UI" pitchFamily="34" charset="0"/>
+                <a:ea typeface="Segoe UI" pitchFamily="34" charset="-122"/>
+                <a:cs typeface="Segoe UI" pitchFamily="34" charset="-120"/>
+              </a:rPr>
+              <a:t>→  Regional BI at this scale is an operations discipline as much as a technology stack.</a:t>
+            </a:r>
+            <a:endParaRPr lang="en-US" sz="1300" dirty="0"/>
+          </a:p>
+        </p:txBody>
+      </p:sp>
+      <p:sp>
+        <p:nvSpPr>
+          <p:cNvPr id="24" name="Text 22"/>
+          <p:cNvSpPr/>
+          <p:nvPr/>
+        </p:nvSpPr>
+        <p:spPr>
+          <a:xfrm>
+            <a:off x="10698480" y="6382512"/>
             <a:ext cx="1188720" cy="365760"/>
           </a:xfrm>
           <a:prstGeom prst="rect">
@@ -2520,7 +6879,7 @@
                 <a:ea typeface="Consolas" pitchFamily="34" charset="-122"/>
                 <a:cs typeface="Consolas" pitchFamily="34" charset="-120"/>
               </a:rPr>
-              <a:t>4 / 7</a:t>
+              <a:t>4 / 14</a:t>
             </a:r>
             <a:endParaRPr lang="en-US" sz="1000" dirty="0"/>
           </a:p>
@@ -2631,7 +6990,7 @@
                 <a:ea typeface="Consolas" pitchFamily="34" charset="-122"/>
                 <a:cs typeface="Consolas" pitchFamily="34" charset="-120"/>
               </a:rPr>
-              <a:t>QUALITY</a:t>
+              <a:t>THE STACK</a:t>
             </a:r>
             <a:endParaRPr lang="en-US" sz="1200" dirty="0"/>
           </a:p>
@@ -2645,8 +7004,8 @@
         </p:nvSpPr>
         <p:spPr>
           <a:xfrm>
-            <a:off x="822960" y="960120"/>
-            <a:ext cx="10515600" cy="868680"/>
+            <a:off x="822960" y="914400"/>
+            <a:ext cx="10561320" cy="868680"/>
           </a:xfrm>
           <a:prstGeom prst="rect">
             <a:avLst/>
@@ -2662,7 +7021,7 @@
               <a:buNone/>
             </a:pPr>
             <a:r>
-              <a:rPr lang="en-US" sz="3000" b="1" dirty="0">
+              <a:rPr lang="en-US" sz="2700" b="1" dirty="0">
                 <a:solidFill>
                   <a:srgbClr val="FFFFFF"/>
                 </a:solidFill>
@@ -2670,69 +7029,143 @@
                 <a:ea typeface="Segoe UI" pitchFamily="34" charset="-122"/>
                 <a:cs typeface="Segoe UI" pitchFamily="34" charset="-120"/>
               </a:rPr>
-              <a:t>Reconciliation as a way of life</a:t>
-            </a:r>
-            <a:endParaRPr lang="en-US" sz="3000" dirty="0"/>
-          </a:p>
-        </p:txBody>
-      </p:sp>
-      <p:sp>
-        <p:nvSpPr>
-          <p:cNvPr id="6" name="Text 4"/>
-          <p:cNvSpPr/>
-          <p:nvPr/>
-        </p:nvSpPr>
-        <p:spPr>
-          <a:xfrm>
-            <a:off x="868680" y="2057400"/>
-            <a:ext cx="10424160" cy="3566160"/>
-          </a:xfrm>
-          <a:prstGeom prst="rect">
-            <a:avLst/>
-          </a:prstGeom>
-          <a:noFill/>
-          <a:ln/>
-        </p:spPr>
-        <p:txBody>
-          <a:bodyPr wrap="square" rtlCol="0" anchor="t"/>
-          <a:lstStyle/>
-          <a:p>
-            <a:pPr marL="342900" indent="-342900">
-              <a:lnSpc>
-                <a:spcPct val="115000"/>
-              </a:lnSpc>
-              <a:spcAft>
-                <a:spcPts val="1000"/>
-              </a:spcAft>
-              <a:buSzPct val="100000"/>
-              <a:buChar char="▸"/>
-            </a:pPr>
-            <a:r>
-              <a:rPr lang="en-US" sz="1600" dirty="0">
-                <a:solidFill>
-                  <a:srgbClr val="CBD5E1"/>
+              <a:t>Data moved through four layers before leadership saw it</a:t>
+            </a:r>
+            <a:endParaRPr lang="en-US" sz="2700" dirty="0"/>
+          </a:p>
+        </p:txBody>
+      </p:sp>
+      <p:sp>
+        <p:nvSpPr>
+          <p:cNvPr id="6" name="Shape 4"/>
+          <p:cNvSpPr/>
+          <p:nvPr/>
+        </p:nvSpPr>
+        <p:spPr>
+          <a:xfrm>
+            <a:off x="774040" y="2514600"/>
+            <a:ext cx="1938528" cy="2103120"/>
+          </a:xfrm>
+          <a:prstGeom prst="roundRect">
+            <a:avLst>
+              <a:gd name="adj" fmla="val 3302"/>
+            </a:avLst>
+          </a:prstGeom>
+          <a:solidFill>
+            <a:srgbClr val="111A2E"/>
+          </a:solidFill>
+          <a:ln w="19050">
+            <a:solidFill>
+              <a:srgbClr val="3B82F6"/>
+            </a:solidFill>
+            <a:prstDash val="solid"/>
+          </a:ln>
+        </p:spPr>
+      </p:sp>
+      <p:sp>
+        <p:nvSpPr>
+          <p:cNvPr id="7" name="Text 5"/>
+          <p:cNvSpPr/>
+          <p:nvPr/>
+        </p:nvSpPr>
+        <p:spPr>
+          <a:xfrm>
+            <a:off x="902056" y="2633472"/>
+            <a:ext cx="1682496" cy="310896"/>
+          </a:xfrm>
+          <a:prstGeom prst="rect">
+            <a:avLst/>
+          </a:prstGeom>
+          <a:noFill/>
+          <a:ln/>
+        </p:spPr>
+        <p:txBody>
+          <a:bodyPr wrap="square" rtlCol="0" anchor="ctr"/>
+          <a:lstStyle/>
+          <a:p>
+            <a:pPr indent="0" marL="0">
+              <a:buNone/>
+            </a:pPr>
+            <a:r>
+              <a:rPr lang="en-US" sz="1100" b="1" dirty="0">
+                <a:solidFill>
+                  <a:srgbClr val="3B82F6"/>
+                </a:solidFill>
+                <a:latin typeface="Consolas" pitchFamily="34" charset="0"/>
+                <a:ea typeface="Consolas" pitchFamily="34" charset="-122"/>
+                <a:cs typeface="Consolas" pitchFamily="34" charset="-120"/>
+              </a:rPr>
+              <a:t>01</a:t>
+            </a:r>
+            <a:endParaRPr lang="en-US" sz="1100" dirty="0"/>
+          </a:p>
+        </p:txBody>
+      </p:sp>
+      <p:sp>
+        <p:nvSpPr>
+          <p:cNvPr id="8" name="Text 6"/>
+          <p:cNvSpPr/>
+          <p:nvPr/>
+        </p:nvSpPr>
+        <p:spPr>
+          <a:xfrm>
+            <a:off x="902056" y="2962656"/>
+            <a:ext cx="1682496" cy="566928"/>
+          </a:xfrm>
+          <a:prstGeom prst="rect">
+            <a:avLst/>
+          </a:prstGeom>
+          <a:noFill/>
+          <a:ln/>
+        </p:spPr>
+        <p:txBody>
+          <a:bodyPr wrap="square" rtlCol="0" anchor="ctr"/>
+          <a:lstStyle/>
+          <a:p>
+            <a:pPr indent="0" marL="0">
+              <a:buNone/>
+            </a:pPr>
+            <a:r>
+              <a:rPr lang="en-US" sz="1350" b="1" dirty="0">
+                <a:solidFill>
+                  <a:srgbClr val="FFFFFF"/>
                 </a:solidFill>
                 <a:latin typeface="Segoe UI" pitchFamily="34" charset="0"/>
                 <a:ea typeface="Segoe UI" pitchFamily="34" charset="-122"/>
                 <a:cs typeface="Segoe UI" pitchFamily="34" charset="-120"/>
               </a:rPr>
-              <a:t>Row counts, sum checks, sampled comparisons at every seam</a:t>
-            </a:r>
-            <a:endParaRPr lang="en-US" sz="1600" dirty="0"/>
-          </a:p>
-          <a:p>
-            <a:pPr marL="342900" indent="-342900">
-              <a:lnSpc>
-                <a:spcPct val="115000"/>
-              </a:lnSpc>
-              <a:spcAft>
-                <a:spcPts val="1000"/>
-              </a:spcAft>
-              <a:buSzPct val="100000"/>
-              <a:buChar char="▸"/>
-            </a:pPr>
-            <a:r>
-              <a:rPr lang="en-US" sz="1600" dirty="0">
+              <a:t>Source systems</a:t>
+            </a:r>
+            <a:endParaRPr lang="en-US" sz="1350" dirty="0"/>
+          </a:p>
+        </p:txBody>
+      </p:sp>
+      <p:sp>
+        <p:nvSpPr>
+          <p:cNvPr id="9" name="Text 7"/>
+          <p:cNvSpPr/>
+          <p:nvPr/>
+        </p:nvSpPr>
+        <p:spPr>
+          <a:xfrm>
+            <a:off x="902056" y="3566160"/>
+            <a:ext cx="1682496" cy="960120"/>
+          </a:xfrm>
+          <a:prstGeom prst="rect">
+            <a:avLst/>
+          </a:prstGeom>
+          <a:noFill/>
+          <a:ln/>
+        </p:spPr>
+        <p:txBody>
+          <a:bodyPr wrap="square" rtlCol="0" anchor="ctr"/>
+          <a:lstStyle/>
+          <a:p>
+            <a:pPr indent="0" marL="0">
+              <a:buNone/>
+            </a:pPr>
+            <a:r>
+              <a:rPr lang="en-US" sz="980" dirty="0">
                 <a:solidFill>
                   <a:srgbClr val="CBD5E1"/>
                 </a:solidFill>
@@ -2740,47 +7173,163 @@
                 <a:ea typeface="Segoe UI" pitchFamily="34" charset="-122"/>
                 <a:cs typeface="Segoe UI" pitchFamily="34" charset="-120"/>
               </a:rPr>
-              <a:t>Discrepancy hunting between datalake and regional systems</a:t>
-            </a:r>
-            <a:endParaRPr lang="en-US" sz="1600" dirty="0"/>
-          </a:p>
-          <a:p>
-            <a:pPr marL="342900" indent="-342900">
-              <a:lnSpc>
-                <a:spcPct val="115000"/>
-              </a:lnSpc>
-              <a:spcAft>
-                <a:spcPts val="1000"/>
-              </a:spcAft>
-              <a:buSzPct val="100000"/>
-              <a:buChar char="▸"/>
-            </a:pPr>
-            <a:r>
-              <a:rPr lang="en-US" sz="1600" dirty="0">
-                <a:solidFill>
-                  <a:srgbClr val="CBD5E1"/>
+              <a:t>Regional store and business systems generated country-level data on their own cadences and quirks.</a:t>
+            </a:r>
+            <a:endParaRPr lang="en-US" sz="980" dirty="0"/>
+          </a:p>
+        </p:txBody>
+      </p:sp>
+      <p:sp>
+        <p:nvSpPr>
+          <p:cNvPr id="10" name="Shape 8"/>
+          <p:cNvSpPr/>
+          <p:nvPr/>
+        </p:nvSpPr>
+        <p:spPr>
+          <a:xfrm>
+            <a:off x="2726284" y="3419856"/>
+            <a:ext cx="210312" cy="274320"/>
+          </a:xfrm>
+          <a:prstGeom prst="rightArrow">
+            <a:avLst/>
+          </a:prstGeom>
+          <a:solidFill>
+            <a:srgbClr val="06B6D4"/>
+          </a:solidFill>
+          <a:ln/>
+        </p:spPr>
+      </p:sp>
+      <p:sp>
+        <p:nvSpPr>
+          <p:cNvPr id="11" name="Shape 9"/>
+          <p:cNvSpPr/>
+          <p:nvPr/>
+        </p:nvSpPr>
+        <p:spPr>
+          <a:xfrm>
+            <a:off x="2950312" y="2514600"/>
+            <a:ext cx="1938528" cy="2103120"/>
+          </a:xfrm>
+          <a:prstGeom prst="roundRect">
+            <a:avLst>
+              <a:gd name="adj" fmla="val 3302"/>
+            </a:avLst>
+          </a:prstGeom>
+          <a:solidFill>
+            <a:srgbClr val="111A2E"/>
+          </a:solidFill>
+          <a:ln w="19050">
+            <a:solidFill>
+              <a:srgbClr val="06B6D4"/>
+            </a:solidFill>
+            <a:prstDash val="solid"/>
+          </a:ln>
+        </p:spPr>
+      </p:sp>
+      <p:sp>
+        <p:nvSpPr>
+          <p:cNvPr id="12" name="Text 10"/>
+          <p:cNvSpPr/>
+          <p:nvPr/>
+        </p:nvSpPr>
+        <p:spPr>
+          <a:xfrm>
+            <a:off x="3078328" y="2633472"/>
+            <a:ext cx="1682496" cy="310896"/>
+          </a:xfrm>
+          <a:prstGeom prst="rect">
+            <a:avLst/>
+          </a:prstGeom>
+          <a:noFill/>
+          <a:ln/>
+        </p:spPr>
+        <p:txBody>
+          <a:bodyPr wrap="square" rtlCol="0" anchor="ctr"/>
+          <a:lstStyle/>
+          <a:p>
+            <a:pPr indent="0" marL="0">
+              <a:buNone/>
+            </a:pPr>
+            <a:r>
+              <a:rPr lang="en-US" sz="1100" b="1" dirty="0">
+                <a:solidFill>
+                  <a:srgbClr val="06B6D4"/>
+                </a:solidFill>
+                <a:latin typeface="Consolas" pitchFamily="34" charset="0"/>
+                <a:ea typeface="Consolas" pitchFamily="34" charset="-122"/>
+                <a:cs typeface="Consolas" pitchFamily="34" charset="-120"/>
+              </a:rPr>
+              <a:t>02</a:t>
+            </a:r>
+            <a:endParaRPr lang="en-US" sz="1100" dirty="0"/>
+          </a:p>
+        </p:txBody>
+      </p:sp>
+      <p:sp>
+        <p:nvSpPr>
+          <p:cNvPr id="13" name="Text 11"/>
+          <p:cNvSpPr/>
+          <p:nvPr/>
+        </p:nvSpPr>
+        <p:spPr>
+          <a:xfrm>
+            <a:off x="3078328" y="2962656"/>
+            <a:ext cx="1682496" cy="566928"/>
+          </a:xfrm>
+          <a:prstGeom prst="rect">
+            <a:avLst/>
+          </a:prstGeom>
+          <a:noFill/>
+          <a:ln/>
+        </p:spPr>
+        <p:txBody>
+          <a:bodyPr wrap="square" rtlCol="0" anchor="ctr"/>
+          <a:lstStyle/>
+          <a:p>
+            <a:pPr indent="0" marL="0">
+              <a:buNone/>
+            </a:pPr>
+            <a:r>
+              <a:rPr lang="en-US" sz="1350" b="1" dirty="0">
+                <a:solidFill>
+                  <a:srgbClr val="FFFFFF"/>
                 </a:solidFill>
                 <a:latin typeface="Segoe UI" pitchFamily="34" charset="0"/>
                 <a:ea typeface="Segoe UI" pitchFamily="34" charset="-122"/>
                 <a:cs typeface="Segoe UI" pitchFamily="34" charset="-120"/>
               </a:rPr>
-              <a:t>Freshness alarms - silent schedule deaths are the default state</a:t>
-            </a:r>
-            <a:endParaRPr lang="en-US" sz="1600" dirty="0"/>
-          </a:p>
-          <a:p>
-            <a:pPr marL="342900" indent="-342900">
-              <a:lnSpc>
-                <a:spcPct val="115000"/>
-              </a:lnSpc>
-              <a:spcAft>
-                <a:spcPts val="1000"/>
-              </a:spcAft>
-              <a:buSzPct val="100000"/>
-              <a:buChar char="▸"/>
-            </a:pPr>
-            <a:r>
-              <a:rPr lang="en-US" sz="1600" dirty="0">
+              <a:t>Alteryx pipelines</a:t>
+            </a:r>
+            <a:endParaRPr lang="en-US" sz="1350" dirty="0"/>
+          </a:p>
+        </p:txBody>
+      </p:sp>
+      <p:sp>
+        <p:nvSpPr>
+          <p:cNvPr id="14" name="Text 12"/>
+          <p:cNvSpPr/>
+          <p:nvPr/>
+        </p:nvSpPr>
+        <p:spPr>
+          <a:xfrm>
+            <a:off x="3078328" y="3566160"/>
+            <a:ext cx="1682496" cy="960120"/>
+          </a:xfrm>
+          <a:prstGeom prst="rect">
+            <a:avLst/>
+          </a:prstGeom>
+          <a:noFill/>
+          <a:ln/>
+        </p:spPr>
+        <p:txBody>
+          <a:bodyPr wrap="square" rtlCol="0" anchor="ctr"/>
+          <a:lstStyle/>
+          <a:p>
+            <a:pPr indent="0" marL="0">
+              <a:buNone/>
+            </a:pPr>
+            <a:r>
+              <a:rPr lang="en-US" sz="980" dirty="0">
                 <a:solidFill>
                   <a:srgbClr val="CBD5E1"/>
                 </a:solidFill>
@@ -2788,22 +7337,69 @@
                 <a:ea typeface="Segoe UI" pitchFamily="34" charset="-122"/>
                 <a:cs typeface="Segoe UI" pitchFamily="34" charset="-120"/>
               </a:rPr>
-              <a:t>Every mismatch got a named owner, not just a ticket</a:t>
-            </a:r>
-            <a:endParaRPr lang="en-US" sz="1600" dirty="0"/>
-          </a:p>
-        </p:txBody>
-      </p:sp>
-      <p:sp>
-        <p:nvSpPr>
-          <p:cNvPr id="7" name="Text 5"/>
-          <p:cNvSpPr/>
-          <p:nvPr/>
-        </p:nvSpPr>
-        <p:spPr>
-          <a:xfrm>
-            <a:off x="10698480" y="6355080"/>
-            <a:ext cx="1188720" cy="365760"/>
+              <a:t>Scheduled Alteryx workflows extracted, transformed, and loaded data into the datalake.</a:t>
+            </a:r>
+            <a:endParaRPr lang="en-US" sz="980" dirty="0"/>
+          </a:p>
+        </p:txBody>
+      </p:sp>
+      <p:sp>
+        <p:nvSpPr>
+          <p:cNvPr id="15" name="Shape 13"/>
+          <p:cNvSpPr/>
+          <p:nvPr/>
+        </p:nvSpPr>
+        <p:spPr>
+          <a:xfrm>
+            <a:off x="4902556" y="3419856"/>
+            <a:ext cx="210312" cy="274320"/>
+          </a:xfrm>
+          <a:prstGeom prst="rightArrow">
+            <a:avLst/>
+          </a:prstGeom>
+          <a:solidFill>
+            <a:srgbClr val="06B6D4"/>
+          </a:solidFill>
+          <a:ln/>
+        </p:spPr>
+      </p:sp>
+      <p:sp>
+        <p:nvSpPr>
+          <p:cNvPr id="16" name="Shape 14"/>
+          <p:cNvSpPr/>
+          <p:nvPr/>
+        </p:nvSpPr>
+        <p:spPr>
+          <a:xfrm>
+            <a:off x="5126584" y="2514600"/>
+            <a:ext cx="1938528" cy="2103120"/>
+          </a:xfrm>
+          <a:prstGeom prst="roundRect">
+            <a:avLst>
+              <a:gd name="adj" fmla="val 3302"/>
+            </a:avLst>
+          </a:prstGeom>
+          <a:solidFill>
+            <a:srgbClr val="111A2E"/>
+          </a:solidFill>
+          <a:ln w="19050">
+            <a:solidFill>
+              <a:srgbClr val="3B82F6"/>
+            </a:solidFill>
+            <a:prstDash val="solid"/>
+          </a:ln>
+        </p:spPr>
+      </p:sp>
+      <p:sp>
+        <p:nvSpPr>
+          <p:cNvPr id="17" name="Text 15"/>
+          <p:cNvSpPr/>
+          <p:nvPr/>
+        </p:nvSpPr>
+        <p:spPr>
+          <a:xfrm>
+            <a:off x="5254600" y="2633472"/>
+            <a:ext cx="1682496" cy="310896"/>
           </a:xfrm>
           <a:prstGeom prst="rect">
             <a:avLst/>
@@ -2815,19 +7411,526 @@
           <a:bodyPr wrap="square" rtlCol="0" anchor="ctr"/>
           <a:lstStyle/>
           <a:p>
-            <a:pPr algn="r" indent="0" marL="0">
+            <a:pPr indent="0" marL="0">
               <a:buNone/>
             </a:pPr>
             <a:r>
-              <a:rPr lang="en-US" sz="1000" dirty="0">
-                <a:solidFill>
-                  <a:srgbClr val="64748B"/>
+              <a:rPr lang="en-US" sz="1100" b="1" dirty="0">
+                <a:solidFill>
+                  <a:srgbClr val="3B82F6"/>
                 </a:solidFill>
                 <a:latin typeface="Consolas" pitchFamily="34" charset="0"/>
                 <a:ea typeface="Consolas" pitchFamily="34" charset="-122"/>
                 <a:cs typeface="Consolas" pitchFamily="34" charset="-120"/>
               </a:rPr>
-              <a:t>5 / 7</a:t>
+              <a:t>03</a:t>
+            </a:r>
+            <a:endParaRPr lang="en-US" sz="1100" dirty="0"/>
+          </a:p>
+        </p:txBody>
+      </p:sp>
+      <p:sp>
+        <p:nvSpPr>
+          <p:cNvPr id="18" name="Text 16"/>
+          <p:cNvSpPr/>
+          <p:nvPr/>
+        </p:nvSpPr>
+        <p:spPr>
+          <a:xfrm>
+            <a:off x="5254600" y="2962656"/>
+            <a:ext cx="1682496" cy="566928"/>
+          </a:xfrm>
+          <a:prstGeom prst="rect">
+            <a:avLst/>
+          </a:prstGeom>
+          <a:noFill/>
+          <a:ln/>
+        </p:spPr>
+        <p:txBody>
+          <a:bodyPr wrap="square" rtlCol="0" anchor="ctr"/>
+          <a:lstStyle/>
+          <a:p>
+            <a:pPr indent="0" marL="0">
+              <a:buNone/>
+            </a:pPr>
+            <a:r>
+              <a:rPr lang="en-US" sz="1350" b="1" dirty="0">
+                <a:solidFill>
+                  <a:srgbClr val="FFFFFF"/>
+                </a:solidFill>
+                <a:latin typeface="Segoe UI" pitchFamily="34" charset="0"/>
+                <a:ea typeface="Segoe UI" pitchFamily="34" charset="-122"/>
+                <a:cs typeface="Segoe UI" pitchFamily="34" charset="-120"/>
+              </a:rPr>
+              <a:t>Datalake on SQL Server</a:t>
+            </a:r>
+            <a:endParaRPr lang="en-US" sz="1350" dirty="0"/>
+          </a:p>
+        </p:txBody>
+      </p:sp>
+      <p:sp>
+        <p:nvSpPr>
+          <p:cNvPr id="19" name="Text 17"/>
+          <p:cNvSpPr/>
+          <p:nvPr/>
+        </p:nvSpPr>
+        <p:spPr>
+          <a:xfrm>
+            <a:off x="5254600" y="3566160"/>
+            <a:ext cx="1682496" cy="960120"/>
+          </a:xfrm>
+          <a:prstGeom prst="rect">
+            <a:avLst/>
+          </a:prstGeom>
+          <a:noFill/>
+          <a:ln/>
+        </p:spPr>
+        <p:txBody>
+          <a:bodyPr wrap="square" rtlCol="0" anchor="ctr"/>
+          <a:lstStyle/>
+          <a:p>
+            <a:pPr indent="0" marL="0">
+              <a:buNone/>
+            </a:pPr>
+            <a:r>
+              <a:rPr lang="en-US" sz="980" dirty="0">
+                <a:solidFill>
+                  <a:srgbClr val="CBD5E1"/>
+                </a:solidFill>
+                <a:latin typeface="Segoe UI" pitchFamily="34" charset="0"/>
+                <a:ea typeface="Segoe UI" pitchFamily="34" charset="-122"/>
+                <a:cs typeface="Segoe UI" pitchFamily="34" charset="-120"/>
+              </a:rPr>
+              <a:t>MS SQL Server served as the shared foundation and single source for regional reporting.</a:t>
+            </a:r>
+            <a:endParaRPr lang="en-US" sz="980" dirty="0"/>
+          </a:p>
+        </p:txBody>
+      </p:sp>
+      <p:sp>
+        <p:nvSpPr>
+          <p:cNvPr id="20" name="Shape 18"/>
+          <p:cNvSpPr/>
+          <p:nvPr/>
+        </p:nvSpPr>
+        <p:spPr>
+          <a:xfrm>
+            <a:off x="7078828" y="3419856"/>
+            <a:ext cx="210312" cy="274320"/>
+          </a:xfrm>
+          <a:prstGeom prst="rightArrow">
+            <a:avLst/>
+          </a:prstGeom>
+          <a:solidFill>
+            <a:srgbClr val="06B6D4"/>
+          </a:solidFill>
+          <a:ln/>
+        </p:spPr>
+      </p:sp>
+      <p:sp>
+        <p:nvSpPr>
+          <p:cNvPr id="21" name="Shape 19"/>
+          <p:cNvSpPr/>
+          <p:nvPr/>
+        </p:nvSpPr>
+        <p:spPr>
+          <a:xfrm>
+            <a:off x="7302856" y="2514600"/>
+            <a:ext cx="1938528" cy="2103120"/>
+          </a:xfrm>
+          <a:prstGeom prst="roundRect">
+            <a:avLst>
+              <a:gd name="adj" fmla="val 3302"/>
+            </a:avLst>
+          </a:prstGeom>
+          <a:solidFill>
+            <a:srgbClr val="111A2E"/>
+          </a:solidFill>
+          <a:ln w="19050">
+            <a:solidFill>
+              <a:srgbClr val="06B6D4"/>
+            </a:solidFill>
+            <a:prstDash val="solid"/>
+          </a:ln>
+        </p:spPr>
+      </p:sp>
+      <p:sp>
+        <p:nvSpPr>
+          <p:cNvPr id="22" name="Text 20"/>
+          <p:cNvSpPr/>
+          <p:nvPr/>
+        </p:nvSpPr>
+        <p:spPr>
+          <a:xfrm>
+            <a:off x="7430872" y="2633472"/>
+            <a:ext cx="1682496" cy="310896"/>
+          </a:xfrm>
+          <a:prstGeom prst="rect">
+            <a:avLst/>
+          </a:prstGeom>
+          <a:noFill/>
+          <a:ln/>
+        </p:spPr>
+        <p:txBody>
+          <a:bodyPr wrap="square" rtlCol="0" anchor="ctr"/>
+          <a:lstStyle/>
+          <a:p>
+            <a:pPr indent="0" marL="0">
+              <a:buNone/>
+            </a:pPr>
+            <a:r>
+              <a:rPr lang="en-US" sz="1100" b="1" dirty="0">
+                <a:solidFill>
+                  <a:srgbClr val="06B6D4"/>
+                </a:solidFill>
+                <a:latin typeface="Consolas" pitchFamily="34" charset="0"/>
+                <a:ea typeface="Consolas" pitchFamily="34" charset="-122"/>
+                <a:cs typeface="Consolas" pitchFamily="34" charset="-120"/>
+              </a:rPr>
+              <a:t>04</a:t>
+            </a:r>
+            <a:endParaRPr lang="en-US" sz="1100" dirty="0"/>
+          </a:p>
+        </p:txBody>
+      </p:sp>
+      <p:sp>
+        <p:nvSpPr>
+          <p:cNvPr id="23" name="Text 21"/>
+          <p:cNvSpPr/>
+          <p:nvPr/>
+        </p:nvSpPr>
+        <p:spPr>
+          <a:xfrm>
+            <a:off x="7430872" y="2962656"/>
+            <a:ext cx="1682496" cy="566928"/>
+          </a:xfrm>
+          <a:prstGeom prst="rect">
+            <a:avLst/>
+          </a:prstGeom>
+          <a:noFill/>
+          <a:ln/>
+        </p:spPr>
+        <p:txBody>
+          <a:bodyPr wrap="square" rtlCol="0" anchor="ctr"/>
+          <a:lstStyle/>
+          <a:p>
+            <a:pPr indent="0" marL="0">
+              <a:buNone/>
+            </a:pPr>
+            <a:r>
+              <a:rPr lang="en-US" sz="1350" b="1" dirty="0">
+                <a:solidFill>
+                  <a:srgbClr val="FFFFFF"/>
+                </a:solidFill>
+                <a:latin typeface="Segoe UI" pitchFamily="34" charset="0"/>
+                <a:ea typeface="Segoe UI" pitchFamily="34" charset="-122"/>
+                <a:cs typeface="Segoe UI" pitchFamily="34" charset="-120"/>
+              </a:rPr>
+              <a:t>Qlik Sense dashboards</a:t>
+            </a:r>
+            <a:endParaRPr lang="en-US" sz="1350" dirty="0"/>
+          </a:p>
+        </p:txBody>
+      </p:sp>
+      <p:sp>
+        <p:nvSpPr>
+          <p:cNvPr id="24" name="Text 22"/>
+          <p:cNvSpPr/>
+          <p:nvPr/>
+        </p:nvSpPr>
+        <p:spPr>
+          <a:xfrm>
+            <a:off x="7430872" y="3566160"/>
+            <a:ext cx="1682496" cy="960120"/>
+          </a:xfrm>
+          <a:prstGeom prst="rect">
+            <a:avLst/>
+          </a:prstGeom>
+          <a:noFill/>
+          <a:ln/>
+        </p:spPr>
+        <p:txBody>
+          <a:bodyPr wrap="square" rtlCol="0" anchor="ctr"/>
+          <a:lstStyle/>
+          <a:p>
+            <a:pPr indent="0" marL="0">
+              <a:buNone/>
+            </a:pPr>
+            <a:r>
+              <a:rPr lang="en-US" sz="980" dirty="0">
+                <a:solidFill>
+                  <a:srgbClr val="CBD5E1"/>
+                </a:solidFill>
+                <a:latin typeface="Segoe UI" pitchFamily="34" charset="0"/>
+                <a:ea typeface="Segoe UI" pitchFamily="34" charset="-122"/>
+                <a:cs typeface="Segoe UI" pitchFamily="34" charset="-120"/>
+              </a:rPr>
+              <a:t>Regional dashboards, administered through the Qlik Management Console, served all four markets.</a:t>
+            </a:r>
+            <a:endParaRPr lang="en-US" sz="980" dirty="0"/>
+          </a:p>
+        </p:txBody>
+      </p:sp>
+      <p:sp>
+        <p:nvSpPr>
+          <p:cNvPr id="25" name="Shape 23"/>
+          <p:cNvSpPr/>
+          <p:nvPr/>
+        </p:nvSpPr>
+        <p:spPr>
+          <a:xfrm>
+            <a:off x="9255100" y="3419856"/>
+            <a:ext cx="210312" cy="274320"/>
+          </a:xfrm>
+          <a:prstGeom prst="rightArrow">
+            <a:avLst/>
+          </a:prstGeom>
+          <a:solidFill>
+            <a:srgbClr val="06B6D4"/>
+          </a:solidFill>
+          <a:ln/>
+        </p:spPr>
+      </p:sp>
+      <p:sp>
+        <p:nvSpPr>
+          <p:cNvPr id="26" name="Shape 24"/>
+          <p:cNvSpPr/>
+          <p:nvPr/>
+        </p:nvSpPr>
+        <p:spPr>
+          <a:xfrm>
+            <a:off x="9479128" y="2514600"/>
+            <a:ext cx="1938528" cy="2103120"/>
+          </a:xfrm>
+          <a:prstGeom prst="roundRect">
+            <a:avLst>
+              <a:gd name="adj" fmla="val 3302"/>
+            </a:avLst>
+          </a:prstGeom>
+          <a:solidFill>
+            <a:srgbClr val="111A2E"/>
+          </a:solidFill>
+          <a:ln w="19050">
+            <a:solidFill>
+              <a:srgbClr val="3B82F6"/>
+            </a:solidFill>
+            <a:prstDash val="solid"/>
+          </a:ln>
+        </p:spPr>
+      </p:sp>
+      <p:sp>
+        <p:nvSpPr>
+          <p:cNvPr id="27" name="Text 25"/>
+          <p:cNvSpPr/>
+          <p:nvPr/>
+        </p:nvSpPr>
+        <p:spPr>
+          <a:xfrm>
+            <a:off x="9607144" y="2633472"/>
+            <a:ext cx="1682496" cy="310896"/>
+          </a:xfrm>
+          <a:prstGeom prst="rect">
+            <a:avLst/>
+          </a:prstGeom>
+          <a:noFill/>
+          <a:ln/>
+        </p:spPr>
+        <p:txBody>
+          <a:bodyPr wrap="square" rtlCol="0" anchor="ctr"/>
+          <a:lstStyle/>
+          <a:p>
+            <a:pPr indent="0" marL="0">
+              <a:buNone/>
+            </a:pPr>
+            <a:r>
+              <a:rPr lang="en-US" sz="1100" b="1" dirty="0">
+                <a:solidFill>
+                  <a:srgbClr val="3B82F6"/>
+                </a:solidFill>
+                <a:latin typeface="Consolas" pitchFamily="34" charset="0"/>
+                <a:ea typeface="Consolas" pitchFamily="34" charset="-122"/>
+                <a:cs typeface="Consolas" pitchFamily="34" charset="-120"/>
+              </a:rPr>
+              <a:t>05</a:t>
+            </a:r>
+            <a:endParaRPr lang="en-US" sz="1100" dirty="0"/>
+          </a:p>
+        </p:txBody>
+      </p:sp>
+      <p:sp>
+        <p:nvSpPr>
+          <p:cNvPr id="28" name="Text 26"/>
+          <p:cNvSpPr/>
+          <p:nvPr/>
+        </p:nvSpPr>
+        <p:spPr>
+          <a:xfrm>
+            <a:off x="9607144" y="2962656"/>
+            <a:ext cx="1682496" cy="566928"/>
+          </a:xfrm>
+          <a:prstGeom prst="rect">
+            <a:avLst/>
+          </a:prstGeom>
+          <a:noFill/>
+          <a:ln/>
+        </p:spPr>
+        <p:txBody>
+          <a:bodyPr wrap="square" rtlCol="0" anchor="ctr"/>
+          <a:lstStyle/>
+          <a:p>
+            <a:pPr indent="0" marL="0">
+              <a:buNone/>
+            </a:pPr>
+            <a:r>
+              <a:rPr lang="en-US" sz="1350" b="1" dirty="0">
+                <a:solidFill>
+                  <a:srgbClr val="FFFFFF"/>
+                </a:solidFill>
+                <a:latin typeface="Segoe UI" pitchFamily="34" charset="0"/>
+                <a:ea typeface="Segoe UI" pitchFamily="34" charset="-122"/>
+                <a:cs typeface="Segoe UI" pitchFamily="34" charset="-120"/>
+              </a:rPr>
+              <a:t>Decisions</a:t>
+            </a:r>
+            <a:endParaRPr lang="en-US" sz="1350" dirty="0"/>
+          </a:p>
+        </p:txBody>
+      </p:sp>
+      <p:sp>
+        <p:nvSpPr>
+          <p:cNvPr id="29" name="Text 27"/>
+          <p:cNvSpPr/>
+          <p:nvPr/>
+        </p:nvSpPr>
+        <p:spPr>
+          <a:xfrm>
+            <a:off x="9607144" y="3566160"/>
+            <a:ext cx="1682496" cy="960120"/>
+          </a:xfrm>
+          <a:prstGeom prst="rect">
+            <a:avLst/>
+          </a:prstGeom>
+          <a:noFill/>
+          <a:ln/>
+        </p:spPr>
+        <p:txBody>
+          <a:bodyPr wrap="square" rtlCol="0" anchor="ctr"/>
+          <a:lstStyle/>
+          <a:p>
+            <a:pPr indent="0" marL="0">
+              <a:buNone/>
+            </a:pPr>
+            <a:r>
+              <a:rPr lang="en-US" sz="980" dirty="0">
+                <a:solidFill>
+                  <a:srgbClr val="CBD5E1"/>
+                </a:solidFill>
+                <a:latin typeface="Segoe UI" pitchFamily="34" charset="0"/>
+                <a:ea typeface="Segoe UI" pitchFamily="34" charset="-122"/>
+                <a:cs typeface="Segoe UI" pitchFamily="34" charset="-120"/>
+              </a:rPr>
+              <a:t>Regional leadership and country teams acted on the numbers - or challenged them.</a:t>
+            </a:r>
+            <a:endParaRPr lang="en-US" sz="980" dirty="0"/>
+          </a:p>
+        </p:txBody>
+      </p:sp>
+      <p:sp>
+        <p:nvSpPr>
+          <p:cNvPr id="30" name="Shape 28"/>
+          <p:cNvSpPr/>
+          <p:nvPr/>
+        </p:nvSpPr>
+        <p:spPr>
+          <a:xfrm>
+            <a:off x="822960" y="5961888"/>
+            <a:ext cx="10515600" cy="0"/>
+          </a:xfrm>
+          <a:prstGeom prst="line">
+            <a:avLst/>
+          </a:prstGeom>
+          <a:noFill/>
+          <a:ln w="12700">
+            <a:solidFill>
+              <a:srgbClr val="1E2D45"/>
+            </a:solidFill>
+            <a:prstDash val="solid"/>
+          </a:ln>
+        </p:spPr>
+      </p:sp>
+      <p:sp>
+        <p:nvSpPr>
+          <p:cNvPr id="31" name="Text 29"/>
+          <p:cNvSpPr/>
+          <p:nvPr/>
+        </p:nvSpPr>
+        <p:spPr>
+          <a:xfrm>
+            <a:off x="822960" y="6053328"/>
+            <a:ext cx="9692640" cy="457200"/>
+          </a:xfrm>
+          <a:prstGeom prst="rect">
+            <a:avLst/>
+          </a:prstGeom>
+          <a:noFill/>
+          <a:ln/>
+        </p:spPr>
+        <p:txBody>
+          <a:bodyPr wrap="square" rtlCol="0" anchor="ctr"/>
+          <a:lstStyle/>
+          <a:p>
+            <a:pPr indent="0" marL="0">
+              <a:buNone/>
+            </a:pPr>
+            <a:r>
+              <a:rPr lang="en-US" sz="1150" dirty="0">
+                <a:solidFill>
+                  <a:srgbClr val="64748B"/>
+                </a:solidFill>
+                <a:latin typeface="Segoe UI" pitchFamily="34" charset="0"/>
+                <a:ea typeface="Segoe UI" pitchFamily="34" charset="-122"/>
+                <a:cs typeface="Segoe UI" pitchFamily="34" charset="-120"/>
+              </a:rPr>
+              <a:t>Every seam between layers was a reconciliation point, not a leap of faith.</a:t>
+            </a:r>
+            <a:endParaRPr lang="en-US" sz="1150" dirty="0"/>
+          </a:p>
+        </p:txBody>
+      </p:sp>
+      <p:sp>
+        <p:nvSpPr>
+          <p:cNvPr id="32" name="Text 30"/>
+          <p:cNvSpPr/>
+          <p:nvPr/>
+        </p:nvSpPr>
+        <p:spPr>
+          <a:xfrm>
+            <a:off x="10698480" y="6382512"/>
+            <a:ext cx="1188720" cy="365760"/>
+          </a:xfrm>
+          <a:prstGeom prst="rect">
+            <a:avLst/>
+          </a:prstGeom>
+          <a:noFill/>
+          <a:ln/>
+        </p:spPr>
+        <p:txBody>
+          <a:bodyPr wrap="square" rtlCol="0" anchor="ctr"/>
+          <a:lstStyle/>
+          <a:p>
+            <a:pPr algn="r" indent="0" marL="0">
+              <a:buNone/>
+            </a:pPr>
+            <a:r>
+              <a:rPr lang="en-US" sz="1000" dirty="0">
+                <a:solidFill>
+                  <a:srgbClr val="64748B"/>
+                </a:solidFill>
+                <a:latin typeface="Consolas" pitchFamily="34" charset="0"/>
+                <a:ea typeface="Consolas" pitchFamily="34" charset="-122"/>
+                <a:cs typeface="Consolas" pitchFamily="34" charset="-120"/>
+              </a:rPr>
+              <a:t>5 / 14</a:t>
             </a:r>
             <a:endParaRPr lang="en-US" sz="1000" dirty="0"/>
           </a:p>
@@ -2938,7 +8041,7 @@
                 <a:ea typeface="Consolas" pitchFamily="34" charset="-122"/>
                 <a:cs typeface="Consolas" pitchFamily="34" charset="-120"/>
               </a:rPr>
-              <a:t>SCALE</a:t>
+              <a:t>RESPONSIBILITIES</a:t>
             </a:r>
             <a:endParaRPr lang="en-US" sz="1200" dirty="0"/>
           </a:p>
@@ -2952,8 +8055,8 @@
         </p:nvSpPr>
         <p:spPr>
           <a:xfrm>
-            <a:off x="822960" y="960120"/>
-            <a:ext cx="10515600" cy="868680"/>
+            <a:off x="822960" y="914400"/>
+            <a:ext cx="10561320" cy="868680"/>
           </a:xfrm>
           <a:prstGeom prst="rect">
             <a:avLst/>
@@ -2969,7 +8072,7 @@
               <a:buNone/>
             </a:pPr>
             <a:r>
-              <a:rPr lang="en-US" sz="3000" b="1" dirty="0">
+              <a:rPr lang="en-US" sz="2700" b="1" dirty="0">
                 <a:solidFill>
                   <a:srgbClr val="FFFFFF"/>
                 </a:solidFill>
@@ -2977,139 +8080,1350 @@
                 <a:ea typeface="Segoe UI" pitchFamily="34" charset="-122"/>
                 <a:cs typeface="Segoe UI" pitchFamily="34" charset="-120"/>
               </a:rPr>
-              <a:t>What four countries taught me</a:t>
-            </a:r>
-            <a:endParaRPr lang="en-US" sz="3000" dirty="0"/>
-          </a:p>
-        </p:txBody>
-      </p:sp>
-      <p:sp>
-        <p:nvSpPr>
-          <p:cNvPr id="6" name="Text 4"/>
-          <p:cNvSpPr/>
-          <p:nvPr/>
-        </p:nvSpPr>
-        <p:spPr>
-          <a:xfrm>
-            <a:off x="868680" y="2057400"/>
-            <a:ext cx="10424160" cy="3566160"/>
-          </a:xfrm>
-          <a:prstGeom prst="rect">
-            <a:avLst/>
-          </a:prstGeom>
-          <a:noFill/>
-          <a:ln/>
-        </p:spPr>
-        <p:txBody>
-          <a:bodyPr wrap="square" rtlCol="0" anchor="t"/>
-          <a:lstStyle/>
-          <a:p>
-            <a:pPr marL="342900" indent="-342900">
-              <a:lnSpc>
-                <a:spcPct val="115000"/>
-              </a:lnSpc>
-              <a:spcAft>
-                <a:spcPts val="1000"/>
-              </a:spcAft>
-              <a:buSzPct val="100000"/>
-              <a:buChar char="▸"/>
-            </a:pPr>
-            <a:r>
-              <a:rPr lang="en-US" sz="1600" dirty="0">
-                <a:solidFill>
-                  <a:srgbClr val="CBD5E1"/>
+              <a:t>What I owned in the regional operation</a:t>
+            </a:r>
+            <a:endParaRPr lang="en-US" sz="2700" dirty="0"/>
+          </a:p>
+        </p:txBody>
+      </p:sp>
+      <p:graphicFrame>
+        <p:nvGraphicFramePr>
+          <p:cNvPr id="7" name="Table 0"/>
+          <p:cNvGraphicFramePr>
+            <a:graphicFrameLocks noGrp="1"/>
+          </p:cNvGraphicFramePr>
+          <p:nvPr>
+            <p:extLst>
+              <p:ext uri="{D42A27DB-BD31-4B8C-83A1-F6EECF244321}">
+                <p14:modId xmlns:p14="http://schemas.microsoft.com/office/powerpoint/2010/main" val="1579011935"/>
+              </p:ext>
+            </p:extLst>
+          </p:nvPr>
+        </p:nvGraphicFramePr>
+        <p:xfrm>
+          <a:off x="822960" y="2011680"/>
+          <a:ext cx="10515600" cy="914400"/>
+        </p:xfrm>
+        <a:graphic>
+          <a:graphicData uri="http://schemas.openxmlformats.org/drawingml/2006/table">
+            <a:tbl>
+              <a:tblPr/>
+              <a:tblGrid>
+                <a:gridCol w="3505200"/>
+                <a:gridCol w="3505200"/>
+                <a:gridCol w="3505200"/>
+              </a:tblGrid>
+              <a:tr h="402336">
+                <a:tc>
+                  <a:txBody>
+                    <a:bodyPr/>
+                    <a:lstStyle/>
+                    <a:p>
+                      <a:pPr indent="0" marL="0">
+                        <a:buNone/>
+                      </a:pPr>
+                      <a:r>
+                        <a:rPr lang="en-US" sz="1150" b="1" dirty="0">
+                          <a:solidFill>
+                            <a:srgbClr val="FFFFFF"/>
+                          </a:solidFill>
+                          <a:latin typeface="Segoe UI" pitchFamily="34" charset="0"/>
+                          <a:ea typeface="Segoe UI" pitchFamily="34" charset="-122"/>
+                          <a:cs typeface="Segoe UI" pitchFamily="34" charset="-120"/>
+                        </a:rPr>
+                        <a:t>Area</a:t>
+                      </a:r>
+                      <a:endParaRPr lang="en-US" sz="1150" dirty="0">
+                        <a:latin typeface="Segoe UI" charset="0"/>
+                        <a:ea typeface="Segoe UI" charset="0"/>
+                        <a:cs typeface="Segoe UI" charset="0"/>
+                      </a:endParaRPr>
+                    </a:p>
+                  </a:txBody>
+                  <a:tcPr marL="64008" marR="64008" marT="64008" marB="64008" anchor="ctr">
+                    <a:lnL w="6350" cap="flat" cmpd="sng" algn="ctr">
+                      <a:solidFill>
+                        <a:srgbClr val="24365A"/>
+                      </a:solidFill>
+                      <a:prstDash val="solid"/>
+                      <a:round/>
+                      <a:headEnd type="none" w="med" len="med"/>
+                      <a:tailEnd type="none" w="med" len="med"/>
+                    </a:lnL>
+                    <a:lnR w="6350" cap="flat" cmpd="sng" algn="ctr">
+                      <a:solidFill>
+                        <a:srgbClr val="24365A"/>
+                      </a:solidFill>
+                      <a:prstDash val="solid"/>
+                      <a:round/>
+                      <a:headEnd type="none" w="med" len="med"/>
+                      <a:tailEnd type="none" w="med" len="med"/>
+                    </a:lnR>
+                    <a:lnT w="6350" cap="flat" cmpd="sng" algn="ctr">
+                      <a:solidFill>
+                        <a:srgbClr val="24365A"/>
+                      </a:solidFill>
+                      <a:prstDash val="solid"/>
+                      <a:round/>
+                      <a:headEnd type="none" w="med" len="med"/>
+                      <a:tailEnd type="none" w="med" len="med"/>
+                    </a:lnT>
+                    <a:lnB w="6350" cap="flat" cmpd="sng" algn="ctr">
+                      <a:solidFill>
+                        <a:srgbClr val="24365A"/>
+                      </a:solidFill>
+                      <a:prstDash val="solid"/>
+                      <a:round/>
+                      <a:headEnd type="none" w="med" len="med"/>
+                      <a:tailEnd type="none" w="med" len="med"/>
+                    </a:lnB>
+                    <a:solidFill>
+                      <a:srgbClr val="16233B"/>
+                    </a:solidFill>
+                  </a:tcPr>
+                </a:tc>
+                <a:tc>
+                  <a:txBody>
+                    <a:bodyPr/>
+                    <a:lstStyle/>
+                    <a:p>
+                      <a:pPr indent="0" marL="0">
+                        <a:buNone/>
+                      </a:pPr>
+                      <a:r>
+                        <a:rPr lang="en-US" sz="1150" b="1" dirty="0">
+                          <a:solidFill>
+                            <a:srgbClr val="FFFFFF"/>
+                          </a:solidFill>
+                          <a:latin typeface="Segoe UI" pitchFamily="34" charset="0"/>
+                          <a:ea typeface="Segoe UI" pitchFamily="34" charset="-122"/>
+                          <a:cs typeface="Segoe UI" pitchFamily="34" charset="-120"/>
+                        </a:rPr>
+                        <a:t>Tooling</a:t>
+                      </a:r>
+                      <a:endParaRPr lang="en-US" sz="1150" dirty="0">
+                        <a:latin typeface="Segoe UI" charset="0"/>
+                        <a:ea typeface="Segoe UI" charset="0"/>
+                        <a:cs typeface="Segoe UI" charset="0"/>
+                      </a:endParaRPr>
+                    </a:p>
+                  </a:txBody>
+                  <a:tcPr marL="64008" marR="64008" marT="64008" marB="64008" anchor="ctr">
+                    <a:lnL w="6350" cap="flat" cmpd="sng" algn="ctr">
+                      <a:solidFill>
+                        <a:srgbClr val="24365A"/>
+                      </a:solidFill>
+                      <a:prstDash val="solid"/>
+                      <a:round/>
+                      <a:headEnd type="none" w="med" len="med"/>
+                      <a:tailEnd type="none" w="med" len="med"/>
+                    </a:lnL>
+                    <a:lnR w="6350" cap="flat" cmpd="sng" algn="ctr">
+                      <a:solidFill>
+                        <a:srgbClr val="24365A"/>
+                      </a:solidFill>
+                      <a:prstDash val="solid"/>
+                      <a:round/>
+                      <a:headEnd type="none" w="med" len="med"/>
+                      <a:tailEnd type="none" w="med" len="med"/>
+                    </a:lnR>
+                    <a:lnT w="6350" cap="flat" cmpd="sng" algn="ctr">
+                      <a:solidFill>
+                        <a:srgbClr val="24365A"/>
+                      </a:solidFill>
+                      <a:prstDash val="solid"/>
+                      <a:round/>
+                      <a:headEnd type="none" w="med" len="med"/>
+                      <a:tailEnd type="none" w="med" len="med"/>
+                    </a:lnT>
+                    <a:lnB w="6350" cap="flat" cmpd="sng" algn="ctr">
+                      <a:solidFill>
+                        <a:srgbClr val="24365A"/>
+                      </a:solidFill>
+                      <a:prstDash val="solid"/>
+                      <a:round/>
+                      <a:headEnd type="none" w="med" len="med"/>
+                      <a:tailEnd type="none" w="med" len="med"/>
+                    </a:lnB>
+                    <a:solidFill>
+                      <a:srgbClr val="16233B"/>
+                    </a:solidFill>
+                  </a:tcPr>
+                </a:tc>
+                <a:tc>
+                  <a:txBody>
+                    <a:bodyPr/>
+                    <a:lstStyle/>
+                    <a:p>
+                      <a:pPr indent="0" marL="0">
+                        <a:buNone/>
+                      </a:pPr>
+                      <a:r>
+                        <a:rPr lang="en-US" sz="1150" b="1" dirty="0">
+                          <a:solidFill>
+                            <a:srgbClr val="FFFFFF"/>
+                          </a:solidFill>
+                          <a:latin typeface="Segoe UI" pitchFamily="34" charset="0"/>
+                          <a:ea typeface="Segoe UI" pitchFamily="34" charset="-122"/>
+                          <a:cs typeface="Segoe UI" pitchFamily="34" charset="-120"/>
+                        </a:rPr>
+                        <a:t>What it meant in practice</a:t>
+                      </a:r>
+                      <a:endParaRPr lang="en-US" sz="1150" dirty="0">
+                        <a:latin typeface="Segoe UI" charset="0"/>
+                        <a:ea typeface="Segoe UI" charset="0"/>
+                        <a:cs typeface="Segoe UI" charset="0"/>
+                      </a:endParaRPr>
+                    </a:p>
+                  </a:txBody>
+                  <a:tcPr marL="64008" marR="64008" marT="64008" marB="64008" anchor="ctr">
+                    <a:lnL w="6350" cap="flat" cmpd="sng" algn="ctr">
+                      <a:solidFill>
+                        <a:srgbClr val="24365A"/>
+                      </a:solidFill>
+                      <a:prstDash val="solid"/>
+                      <a:round/>
+                      <a:headEnd type="none" w="med" len="med"/>
+                      <a:tailEnd type="none" w="med" len="med"/>
+                    </a:lnL>
+                    <a:lnR w="6350" cap="flat" cmpd="sng" algn="ctr">
+                      <a:solidFill>
+                        <a:srgbClr val="24365A"/>
+                      </a:solidFill>
+                      <a:prstDash val="solid"/>
+                      <a:round/>
+                      <a:headEnd type="none" w="med" len="med"/>
+                      <a:tailEnd type="none" w="med" len="med"/>
+                    </a:lnR>
+                    <a:lnT w="6350" cap="flat" cmpd="sng" algn="ctr">
+                      <a:solidFill>
+                        <a:srgbClr val="24365A"/>
+                      </a:solidFill>
+                      <a:prstDash val="solid"/>
+                      <a:round/>
+                      <a:headEnd type="none" w="med" len="med"/>
+                      <a:tailEnd type="none" w="med" len="med"/>
+                    </a:lnT>
+                    <a:lnB w="6350" cap="flat" cmpd="sng" algn="ctr">
+                      <a:solidFill>
+                        <a:srgbClr val="24365A"/>
+                      </a:solidFill>
+                      <a:prstDash val="solid"/>
+                      <a:round/>
+                      <a:headEnd type="none" w="med" len="med"/>
+                      <a:tailEnd type="none" w="med" len="med"/>
+                    </a:lnB>
+                    <a:solidFill>
+                      <a:srgbClr val="16233B"/>
+                    </a:solidFill>
+                  </a:tcPr>
+                </a:tc>
+              </a:tr>
+              <a:tr h="402336">
+                <a:tc>
+                  <a:txBody>
+                    <a:bodyPr/>
+                    <a:lstStyle/>
+                    <a:p>
+                      <a:pPr indent="0" marL="0">
+                        <a:buNone/>
+                      </a:pPr>
+                      <a:r>
+                        <a:rPr lang="en-US" sz="1080" dirty="0">
+                          <a:solidFill>
+                            <a:srgbClr val="CBD5E1"/>
+                          </a:solidFill>
+                          <a:latin typeface="Segoe UI" pitchFamily="34" charset="0"/>
+                          <a:ea typeface="Segoe UI" pitchFamily="34" charset="-122"/>
+                          <a:cs typeface="Segoe UI" pitchFamily="34" charset="-120"/>
+                        </a:rPr>
+                        <a:t>Pipeline scheduling</a:t>
+                      </a:r>
+                      <a:endParaRPr lang="en-US" sz="1080" dirty="0">
+                        <a:latin typeface="Segoe UI" charset="0"/>
+                        <a:ea typeface="Segoe UI" charset="0"/>
+                        <a:cs typeface="Segoe UI" charset="0"/>
+                      </a:endParaRPr>
+                    </a:p>
+                  </a:txBody>
+                  <a:tcPr marL="64008" marR="64008" marT="64008" marB="64008" anchor="ctr">
+                    <a:lnL w="6350" cap="flat" cmpd="sng" algn="ctr">
+                      <a:solidFill>
+                        <a:srgbClr val="24365A"/>
+                      </a:solidFill>
+                      <a:prstDash val="solid"/>
+                      <a:round/>
+                      <a:headEnd type="none" w="med" len="med"/>
+                      <a:tailEnd type="none" w="med" len="med"/>
+                    </a:lnL>
+                    <a:lnR w="6350" cap="flat" cmpd="sng" algn="ctr">
+                      <a:solidFill>
+                        <a:srgbClr val="24365A"/>
+                      </a:solidFill>
+                      <a:prstDash val="solid"/>
+                      <a:round/>
+                      <a:headEnd type="none" w="med" len="med"/>
+                      <a:tailEnd type="none" w="med" len="med"/>
+                    </a:lnR>
+                    <a:lnT w="6350" cap="flat" cmpd="sng" algn="ctr">
+                      <a:solidFill>
+                        <a:srgbClr val="24365A"/>
+                      </a:solidFill>
+                      <a:prstDash val="solid"/>
+                      <a:round/>
+                      <a:headEnd type="none" w="med" len="med"/>
+                      <a:tailEnd type="none" w="med" len="med"/>
+                    </a:lnT>
+                    <a:lnB w="6350" cap="flat" cmpd="sng" algn="ctr">
+                      <a:solidFill>
+                        <a:srgbClr val="24365A"/>
+                      </a:solidFill>
+                      <a:prstDash val="solid"/>
+                      <a:round/>
+                      <a:headEnd type="none" w="med" len="med"/>
+                      <a:tailEnd type="none" w="med" len="med"/>
+                    </a:lnB>
+                    <a:solidFill>
+                      <a:srgbClr val="101A2D"/>
+                    </a:solidFill>
+                  </a:tcPr>
+                </a:tc>
+                <a:tc>
+                  <a:txBody>
+                    <a:bodyPr/>
+                    <a:lstStyle/>
+                    <a:p>
+                      <a:pPr indent="0" marL="0">
+                        <a:buNone/>
+                      </a:pPr>
+                      <a:r>
+                        <a:rPr lang="en-US" sz="1080" dirty="0">
+                          <a:solidFill>
+                            <a:srgbClr val="CBD5E1"/>
+                          </a:solidFill>
+                          <a:latin typeface="Segoe UI" pitchFamily="34" charset="0"/>
+                          <a:ea typeface="Segoe UI" pitchFamily="34" charset="-122"/>
+                          <a:cs typeface="Segoe UI" pitchFamily="34" charset="-120"/>
+                        </a:rPr>
+                        <a:t>Alteryx</a:t>
+                      </a:r>
+                      <a:endParaRPr lang="en-US" sz="1080" dirty="0">
+                        <a:latin typeface="Segoe UI" charset="0"/>
+                        <a:ea typeface="Segoe UI" charset="0"/>
+                        <a:cs typeface="Segoe UI" charset="0"/>
+                      </a:endParaRPr>
+                    </a:p>
+                  </a:txBody>
+                  <a:tcPr marL="64008" marR="64008" marT="64008" marB="64008" anchor="ctr">
+                    <a:lnL w="6350" cap="flat" cmpd="sng" algn="ctr">
+                      <a:solidFill>
+                        <a:srgbClr val="24365A"/>
+                      </a:solidFill>
+                      <a:prstDash val="solid"/>
+                      <a:round/>
+                      <a:headEnd type="none" w="med" len="med"/>
+                      <a:tailEnd type="none" w="med" len="med"/>
+                    </a:lnL>
+                    <a:lnR w="6350" cap="flat" cmpd="sng" algn="ctr">
+                      <a:solidFill>
+                        <a:srgbClr val="24365A"/>
+                      </a:solidFill>
+                      <a:prstDash val="solid"/>
+                      <a:round/>
+                      <a:headEnd type="none" w="med" len="med"/>
+                      <a:tailEnd type="none" w="med" len="med"/>
+                    </a:lnR>
+                    <a:lnT w="6350" cap="flat" cmpd="sng" algn="ctr">
+                      <a:solidFill>
+                        <a:srgbClr val="24365A"/>
+                      </a:solidFill>
+                      <a:prstDash val="solid"/>
+                      <a:round/>
+                      <a:headEnd type="none" w="med" len="med"/>
+                      <a:tailEnd type="none" w="med" len="med"/>
+                    </a:lnT>
+                    <a:lnB w="6350" cap="flat" cmpd="sng" algn="ctr">
+                      <a:solidFill>
+                        <a:srgbClr val="24365A"/>
+                      </a:solidFill>
+                      <a:prstDash val="solid"/>
+                      <a:round/>
+                      <a:headEnd type="none" w="med" len="med"/>
+                      <a:tailEnd type="none" w="med" len="med"/>
+                    </a:lnB>
+                    <a:solidFill>
+                      <a:srgbClr val="101A2D"/>
+                    </a:solidFill>
+                  </a:tcPr>
+                </a:tc>
+                <a:tc>
+                  <a:txBody>
+                    <a:bodyPr/>
+                    <a:lstStyle/>
+                    <a:p>
+                      <a:pPr indent="0" marL="0">
+                        <a:buNone/>
+                      </a:pPr>
+                      <a:r>
+                        <a:rPr lang="en-US" sz="1080" dirty="0">
+                          <a:solidFill>
+                            <a:srgbClr val="CBD5E1"/>
+                          </a:solidFill>
+                          <a:latin typeface="Segoe UI" pitchFamily="34" charset="0"/>
+                          <a:ea typeface="Segoe UI" pitchFamily="34" charset="-122"/>
+                          <a:cs typeface="Segoe UI" pitchFamily="34" charset="-120"/>
+                        </a:rPr>
+                        <a:t>Owned the scheduled workflows feeding the datalake and their day-to-day health</a:t>
+                      </a:r>
+                      <a:endParaRPr lang="en-US" sz="1080" dirty="0">
+                        <a:latin typeface="Segoe UI" charset="0"/>
+                        <a:ea typeface="Segoe UI" charset="0"/>
+                        <a:cs typeface="Segoe UI" charset="0"/>
+                      </a:endParaRPr>
+                    </a:p>
+                  </a:txBody>
+                  <a:tcPr marL="64008" marR="64008" marT="64008" marB="64008" anchor="ctr">
+                    <a:lnL w="6350" cap="flat" cmpd="sng" algn="ctr">
+                      <a:solidFill>
+                        <a:srgbClr val="24365A"/>
+                      </a:solidFill>
+                      <a:prstDash val="solid"/>
+                      <a:round/>
+                      <a:headEnd type="none" w="med" len="med"/>
+                      <a:tailEnd type="none" w="med" len="med"/>
+                    </a:lnL>
+                    <a:lnR w="6350" cap="flat" cmpd="sng" algn="ctr">
+                      <a:solidFill>
+                        <a:srgbClr val="24365A"/>
+                      </a:solidFill>
+                      <a:prstDash val="solid"/>
+                      <a:round/>
+                      <a:headEnd type="none" w="med" len="med"/>
+                      <a:tailEnd type="none" w="med" len="med"/>
+                    </a:lnR>
+                    <a:lnT w="6350" cap="flat" cmpd="sng" algn="ctr">
+                      <a:solidFill>
+                        <a:srgbClr val="24365A"/>
+                      </a:solidFill>
+                      <a:prstDash val="solid"/>
+                      <a:round/>
+                      <a:headEnd type="none" w="med" len="med"/>
+                      <a:tailEnd type="none" w="med" len="med"/>
+                    </a:lnT>
+                    <a:lnB w="6350" cap="flat" cmpd="sng" algn="ctr">
+                      <a:solidFill>
+                        <a:srgbClr val="24365A"/>
+                      </a:solidFill>
+                      <a:prstDash val="solid"/>
+                      <a:round/>
+                      <a:headEnd type="none" w="med" len="med"/>
+                      <a:tailEnd type="none" w="med" len="med"/>
+                    </a:lnB>
+                    <a:solidFill>
+                      <a:srgbClr val="101A2D"/>
+                    </a:solidFill>
+                  </a:tcPr>
+                </a:tc>
+              </a:tr>
+              <a:tr h="402336">
+                <a:tc>
+                  <a:txBody>
+                    <a:bodyPr/>
+                    <a:lstStyle/>
+                    <a:p>
+                      <a:pPr indent="0" marL="0">
+                        <a:buNone/>
+                      </a:pPr>
+                      <a:r>
+                        <a:rPr lang="en-US" sz="1080" dirty="0">
+                          <a:solidFill>
+                            <a:srgbClr val="CBD5E1"/>
+                          </a:solidFill>
+                          <a:latin typeface="Segoe UI" pitchFamily="34" charset="0"/>
+                          <a:ea typeface="Segoe UI" pitchFamily="34" charset="-122"/>
+                          <a:cs typeface="Segoe UI" pitchFamily="34" charset="-120"/>
+                        </a:rPr>
+                        <a:t>Dashboard platform</a:t>
+                      </a:r>
+                      <a:endParaRPr lang="en-US" sz="1080" dirty="0">
+                        <a:latin typeface="Segoe UI" charset="0"/>
+                        <a:ea typeface="Segoe UI" charset="0"/>
+                        <a:cs typeface="Segoe UI" charset="0"/>
+                      </a:endParaRPr>
+                    </a:p>
+                  </a:txBody>
+                  <a:tcPr marL="64008" marR="64008" marT="64008" marB="64008" anchor="ctr">
+                    <a:lnL w="6350" cap="flat" cmpd="sng" algn="ctr">
+                      <a:solidFill>
+                        <a:srgbClr val="24365A"/>
+                      </a:solidFill>
+                      <a:prstDash val="solid"/>
+                      <a:round/>
+                      <a:headEnd type="none" w="med" len="med"/>
+                      <a:tailEnd type="none" w="med" len="med"/>
+                    </a:lnL>
+                    <a:lnR w="6350" cap="flat" cmpd="sng" algn="ctr">
+                      <a:solidFill>
+                        <a:srgbClr val="24365A"/>
+                      </a:solidFill>
+                      <a:prstDash val="solid"/>
+                      <a:round/>
+                      <a:headEnd type="none" w="med" len="med"/>
+                      <a:tailEnd type="none" w="med" len="med"/>
+                    </a:lnR>
+                    <a:lnT w="6350" cap="flat" cmpd="sng" algn="ctr">
+                      <a:solidFill>
+                        <a:srgbClr val="24365A"/>
+                      </a:solidFill>
+                      <a:prstDash val="solid"/>
+                      <a:round/>
+                      <a:headEnd type="none" w="med" len="med"/>
+                      <a:tailEnd type="none" w="med" len="med"/>
+                    </a:lnT>
+                    <a:lnB w="6350" cap="flat" cmpd="sng" algn="ctr">
+                      <a:solidFill>
+                        <a:srgbClr val="24365A"/>
+                      </a:solidFill>
+                      <a:prstDash val="solid"/>
+                      <a:round/>
+                      <a:headEnd type="none" w="med" len="med"/>
+                      <a:tailEnd type="none" w="med" len="med"/>
+                    </a:lnB>
+                    <a:solidFill>
+                      <a:srgbClr val="0D1420"/>
+                    </a:solidFill>
+                  </a:tcPr>
+                </a:tc>
+                <a:tc>
+                  <a:txBody>
+                    <a:bodyPr/>
+                    <a:lstStyle/>
+                    <a:p>
+                      <a:pPr indent="0" marL="0">
+                        <a:buNone/>
+                      </a:pPr>
+                      <a:r>
+                        <a:rPr lang="en-US" sz="1080" dirty="0">
+                          <a:solidFill>
+                            <a:srgbClr val="CBD5E1"/>
+                          </a:solidFill>
+                          <a:latin typeface="Segoe UI" pitchFamily="34" charset="0"/>
+                          <a:ea typeface="Segoe UI" pitchFamily="34" charset="-122"/>
+                          <a:cs typeface="Segoe UI" pitchFamily="34" charset="-120"/>
+                        </a:rPr>
+                        <a:t>Qlik Sense</a:t>
+                      </a:r>
+                      <a:endParaRPr lang="en-US" sz="1080" dirty="0">
+                        <a:latin typeface="Segoe UI" charset="0"/>
+                        <a:ea typeface="Segoe UI" charset="0"/>
+                        <a:cs typeface="Segoe UI" charset="0"/>
+                      </a:endParaRPr>
+                    </a:p>
+                  </a:txBody>
+                  <a:tcPr marL="64008" marR="64008" marT="64008" marB="64008" anchor="ctr">
+                    <a:lnL w="6350" cap="flat" cmpd="sng" algn="ctr">
+                      <a:solidFill>
+                        <a:srgbClr val="24365A"/>
+                      </a:solidFill>
+                      <a:prstDash val="solid"/>
+                      <a:round/>
+                      <a:headEnd type="none" w="med" len="med"/>
+                      <a:tailEnd type="none" w="med" len="med"/>
+                    </a:lnL>
+                    <a:lnR w="6350" cap="flat" cmpd="sng" algn="ctr">
+                      <a:solidFill>
+                        <a:srgbClr val="24365A"/>
+                      </a:solidFill>
+                      <a:prstDash val="solid"/>
+                      <a:round/>
+                      <a:headEnd type="none" w="med" len="med"/>
+                      <a:tailEnd type="none" w="med" len="med"/>
+                    </a:lnR>
+                    <a:lnT w="6350" cap="flat" cmpd="sng" algn="ctr">
+                      <a:solidFill>
+                        <a:srgbClr val="24365A"/>
+                      </a:solidFill>
+                      <a:prstDash val="solid"/>
+                      <a:round/>
+                      <a:headEnd type="none" w="med" len="med"/>
+                      <a:tailEnd type="none" w="med" len="med"/>
+                    </a:lnT>
+                    <a:lnB w="6350" cap="flat" cmpd="sng" algn="ctr">
+                      <a:solidFill>
+                        <a:srgbClr val="24365A"/>
+                      </a:solidFill>
+                      <a:prstDash val="solid"/>
+                      <a:round/>
+                      <a:headEnd type="none" w="med" len="med"/>
+                      <a:tailEnd type="none" w="med" len="med"/>
+                    </a:lnB>
+                    <a:solidFill>
+                      <a:srgbClr val="0D1420"/>
+                    </a:solidFill>
+                  </a:tcPr>
+                </a:tc>
+                <a:tc>
+                  <a:txBody>
+                    <a:bodyPr/>
+                    <a:lstStyle/>
+                    <a:p>
+                      <a:pPr indent="0" marL="0">
+                        <a:buNone/>
+                      </a:pPr>
+                      <a:r>
+                        <a:rPr lang="en-US" sz="1080" dirty="0">
+                          <a:solidFill>
+                            <a:srgbClr val="CBD5E1"/>
+                          </a:solidFill>
+                          <a:latin typeface="Segoe UI" pitchFamily="34" charset="0"/>
+                          <a:ea typeface="Segoe UI" pitchFamily="34" charset="-122"/>
+                          <a:cs typeface="Segoe UI" pitchFamily="34" charset="-120"/>
+                        </a:rPr>
+                        <a:t>Administered the Management Console behind regional dashboards in four markets</a:t>
+                      </a:r>
+                      <a:endParaRPr lang="en-US" sz="1080" dirty="0">
+                        <a:latin typeface="Segoe UI" charset="0"/>
+                        <a:ea typeface="Segoe UI" charset="0"/>
+                        <a:cs typeface="Segoe UI" charset="0"/>
+                      </a:endParaRPr>
+                    </a:p>
+                  </a:txBody>
+                  <a:tcPr marL="64008" marR="64008" marT="64008" marB="64008" anchor="ctr">
+                    <a:lnL w="6350" cap="flat" cmpd="sng" algn="ctr">
+                      <a:solidFill>
+                        <a:srgbClr val="24365A"/>
+                      </a:solidFill>
+                      <a:prstDash val="solid"/>
+                      <a:round/>
+                      <a:headEnd type="none" w="med" len="med"/>
+                      <a:tailEnd type="none" w="med" len="med"/>
+                    </a:lnL>
+                    <a:lnR w="6350" cap="flat" cmpd="sng" algn="ctr">
+                      <a:solidFill>
+                        <a:srgbClr val="24365A"/>
+                      </a:solidFill>
+                      <a:prstDash val="solid"/>
+                      <a:round/>
+                      <a:headEnd type="none" w="med" len="med"/>
+                      <a:tailEnd type="none" w="med" len="med"/>
+                    </a:lnR>
+                    <a:lnT w="6350" cap="flat" cmpd="sng" algn="ctr">
+                      <a:solidFill>
+                        <a:srgbClr val="24365A"/>
+                      </a:solidFill>
+                      <a:prstDash val="solid"/>
+                      <a:round/>
+                      <a:headEnd type="none" w="med" len="med"/>
+                      <a:tailEnd type="none" w="med" len="med"/>
+                    </a:lnT>
+                    <a:lnB w="6350" cap="flat" cmpd="sng" algn="ctr">
+                      <a:solidFill>
+                        <a:srgbClr val="24365A"/>
+                      </a:solidFill>
+                      <a:prstDash val="solid"/>
+                      <a:round/>
+                      <a:headEnd type="none" w="med" len="med"/>
+                      <a:tailEnd type="none" w="med" len="med"/>
+                    </a:lnB>
+                    <a:solidFill>
+                      <a:srgbClr val="0D1420"/>
+                    </a:solidFill>
+                  </a:tcPr>
+                </a:tc>
+              </a:tr>
+              <a:tr h="402336">
+                <a:tc>
+                  <a:txBody>
+                    <a:bodyPr/>
+                    <a:lstStyle/>
+                    <a:p>
+                      <a:pPr indent="0" marL="0">
+                        <a:buNone/>
+                      </a:pPr>
+                      <a:r>
+                        <a:rPr lang="en-US" sz="1080" dirty="0">
+                          <a:solidFill>
+                            <a:srgbClr val="CBD5E1"/>
+                          </a:solidFill>
+                          <a:latin typeface="Segoe UI" pitchFamily="34" charset="0"/>
+                          <a:ea typeface="Segoe UI" pitchFamily="34" charset="-122"/>
+                          <a:cs typeface="Segoe UI" pitchFamily="34" charset="-120"/>
+                        </a:rPr>
+                        <a:t>Data foundation</a:t>
+                      </a:r>
+                      <a:endParaRPr lang="en-US" sz="1080" dirty="0">
+                        <a:latin typeface="Segoe UI" charset="0"/>
+                        <a:ea typeface="Segoe UI" charset="0"/>
+                        <a:cs typeface="Segoe UI" charset="0"/>
+                      </a:endParaRPr>
+                    </a:p>
+                  </a:txBody>
+                  <a:tcPr marL="64008" marR="64008" marT="64008" marB="64008" anchor="ctr">
+                    <a:lnL w="6350" cap="flat" cmpd="sng" algn="ctr">
+                      <a:solidFill>
+                        <a:srgbClr val="24365A"/>
+                      </a:solidFill>
+                      <a:prstDash val="solid"/>
+                      <a:round/>
+                      <a:headEnd type="none" w="med" len="med"/>
+                      <a:tailEnd type="none" w="med" len="med"/>
+                    </a:lnL>
+                    <a:lnR w="6350" cap="flat" cmpd="sng" algn="ctr">
+                      <a:solidFill>
+                        <a:srgbClr val="24365A"/>
+                      </a:solidFill>
+                      <a:prstDash val="solid"/>
+                      <a:round/>
+                      <a:headEnd type="none" w="med" len="med"/>
+                      <a:tailEnd type="none" w="med" len="med"/>
+                    </a:lnR>
+                    <a:lnT w="6350" cap="flat" cmpd="sng" algn="ctr">
+                      <a:solidFill>
+                        <a:srgbClr val="24365A"/>
+                      </a:solidFill>
+                      <a:prstDash val="solid"/>
+                      <a:round/>
+                      <a:headEnd type="none" w="med" len="med"/>
+                      <a:tailEnd type="none" w="med" len="med"/>
+                    </a:lnT>
+                    <a:lnB w="6350" cap="flat" cmpd="sng" algn="ctr">
+                      <a:solidFill>
+                        <a:srgbClr val="24365A"/>
+                      </a:solidFill>
+                      <a:prstDash val="solid"/>
+                      <a:round/>
+                      <a:headEnd type="none" w="med" len="med"/>
+                      <a:tailEnd type="none" w="med" len="med"/>
+                    </a:lnB>
+                    <a:solidFill>
+                      <a:srgbClr val="101A2D"/>
+                    </a:solidFill>
+                  </a:tcPr>
+                </a:tc>
+                <a:tc>
+                  <a:txBody>
+                    <a:bodyPr/>
+                    <a:lstStyle/>
+                    <a:p>
+                      <a:pPr indent="0" marL="0">
+                        <a:buNone/>
+                      </a:pPr>
+                      <a:r>
+                        <a:rPr lang="en-US" sz="1080" dirty="0">
+                          <a:solidFill>
+                            <a:srgbClr val="CBD5E1"/>
+                          </a:solidFill>
+                          <a:latin typeface="Segoe UI" pitchFamily="34" charset="0"/>
+                          <a:ea typeface="Segoe UI" pitchFamily="34" charset="-122"/>
+                          <a:cs typeface="Segoe UI" pitchFamily="34" charset="-120"/>
+                        </a:rPr>
+                        <a:t>MS SQL Server</a:t>
+                      </a:r>
+                      <a:endParaRPr lang="en-US" sz="1080" dirty="0">
+                        <a:latin typeface="Segoe UI" charset="0"/>
+                        <a:ea typeface="Segoe UI" charset="0"/>
+                        <a:cs typeface="Segoe UI" charset="0"/>
+                      </a:endParaRPr>
+                    </a:p>
+                  </a:txBody>
+                  <a:tcPr marL="64008" marR="64008" marT="64008" marB="64008" anchor="ctr">
+                    <a:lnL w="6350" cap="flat" cmpd="sng" algn="ctr">
+                      <a:solidFill>
+                        <a:srgbClr val="24365A"/>
+                      </a:solidFill>
+                      <a:prstDash val="solid"/>
+                      <a:round/>
+                      <a:headEnd type="none" w="med" len="med"/>
+                      <a:tailEnd type="none" w="med" len="med"/>
+                    </a:lnL>
+                    <a:lnR w="6350" cap="flat" cmpd="sng" algn="ctr">
+                      <a:solidFill>
+                        <a:srgbClr val="24365A"/>
+                      </a:solidFill>
+                      <a:prstDash val="solid"/>
+                      <a:round/>
+                      <a:headEnd type="none" w="med" len="med"/>
+                      <a:tailEnd type="none" w="med" len="med"/>
+                    </a:lnR>
+                    <a:lnT w="6350" cap="flat" cmpd="sng" algn="ctr">
+                      <a:solidFill>
+                        <a:srgbClr val="24365A"/>
+                      </a:solidFill>
+                      <a:prstDash val="solid"/>
+                      <a:round/>
+                      <a:headEnd type="none" w="med" len="med"/>
+                      <a:tailEnd type="none" w="med" len="med"/>
+                    </a:lnT>
+                    <a:lnB w="6350" cap="flat" cmpd="sng" algn="ctr">
+                      <a:solidFill>
+                        <a:srgbClr val="24365A"/>
+                      </a:solidFill>
+                      <a:prstDash val="solid"/>
+                      <a:round/>
+                      <a:headEnd type="none" w="med" len="med"/>
+                      <a:tailEnd type="none" w="med" len="med"/>
+                    </a:lnB>
+                    <a:solidFill>
+                      <a:srgbClr val="101A2D"/>
+                    </a:solidFill>
+                  </a:tcPr>
+                </a:tc>
+                <a:tc>
+                  <a:txBody>
+                    <a:bodyPr/>
+                    <a:lstStyle/>
+                    <a:p>
+                      <a:pPr indent="0" marL="0">
+                        <a:buNone/>
+                      </a:pPr>
+                      <a:r>
+                        <a:rPr lang="en-US" sz="1080" dirty="0">
+                          <a:solidFill>
+                            <a:srgbClr val="CBD5E1"/>
+                          </a:solidFill>
+                          <a:latin typeface="Segoe UI" pitchFamily="34" charset="0"/>
+                          <a:ea typeface="Segoe UI" pitchFamily="34" charset="-122"/>
+                          <a:cs typeface="Segoe UI" pitchFamily="34" charset="-120"/>
+                        </a:rPr>
+                        <a:t>Kept the shared foundation dependable for every downstream report</a:t>
+                      </a:r>
+                      <a:endParaRPr lang="en-US" sz="1080" dirty="0">
+                        <a:latin typeface="Segoe UI" charset="0"/>
+                        <a:ea typeface="Segoe UI" charset="0"/>
+                        <a:cs typeface="Segoe UI" charset="0"/>
+                      </a:endParaRPr>
+                    </a:p>
+                  </a:txBody>
+                  <a:tcPr marL="64008" marR="64008" marT="64008" marB="64008" anchor="ctr">
+                    <a:lnL w="6350" cap="flat" cmpd="sng" algn="ctr">
+                      <a:solidFill>
+                        <a:srgbClr val="24365A"/>
+                      </a:solidFill>
+                      <a:prstDash val="solid"/>
+                      <a:round/>
+                      <a:headEnd type="none" w="med" len="med"/>
+                      <a:tailEnd type="none" w="med" len="med"/>
+                    </a:lnL>
+                    <a:lnR w="6350" cap="flat" cmpd="sng" algn="ctr">
+                      <a:solidFill>
+                        <a:srgbClr val="24365A"/>
+                      </a:solidFill>
+                      <a:prstDash val="solid"/>
+                      <a:round/>
+                      <a:headEnd type="none" w="med" len="med"/>
+                      <a:tailEnd type="none" w="med" len="med"/>
+                    </a:lnR>
+                    <a:lnT w="6350" cap="flat" cmpd="sng" algn="ctr">
+                      <a:solidFill>
+                        <a:srgbClr val="24365A"/>
+                      </a:solidFill>
+                      <a:prstDash val="solid"/>
+                      <a:round/>
+                      <a:headEnd type="none" w="med" len="med"/>
+                      <a:tailEnd type="none" w="med" len="med"/>
+                    </a:lnT>
+                    <a:lnB w="6350" cap="flat" cmpd="sng" algn="ctr">
+                      <a:solidFill>
+                        <a:srgbClr val="24365A"/>
+                      </a:solidFill>
+                      <a:prstDash val="solid"/>
+                      <a:round/>
+                      <a:headEnd type="none" w="med" len="med"/>
+                      <a:tailEnd type="none" w="med" len="med"/>
+                    </a:lnB>
+                    <a:solidFill>
+                      <a:srgbClr val="101A2D"/>
+                    </a:solidFill>
+                  </a:tcPr>
+                </a:tc>
+              </a:tr>
+              <a:tr h="402336">
+                <a:tc>
+                  <a:txBody>
+                    <a:bodyPr/>
+                    <a:lstStyle/>
+                    <a:p>
+                      <a:pPr indent="0" marL="0">
+                        <a:buNone/>
+                      </a:pPr>
+                      <a:r>
+                        <a:rPr lang="en-US" sz="1080" dirty="0">
+                          <a:solidFill>
+                            <a:srgbClr val="CBD5E1"/>
+                          </a:solidFill>
+                          <a:latin typeface="Segoe UI" pitchFamily="34" charset="0"/>
+                          <a:ea typeface="Segoe UI" pitchFamily="34" charset="-122"/>
+                          <a:cs typeface="Segoe UI" pitchFamily="34" charset="-120"/>
+                        </a:rPr>
+                        <a:t>Data quality</a:t>
+                      </a:r>
+                      <a:endParaRPr lang="en-US" sz="1080" dirty="0">
+                        <a:latin typeface="Segoe UI" charset="0"/>
+                        <a:ea typeface="Segoe UI" charset="0"/>
+                        <a:cs typeface="Segoe UI" charset="0"/>
+                      </a:endParaRPr>
+                    </a:p>
+                  </a:txBody>
+                  <a:tcPr marL="64008" marR="64008" marT="64008" marB="64008" anchor="ctr">
+                    <a:lnL w="6350" cap="flat" cmpd="sng" algn="ctr">
+                      <a:solidFill>
+                        <a:srgbClr val="24365A"/>
+                      </a:solidFill>
+                      <a:prstDash val="solid"/>
+                      <a:round/>
+                      <a:headEnd type="none" w="med" len="med"/>
+                      <a:tailEnd type="none" w="med" len="med"/>
+                    </a:lnL>
+                    <a:lnR w="6350" cap="flat" cmpd="sng" algn="ctr">
+                      <a:solidFill>
+                        <a:srgbClr val="24365A"/>
+                      </a:solidFill>
+                      <a:prstDash val="solid"/>
+                      <a:round/>
+                      <a:headEnd type="none" w="med" len="med"/>
+                      <a:tailEnd type="none" w="med" len="med"/>
+                    </a:lnR>
+                    <a:lnT w="6350" cap="flat" cmpd="sng" algn="ctr">
+                      <a:solidFill>
+                        <a:srgbClr val="24365A"/>
+                      </a:solidFill>
+                      <a:prstDash val="solid"/>
+                      <a:round/>
+                      <a:headEnd type="none" w="med" len="med"/>
+                      <a:tailEnd type="none" w="med" len="med"/>
+                    </a:lnT>
+                    <a:lnB w="6350" cap="flat" cmpd="sng" algn="ctr">
+                      <a:solidFill>
+                        <a:srgbClr val="24365A"/>
+                      </a:solidFill>
+                      <a:prstDash val="solid"/>
+                      <a:round/>
+                      <a:headEnd type="none" w="med" len="med"/>
+                      <a:tailEnd type="none" w="med" len="med"/>
+                    </a:lnB>
+                    <a:solidFill>
+                      <a:srgbClr val="0D1420"/>
+                    </a:solidFill>
+                  </a:tcPr>
+                </a:tc>
+                <a:tc>
+                  <a:txBody>
+                    <a:bodyPr/>
+                    <a:lstStyle/>
+                    <a:p>
+                      <a:pPr indent="0" marL="0">
+                        <a:buNone/>
+                      </a:pPr>
+                      <a:r>
+                        <a:rPr lang="en-US" sz="1080" dirty="0">
+                          <a:solidFill>
+                            <a:srgbClr val="CBD5E1"/>
+                          </a:solidFill>
+                          <a:latin typeface="Segoe UI" pitchFamily="34" charset="0"/>
+                          <a:ea typeface="Segoe UI" pitchFamily="34" charset="-122"/>
+                          <a:cs typeface="Segoe UI" pitchFamily="34" charset="-120"/>
+                        </a:rPr>
+                        <a:t>Datalake vs store systems</a:t>
+                      </a:r>
+                      <a:endParaRPr lang="en-US" sz="1080" dirty="0">
+                        <a:latin typeface="Segoe UI" charset="0"/>
+                        <a:ea typeface="Segoe UI" charset="0"/>
+                        <a:cs typeface="Segoe UI" charset="0"/>
+                      </a:endParaRPr>
+                    </a:p>
+                  </a:txBody>
+                  <a:tcPr marL="64008" marR="64008" marT="64008" marB="64008" anchor="ctr">
+                    <a:lnL w="6350" cap="flat" cmpd="sng" algn="ctr">
+                      <a:solidFill>
+                        <a:srgbClr val="24365A"/>
+                      </a:solidFill>
+                      <a:prstDash val="solid"/>
+                      <a:round/>
+                      <a:headEnd type="none" w="med" len="med"/>
+                      <a:tailEnd type="none" w="med" len="med"/>
+                    </a:lnL>
+                    <a:lnR w="6350" cap="flat" cmpd="sng" algn="ctr">
+                      <a:solidFill>
+                        <a:srgbClr val="24365A"/>
+                      </a:solidFill>
+                      <a:prstDash val="solid"/>
+                      <a:round/>
+                      <a:headEnd type="none" w="med" len="med"/>
+                      <a:tailEnd type="none" w="med" len="med"/>
+                    </a:lnR>
+                    <a:lnT w="6350" cap="flat" cmpd="sng" algn="ctr">
+                      <a:solidFill>
+                        <a:srgbClr val="24365A"/>
+                      </a:solidFill>
+                      <a:prstDash val="solid"/>
+                      <a:round/>
+                      <a:headEnd type="none" w="med" len="med"/>
+                      <a:tailEnd type="none" w="med" len="med"/>
+                    </a:lnT>
+                    <a:lnB w="6350" cap="flat" cmpd="sng" algn="ctr">
+                      <a:solidFill>
+                        <a:srgbClr val="24365A"/>
+                      </a:solidFill>
+                      <a:prstDash val="solid"/>
+                      <a:round/>
+                      <a:headEnd type="none" w="med" len="med"/>
+                      <a:tailEnd type="none" w="med" len="med"/>
+                    </a:lnB>
+                    <a:solidFill>
+                      <a:srgbClr val="0D1420"/>
+                    </a:solidFill>
+                  </a:tcPr>
+                </a:tc>
+                <a:tc>
+                  <a:txBody>
+                    <a:bodyPr/>
+                    <a:lstStyle/>
+                    <a:p>
+                      <a:pPr indent="0" marL="0">
+                        <a:buNone/>
+                      </a:pPr>
+                      <a:r>
+                        <a:rPr lang="en-US" sz="1080" dirty="0">
+                          <a:solidFill>
+                            <a:srgbClr val="CBD5E1"/>
+                          </a:solidFill>
+                          <a:latin typeface="Segoe UI" pitchFamily="34" charset="0"/>
+                          <a:ea typeface="Segoe UI" pitchFamily="34" charset="-122"/>
+                          <a:cs typeface="Segoe UI" pitchFamily="34" charset="-120"/>
+                        </a:rPr>
+                        <a:t>Ran reconciliation checks and discrepancy hunting between lake and sources</a:t>
+                      </a:r>
+                      <a:endParaRPr lang="en-US" sz="1080" dirty="0">
+                        <a:latin typeface="Segoe UI" charset="0"/>
+                        <a:ea typeface="Segoe UI" charset="0"/>
+                        <a:cs typeface="Segoe UI" charset="0"/>
+                      </a:endParaRPr>
+                    </a:p>
+                  </a:txBody>
+                  <a:tcPr marL="64008" marR="64008" marT="64008" marB="64008" anchor="ctr">
+                    <a:lnL w="6350" cap="flat" cmpd="sng" algn="ctr">
+                      <a:solidFill>
+                        <a:srgbClr val="24365A"/>
+                      </a:solidFill>
+                      <a:prstDash val="solid"/>
+                      <a:round/>
+                      <a:headEnd type="none" w="med" len="med"/>
+                      <a:tailEnd type="none" w="med" len="med"/>
+                    </a:lnL>
+                    <a:lnR w="6350" cap="flat" cmpd="sng" algn="ctr">
+                      <a:solidFill>
+                        <a:srgbClr val="24365A"/>
+                      </a:solidFill>
+                      <a:prstDash val="solid"/>
+                      <a:round/>
+                      <a:headEnd type="none" w="med" len="med"/>
+                      <a:tailEnd type="none" w="med" len="med"/>
+                    </a:lnR>
+                    <a:lnT w="6350" cap="flat" cmpd="sng" algn="ctr">
+                      <a:solidFill>
+                        <a:srgbClr val="24365A"/>
+                      </a:solidFill>
+                      <a:prstDash val="solid"/>
+                      <a:round/>
+                      <a:headEnd type="none" w="med" len="med"/>
+                      <a:tailEnd type="none" w="med" len="med"/>
+                    </a:lnT>
+                    <a:lnB w="6350" cap="flat" cmpd="sng" algn="ctr">
+                      <a:solidFill>
+                        <a:srgbClr val="24365A"/>
+                      </a:solidFill>
+                      <a:prstDash val="solid"/>
+                      <a:round/>
+                      <a:headEnd type="none" w="med" len="med"/>
+                      <a:tailEnd type="none" w="med" len="med"/>
+                    </a:lnB>
+                    <a:solidFill>
+                      <a:srgbClr val="0D1420"/>
+                    </a:solidFill>
+                  </a:tcPr>
+                </a:tc>
+              </a:tr>
+              <a:tr h="402336">
+                <a:tc>
+                  <a:txBody>
+                    <a:bodyPr/>
+                    <a:lstStyle/>
+                    <a:p>
+                      <a:pPr indent="0" marL="0">
+                        <a:buNone/>
+                      </a:pPr>
+                      <a:r>
+                        <a:rPr lang="en-US" sz="1080" dirty="0">
+                          <a:solidFill>
+                            <a:srgbClr val="CBD5E1"/>
+                          </a:solidFill>
+                          <a:latin typeface="Segoe UI" pitchFamily="34" charset="0"/>
+                          <a:ea typeface="Segoe UI" pitchFamily="34" charset="-122"/>
+                          <a:cs typeface="Segoe UI" pitchFamily="34" charset="-120"/>
+                        </a:rPr>
+                        <a:t>Alignment</a:t>
+                      </a:r>
+                      <a:endParaRPr lang="en-US" sz="1080" dirty="0">
+                        <a:latin typeface="Segoe UI" charset="0"/>
+                        <a:ea typeface="Segoe UI" charset="0"/>
+                        <a:cs typeface="Segoe UI" charset="0"/>
+                      </a:endParaRPr>
+                    </a:p>
+                  </a:txBody>
+                  <a:tcPr marL="64008" marR="64008" marT="64008" marB="64008" anchor="ctr">
+                    <a:lnL w="6350" cap="flat" cmpd="sng" algn="ctr">
+                      <a:solidFill>
+                        <a:srgbClr val="24365A"/>
+                      </a:solidFill>
+                      <a:prstDash val="solid"/>
+                      <a:round/>
+                      <a:headEnd type="none" w="med" len="med"/>
+                      <a:tailEnd type="none" w="med" len="med"/>
+                    </a:lnL>
+                    <a:lnR w="6350" cap="flat" cmpd="sng" algn="ctr">
+                      <a:solidFill>
+                        <a:srgbClr val="24365A"/>
+                      </a:solidFill>
+                      <a:prstDash val="solid"/>
+                      <a:round/>
+                      <a:headEnd type="none" w="med" len="med"/>
+                      <a:tailEnd type="none" w="med" len="med"/>
+                    </a:lnR>
+                    <a:lnT w="6350" cap="flat" cmpd="sng" algn="ctr">
+                      <a:solidFill>
+                        <a:srgbClr val="24365A"/>
+                      </a:solidFill>
+                      <a:prstDash val="solid"/>
+                      <a:round/>
+                      <a:headEnd type="none" w="med" len="med"/>
+                      <a:tailEnd type="none" w="med" len="med"/>
+                    </a:lnT>
+                    <a:lnB w="6350" cap="flat" cmpd="sng" algn="ctr">
+                      <a:solidFill>
+                        <a:srgbClr val="24365A"/>
+                      </a:solidFill>
+                      <a:prstDash val="solid"/>
+                      <a:round/>
+                      <a:headEnd type="none" w="med" len="med"/>
+                      <a:tailEnd type="none" w="med" len="med"/>
+                    </a:lnB>
+                    <a:solidFill>
+                      <a:srgbClr val="101A2D"/>
+                    </a:solidFill>
+                  </a:tcPr>
+                </a:tc>
+                <a:tc>
+                  <a:txBody>
+                    <a:bodyPr/>
+                    <a:lstStyle/>
+                    <a:p>
+                      <a:pPr indent="0" marL="0">
+                        <a:buNone/>
+                      </a:pPr>
+                      <a:r>
+                        <a:rPr lang="en-US" sz="1080" dirty="0">
+                          <a:solidFill>
+                            <a:srgbClr val="CBD5E1"/>
+                          </a:solidFill>
+                          <a:latin typeface="Segoe UI" pitchFamily="34" charset="0"/>
+                          <a:ea typeface="Segoe UI" pitchFamily="34" charset="-122"/>
+                          <a:cs typeface="Segoe UI" pitchFamily="34" charset="-120"/>
+                        </a:rPr>
+                        <a:t>BI, Regional IT, business</a:t>
+                      </a:r>
+                      <a:endParaRPr lang="en-US" sz="1080" dirty="0">
+                        <a:latin typeface="Segoe UI" charset="0"/>
+                        <a:ea typeface="Segoe UI" charset="0"/>
+                        <a:cs typeface="Segoe UI" charset="0"/>
+                      </a:endParaRPr>
+                    </a:p>
+                  </a:txBody>
+                  <a:tcPr marL="64008" marR="64008" marT="64008" marB="64008" anchor="ctr">
+                    <a:lnL w="6350" cap="flat" cmpd="sng" algn="ctr">
+                      <a:solidFill>
+                        <a:srgbClr val="24365A"/>
+                      </a:solidFill>
+                      <a:prstDash val="solid"/>
+                      <a:round/>
+                      <a:headEnd type="none" w="med" len="med"/>
+                      <a:tailEnd type="none" w="med" len="med"/>
+                    </a:lnL>
+                    <a:lnR w="6350" cap="flat" cmpd="sng" algn="ctr">
+                      <a:solidFill>
+                        <a:srgbClr val="24365A"/>
+                      </a:solidFill>
+                      <a:prstDash val="solid"/>
+                      <a:round/>
+                      <a:headEnd type="none" w="med" len="med"/>
+                      <a:tailEnd type="none" w="med" len="med"/>
+                    </a:lnR>
+                    <a:lnT w="6350" cap="flat" cmpd="sng" algn="ctr">
+                      <a:solidFill>
+                        <a:srgbClr val="24365A"/>
+                      </a:solidFill>
+                      <a:prstDash val="solid"/>
+                      <a:round/>
+                      <a:headEnd type="none" w="med" len="med"/>
+                      <a:tailEnd type="none" w="med" len="med"/>
+                    </a:lnT>
+                    <a:lnB w="6350" cap="flat" cmpd="sng" algn="ctr">
+                      <a:solidFill>
+                        <a:srgbClr val="24365A"/>
+                      </a:solidFill>
+                      <a:prstDash val="solid"/>
+                      <a:round/>
+                      <a:headEnd type="none" w="med" len="med"/>
+                      <a:tailEnd type="none" w="med" len="med"/>
+                    </a:lnB>
+                    <a:solidFill>
+                      <a:srgbClr val="101A2D"/>
+                    </a:solidFill>
+                  </a:tcPr>
+                </a:tc>
+                <a:tc>
+                  <a:txBody>
+                    <a:bodyPr/>
+                    <a:lstStyle/>
+                    <a:p>
+                      <a:pPr indent="0" marL="0">
+                        <a:buNone/>
+                      </a:pPr>
+                      <a:r>
+                        <a:rPr lang="en-US" sz="1080" dirty="0">
+                          <a:solidFill>
+                            <a:srgbClr val="CBD5E1"/>
+                          </a:solidFill>
+                          <a:latin typeface="Segoe UI" pitchFamily="34" charset="0"/>
+                          <a:ea typeface="Segoe UI" pitchFamily="34" charset="-122"/>
+                          <a:cs typeface="Segoe UI" pitchFamily="34" charset="-120"/>
+                        </a:rPr>
+                        <a:t>Turned every mismatch into a conversation with a named owner on both sides</a:t>
+                      </a:r>
+                      <a:endParaRPr lang="en-US" sz="1080" dirty="0">
+                        <a:latin typeface="Segoe UI" charset="0"/>
+                        <a:ea typeface="Segoe UI" charset="0"/>
+                        <a:cs typeface="Segoe UI" charset="0"/>
+                      </a:endParaRPr>
+                    </a:p>
+                  </a:txBody>
+                  <a:tcPr marL="64008" marR="64008" marT="64008" marB="64008" anchor="ctr">
+                    <a:lnL w="6350" cap="flat" cmpd="sng" algn="ctr">
+                      <a:solidFill>
+                        <a:srgbClr val="24365A"/>
+                      </a:solidFill>
+                      <a:prstDash val="solid"/>
+                      <a:round/>
+                      <a:headEnd type="none" w="med" len="med"/>
+                      <a:tailEnd type="none" w="med" len="med"/>
+                    </a:lnL>
+                    <a:lnR w="6350" cap="flat" cmpd="sng" algn="ctr">
+                      <a:solidFill>
+                        <a:srgbClr val="24365A"/>
+                      </a:solidFill>
+                      <a:prstDash val="solid"/>
+                      <a:round/>
+                      <a:headEnd type="none" w="med" len="med"/>
+                      <a:tailEnd type="none" w="med" len="med"/>
+                    </a:lnR>
+                    <a:lnT w="6350" cap="flat" cmpd="sng" algn="ctr">
+                      <a:solidFill>
+                        <a:srgbClr val="24365A"/>
+                      </a:solidFill>
+                      <a:prstDash val="solid"/>
+                      <a:round/>
+                      <a:headEnd type="none" w="med" len="med"/>
+                      <a:tailEnd type="none" w="med" len="med"/>
+                    </a:lnT>
+                    <a:lnB w="6350" cap="flat" cmpd="sng" algn="ctr">
+                      <a:solidFill>
+                        <a:srgbClr val="24365A"/>
+                      </a:solidFill>
+                      <a:prstDash val="solid"/>
+                      <a:round/>
+                      <a:headEnd type="none" w="med" len="med"/>
+                      <a:tailEnd type="none" w="med" len="med"/>
+                    </a:lnB>
+                    <a:solidFill>
+                      <a:srgbClr val="101A2D"/>
+                    </a:solidFill>
+                  </a:tcPr>
+                </a:tc>
+              </a:tr>
+            </a:tbl>
+          </a:graphicData>
+        </a:graphic>
+      </p:graphicFrame>
+      <p:sp>
+        <p:nvSpPr>
+          <p:cNvPr id="7" name="Shape 4"/>
+          <p:cNvSpPr/>
+          <p:nvPr/>
+        </p:nvSpPr>
+        <p:spPr>
+          <a:xfrm>
+            <a:off x="822960" y="5961888"/>
+            <a:ext cx="10515600" cy="0"/>
+          </a:xfrm>
+          <a:prstGeom prst="line">
+            <a:avLst/>
+          </a:prstGeom>
+          <a:noFill/>
+          <a:ln w="12700">
+            <a:solidFill>
+              <a:srgbClr val="1E2D45"/>
+            </a:solidFill>
+            <a:prstDash val="solid"/>
+          </a:ln>
+        </p:spPr>
+      </p:sp>
+      <p:sp>
+        <p:nvSpPr>
+          <p:cNvPr id="8" name="Text 5"/>
+          <p:cNvSpPr/>
+          <p:nvPr/>
+        </p:nvSpPr>
+        <p:spPr>
+          <a:xfrm>
+            <a:off x="822960" y="6053328"/>
+            <a:ext cx="9692640" cy="457200"/>
+          </a:xfrm>
+          <a:prstGeom prst="rect">
+            <a:avLst/>
+          </a:prstGeom>
+          <a:noFill/>
+          <a:ln/>
+        </p:spPr>
+        <p:txBody>
+          <a:bodyPr wrap="square" rtlCol="0" anchor="ctr"/>
+          <a:lstStyle/>
+          <a:p>
+            <a:pPr indent="0" marL="0">
+              <a:buNone/>
+            </a:pPr>
+            <a:r>
+              <a:rPr lang="en-US" sz="1150" dirty="0">
+                <a:solidFill>
+                  <a:srgbClr val="64748B"/>
                 </a:solidFill>
                 <a:latin typeface="Segoe UI" pitchFamily="34" charset="0"/>
                 <a:ea typeface="Segoe UI" pitchFamily="34" charset="-122"/>
                 <a:cs typeface="Segoe UI" pitchFamily="34" charset="-120"/>
               </a:rPr>
-              <a:t>One number, one definition - the definition registry was my most-used document</a:t>
-            </a:r>
-            <a:endParaRPr lang="en-US" sz="1600" dirty="0"/>
-          </a:p>
-          <a:p>
-            <a:pPr marL="342900" indent="-342900">
-              <a:lnSpc>
-                <a:spcPct val="115000"/>
-              </a:lnSpc>
-              <a:spcAft>
-                <a:spcPts val="1000"/>
-              </a:spcAft>
-              <a:buSzPct val="100000"/>
-              <a:buChar char="▸"/>
-            </a:pPr>
-            <a:r>
-              <a:rPr lang="en-US" sz="1600" dirty="0">
-                <a:solidFill>
-                  <a:srgbClr val="CBD5E1"/>
-                </a:solidFill>
-                <a:latin typeface="Segoe UI" pitchFamily="34" charset="0"/>
-                <a:ea typeface="Segoe UI" pitchFamily="34" charset="-122"/>
-                <a:cs typeface="Segoe UI" pitchFamily="34" charset="-120"/>
-              </a:rPr>
-              <a:t>Most disagreements were definitions, not data</a:t>
-            </a:r>
-            <a:endParaRPr lang="en-US" sz="1600" dirty="0"/>
-          </a:p>
-          <a:p>
-            <a:pPr marL="342900" indent="-342900">
-              <a:lnSpc>
-                <a:spcPct val="115000"/>
-              </a:lnSpc>
-              <a:spcAft>
-                <a:spcPts val="1000"/>
-              </a:spcAft>
-              <a:buSzPct val="100000"/>
-              <a:buChar char="▸"/>
-            </a:pPr>
-            <a:r>
-              <a:rPr lang="en-US" sz="1600" dirty="0">
-                <a:solidFill>
-                  <a:srgbClr val="CBD5E1"/>
-                </a:solidFill>
-                <a:latin typeface="Segoe UI" pitchFamily="34" charset="0"/>
-                <a:ea typeface="Segoe UI" pitchFamily="34" charset="-122"/>
-                <a:cs typeface="Segoe UI" pitchFamily="34" charset="-120"/>
-              </a:rPr>
-              <a:t>Local context matters per market; standardize definitions, not cultures</a:t>
-            </a:r>
-            <a:endParaRPr lang="en-US" sz="1600" dirty="0"/>
-          </a:p>
-          <a:p>
-            <a:pPr marL="342900" indent="-342900">
-              <a:lnSpc>
-                <a:spcPct val="115000"/>
-              </a:lnSpc>
-              <a:spcAft>
-                <a:spcPts val="1000"/>
-              </a:spcAft>
-              <a:buSzPct val="100000"/>
-              <a:buChar char="▸"/>
-            </a:pPr>
-            <a:r>
-              <a:rPr lang="en-US" sz="1600" dirty="0">
-                <a:solidFill>
-                  <a:srgbClr val="CBD5E1"/>
-                </a:solidFill>
-                <a:latin typeface="Segoe UI" pitchFamily="34" charset="0"/>
-                <a:ea typeface="Segoe UI" pitchFamily="34" charset="-122"/>
-                <a:cs typeface="Segoe UI" pitchFamily="34" charset="-120"/>
-              </a:rPr>
-              <a:t>Trust in numbers is earned row by row</a:t>
-            </a:r>
-            <a:endParaRPr lang="en-US" sz="1600" dirty="0"/>
-          </a:p>
-        </p:txBody>
-      </p:sp>
-      <p:sp>
-        <p:nvSpPr>
-          <p:cNvPr id="7" name="Text 5"/>
-          <p:cNvSpPr/>
-          <p:nvPr/>
-        </p:nvSpPr>
-        <p:spPr>
-          <a:xfrm>
-            <a:off x="10698480" y="6355080"/>
+              <a:t>Five ownership areas, one thread: nothing was allowed to fail quietly.</a:t>
+            </a:r>
+            <a:endParaRPr lang="en-US" sz="1150" dirty="0"/>
+          </a:p>
+        </p:txBody>
+      </p:sp>
+      <p:sp>
+        <p:nvSpPr>
+          <p:cNvPr id="9" name="Text 6"/>
+          <p:cNvSpPr/>
+          <p:nvPr/>
+        </p:nvSpPr>
+        <p:spPr>
+          <a:xfrm>
+            <a:off x="10698480" y="6382512"/>
             <a:ext cx="1188720" cy="365760"/>
           </a:xfrm>
           <a:prstGeom prst="rect">
@@ -3134,7 +9448,7 @@
                 <a:ea typeface="Consolas" pitchFamily="34" charset="-122"/>
                 <a:cs typeface="Consolas" pitchFamily="34" charset="-120"/>
               </a:rPr>
-              <a:t>6 / 7</a:t>
+              <a:t>6 / 14</a:t>
             </a:r>
             <a:endParaRPr lang="en-US" sz="1000" dirty="0"/>
           </a:p>
@@ -3220,8 +9534,8 @@
         </p:nvSpPr>
         <p:spPr>
           <a:xfrm>
-            <a:off x="822960" y="1554480"/>
-            <a:ext cx="10515600" cy="457200"/>
+            <a:off x="822960" y="502920"/>
+            <a:ext cx="10515600" cy="365760"/>
           </a:xfrm>
           <a:prstGeom prst="rect">
             <a:avLst/>
@@ -3237,7 +9551,7 @@
               <a:buNone/>
             </a:pPr>
             <a:r>
-              <a:rPr lang="en-US" sz="1400" spc="400" kern="0" dirty="0">
+              <a:rPr lang="en-US" sz="1200" spc="300" kern="0" dirty="0">
                 <a:solidFill>
                   <a:srgbClr val="06B6D4"/>
                 </a:solidFill>
@@ -3245,9 +9559,9 @@
                 <a:ea typeface="Consolas" pitchFamily="34" charset="-122"/>
                 <a:cs typeface="Consolas" pitchFamily="34" charset="-120"/>
               </a:rPr>
-              <a:t>TAKEAWAY</a:t>
-            </a:r>
-            <a:endParaRPr lang="en-US" sz="1400" dirty="0"/>
+              <a:t>DATA QUALITY</a:t>
+            </a:r>
+            <a:endParaRPr lang="en-US" sz="1200" dirty="0"/>
           </a:p>
         </p:txBody>
       </p:sp>
@@ -3259,8 +9573,8 @@
         </p:nvSpPr>
         <p:spPr>
           <a:xfrm>
-            <a:off x="822960" y="2286000"/>
-            <a:ext cx="10515600" cy="1737360"/>
+            <a:off x="822960" y="914400"/>
+            <a:ext cx="10561320" cy="868680"/>
           </a:xfrm>
           <a:prstGeom prst="rect">
             <a:avLst/>
@@ -3276,7 +9590,7 @@
               <a:buNone/>
             </a:pPr>
             <a:r>
-              <a:rPr lang="en-US" sz="4400" b="1" dirty="0">
+              <a:rPr lang="en-US" sz="2700" b="1" dirty="0">
                 <a:solidFill>
                   <a:srgbClr val="FFFFFF"/>
                 </a:solidFill>
@@ -3284,9 +9598,9 @@
                 <a:ea typeface="Segoe UI" pitchFamily="34" charset="-122"/>
                 <a:cs typeface="Segoe UI" pitchFamily="34" charset="-120"/>
               </a:rPr>
-              <a:t>Scale breaks definitions before pipelines</a:t>
-            </a:r>
-            <a:endParaRPr lang="en-US" sz="4400" dirty="0"/>
+              <a:t>Reconciliation is a property, not a project</a:t>
+            </a:r>
+            <a:endParaRPr lang="en-US" sz="2700" dirty="0"/>
           </a:p>
         </p:txBody>
       </p:sp>
@@ -3298,35 +9612,138 @@
         </p:nvSpPr>
         <p:spPr>
           <a:xfrm>
-            <a:off x="822960" y="4206240"/>
-            <a:ext cx="10515600" cy="914400"/>
-          </a:xfrm>
-          <a:prstGeom prst="rect">
-            <a:avLst/>
-          </a:prstGeom>
-          <a:noFill/>
-          <a:ln/>
-        </p:spPr>
-        <p:txBody>
-          <a:bodyPr wrap="square" rtlCol="0" anchor="ctr"/>
-          <a:lstStyle/>
-          <a:p>
-            <a:pPr indent="0" marL="0">
-              <a:buNone/>
+            <a:off x="868680" y="2011680"/>
+            <a:ext cx="10424160" cy="3566160"/>
+          </a:xfrm>
+          <a:prstGeom prst="rect">
+            <a:avLst/>
+          </a:prstGeom>
+          <a:noFill/>
+          <a:ln/>
+        </p:spPr>
+        <p:txBody>
+          <a:bodyPr wrap="square" rtlCol="0" anchor="t"/>
+          <a:lstStyle/>
+          <a:p>
+            <a:pPr marL="342900" indent="-342900">
+              <a:lnSpc>
+                <a:spcPct val="112000"/>
+              </a:lnSpc>
+              <a:spcAft>
+                <a:spcPts val="900"/>
+              </a:spcAft>
+              <a:buSzPct val="100000"/>
+              <a:buChar char="▸"/>
             </a:pPr>
             <a:r>
               <a:rPr lang="en-US" sz="1600" dirty="0">
                 <a:solidFill>
-                  <a:srgbClr val="94A3B8"/>
+                  <a:srgbClr val="CBD5E1"/>
                 </a:solidFill>
                 <a:latin typeface="Segoe UI" pitchFamily="34" charset="0"/>
                 <a:ea typeface="Segoe UI" pitchFamily="34" charset="-122"/>
                 <a:cs typeface="Segoe UI" pitchFamily="34" charset="-120"/>
               </a:rPr>
-              <a:t>Multi-market BI is an agreement problem wearing a technology costume. · rezalianvatiady.github.io</a:t>
+              <a:t>Reconciliation ran at every seam: row counts, sum checks, and sampled row-level comparisons</a:t>
             </a:r>
             <a:endParaRPr lang="en-US" sz="1600" dirty="0"/>
           </a:p>
+          <a:p>
+            <a:pPr marL="342900" indent="-342900">
+              <a:lnSpc>
+                <a:spcPct val="112000"/>
+              </a:lnSpc>
+              <a:spcAft>
+                <a:spcPts val="900"/>
+              </a:spcAft>
+              <a:buSzPct val="100000"/>
+              <a:buChar char="▸"/>
+            </a:pPr>
+            <a:r>
+              <a:rPr lang="en-US" sz="1600" dirty="0">
+                <a:solidFill>
+                  <a:srgbClr val="CBD5E1"/>
+                </a:solidFill>
+                <a:latin typeface="Segoe UI" pitchFamily="34" charset="0"/>
+                <a:ea typeface="Segoe UI" pitchFamily="34" charset="-122"/>
+                <a:cs typeface="Segoe UI" pitchFamily="34" charset="-120"/>
+              </a:rPr>
+              <a:t>Every source was profiled for expected row counts, key uniqueness, update cadence, and known quirks</a:t>
+            </a:r>
+            <a:endParaRPr lang="en-US" sz="1600" dirty="0"/>
+          </a:p>
+          <a:p>
+            <a:pPr marL="342900" indent="-342900">
+              <a:lnSpc>
+                <a:spcPct val="112000"/>
+              </a:lnSpc>
+              <a:spcAft>
+                <a:spcPts val="900"/>
+              </a:spcAft>
+              <a:buSzPct val="100000"/>
+              <a:buChar char="▸"/>
+            </a:pPr>
+            <a:r>
+              <a:rPr lang="en-US" sz="1600" dirty="0">
+                <a:solidFill>
+                  <a:srgbClr val="CBD5E1"/>
+                </a:solidFill>
+                <a:latin typeface="Segoe UI" pitchFamily="34" charset="0"/>
+                <a:ea typeface="Segoe UI" pitchFamily="34" charset="-122"/>
+                <a:cs typeface="Segoe UI" pitchFamily="34" charset="-120"/>
+              </a:rPr>
+              <a:t>Freshness alarms covered every source, because silent schedule deaths are the default state</a:t>
+            </a:r>
+            <a:endParaRPr lang="en-US" sz="1600" dirty="0"/>
+          </a:p>
+          <a:p>
+            <a:pPr marL="342900" indent="-342900">
+              <a:lnSpc>
+                <a:spcPct val="112000"/>
+              </a:lnSpc>
+              <a:spcAft>
+                <a:spcPts val="900"/>
+              </a:spcAft>
+              <a:buSzPct val="100000"/>
+              <a:buChar char="▸"/>
+            </a:pPr>
+            <a:r>
+              <a:rPr lang="en-US" sz="1600" dirty="0">
+                <a:solidFill>
+                  <a:srgbClr val="CBD5E1"/>
+                </a:solidFill>
+                <a:latin typeface="Segoe UI" pitchFamily="34" charset="0"/>
+                <a:ea typeface="Segoe UI" pitchFamily="34" charset="-122"/>
+                <a:cs typeface="Segoe UI" pitchFamily="34" charset="-120"/>
+              </a:rPr>
+              <a:t>Each discrepancy got a named owner on both sides, not just a ticket</a:t>
+            </a:r>
+            <a:endParaRPr lang="en-US" sz="1600" dirty="0"/>
+          </a:p>
+          <a:p>
+            <a:pPr marL="342900" indent="-342900">
+              <a:lnSpc>
+                <a:spcPct val="112000"/>
+              </a:lnSpc>
+              <a:spcAft>
+                <a:spcPts val="900"/>
+              </a:spcAft>
+              <a:buSzPct val="100000"/>
+              <a:buChar char="▸"/>
+            </a:pPr>
+            <a:r>
+              <a:rPr lang="en-US" sz="1600" dirty="0">
+                <a:solidFill>
+                  <a:srgbClr val="CBD5E1"/>
+                </a:solidFill>
+                <a:latin typeface="Segoe UI" pitchFamily="34" charset="0"/>
+                <a:ea typeface="Segoe UI" pitchFamily="34" charset="-122"/>
+                <a:cs typeface="Segoe UI" pitchFamily="34" charset="-120"/>
+              </a:rPr>
+              <a:t>Runbooks lived next to the pipelines, not in a wiki nobody opens</a:t>
+            </a:r>
+            <a:endParaRPr lang="en-US" sz="1600" dirty="0"/>
+          </a:p>
         </p:txBody>
       </p:sp>
       <p:sp>
@@ -3337,7 +9754,7 @@
         </p:nvSpPr>
         <p:spPr>
           <a:xfrm>
-            <a:off x="10698480" y="6355080"/>
+            <a:off x="10698480" y="6382512"/>
             <a:ext cx="1188720" cy="365760"/>
           </a:xfrm>
           <a:prstGeom prst="rect">
@@ -3362,7 +9779,667 @@
                 <a:ea typeface="Consolas" pitchFamily="34" charset="-122"/>
                 <a:cs typeface="Consolas" pitchFamily="34" charset="-120"/>
               </a:rPr>
-              <a:t>7 / 7</a:t>
+              <a:t>7 / 14</a:t>
+            </a:r>
+            <a:endParaRPr lang="en-US" sz="1000" dirty="0"/>
+          </a:p>
+        </p:txBody>
+      </p:sp>
+    </p:spTree>
+  </p:cSld>
+  <p:clrMapOvr>
+    <a:masterClrMapping/>
+  </p:clrMapOvr>
+</p:sld>
+</file>
+
+<file path=ppt/slides/slide8.xml><?xml version="1.0" encoding="utf-8"?>
+<p:sld xmlns:a="http://schemas.openxmlformats.org/drawingml/2006/main" xmlns:r="http://schemas.openxmlformats.org/officeDocument/2006/relationships" xmlns:p="http://schemas.openxmlformats.org/presentationml/2006/main">
+  <p:cSld name="Slide 8">
+    <p:bg>
+      <p:bgPr>
+        <a:solidFill>
+          <a:srgbClr val="0A0C12"/>
+        </a:solidFill>
+      </p:bgPr>
+    </p:bg>
+    <p:spTree>
+      <p:nvGrpSpPr>
+        <p:cNvPr id="1" name=""/>
+        <p:cNvGrpSpPr/>
+        <p:nvPr/>
+      </p:nvGrpSpPr>
+      <p:grpSpPr>
+        <a:xfrm>
+          <a:off x="0" y="0"/>
+          <a:ext cx="0" cy="0"/>
+          <a:chOff x="0" y="0"/>
+          <a:chExt cx="0" cy="0"/>
+        </a:xfrm>
+      </p:grpSpPr>
+      <p:sp>
+        <p:nvSpPr>
+          <p:cNvPr id="2" name="Shape 0"/>
+          <p:cNvSpPr/>
+          <p:nvPr/>
+        </p:nvSpPr>
+        <p:spPr>
+          <a:xfrm>
+            <a:off x="0" y="0"/>
+            <a:ext cx="7680960" cy="64008"/>
+          </a:xfrm>
+          <a:prstGeom prst="rect">
+            <a:avLst/>
+          </a:prstGeom>
+          <a:solidFill>
+            <a:srgbClr val="3B82F6"/>
+          </a:solidFill>
+          <a:ln/>
+        </p:spPr>
+      </p:sp>
+      <p:sp>
+        <p:nvSpPr>
+          <p:cNvPr id="3" name="Shape 1"/>
+          <p:cNvSpPr/>
+          <p:nvPr/>
+        </p:nvSpPr>
+        <p:spPr>
+          <a:xfrm>
+            <a:off x="7680960" y="0"/>
+            <a:ext cx="4510735" cy="64008"/>
+          </a:xfrm>
+          <a:prstGeom prst="rect">
+            <a:avLst/>
+          </a:prstGeom>
+          <a:solidFill>
+            <a:srgbClr val="06B6D4"/>
+          </a:solidFill>
+          <a:ln/>
+        </p:spPr>
+      </p:sp>
+      <p:sp>
+        <p:nvSpPr>
+          <p:cNvPr id="4" name="Text 2"/>
+          <p:cNvSpPr/>
+          <p:nvPr/>
+        </p:nvSpPr>
+        <p:spPr>
+          <a:xfrm>
+            <a:off x="822960" y="502920"/>
+            <a:ext cx="10515600" cy="365760"/>
+          </a:xfrm>
+          <a:prstGeom prst="rect">
+            <a:avLst/>
+          </a:prstGeom>
+          <a:noFill/>
+          <a:ln/>
+        </p:spPr>
+        <p:txBody>
+          <a:bodyPr wrap="square" rtlCol="0" anchor="ctr"/>
+          <a:lstStyle/>
+          <a:p>
+            <a:pPr indent="0" marL="0">
+              <a:buNone/>
+            </a:pPr>
+            <a:r>
+              <a:rPr lang="en-US" sz="1200" spc="300" kern="0" dirty="0">
+                <a:solidFill>
+                  <a:srgbClr val="06B6D4"/>
+                </a:solidFill>
+                <a:latin typeface="Consolas" pitchFamily="34" charset="0"/>
+                <a:ea typeface="Consolas" pitchFamily="34" charset="-122"/>
+                <a:cs typeface="Consolas" pitchFamily="34" charset="-120"/>
+              </a:rPr>
+              <a:t>INCIDENT SOURCES</a:t>
+            </a:r>
+            <a:endParaRPr lang="en-US" sz="1200" dirty="0"/>
+          </a:p>
+        </p:txBody>
+      </p:sp>
+      <p:sp>
+        <p:nvSpPr>
+          <p:cNvPr id="5" name="Text 3"/>
+          <p:cNvSpPr/>
+          <p:nvPr/>
+        </p:nvSpPr>
+        <p:spPr>
+          <a:xfrm>
+            <a:off x="822960" y="914400"/>
+            <a:ext cx="10561320" cy="868680"/>
+          </a:xfrm>
+          <a:prstGeom prst="rect">
+            <a:avLst/>
+          </a:prstGeom>
+          <a:noFill/>
+          <a:ln/>
+        </p:spPr>
+        <p:txBody>
+          <a:bodyPr wrap="square" rtlCol="0" anchor="ctr"/>
+          <a:lstStyle/>
+          <a:p>
+            <a:pPr indent="0" marL="0">
+              <a:buNone/>
+            </a:pPr>
+            <a:r>
+              <a:rPr lang="en-US" sz="2700" b="1" dirty="0">
+                <a:solidFill>
+                  <a:srgbClr val="FFFFFF"/>
+                </a:solidFill>
+                <a:latin typeface="Segoe UI" pitchFamily="34" charset="0"/>
+                <a:ea typeface="Segoe UI" pitchFamily="34" charset="-122"/>
+                <a:cs typeface="Segoe UI" pitchFamily="34" charset="-120"/>
+              </a:rPr>
+              <a:t>Most reporting incidents were not logic bugs</a:t>
+            </a:r>
+            <a:endParaRPr lang="en-US" sz="2700" dirty="0"/>
+          </a:p>
+        </p:txBody>
+      </p:sp>
+      <p:graphicFrame>
+        <p:nvGraphicFramePr>
+          <p:cNvPr id="6" name="Chart 0" descr=""/>
+          <p:cNvGraphicFramePr/>
+          <p:nvPr/>
+        </p:nvGraphicFramePr>
+        <p:xfrm>
+          <a:off x="822960" y="1874520"/>
+          <a:ext cx="10515600" cy="3337560"/>
+        </p:xfrm>
+        <a:graphic xmlns:a="http://schemas.openxmlformats.org/drawingml/2006/main">
+          <a:graphicData uri="http://schemas.openxmlformats.org/drawingml/2006/chart">
+            <c:chart xmlns:c="http://schemas.openxmlformats.org/drawingml/2006/chart" r:id="rId1"/>
+          </a:graphicData>
+        </a:graphic>
+      </p:graphicFrame>
+      <p:sp>
+        <p:nvSpPr>
+          <p:cNvPr id="7" name="Shape 4"/>
+          <p:cNvSpPr/>
+          <p:nvPr/>
+        </p:nvSpPr>
+        <p:spPr>
+          <a:xfrm>
+            <a:off x="822960" y="5413248"/>
+            <a:ext cx="10515600" cy="0"/>
+          </a:xfrm>
+          <a:prstGeom prst="line">
+            <a:avLst/>
+          </a:prstGeom>
+          <a:noFill/>
+          <a:ln w="12700">
+            <a:solidFill>
+              <a:srgbClr val="1E2D45"/>
+            </a:solidFill>
+            <a:prstDash val="solid"/>
+          </a:ln>
+        </p:spPr>
+      </p:sp>
+      <p:sp>
+        <p:nvSpPr>
+          <p:cNvPr id="8" name="Text 5"/>
+          <p:cNvSpPr/>
+          <p:nvPr/>
+        </p:nvSpPr>
+        <p:spPr>
+          <a:xfrm>
+            <a:off x="822960" y="5504688"/>
+            <a:ext cx="10424160" cy="411480"/>
+          </a:xfrm>
+          <a:prstGeom prst="rect">
+            <a:avLst/>
+          </a:prstGeom>
+          <a:noFill/>
+          <a:ln/>
+        </p:spPr>
+        <p:txBody>
+          <a:bodyPr wrap="square" rtlCol="0" anchor="ctr"/>
+          <a:lstStyle/>
+          <a:p>
+            <a:pPr indent="0" marL="0">
+              <a:buNone/>
+            </a:pPr>
+            <a:r>
+              <a:rPr lang="en-US" sz="1300" i="1" dirty="0">
+                <a:solidFill>
+                  <a:srgbClr val="06B6D4"/>
+                </a:solidFill>
+                <a:latin typeface="Segoe UI" pitchFamily="34" charset="0"/>
+                <a:ea typeface="Segoe UI" pitchFamily="34" charset="-122"/>
+                <a:cs typeface="Segoe UI" pitchFamily="34" charset="-120"/>
+              </a:rPr>
+              <a:t>→  Instrumenting schedules and definitions prevented more incidents than fixing code ever did.</a:t>
+            </a:r>
+            <a:endParaRPr lang="en-US" sz="1300" dirty="0"/>
+          </a:p>
+        </p:txBody>
+      </p:sp>
+      <p:sp>
+        <p:nvSpPr>
+          <p:cNvPr id="9" name="Shape 6"/>
+          <p:cNvSpPr/>
+          <p:nvPr/>
+        </p:nvSpPr>
+        <p:spPr>
+          <a:xfrm>
+            <a:off x="822960" y="5961888"/>
+            <a:ext cx="10515600" cy="0"/>
+          </a:xfrm>
+          <a:prstGeom prst="line">
+            <a:avLst/>
+          </a:prstGeom>
+          <a:noFill/>
+          <a:ln w="12700">
+            <a:solidFill>
+              <a:srgbClr val="1E2D45"/>
+            </a:solidFill>
+            <a:prstDash val="solid"/>
+          </a:ln>
+        </p:spPr>
+      </p:sp>
+      <p:sp>
+        <p:nvSpPr>
+          <p:cNvPr id="10" name="Text 7"/>
+          <p:cNvSpPr/>
+          <p:nvPr/>
+        </p:nvSpPr>
+        <p:spPr>
+          <a:xfrm>
+            <a:off x="822960" y="6053328"/>
+            <a:ext cx="9692640" cy="457200"/>
+          </a:xfrm>
+          <a:prstGeom prst="rect">
+            <a:avLst/>
+          </a:prstGeom>
+          <a:noFill/>
+          <a:ln/>
+        </p:spPr>
+        <p:txBody>
+          <a:bodyPr wrap="square" rtlCol="0" anchor="ctr"/>
+          <a:lstStyle/>
+          <a:p>
+            <a:pPr indent="0" marL="0">
+              <a:buNone/>
+            </a:pPr>
+            <a:r>
+              <a:rPr lang="en-US" sz="1150" dirty="0">
+                <a:solidFill>
+                  <a:srgbClr val="64748B"/>
+                </a:solidFill>
+                <a:latin typeface="Segoe UI" pitchFamily="34" charset="0"/>
+                <a:ea typeface="Segoe UI" pitchFamily="34" charset="-122"/>
+                <a:cs typeface="Segoe UI" pitchFamily="34" charset="-120"/>
+              </a:rPr>
+              <a:t>Illustrative distribution of reporting-incident causes across the operation.</a:t>
+            </a:r>
+            <a:endParaRPr lang="en-US" sz="1150" dirty="0"/>
+          </a:p>
+        </p:txBody>
+      </p:sp>
+      <p:sp>
+        <p:nvSpPr>
+          <p:cNvPr id="11" name="Text 8"/>
+          <p:cNvSpPr/>
+          <p:nvPr/>
+        </p:nvSpPr>
+        <p:spPr>
+          <a:xfrm>
+            <a:off x="10698480" y="6382512"/>
+            <a:ext cx="1188720" cy="365760"/>
+          </a:xfrm>
+          <a:prstGeom prst="rect">
+            <a:avLst/>
+          </a:prstGeom>
+          <a:noFill/>
+          <a:ln/>
+        </p:spPr>
+        <p:txBody>
+          <a:bodyPr wrap="square" rtlCol="0" anchor="ctr"/>
+          <a:lstStyle/>
+          <a:p>
+            <a:pPr algn="r" indent="0" marL="0">
+              <a:buNone/>
+            </a:pPr>
+            <a:r>
+              <a:rPr lang="en-US" sz="1000" dirty="0">
+                <a:solidFill>
+                  <a:srgbClr val="64748B"/>
+                </a:solidFill>
+                <a:latin typeface="Consolas" pitchFamily="34" charset="0"/>
+                <a:ea typeface="Consolas" pitchFamily="34" charset="-122"/>
+                <a:cs typeface="Consolas" pitchFamily="34" charset="-120"/>
+              </a:rPr>
+              <a:t>8 / 14</a:t>
+            </a:r>
+            <a:endParaRPr lang="en-US" sz="1000" dirty="0"/>
+          </a:p>
+        </p:txBody>
+      </p:sp>
+    </p:spTree>
+  </p:cSld>
+  <p:clrMapOvr>
+    <a:masterClrMapping/>
+  </p:clrMapOvr>
+</p:sld>
+</file>
+
+<file path=ppt/slides/slide9.xml><?xml version="1.0" encoding="utf-8"?>
+<p:sld xmlns:a="http://schemas.openxmlformats.org/drawingml/2006/main" xmlns:r="http://schemas.openxmlformats.org/officeDocument/2006/relationships" xmlns:p="http://schemas.openxmlformats.org/presentationml/2006/main">
+  <p:cSld name="Slide 9">
+    <p:bg>
+      <p:bgPr>
+        <a:solidFill>
+          <a:srgbClr val="0A0C12"/>
+        </a:solidFill>
+      </p:bgPr>
+    </p:bg>
+    <p:spTree>
+      <p:nvGrpSpPr>
+        <p:cNvPr id="1" name=""/>
+        <p:cNvGrpSpPr/>
+        <p:nvPr/>
+      </p:nvGrpSpPr>
+      <p:grpSpPr>
+        <a:xfrm>
+          <a:off x="0" y="0"/>
+          <a:ext cx="0" cy="0"/>
+          <a:chOff x="0" y="0"/>
+          <a:chExt cx="0" cy="0"/>
+        </a:xfrm>
+      </p:grpSpPr>
+      <p:sp>
+        <p:nvSpPr>
+          <p:cNvPr id="2" name="Shape 0"/>
+          <p:cNvSpPr/>
+          <p:nvPr/>
+        </p:nvSpPr>
+        <p:spPr>
+          <a:xfrm>
+            <a:off x="0" y="0"/>
+            <a:ext cx="7680960" cy="64008"/>
+          </a:xfrm>
+          <a:prstGeom prst="rect">
+            <a:avLst/>
+          </a:prstGeom>
+          <a:solidFill>
+            <a:srgbClr val="3B82F6"/>
+          </a:solidFill>
+          <a:ln/>
+        </p:spPr>
+      </p:sp>
+      <p:sp>
+        <p:nvSpPr>
+          <p:cNvPr id="3" name="Shape 1"/>
+          <p:cNvSpPr/>
+          <p:nvPr/>
+        </p:nvSpPr>
+        <p:spPr>
+          <a:xfrm>
+            <a:off x="7680960" y="0"/>
+            <a:ext cx="4510735" cy="64008"/>
+          </a:xfrm>
+          <a:prstGeom prst="rect">
+            <a:avLst/>
+          </a:prstGeom>
+          <a:solidFill>
+            <a:srgbClr val="06B6D4"/>
+          </a:solidFill>
+          <a:ln/>
+        </p:spPr>
+      </p:sp>
+      <p:sp>
+        <p:nvSpPr>
+          <p:cNvPr id="4" name="Text 2"/>
+          <p:cNvSpPr/>
+          <p:nvPr/>
+        </p:nvSpPr>
+        <p:spPr>
+          <a:xfrm>
+            <a:off x="822960" y="502920"/>
+            <a:ext cx="10515600" cy="365760"/>
+          </a:xfrm>
+          <a:prstGeom prst="rect">
+            <a:avLst/>
+          </a:prstGeom>
+          <a:noFill/>
+          <a:ln/>
+        </p:spPr>
+        <p:txBody>
+          <a:bodyPr wrap="square" rtlCol="0" anchor="ctr"/>
+          <a:lstStyle/>
+          <a:p>
+            <a:pPr indent="0" marL="0">
+              <a:buNone/>
+            </a:pPr>
+            <a:r>
+              <a:rPr lang="en-US" sz="1200" spc="300" kern="0" dirty="0">
+                <a:solidFill>
+                  <a:srgbClr val="06B6D4"/>
+                </a:solidFill>
+                <a:latin typeface="Consolas" pitchFamily="34" charset="0"/>
+                <a:ea typeface="Consolas" pitchFamily="34" charset="-122"/>
+                <a:cs typeface="Consolas" pitchFamily="34" charset="-120"/>
+              </a:rPr>
+              <a:t>GOVERNANCE</a:t>
+            </a:r>
+            <a:endParaRPr lang="en-US" sz="1200" dirty="0"/>
+          </a:p>
+        </p:txBody>
+      </p:sp>
+      <p:sp>
+        <p:nvSpPr>
+          <p:cNvPr id="5" name="Text 3"/>
+          <p:cNvSpPr/>
+          <p:nvPr/>
+        </p:nvSpPr>
+        <p:spPr>
+          <a:xfrm>
+            <a:off x="822960" y="914400"/>
+            <a:ext cx="10561320" cy="868680"/>
+          </a:xfrm>
+          <a:prstGeom prst="rect">
+            <a:avLst/>
+          </a:prstGeom>
+          <a:noFill/>
+          <a:ln/>
+        </p:spPr>
+        <p:txBody>
+          <a:bodyPr wrap="square" rtlCol="0" anchor="ctr"/>
+          <a:lstStyle/>
+          <a:p>
+            <a:pPr indent="0" marL="0">
+              <a:buNone/>
+            </a:pPr>
+            <a:r>
+              <a:rPr lang="en-US" sz="2700" b="1" dirty="0">
+                <a:solidFill>
+                  <a:srgbClr val="FFFFFF"/>
+                </a:solidFill>
+                <a:latin typeface="Segoe UI" pitchFamily="34" charset="0"/>
+                <a:ea typeface="Segoe UI" pitchFamily="34" charset="-122"/>
+                <a:cs typeface="Segoe UI" pitchFamily="34" charset="-120"/>
+              </a:rPr>
+              <a:t>One number, one definition, one owner</a:t>
+            </a:r>
+            <a:endParaRPr lang="en-US" sz="2700" dirty="0"/>
+          </a:p>
+        </p:txBody>
+      </p:sp>
+      <p:sp>
+        <p:nvSpPr>
+          <p:cNvPr id="6" name="Text 4"/>
+          <p:cNvSpPr/>
+          <p:nvPr/>
+        </p:nvSpPr>
+        <p:spPr>
+          <a:xfrm>
+            <a:off x="868680" y="2011680"/>
+            <a:ext cx="10424160" cy="3566160"/>
+          </a:xfrm>
+          <a:prstGeom prst="rect">
+            <a:avLst/>
+          </a:prstGeom>
+          <a:noFill/>
+          <a:ln/>
+        </p:spPr>
+        <p:txBody>
+          <a:bodyPr wrap="square" rtlCol="0" anchor="t"/>
+          <a:lstStyle/>
+          <a:p>
+            <a:pPr marL="342900" indent="-342900">
+              <a:lnSpc>
+                <a:spcPct val="112000"/>
+              </a:lnSpc>
+              <a:spcAft>
+                <a:spcPts val="900"/>
+              </a:spcAft>
+              <a:buSzPct val="100000"/>
+              <a:buChar char="▸"/>
+            </a:pPr>
+            <a:r>
+              <a:rPr lang="en-US" sz="1600" dirty="0">
+                <a:solidFill>
+                  <a:srgbClr val="CBD5E1"/>
+                </a:solidFill>
+                <a:latin typeface="Segoe UI" pitchFamily="34" charset="0"/>
+                <a:ea typeface="Segoe UI" pitchFamily="34" charset="-122"/>
+                <a:cs typeface="Segoe UI" pitchFamily="34" charset="-120"/>
+              </a:rPr>
+              <a:t>The definition registry was the most-used document: every KPI, its formula, its scope, its owner</a:t>
+            </a:r>
+            <a:endParaRPr lang="en-US" sz="1600" dirty="0"/>
+          </a:p>
+          <a:p>
+            <a:pPr marL="342900" indent="-342900">
+              <a:lnSpc>
+                <a:spcPct val="112000"/>
+              </a:lnSpc>
+              <a:spcAft>
+                <a:spcPts val="900"/>
+              </a:spcAft>
+              <a:buSzPct val="100000"/>
+              <a:buChar char="▸"/>
+            </a:pPr>
+            <a:r>
+              <a:rPr lang="en-US" sz="1600" dirty="0">
+                <a:solidFill>
+                  <a:srgbClr val="CBD5E1"/>
+                </a:solidFill>
+                <a:latin typeface="Segoe UI" pitchFamily="34" charset="0"/>
+                <a:ea typeface="Segoe UI" pitchFamily="34" charset="-122"/>
+                <a:cs typeface="Segoe UI" pitchFamily="34" charset="-120"/>
+              </a:rPr>
+              <a:t>When two markets disagreed on a returns figure, the fix was almost never technical</a:t>
+            </a:r>
+            <a:endParaRPr lang="en-US" sz="1600" dirty="0"/>
+          </a:p>
+          <a:p>
+            <a:pPr marL="342900" indent="-342900">
+              <a:lnSpc>
+                <a:spcPct val="112000"/>
+              </a:lnSpc>
+              <a:spcAft>
+                <a:spcPts val="900"/>
+              </a:spcAft>
+              <a:buSzPct val="100000"/>
+              <a:buChar char="▸"/>
+            </a:pPr>
+            <a:r>
+              <a:rPr lang="en-US" sz="1600" dirty="0">
+                <a:solidFill>
+                  <a:srgbClr val="CBD5E1"/>
+                </a:solidFill>
+                <a:latin typeface="Segoe UI" pitchFamily="34" charset="0"/>
+                <a:ea typeface="Segoe UI" pitchFamily="34" charset="-122"/>
+                <a:cs typeface="Segoe UI" pitchFamily="34" charset="-120"/>
+              </a:rPr>
+              <a:t>Most cross-country disputes were definitions wearing the costume of data problems</a:t>
+            </a:r>
+            <a:endParaRPr lang="en-US" sz="1600" dirty="0"/>
+          </a:p>
+          <a:p>
+            <a:pPr marL="342900" indent="-342900">
+              <a:lnSpc>
+                <a:spcPct val="112000"/>
+              </a:lnSpc>
+              <a:spcAft>
+                <a:spcPts val="900"/>
+              </a:spcAft>
+              <a:buSzPct val="100000"/>
+              <a:buChar char="▸"/>
+            </a:pPr>
+            <a:r>
+              <a:rPr lang="en-US" sz="1600" dirty="0">
+                <a:solidFill>
+                  <a:srgbClr val="CBD5E1"/>
+                </a:solidFill>
+                <a:latin typeface="Segoe UI" pitchFamily="34" charset="0"/>
+                <a:ea typeface="Segoe UI" pitchFamily="34" charset="-122"/>
+                <a:cs typeface="Segoe UI" pitchFamily="34" charset="-120"/>
+              </a:rPr>
+              <a:t>Local context matters per market - standardize definitions, never cultures</a:t>
+            </a:r>
+            <a:endParaRPr lang="en-US" sz="1600" dirty="0"/>
+          </a:p>
+          <a:p>
+            <a:pPr marL="342900" indent="-342900">
+              <a:lnSpc>
+                <a:spcPct val="112000"/>
+              </a:lnSpc>
+              <a:spcAft>
+                <a:spcPts val="900"/>
+              </a:spcAft>
+              <a:buSzPct val="100000"/>
+              <a:buChar char="▸"/>
+            </a:pPr>
+            <a:r>
+              <a:rPr lang="en-US" sz="1600" dirty="0">
+                <a:solidFill>
+                  <a:srgbClr val="CBD5E1"/>
+                </a:solidFill>
+                <a:latin typeface="Segoe UI" pitchFamily="34" charset="0"/>
+                <a:ea typeface="Segoe UI" pitchFamily="34" charset="-122"/>
+                <a:cs typeface="Segoe UI" pitchFamily="34" charset="-120"/>
+              </a:rPr>
+              <a:t>Trust in the numbers is earned row by row and destroyed by one unexplained figure</a:t>
+            </a:r>
+            <a:endParaRPr lang="en-US" sz="1600" dirty="0"/>
+          </a:p>
+        </p:txBody>
+      </p:sp>
+      <p:sp>
+        <p:nvSpPr>
+          <p:cNvPr id="7" name="Text 5"/>
+          <p:cNvSpPr/>
+          <p:nvPr/>
+        </p:nvSpPr>
+        <p:spPr>
+          <a:xfrm>
+            <a:off x="10698480" y="6382512"/>
+            <a:ext cx="1188720" cy="365760"/>
+          </a:xfrm>
+          <a:prstGeom prst="rect">
+            <a:avLst/>
+          </a:prstGeom>
+          <a:noFill/>
+          <a:ln/>
+        </p:spPr>
+        <p:txBody>
+          <a:bodyPr wrap="square" rtlCol="0" anchor="ctr"/>
+          <a:lstStyle/>
+          <a:p>
+            <a:pPr algn="r" indent="0" marL="0">
+              <a:buNone/>
+            </a:pPr>
+            <a:r>
+              <a:rPr lang="en-US" sz="1000" dirty="0">
+                <a:solidFill>
+                  <a:srgbClr val="64748B"/>
+                </a:solidFill>
+                <a:latin typeface="Consolas" pitchFamily="34" charset="0"/>
+                <a:ea typeface="Consolas" pitchFamily="34" charset="-122"/>
+                <a:cs typeface="Consolas" pitchFamily="34" charset="-120"/>
+              </a:rPr>
+              <a:t>9 / 14</a:t>
             </a:r>
             <a:endParaRPr lang="en-US" sz="1000" dirty="0"/>
           </a:p>

--- a/decks/ikea-retail-bi.pptx
+++ b/decks/ikea-retail-bi.pptx
@@ -160,7 +160,7 @@
               <a:lstStyle/>
               <a:p>
                 <a:pPr>
-                  <a:defRPr b="0" i="0" strike="noStrike" sz="1000" u="none">
+                  <a:defRPr b="0" i="0" strike="noStrike" sz="1800" u="none">
                     <a:solidFill>
                       <a:srgbClr val="E2E8F0"/>
                     </a:solidFill>
@@ -289,7 +289,7 @@
             <a:lstStyle/>
             <a:p>
               <a:pPr>
-                <a:defRPr b="0" i="0" strike="noStrike" sz="1000" u="none">
+                <a:defRPr b="0" i="0" strike="noStrike" sz="1800" u="none">
                   <a:solidFill>
                     <a:srgbClr val="E2E8F0"/>
                   </a:solidFill>
@@ -337,7 +337,7 @@
           <a:lstStyle/>
           <a:p>
             <a:pPr>
-              <a:defRPr sz="1100" b="0" i="0" u="none" strike="noStrike">
+              <a:defRPr sz="1800" b="0" i="0" u="none" strike="noStrike">
                 <a:solidFill>
                   <a:srgbClr val="94A3B8"/>
                 </a:solidFill>
@@ -357,6 +357,7 @@
         <c:axId val="2094734552"/>
         <c:scaling>
           <c:orientation val="minMax"/>
+          <c:min val="0"/>
         </c:scaling>
         <c:delete val="0"/>
         <c:axPos val="l"/>
@@ -389,7 +390,7 @@
           <a:lstStyle/>
           <a:p>
             <a:pPr>
-              <a:defRPr sz="1000" b="0" i="0" u="none" strike="noStrike">
+              <a:defRPr sz="1800" b="0" i="0" u="none" strike="noStrike">
                 <a:solidFill>
                   <a:srgbClr val="94A3B8"/>
                 </a:solidFill>
@@ -623,7 +624,7 @@
           <a:lstStyle/>
           <a:p>
             <a:pPr>
-              <a:defRPr sz="1100" b="0" i="0" u="none" strike="noStrike">
+              <a:defRPr sz="1800" b="0" i="0" u="none" strike="noStrike">
                 <a:solidFill>
                   <a:srgbClr val="94A3B8"/>
                 </a:solidFill>
@@ -643,6 +644,7 @@
         <c:axId val="2094734552"/>
         <c:scaling>
           <c:orientation val="minMax"/>
+          <c:min val="0"/>
         </c:scaling>
         <c:delete val="0"/>
         <c:axPos val="l"/>
@@ -675,7 +677,7 @@
           <a:lstStyle/>
           <a:p>
             <a:pPr>
-              <a:defRPr sz="1000" b="0" i="0" u="none" strike="noStrike">
+              <a:defRPr sz="1800" b="0" i="0" u="none" strike="noStrike">
                 <a:solidFill>
                   <a:srgbClr val="94A3B8"/>
                 </a:solidFill>
@@ -806,7 +808,7 @@
                 <a:lstStyle/>
                 <a:p>
                   <a:pPr>
-                    <a:defRPr sz="1000" b="0" i="0" u="none" strike="noStrike">
+                    <a:defRPr sz="1800" b="0" i="0" u="none" strike="noStrike">
                       <a:solidFill>
                         <a:srgbClr val="E2E8F0"/>
                       </a:solidFill>
@@ -831,7 +833,7 @@
                 <a:lstStyle/>
                 <a:p>
                   <a:pPr>
-                    <a:defRPr sz="1000" b="0" i="0" u="none" strike="noStrike">
+                    <a:defRPr sz="1800" b="0" i="0" u="none" strike="noStrike">
                       <a:solidFill>
                         <a:srgbClr val="E2E8F0"/>
                       </a:solidFill>
@@ -856,7 +858,7 @@
                 <a:lstStyle/>
                 <a:p>
                   <a:pPr>
-                    <a:defRPr sz="1000" b="0" i="0" u="none" strike="noStrike">
+                    <a:defRPr sz="1800" b="0" i="0" u="none" strike="noStrike">
                       <a:solidFill>
                         <a:srgbClr val="E2E8F0"/>
                       </a:solidFill>
@@ -881,7 +883,7 @@
                 <a:lstStyle/>
                 <a:p>
                   <a:pPr>
-                    <a:defRPr sz="1000" b="0" i="0" u="none" strike="noStrike">
+                    <a:defRPr sz="1800" b="0" i="0" u="none" strike="noStrike">
                       <a:solidFill>
                         <a:srgbClr val="E2E8F0"/>
                       </a:solidFill>
@@ -962,7 +964,7 @@
           </c:val>
         </c:ser>
         <c:firstSliceAng val="0"/>
-        <c:holeSize val="62"/>
+        <c:holeSize val="60"/>
       </c:doughnutChart>
       <c:spPr>
         <a:solidFill>
@@ -982,7 +984,7 @@
         <a:lstStyle/>
         <a:p>
           <a:pPr>
-            <a:defRPr sz="1100">
+            <a:defRPr sz="1800">
               <a:solidFill>
                 <a:srgbClr val="CBD5E1"/>
               </a:solidFill>
@@ -1409,7 +1411,7 @@
           <a:p>
             <a:r>
               <a:rPr lang="en-US" dirty="0"/>
-              <a:t/>
+              <a:t>Opening: introduce yourself and this deck, "Retail BI at Scale: Four Countries, One Datalake". | Transition: next up - "What this deck covers".</a:t>
             </a:r>
             <a:endParaRPr lang="en-US" dirty="0"/>
           </a:p>
@@ -1497,7 +1499,7 @@
           <a:p>
             <a:r>
               <a:rPr lang="en-US" dirty="0"/>
-              <a:t/>
+              <a:t>Key message: Reconciliation catches drift before leadership does | Insight: Reconciliation on every load drove unexplained mismatches steadily toward zero. | Talk track: Illustrative weekly trend of unexplained mismatches at reconciliation seams. | Transition: next up - "Most cross-market fights were definitions, not data".</a:t>
             </a:r>
             <a:endParaRPr lang="en-US" dirty="0"/>
           </a:p>
@@ -1585,7 +1587,7 @@
           <a:p>
             <a:r>
               <a:rPr lang="en-US" dirty="0"/>
-              <a:t/>
+              <a:t>Key message: Most cross-market fights were definitions, not data | Insight: The fix for most disputes was a registry entry, not a code change. | Talk track: Illustrative breakdown of cross-market data disagreements. | Transition: next up - "Scale breaks definitions before pipelines".</a:t>
             </a:r>
             <a:endParaRPr lang="en-US" dirty="0"/>
           </a:p>
@@ -1673,7 +1675,7 @@
           <a:p>
             <a:r>
               <a:rPr lang="en-US" dirty="0"/>
-              <a:t/>
+              <a:t>Key message: Scale breaks definitions before pipelines | Talk track: Multi-market BI is an agreement problem wearing a technology costume. | Transition: next up - "What four countries taught me about BI at scale".</a:t>
             </a:r>
             <a:endParaRPr lang="en-US" dirty="0"/>
           </a:p>
@@ -1761,7 +1763,7 @@
           <a:p>
             <a:r>
               <a:rPr lang="en-US" dirty="0"/>
-              <a:t/>
+              <a:t>Key message: What four countries taught me about BI at scale | Transition: next up - "Need BI your whole region can trust?".</a:t>
             </a:r>
             <a:endParaRPr lang="en-US" dirty="0"/>
           </a:p>
@@ -1849,7 +1851,7 @@
           <a:p>
             <a:r>
               <a:rPr lang="en-US" dirty="0"/>
-              <a:t/>
+              <a:t>Key message: Need BI your whole region can trust? | Transition: close with the call to action on the contact slide, invite questions.</a:t>
             </a:r>
             <a:endParaRPr lang="en-US" dirty="0"/>
           </a:p>
@@ -1937,7 +1939,7 @@
           <a:p>
             <a:r>
               <a:rPr lang="en-US" dirty="0"/>
-              <a:t/>
+              <a:t>Key message: What this deck covers | Agenda: The operation: regional BI across Indonesia, Taiwan, Hong Kong, and Macau; The stack: Alteryx pipelines, a SQL Server datalake, and Qlik Sense dashboards; The quality playbook: reconciliation at every seam, alarms on every source; Governance: one number, one definition, one owner; What four countries teach about scale | Transition: next up - "Four markets, one datalake, daily decisions".</a:t>
             </a:r>
             <a:endParaRPr lang="en-US" dirty="0"/>
           </a:p>
@@ -2025,7 +2027,7 @@
           <a:p>
             <a:r>
               <a:rPr lang="en-US" dirty="0"/>
-              <a:t/>
+              <a:t>Key message: Four markets, one datalake, daily decisions | Transition: next up - "The operation in numbers".</a:t>
             </a:r>
             <a:endParaRPr lang="en-US" dirty="0"/>
           </a:p>
@@ -2113,7 +2115,7 @@
           <a:p>
             <a:r>
               <a:rPr lang="en-US" dirty="0"/>
-              <a:t/>
+              <a:t>Key message: The operation in numbers | Talk track: Regional BI at this scale is an operations discipline as much as a technology stack. | Transition: next up - "Data moved through four layers before leadership saw it".</a:t>
             </a:r>
             <a:endParaRPr lang="en-US" dirty="0"/>
           </a:p>
@@ -2201,7 +2203,7 @@
           <a:p>
             <a:r>
               <a:rPr lang="en-US" dirty="0"/>
-              <a:t/>
+              <a:t>Key message: Data moved through four layers before leadership saw it | Talk track: Every seam between layers was a reconciliation point, not a leap of faith. | Transition: next up - "What I owned in the regional operation".</a:t>
             </a:r>
             <a:endParaRPr lang="en-US" dirty="0"/>
           </a:p>
@@ -2289,7 +2291,7 @@
           <a:p>
             <a:r>
               <a:rPr lang="en-US" dirty="0"/>
-              <a:t/>
+              <a:t>Key message: What I owned in the regional operation | Talk track: Five ownership areas, one thread: nothing was allowed to fail quietly. | Transition: next up - "Reconciliation is a property, not a project".</a:t>
             </a:r>
             <a:endParaRPr lang="en-US" dirty="0"/>
           </a:p>
@@ -2377,7 +2379,7 @@
           <a:p>
             <a:r>
               <a:rPr lang="en-US" dirty="0"/>
-              <a:t/>
+              <a:t>Key message: Reconciliation is a property, not a project | Transition: next up - "Most reporting incidents were not logic bugs".</a:t>
             </a:r>
             <a:endParaRPr lang="en-US" dirty="0"/>
           </a:p>
@@ -2465,7 +2467,7 @@
           <a:p>
             <a:r>
               <a:rPr lang="en-US" dirty="0"/>
-              <a:t/>
+              <a:t>Key message: Most reporting incidents were not logic bugs | Insight: Instrumenting schedules and definitions prevented more incidents than fixing code ever did. | Talk track: Illustrative distribution of reporting-incident causes across the operation. | Transition: next up - "One number, one definition, one owner".</a:t>
             </a:r>
             <a:endParaRPr lang="en-US" dirty="0"/>
           </a:p>
@@ -2553,7 +2555,7 @@
           <a:p>
             <a:r>
               <a:rPr lang="en-US" dirty="0"/>
-              <a:t/>
+              <a:t>Key message: One number, one definition, one owner | Transition: next up - "Reconciliation catches drift before leadership does".</a:t>
             </a:r>
             <a:endParaRPr lang="en-US" dirty="0"/>
           </a:p>
@@ -2974,7 +2976,7 @@
         </p:nvSpPr>
         <p:spPr>
           <a:xfrm>
-            <a:off x="822960" y="1783080"/>
+            <a:off x="822960" y="1737360"/>
             <a:ext cx="10515600" cy="457200"/>
           </a:xfrm>
           <a:prstGeom prst="rect">
@@ -2991,7 +2993,7 @@
               <a:buNone/>
             </a:pPr>
             <a:r>
-              <a:rPr lang="en-US" sz="1400" spc="400" kern="0" dirty="0">
+              <a:rPr lang="en-US" sz="1800" spc="400" kern="0" dirty="0">
                 <a:solidFill>
                   <a:srgbClr val="06B6D4"/>
                 </a:solidFill>
@@ -3001,7 +3003,7 @@
               </a:rPr>
               <a:t>CASE STUDY · RETAIL</a:t>
             </a:r>
-            <a:endParaRPr lang="en-US" sz="1400" dirty="0"/>
+            <a:endParaRPr lang="en-US" sz="1800" dirty="0"/>
           </a:p>
         </p:txBody>
       </p:sp>
@@ -3013,7 +3015,7 @@
         </p:nvSpPr>
         <p:spPr>
           <a:xfrm>
-            <a:off x="822960" y="2286000"/>
+            <a:off x="822960" y="2240280"/>
             <a:ext cx="10607040" cy="1691640"/>
           </a:xfrm>
           <a:prstGeom prst="rect">
@@ -3052,8 +3054,8 @@
         </p:nvSpPr>
         <p:spPr>
           <a:xfrm>
-            <a:off x="822960" y="4023360"/>
-            <a:ext cx="10058400" cy="777240"/>
+            <a:off x="822960" y="3977640"/>
+            <a:ext cx="10058400" cy="822960"/>
           </a:xfrm>
           <a:prstGeom prst="rect">
             <a:avLst/>
@@ -3069,7 +3071,7 @@
               <a:buNone/>
             </a:pPr>
             <a:r>
-              <a:rPr lang="en-US" sz="1700" dirty="0">
+              <a:rPr lang="en-US" sz="2000" dirty="0">
                 <a:solidFill>
                   <a:srgbClr val="94A3B8"/>
                 </a:solidFill>
@@ -3079,7 +3081,7 @@
               </a:rPr>
               <a:t>Four markets, one datalake, zero tolerance for numbers that quietly disagree</a:t>
             </a:r>
-            <a:endParaRPr lang="en-US" sz="1700" dirty="0"/>
+            <a:endParaRPr lang="en-US" sz="2000" dirty="0"/>
           </a:p>
         </p:txBody>
       </p:sp>
@@ -3091,7 +3093,7 @@
         </p:nvSpPr>
         <p:spPr>
           <a:xfrm>
-            <a:off x="822960" y="5440680"/>
+            <a:off x="822960" y="5349240"/>
             <a:ext cx="4114800" cy="0"/>
           </a:xfrm>
           <a:prstGeom prst="line">
@@ -3114,8 +3116,8 @@
         </p:nvSpPr>
         <p:spPr>
           <a:xfrm>
-            <a:off x="822960" y="5596128"/>
-            <a:ext cx="10058400" cy="457200"/>
+            <a:off x="822960" y="5532120"/>
+            <a:ext cx="10058400" cy="502920"/>
           </a:xfrm>
           <a:prstGeom prst="rect">
             <a:avLst/>
@@ -3131,9 +3133,9 @@
               <a:buNone/>
             </a:pPr>
             <a:r>
-              <a:rPr lang="en-US" sz="1250" dirty="0">
-                <a:solidFill>
-                  <a:srgbClr val="64748B"/>
+              <a:rPr lang="en-US" sz="1800" dirty="0">
+                <a:solidFill>
+                  <a:srgbClr val="8FA3BF"/>
                 </a:solidFill>
                 <a:latin typeface="Segoe UI" pitchFamily="34" charset="0"/>
                 <a:ea typeface="Segoe UI" pitchFamily="34" charset="-122"/>
@@ -3141,7 +3143,7 @@
               </a:rPr>
               <a:t>Rezalian Vatiady · Zalin Labs · 2026</a:t>
             </a:r>
-            <a:endParaRPr lang="en-US" sz="1250" dirty="0"/>
+            <a:endParaRPr lang="en-US" sz="1800" dirty="0"/>
           </a:p>
         </p:txBody>
       </p:sp>
@@ -3153,8 +3155,8 @@
         </p:nvSpPr>
         <p:spPr>
           <a:xfrm>
-            <a:off x="10698480" y="6382512"/>
-            <a:ext cx="1188720" cy="365760"/>
+            <a:off x="10698480" y="6309360"/>
+            <a:ext cx="1188720" cy="411480"/>
           </a:xfrm>
           <a:prstGeom prst="rect">
             <a:avLst/>
@@ -3170,9 +3172,9 @@
               <a:buNone/>
             </a:pPr>
             <a:r>
-              <a:rPr lang="en-US" sz="1000" dirty="0">
-                <a:solidFill>
-                  <a:srgbClr val="64748B"/>
+              <a:rPr lang="en-US" sz="1800" dirty="0">
+                <a:solidFill>
+                  <a:srgbClr val="8FA3BF"/>
                 </a:solidFill>
                 <a:latin typeface="Consolas" pitchFamily="34" charset="0"/>
                 <a:ea typeface="Consolas" pitchFamily="34" charset="-122"/>
@@ -3180,7 +3182,7 @@
               </a:rPr>
               <a:t>1 / 14</a:t>
             </a:r>
-            <a:endParaRPr lang="en-US" sz="1000" dirty="0"/>
+            <a:endParaRPr lang="en-US" sz="1800" dirty="0"/>
           </a:p>
         </p:txBody>
       </p:sp>
@@ -3264,8 +3266,8 @@
         </p:nvSpPr>
         <p:spPr>
           <a:xfrm>
-            <a:off x="822960" y="502920"/>
-            <a:ext cx="10515600" cy="365760"/>
+            <a:off x="822960" y="457200"/>
+            <a:ext cx="10515600" cy="411480"/>
           </a:xfrm>
           <a:prstGeom prst="rect">
             <a:avLst/>
@@ -3281,7 +3283,7 @@
               <a:buNone/>
             </a:pPr>
             <a:r>
-              <a:rPr lang="en-US" sz="1200" spc="300" kern="0" dirty="0">
+              <a:rPr lang="en-US" sz="1800" spc="300" kern="0" dirty="0">
                 <a:solidFill>
                   <a:srgbClr val="06B6D4"/>
                 </a:solidFill>
@@ -3291,7 +3293,7 @@
               </a:rPr>
               <a:t>QUALITY DRIFT</a:t>
             </a:r>
-            <a:endParaRPr lang="en-US" sz="1200" dirty="0"/>
+            <a:endParaRPr lang="en-US" sz="1800" dirty="0"/>
           </a:p>
         </p:txBody>
       </p:sp>
@@ -3342,7 +3344,7 @@
         </p:nvGraphicFramePr>
         <p:xfrm>
           <a:off x="822960" y="1874520"/>
-          <a:ext cx="10515600" cy="3337560"/>
+          <a:ext cx="10515600" cy="3246120"/>
         </p:xfrm>
         <a:graphic xmlns:a="http://schemas.openxmlformats.org/drawingml/2006/main">
           <a:graphicData uri="http://schemas.openxmlformats.org/drawingml/2006/chart">
@@ -3358,7 +3360,7 @@
         </p:nvSpPr>
         <p:spPr>
           <a:xfrm>
-            <a:off x="822960" y="5413248"/>
+            <a:off x="822960" y="5321808"/>
             <a:ext cx="10515600" cy="0"/>
           </a:xfrm>
           <a:prstGeom prst="line">
@@ -3381,8 +3383,8 @@
         </p:nvSpPr>
         <p:spPr>
           <a:xfrm>
-            <a:off x="822960" y="5504688"/>
-            <a:ext cx="10424160" cy="411480"/>
+            <a:off x="822960" y="5394960"/>
+            <a:ext cx="10424160" cy="502920"/>
           </a:xfrm>
           <a:prstGeom prst="rect">
             <a:avLst/>
@@ -3398,7 +3400,7 @@
               <a:buNone/>
             </a:pPr>
             <a:r>
-              <a:rPr lang="en-US" sz="1300" i="1" dirty="0">
+              <a:rPr lang="en-US" sz="1800" i="1" dirty="0">
                 <a:solidFill>
                   <a:srgbClr val="06B6D4"/>
                 </a:solidFill>
@@ -3408,7 +3410,7 @@
               </a:rPr>
               <a:t>→  Reconciliation on every load drove unexplained mismatches steadily toward zero.</a:t>
             </a:r>
-            <a:endParaRPr lang="en-US" sz="1300" dirty="0"/>
+            <a:endParaRPr lang="en-US" sz="1800" dirty="0"/>
           </a:p>
         </p:txBody>
       </p:sp>
@@ -3443,8 +3445,8 @@
         </p:nvSpPr>
         <p:spPr>
           <a:xfrm>
-            <a:off x="822960" y="6053328"/>
-            <a:ext cx="9692640" cy="457200"/>
+            <a:off x="822960" y="6035040"/>
+            <a:ext cx="10424160" cy="566928"/>
           </a:xfrm>
           <a:prstGeom prst="rect">
             <a:avLst/>
@@ -3460,9 +3462,9 @@
               <a:buNone/>
             </a:pPr>
             <a:r>
-              <a:rPr lang="en-US" sz="1150" dirty="0">
-                <a:solidFill>
-                  <a:srgbClr val="64748B"/>
+              <a:rPr lang="en-US" sz="1800" dirty="0">
+                <a:solidFill>
+                  <a:srgbClr val="8FA3BF"/>
                 </a:solidFill>
                 <a:latin typeface="Segoe UI" pitchFamily="34" charset="0"/>
                 <a:ea typeface="Segoe UI" pitchFamily="34" charset="-122"/>
@@ -3470,7 +3472,7 @@
               </a:rPr>
               <a:t>Illustrative weekly trend of unexplained mismatches at reconciliation seams.</a:t>
             </a:r>
-            <a:endParaRPr lang="en-US" sz="1150" dirty="0"/>
+            <a:endParaRPr lang="en-US" sz="1800" dirty="0"/>
           </a:p>
         </p:txBody>
       </p:sp>
@@ -3482,8 +3484,8 @@
         </p:nvSpPr>
         <p:spPr>
           <a:xfrm>
-            <a:off x="10698480" y="6382512"/>
-            <a:ext cx="1188720" cy="365760"/>
+            <a:off x="10698480" y="6309360"/>
+            <a:ext cx="1188720" cy="411480"/>
           </a:xfrm>
           <a:prstGeom prst="rect">
             <a:avLst/>
@@ -3499,9 +3501,9 @@
               <a:buNone/>
             </a:pPr>
             <a:r>
-              <a:rPr lang="en-US" sz="1000" dirty="0">
-                <a:solidFill>
-                  <a:srgbClr val="64748B"/>
+              <a:rPr lang="en-US" sz="1800" dirty="0">
+                <a:solidFill>
+                  <a:srgbClr val="8FA3BF"/>
                 </a:solidFill>
                 <a:latin typeface="Consolas" pitchFamily="34" charset="0"/>
                 <a:ea typeface="Consolas" pitchFamily="34" charset="-122"/>
@@ -3509,7 +3511,7 @@
               </a:rPr>
               <a:t>10 / 14</a:t>
             </a:r>
-            <a:endParaRPr lang="en-US" sz="1000" dirty="0"/>
+            <a:endParaRPr lang="en-US" sz="1800" dirty="0"/>
           </a:p>
         </p:txBody>
       </p:sp>
@@ -3593,8 +3595,8 @@
         </p:nvSpPr>
         <p:spPr>
           <a:xfrm>
-            <a:off x="822960" y="502920"/>
-            <a:ext cx="10515600" cy="365760"/>
+            <a:off x="822960" y="457200"/>
+            <a:ext cx="10515600" cy="411480"/>
           </a:xfrm>
           <a:prstGeom prst="rect">
             <a:avLst/>
@@ -3610,7 +3612,7 @@
               <a:buNone/>
             </a:pPr>
             <a:r>
-              <a:rPr lang="en-US" sz="1200" spc="300" kern="0" dirty="0">
+              <a:rPr lang="en-US" sz="1800" spc="300" kern="0" dirty="0">
                 <a:solidFill>
                   <a:srgbClr val="06B6D4"/>
                 </a:solidFill>
@@ -3620,7 +3622,7 @@
               </a:rPr>
               <a:t>WHERE DISAGREEMENTS CAME FROM</a:t>
             </a:r>
-            <a:endParaRPr lang="en-US" sz="1200" dirty="0"/>
+            <a:endParaRPr lang="en-US" sz="1800" dirty="0"/>
           </a:p>
         </p:txBody>
       </p:sp>
@@ -3670,8 +3672,8 @@
           <p:nvPr/>
         </p:nvGraphicFramePr>
         <p:xfrm>
-          <a:off x="822960" y="1874520"/>
-          <a:ext cx="10515600" cy="3337560"/>
+          <a:off x="822960" y="1783080"/>
+          <a:ext cx="10515600" cy="3383280"/>
         </p:xfrm>
         <a:graphic xmlns:a="http://schemas.openxmlformats.org/drawingml/2006/main">
           <a:graphicData uri="http://schemas.openxmlformats.org/drawingml/2006/chart">
@@ -3687,7 +3689,7 @@
         </p:nvSpPr>
         <p:spPr>
           <a:xfrm>
-            <a:off x="822960" y="5413248"/>
+            <a:off x="822960" y="5321808"/>
             <a:ext cx="10515600" cy="0"/>
           </a:xfrm>
           <a:prstGeom prst="line">
@@ -3710,8 +3712,8 @@
         </p:nvSpPr>
         <p:spPr>
           <a:xfrm>
-            <a:off x="822960" y="5504688"/>
-            <a:ext cx="10424160" cy="411480"/>
+            <a:off x="822960" y="5394960"/>
+            <a:ext cx="10424160" cy="502920"/>
           </a:xfrm>
           <a:prstGeom prst="rect">
             <a:avLst/>
@@ -3727,7 +3729,7 @@
               <a:buNone/>
             </a:pPr>
             <a:r>
-              <a:rPr lang="en-US" sz="1300" i="1" dirty="0">
+              <a:rPr lang="en-US" sz="1800" i="1" dirty="0">
                 <a:solidFill>
                   <a:srgbClr val="06B6D4"/>
                 </a:solidFill>
@@ -3737,7 +3739,7 @@
               </a:rPr>
               <a:t>→  The fix for most disputes was a registry entry, not a code change.</a:t>
             </a:r>
-            <a:endParaRPr lang="en-US" sz="1300" dirty="0"/>
+            <a:endParaRPr lang="en-US" sz="1800" dirty="0"/>
           </a:p>
         </p:txBody>
       </p:sp>
@@ -3772,8 +3774,8 @@
         </p:nvSpPr>
         <p:spPr>
           <a:xfrm>
-            <a:off x="822960" y="6053328"/>
-            <a:ext cx="9692640" cy="457200"/>
+            <a:off x="822960" y="6035040"/>
+            <a:ext cx="10424160" cy="566928"/>
           </a:xfrm>
           <a:prstGeom prst="rect">
             <a:avLst/>
@@ -3789,9 +3791,9 @@
               <a:buNone/>
             </a:pPr>
             <a:r>
-              <a:rPr lang="en-US" sz="1150" dirty="0">
-                <a:solidFill>
-                  <a:srgbClr val="64748B"/>
+              <a:rPr lang="en-US" sz="1800" dirty="0">
+                <a:solidFill>
+                  <a:srgbClr val="8FA3BF"/>
                 </a:solidFill>
                 <a:latin typeface="Segoe UI" pitchFamily="34" charset="0"/>
                 <a:ea typeface="Segoe UI" pitchFamily="34" charset="-122"/>
@@ -3799,7 +3801,7 @@
               </a:rPr>
               <a:t>Illustrative breakdown of cross-market data disagreements.</a:t>
             </a:r>
-            <a:endParaRPr lang="en-US" sz="1150" dirty="0"/>
+            <a:endParaRPr lang="en-US" sz="1800" dirty="0"/>
           </a:p>
         </p:txBody>
       </p:sp>
@@ -3811,8 +3813,8 @@
         </p:nvSpPr>
         <p:spPr>
           <a:xfrm>
-            <a:off x="10698480" y="6382512"/>
-            <a:ext cx="1188720" cy="365760"/>
+            <a:off x="10698480" y="6309360"/>
+            <a:ext cx="1188720" cy="411480"/>
           </a:xfrm>
           <a:prstGeom prst="rect">
             <a:avLst/>
@@ -3828,9 +3830,9 @@
               <a:buNone/>
             </a:pPr>
             <a:r>
-              <a:rPr lang="en-US" sz="1000" dirty="0">
-                <a:solidFill>
-                  <a:srgbClr val="64748B"/>
+              <a:rPr lang="en-US" sz="1800" dirty="0">
+                <a:solidFill>
+                  <a:srgbClr val="8FA3BF"/>
                 </a:solidFill>
                 <a:latin typeface="Consolas" pitchFamily="34" charset="0"/>
                 <a:ea typeface="Consolas" pitchFamily="34" charset="-122"/>
@@ -3838,7 +3840,7 @@
               </a:rPr>
               <a:t>11 / 14</a:t>
             </a:r>
-            <a:endParaRPr lang="en-US" sz="1000" dirty="0"/>
+            <a:endParaRPr lang="en-US" sz="1800" dirty="0"/>
           </a:p>
         </p:txBody>
       </p:sp>
@@ -3922,8 +3924,8 @@
         </p:nvSpPr>
         <p:spPr>
           <a:xfrm>
-            <a:off x="822960" y="502920"/>
-            <a:ext cx="10515600" cy="365760"/>
+            <a:off x="822960" y="457200"/>
+            <a:ext cx="10515600" cy="411480"/>
           </a:xfrm>
           <a:prstGeom prst="rect">
             <a:avLst/>
@@ -3939,7 +3941,7 @@
               <a:buNone/>
             </a:pPr>
             <a:r>
-              <a:rPr lang="en-US" sz="1200" spc="300" kern="0" dirty="0">
+              <a:rPr lang="en-US" sz="1800" spc="300" kern="0" dirty="0">
                 <a:solidFill>
                   <a:srgbClr val="06B6D4"/>
                 </a:solidFill>
@@ -3949,7 +3951,7 @@
               </a:rPr>
               <a:t>THE PLAYBOOK</a:t>
             </a:r>
-            <a:endParaRPr lang="en-US" sz="1200" dirty="0"/>
+            <a:endParaRPr lang="en-US" sz="1800" dirty="0"/>
           </a:p>
         </p:txBody>
       </p:sp>
@@ -4000,12 +4002,12 @@
         </p:nvSpPr>
         <p:spPr>
           <a:xfrm>
-            <a:off x="822960" y="2011680"/>
-            <a:ext cx="5074920" cy="3611880"/>
+            <a:off x="822960" y="1965960"/>
+            <a:ext cx="5074920" cy="3657600"/>
           </a:xfrm>
           <a:prstGeom prst="roundRect">
             <a:avLst>
-              <a:gd name="adj" fmla="val 2025"/>
+              <a:gd name="adj" fmla="val 2000"/>
             </a:avLst>
           </a:prstGeom>
           <a:solidFill>
@@ -4027,8 +4029,8 @@
         </p:nvSpPr>
         <p:spPr>
           <a:xfrm>
-            <a:off x="1097280" y="2240280"/>
-            <a:ext cx="4526280" cy="502920"/>
+            <a:off x="1097280" y="2194560"/>
+            <a:ext cx="4526280" cy="548640"/>
           </a:xfrm>
           <a:prstGeom prst="rect">
             <a:avLst/>
@@ -4044,7 +4046,7 @@
               <a:buNone/>
             </a:pPr>
             <a:r>
-              <a:rPr lang="en-US" sz="1650" b="1" dirty="0">
+              <a:rPr lang="en-US" sz="2000" b="1" dirty="0">
                 <a:solidFill>
                   <a:srgbClr val="06B6D4"/>
                 </a:solidFill>
@@ -4054,7 +4056,7 @@
               </a:rPr>
               <a:t>Without a quality playbook</a:t>
             </a:r>
-            <a:endParaRPr lang="en-US" sz="1650" dirty="0"/>
+            <a:endParaRPr lang="en-US" sz="2000" dirty="0"/>
           </a:p>
         </p:txBody>
       </p:sp>
@@ -4090,7 +4092,7 @@
               <a:buChar char="▸"/>
             </a:pPr>
             <a:r>
-              <a:rPr lang="en-US" sz="1280" dirty="0">
+              <a:rPr lang="en-US" sz="1800" dirty="0">
                 <a:solidFill>
                   <a:srgbClr val="CBD5E1"/>
                 </a:solidFill>
@@ -4100,7 +4102,7 @@
               </a:rPr>
               <a:t>Numbers drift between datalake and store systems until someone notices in a meeting</a:t>
             </a:r>
-            <a:endParaRPr lang="en-US" sz="1280" dirty="0"/>
+            <a:endParaRPr lang="en-US" sz="1800" dirty="0"/>
           </a:p>
           <a:p>
             <a:pPr marL="342900" indent="-342900">
@@ -4114,7 +4116,7 @@
               <a:buChar char="▸"/>
             </a:pPr>
             <a:r>
-              <a:rPr lang="en-US" sz="1280" dirty="0">
+              <a:rPr lang="en-US" sz="1800" dirty="0">
                 <a:solidFill>
                   <a:srgbClr val="CBD5E1"/>
                 </a:solidFill>
@@ -4124,7 +4126,7 @@
               </a:rPr>
               <a:t>Schedules die silently and reports quietly show stale data</a:t>
             </a:r>
-            <a:endParaRPr lang="en-US" sz="1280" dirty="0"/>
+            <a:endParaRPr lang="en-US" sz="1800" dirty="0"/>
           </a:p>
           <a:p>
             <a:pPr marL="342900" indent="-342900">
@@ -4138,7 +4140,7 @@
               <a:buChar char="▸"/>
             </a:pPr>
             <a:r>
-              <a:rPr lang="en-US" sz="1280" dirty="0">
+              <a:rPr lang="en-US" sz="1800" dirty="0">
                 <a:solidFill>
                   <a:srgbClr val="CBD5E1"/>
                 </a:solidFill>
@@ -4148,7 +4150,7 @@
               </a:rPr>
               <a:t>Discrepancies float as tickets with no accountable owner</a:t>
             </a:r>
-            <a:endParaRPr lang="en-US" sz="1280" dirty="0"/>
+            <a:endParaRPr lang="en-US" sz="1800" dirty="0"/>
           </a:p>
         </p:txBody>
       </p:sp>
@@ -4160,12 +4162,12 @@
         </p:nvSpPr>
         <p:spPr>
           <a:xfrm>
-            <a:off x="6291072" y="2011680"/>
-            <a:ext cx="5074920" cy="3611880"/>
+            <a:off x="6291072" y="1965960"/>
+            <a:ext cx="5074920" cy="3657600"/>
           </a:xfrm>
           <a:prstGeom prst="roundRect">
             <a:avLst>
-              <a:gd name="adj" fmla="val 2025"/>
+              <a:gd name="adj" fmla="val 2000"/>
             </a:avLst>
           </a:prstGeom>
           <a:solidFill>
@@ -4187,8 +4189,8 @@
         </p:nvSpPr>
         <p:spPr>
           <a:xfrm>
-            <a:off x="6565392" y="2240280"/>
-            <a:ext cx="4526280" cy="502920"/>
+            <a:off x="6565392" y="2194560"/>
+            <a:ext cx="4526280" cy="548640"/>
           </a:xfrm>
           <a:prstGeom prst="rect">
             <a:avLst/>
@@ -4204,7 +4206,7 @@
               <a:buNone/>
             </a:pPr>
             <a:r>
-              <a:rPr lang="en-US" sz="1650" b="1" dirty="0">
+              <a:rPr lang="en-US" sz="2000" b="1" dirty="0">
                 <a:solidFill>
                   <a:srgbClr val="93C5FD"/>
                 </a:solidFill>
@@ -4214,7 +4216,7 @@
               </a:rPr>
               <a:t>With the playbook I ran</a:t>
             </a:r>
-            <a:endParaRPr lang="en-US" sz="1650" dirty="0"/>
+            <a:endParaRPr lang="en-US" sz="2000" dirty="0"/>
           </a:p>
         </p:txBody>
       </p:sp>
@@ -4250,7 +4252,7 @@
               <a:buChar char="▸"/>
             </a:pPr>
             <a:r>
-              <a:rPr lang="en-US" sz="1280" dirty="0">
+              <a:rPr lang="en-US" sz="1800" dirty="0">
                 <a:solidFill>
                   <a:srgbClr val="CBD5E1"/>
                 </a:solidFill>
@@ -4260,7 +4262,7 @@
               </a:rPr>
               <a:t>Reconciliation at every load, with named owners on both sides of every mismatch</a:t>
             </a:r>
-            <a:endParaRPr lang="en-US" sz="1280" dirty="0"/>
+            <a:endParaRPr lang="en-US" sz="1800" dirty="0"/>
           </a:p>
           <a:p>
             <a:pPr marL="342900" indent="-342900">
@@ -4274,7 +4276,7 @@
               <a:buChar char="▸"/>
             </a:pPr>
             <a:r>
-              <a:rPr lang="en-US" sz="1280" dirty="0">
+              <a:rPr lang="en-US" sz="1800" dirty="0">
                 <a:solidFill>
                   <a:srgbClr val="CBD5E1"/>
                 </a:solidFill>
@@ -4284,7 +4286,7 @@
               </a:rPr>
               <a:t>Freshness alarms fire before stale numbers reach leadership</a:t>
             </a:r>
-            <a:endParaRPr lang="en-US" sz="1280" dirty="0"/>
+            <a:endParaRPr lang="en-US" sz="1800" dirty="0"/>
           </a:p>
           <a:p>
             <a:pPr marL="342900" indent="-342900">
@@ -4298,7 +4300,7 @@
               <a:buChar char="▸"/>
             </a:pPr>
             <a:r>
-              <a:rPr lang="en-US" sz="1280" dirty="0">
+              <a:rPr lang="en-US" sz="1800" dirty="0">
                 <a:solidFill>
                   <a:srgbClr val="CBD5E1"/>
                 </a:solidFill>
@@ -4308,7 +4310,7 @@
               </a:rPr>
               <a:t>Quirks and runbooks documented where the work actually happens</a:t>
             </a:r>
-            <a:endParaRPr lang="en-US" sz="1280" dirty="0"/>
+            <a:endParaRPr lang="en-US" sz="1800" dirty="0"/>
           </a:p>
         </p:txBody>
       </p:sp>
@@ -4343,8 +4345,8 @@
         </p:nvSpPr>
         <p:spPr>
           <a:xfrm>
-            <a:off x="822960" y="6053328"/>
-            <a:ext cx="9692640" cy="457200"/>
+            <a:off x="822960" y="6035040"/>
+            <a:ext cx="10424160" cy="566928"/>
           </a:xfrm>
           <a:prstGeom prst="rect">
             <a:avLst/>
@@ -4360,9 +4362,9 @@
               <a:buNone/>
             </a:pPr>
             <a:r>
-              <a:rPr lang="en-US" sz="1150" dirty="0">
-                <a:solidFill>
-                  <a:srgbClr val="64748B"/>
+              <a:rPr lang="en-US" sz="1800" dirty="0">
+                <a:solidFill>
+                  <a:srgbClr val="8FA3BF"/>
                 </a:solidFill>
                 <a:latin typeface="Segoe UI" pitchFamily="34" charset="0"/>
                 <a:ea typeface="Segoe UI" pitchFamily="34" charset="-122"/>
@@ -4370,7 +4372,7 @@
               </a:rPr>
               <a:t>Multi-market BI is an agreement problem wearing a technology costume.</a:t>
             </a:r>
-            <a:endParaRPr lang="en-US" sz="1150" dirty="0"/>
+            <a:endParaRPr lang="en-US" sz="1800" dirty="0"/>
           </a:p>
         </p:txBody>
       </p:sp>
@@ -4382,8 +4384,8 @@
         </p:nvSpPr>
         <p:spPr>
           <a:xfrm>
-            <a:off x="10698480" y="6382512"/>
-            <a:ext cx="1188720" cy="365760"/>
+            <a:off x="10698480" y="6309360"/>
+            <a:ext cx="1188720" cy="411480"/>
           </a:xfrm>
           <a:prstGeom prst="rect">
             <a:avLst/>
@@ -4399,9 +4401,9 @@
               <a:buNone/>
             </a:pPr>
             <a:r>
-              <a:rPr lang="en-US" sz="1000" dirty="0">
-                <a:solidFill>
-                  <a:srgbClr val="64748B"/>
+              <a:rPr lang="en-US" sz="1800" dirty="0">
+                <a:solidFill>
+                  <a:srgbClr val="8FA3BF"/>
                 </a:solidFill>
                 <a:latin typeface="Consolas" pitchFamily="34" charset="0"/>
                 <a:ea typeface="Consolas" pitchFamily="34" charset="-122"/>
@@ -4409,7 +4411,7 @@
               </a:rPr>
               <a:t>12 / 14</a:t>
             </a:r>
-            <a:endParaRPr lang="en-US" sz="1000" dirty="0"/>
+            <a:endParaRPr lang="en-US" sz="1800" dirty="0"/>
           </a:p>
         </p:txBody>
       </p:sp>
@@ -4493,8 +4495,8 @@
         </p:nvSpPr>
         <p:spPr>
           <a:xfrm>
-            <a:off x="822960" y="502920"/>
-            <a:ext cx="10515600" cy="365760"/>
+            <a:off x="822960" y="457200"/>
+            <a:ext cx="10515600" cy="411480"/>
           </a:xfrm>
           <a:prstGeom prst="rect">
             <a:avLst/>
@@ -4510,7 +4512,7 @@
               <a:buNone/>
             </a:pPr>
             <a:r>
-              <a:rPr lang="en-US" sz="1200" spc="300" kern="0" dirty="0">
+              <a:rPr lang="en-US" sz="1800" spc="300" kern="0" dirty="0">
                 <a:solidFill>
                   <a:srgbClr val="06B6D4"/>
                 </a:solidFill>
@@ -4520,7 +4522,7 @@
               </a:rPr>
               <a:t>LESSONS</a:t>
             </a:r>
-            <a:endParaRPr lang="en-US" sz="1200" dirty="0"/>
+            <a:endParaRPr lang="en-US" sz="1800" dirty="0"/>
           </a:p>
         </p:txBody>
       </p:sp>
@@ -4571,8 +4573,8 @@
         </p:nvSpPr>
         <p:spPr>
           <a:xfrm>
-            <a:off x="868680" y="2011680"/>
-            <a:ext cx="10424160" cy="3566160"/>
+            <a:off x="868680" y="1965960"/>
+            <a:ext cx="10424160" cy="3840480"/>
           </a:xfrm>
           <a:prstGeom prst="rect">
             <a:avLst/>
@@ -4595,7 +4597,7 @@
               <a:buChar char="▸"/>
             </a:pPr>
             <a:r>
-              <a:rPr lang="en-US" sz="1600" dirty="0">
+              <a:rPr lang="en-US" sz="2000" dirty="0">
                 <a:solidFill>
                   <a:srgbClr val="CBD5E1"/>
                 </a:solidFill>
@@ -4605,7 +4607,7 @@
               </a:rPr>
               <a:t>One number, one definition - governance outvalues every technical optimization</a:t>
             </a:r>
-            <a:endParaRPr lang="en-US" sz="1600" dirty="0"/>
+            <a:endParaRPr lang="en-US" sz="2000" dirty="0"/>
           </a:p>
           <a:p>
             <a:pPr marL="342900" indent="-342900">
@@ -4619,7 +4621,7 @@
               <a:buChar char="▸"/>
             </a:pPr>
             <a:r>
-              <a:rPr lang="en-US" sz="1600" dirty="0">
+              <a:rPr lang="en-US" sz="2000" dirty="0">
                 <a:solidFill>
                   <a:srgbClr val="CBD5E1"/>
                 </a:solidFill>
@@ -4629,7 +4631,7 @@
               </a:rPr>
               <a:t>Instrument pipelines, because silent failure is the default state</a:t>
             </a:r>
-            <a:endParaRPr lang="en-US" sz="1600" dirty="0"/>
+            <a:endParaRPr lang="en-US" sz="2000" dirty="0"/>
           </a:p>
           <a:p>
             <a:pPr marL="342900" indent="-342900">
@@ -4643,7 +4645,7 @@
               <a:buChar char="▸"/>
             </a:pPr>
             <a:r>
-              <a:rPr lang="en-US" sz="1600" dirty="0">
+              <a:rPr lang="en-US" sz="2000" dirty="0">
                 <a:solidFill>
                   <a:srgbClr val="CBD5E1"/>
                 </a:solidFill>
@@ -4653,7 +4655,7 @@
               </a:rPr>
               <a:t>Collaboration with Regional IT is a feature of the system, not overhead</a:t>
             </a:r>
-            <a:endParaRPr lang="en-US" sz="1600" dirty="0"/>
+            <a:endParaRPr lang="en-US" sz="2000" dirty="0"/>
           </a:p>
           <a:p>
             <a:pPr marL="342900" indent="-342900">
@@ -4667,7 +4669,7 @@
               <a:buChar char="▸"/>
             </a:pPr>
             <a:r>
-              <a:rPr lang="en-US" sz="1600" dirty="0">
+              <a:rPr lang="en-US" sz="2000" dirty="0">
                 <a:solidFill>
                   <a:srgbClr val="CBD5E1"/>
                 </a:solidFill>
@@ -4677,7 +4679,7 @@
               </a:rPr>
               <a:t>Standardize definitions across markets; respect the cultures that use them</a:t>
             </a:r>
-            <a:endParaRPr lang="en-US" sz="1600" dirty="0"/>
+            <a:endParaRPr lang="en-US" sz="2000" dirty="0"/>
           </a:p>
         </p:txBody>
       </p:sp>
@@ -4689,8 +4691,8 @@
         </p:nvSpPr>
         <p:spPr>
           <a:xfrm>
-            <a:off x="10698480" y="6382512"/>
-            <a:ext cx="1188720" cy="365760"/>
+            <a:off x="10698480" y="6309360"/>
+            <a:ext cx="1188720" cy="411480"/>
           </a:xfrm>
           <a:prstGeom prst="rect">
             <a:avLst/>
@@ -4706,9 +4708,9 @@
               <a:buNone/>
             </a:pPr>
             <a:r>
-              <a:rPr lang="en-US" sz="1000" dirty="0">
-                <a:solidFill>
-                  <a:srgbClr val="64748B"/>
+              <a:rPr lang="en-US" sz="1800" dirty="0">
+                <a:solidFill>
+                  <a:srgbClr val="8FA3BF"/>
                 </a:solidFill>
                 <a:latin typeface="Consolas" pitchFamily="34" charset="0"/>
                 <a:ea typeface="Consolas" pitchFamily="34" charset="-122"/>
@@ -4716,7 +4718,7 @@
               </a:rPr>
               <a:t>13 / 14</a:t>
             </a:r>
-            <a:endParaRPr lang="en-US" sz="1000" dirty="0"/>
+            <a:endParaRPr lang="en-US" sz="1800" dirty="0"/>
           </a:p>
         </p:txBody>
       </p:sp>
@@ -4800,8 +4802,8 @@
         </p:nvSpPr>
         <p:spPr>
           <a:xfrm>
-            <a:off x="822960" y="1417320"/>
-            <a:ext cx="10515600" cy="411480"/>
+            <a:off x="822960" y="1371600"/>
+            <a:ext cx="10515600" cy="457200"/>
           </a:xfrm>
           <a:prstGeom prst="rect">
             <a:avLst/>
@@ -4817,7 +4819,7 @@
               <a:buNone/>
             </a:pPr>
             <a:r>
-              <a:rPr lang="en-US" sz="1300" spc="400" kern="0" dirty="0">
+              <a:rPr lang="en-US" sz="1800" spc="400" kern="0" dirty="0">
                 <a:solidFill>
                   <a:srgbClr val="06B6D4"/>
                 </a:solidFill>
@@ -4827,7 +4829,7 @@
               </a:rPr>
               <a:t>WORK WITH ME</a:t>
             </a:r>
-            <a:endParaRPr lang="en-US" sz="1300" dirty="0"/>
+            <a:endParaRPr lang="en-US" sz="1800" dirty="0"/>
           </a:p>
         </p:txBody>
       </p:sp>
@@ -4839,7 +4841,7 @@
         </p:nvSpPr>
         <p:spPr>
           <a:xfrm>
-            <a:off x="822960" y="1920240"/>
+            <a:off x="822960" y="1874520"/>
             <a:ext cx="10515600" cy="1371600"/>
           </a:xfrm>
           <a:prstGeom prst="rect">
@@ -4878,8 +4880,8 @@
         </p:nvSpPr>
         <p:spPr>
           <a:xfrm>
-            <a:off x="2011680" y="3429000"/>
-            <a:ext cx="8183880" cy="1554480"/>
+            <a:off x="2011680" y="3383280"/>
+            <a:ext cx="8183880" cy="1691640"/>
           </a:xfrm>
           <a:prstGeom prst="rect">
             <a:avLst/>
@@ -4898,7 +4900,7 @@
               <a:buNone/>
             </a:pPr>
             <a:r>
-              <a:rPr lang="en-US" sz="1500" dirty="0">
+              <a:rPr lang="en-US" sz="2000" dirty="0">
                 <a:solidFill>
                   <a:srgbClr val="CBD5E1"/>
                 </a:solidFill>
@@ -4915,7 +4917,7 @@
               <a:buNone/>
             </a:pPr>
             <a:r>
-              <a:rPr lang="en-US" sz="1500" dirty="0">
+              <a:rPr lang="en-US" sz="2000" dirty="0">
                 <a:solidFill>
                   <a:srgbClr val="CBD5E1"/>
                 </a:solidFill>
@@ -4932,7 +4934,7 @@
               <a:buNone/>
             </a:pPr>
             <a:r>
-              <a:rPr lang="en-US" sz="1500" dirty="0">
+              <a:rPr lang="en-US" sz="2000" dirty="0">
                 <a:solidFill>
                   <a:srgbClr val="CBD5E1"/>
                 </a:solidFill>
@@ -4942,7 +4944,7 @@
               </a:rPr>
               <a:t>Available for freelance and contract engagements worldwide</a:t>
             </a:r>
-            <a:endParaRPr lang="en-US" sz="1500" dirty="0"/>
+            <a:endParaRPr lang="en-US" sz="2000" dirty="0"/>
           </a:p>
         </p:txBody>
       </p:sp>
@@ -4977,8 +4979,8 @@
         </p:nvSpPr>
         <p:spPr>
           <a:xfrm>
-            <a:off x="822960" y="5376672"/>
-            <a:ext cx="10515600" cy="457200"/>
+            <a:off x="822960" y="5349240"/>
+            <a:ext cx="10515600" cy="502920"/>
           </a:xfrm>
           <a:prstGeom prst="rect">
             <a:avLst/>
@@ -4994,7 +4996,7 @@
               <a:buNone/>
             </a:pPr>
             <a:r>
-              <a:rPr lang="en-US" sz="1350" b="1" dirty="0">
+              <a:rPr lang="en-US" sz="1800" b="1" dirty="0">
                 <a:solidFill>
                   <a:srgbClr val="06B6D4"/>
                 </a:solidFill>
@@ -5004,7 +5006,7 @@
               </a:rPr>
               <a:t>rezalianvatiady.github.io · github.com/rezalianvatiady</a:t>
             </a:r>
-            <a:endParaRPr lang="en-US" sz="1350" dirty="0"/>
+            <a:endParaRPr lang="en-US" sz="1800" dirty="0"/>
           </a:p>
         </p:txBody>
       </p:sp>
@@ -5016,8 +5018,8 @@
         </p:nvSpPr>
         <p:spPr>
           <a:xfrm>
-            <a:off x="10698480" y="6382512"/>
-            <a:ext cx="1188720" cy="365760"/>
+            <a:off x="10698480" y="6309360"/>
+            <a:ext cx="1188720" cy="411480"/>
           </a:xfrm>
           <a:prstGeom prst="rect">
             <a:avLst/>
@@ -5033,9 +5035,9 @@
               <a:buNone/>
             </a:pPr>
             <a:r>
-              <a:rPr lang="en-US" sz="1000" dirty="0">
-                <a:solidFill>
-                  <a:srgbClr val="64748B"/>
+              <a:rPr lang="en-US" sz="1800" dirty="0">
+                <a:solidFill>
+                  <a:srgbClr val="8FA3BF"/>
                 </a:solidFill>
                 <a:latin typeface="Consolas" pitchFamily="34" charset="0"/>
                 <a:ea typeface="Consolas" pitchFamily="34" charset="-122"/>
@@ -5043,7 +5045,7 @@
               </a:rPr>
               <a:t>14 / 14</a:t>
             </a:r>
-            <a:endParaRPr lang="en-US" sz="1000" dirty="0"/>
+            <a:endParaRPr lang="en-US" sz="1800" dirty="0"/>
           </a:p>
         </p:txBody>
       </p:sp>
@@ -5127,8 +5129,8 @@
         </p:nvSpPr>
         <p:spPr>
           <a:xfrm>
-            <a:off x="822960" y="502920"/>
-            <a:ext cx="10515600" cy="365760"/>
+            <a:off x="822960" y="457200"/>
+            <a:ext cx="10515600" cy="411480"/>
           </a:xfrm>
           <a:prstGeom prst="rect">
             <a:avLst/>
@@ -5144,7 +5146,7 @@
               <a:buNone/>
             </a:pPr>
             <a:r>
-              <a:rPr lang="en-US" sz="1200" spc="300" kern="0" dirty="0">
+              <a:rPr lang="en-US" sz="1800" spc="300" kern="0" dirty="0">
                 <a:solidFill>
                   <a:srgbClr val="06B6D4"/>
                 </a:solidFill>
@@ -5154,7 +5156,7 @@
               </a:rPr>
               <a:t>AGENDA</a:t>
             </a:r>
-            <a:endParaRPr lang="en-US" sz="1200" dirty="0"/>
+            <a:endParaRPr lang="en-US" sz="1800" dirty="0"/>
           </a:p>
         </p:txBody>
       </p:sp>
@@ -5205,8 +5207,8 @@
         </p:nvSpPr>
         <p:spPr>
           <a:xfrm>
-            <a:off x="868680" y="2112264"/>
-            <a:ext cx="420624" cy="420624"/>
+            <a:off x="868680" y="2103120"/>
+            <a:ext cx="457200" cy="457200"/>
           </a:xfrm>
           <a:prstGeom prst="ellipse">
             <a:avLst/>
@@ -5230,8 +5232,8 @@
         </p:nvSpPr>
         <p:spPr>
           <a:xfrm>
-            <a:off x="868680" y="2112264"/>
-            <a:ext cx="420624" cy="420624"/>
+            <a:off x="868680" y="2103120"/>
+            <a:ext cx="457200" cy="457200"/>
           </a:xfrm>
           <a:prstGeom prst="rect">
             <a:avLst/>
@@ -5247,7 +5249,7 @@
               <a:buNone/>
             </a:pPr>
             <a:r>
-              <a:rPr lang="en-US" sz="1300" b="1" dirty="0">
+              <a:rPr lang="en-US" sz="1800" b="1" dirty="0">
                 <a:solidFill>
                   <a:srgbClr val="3B82F6"/>
                 </a:solidFill>
@@ -5257,7 +5259,7 @@
               </a:rPr>
               <a:t>1</a:t>
             </a:r>
-            <a:endParaRPr lang="en-US" sz="1300" dirty="0"/>
+            <a:endParaRPr lang="en-US" sz="1800" dirty="0"/>
           </a:p>
         </p:txBody>
       </p:sp>
@@ -5269,8 +5271,8 @@
         </p:nvSpPr>
         <p:spPr>
           <a:xfrm>
-            <a:off x="1435608" y="2057400"/>
-            <a:ext cx="4480560" cy="822960"/>
+            <a:off x="1472184" y="2011680"/>
+            <a:ext cx="4443984" cy="960120"/>
           </a:xfrm>
           <a:prstGeom prst="rect">
             <a:avLst/>
@@ -5286,7 +5288,7 @@
               <a:buNone/>
             </a:pPr>
             <a:r>
-              <a:rPr lang="en-US" sz="1450" dirty="0">
+              <a:rPr lang="en-US" sz="2000" dirty="0">
                 <a:solidFill>
                   <a:srgbClr val="CBD5E1"/>
                 </a:solidFill>
@@ -5296,7 +5298,7 @@
               </a:rPr>
               <a:t>The operation: regional BI across Indonesia, Taiwan, Hong Kong, and Macau</a:t>
             </a:r>
-            <a:endParaRPr lang="en-US" sz="1450" dirty="0"/>
+            <a:endParaRPr lang="en-US" sz="2000" dirty="0"/>
           </a:p>
         </p:txBody>
       </p:sp>
@@ -5308,8 +5310,8 @@
         </p:nvSpPr>
         <p:spPr>
           <a:xfrm>
-            <a:off x="868680" y="3044952"/>
-            <a:ext cx="420624" cy="420624"/>
+            <a:off x="868680" y="3182112"/>
+            <a:ext cx="457200" cy="457200"/>
           </a:xfrm>
           <a:prstGeom prst="ellipse">
             <a:avLst/>
@@ -5333,8 +5335,8 @@
         </p:nvSpPr>
         <p:spPr>
           <a:xfrm>
-            <a:off x="868680" y="3044952"/>
-            <a:ext cx="420624" cy="420624"/>
+            <a:off x="868680" y="3182112"/>
+            <a:ext cx="457200" cy="457200"/>
           </a:xfrm>
           <a:prstGeom prst="rect">
             <a:avLst/>
@@ -5350,7 +5352,7 @@
               <a:buNone/>
             </a:pPr>
             <a:r>
-              <a:rPr lang="en-US" sz="1300" b="1" dirty="0">
+              <a:rPr lang="en-US" sz="1800" b="1" dirty="0">
                 <a:solidFill>
                   <a:srgbClr val="06B6D4"/>
                 </a:solidFill>
@@ -5360,7 +5362,7 @@
               </a:rPr>
               <a:t>2</a:t>
             </a:r>
-            <a:endParaRPr lang="en-US" sz="1300" dirty="0"/>
+            <a:endParaRPr lang="en-US" sz="1800" dirty="0"/>
           </a:p>
         </p:txBody>
       </p:sp>
@@ -5372,8 +5374,8 @@
         </p:nvSpPr>
         <p:spPr>
           <a:xfrm>
-            <a:off x="1435608" y="2990088"/>
-            <a:ext cx="4480560" cy="822960"/>
+            <a:off x="1472184" y="3090672"/>
+            <a:ext cx="4443984" cy="960120"/>
           </a:xfrm>
           <a:prstGeom prst="rect">
             <a:avLst/>
@@ -5389,7 +5391,7 @@
               <a:buNone/>
             </a:pPr>
             <a:r>
-              <a:rPr lang="en-US" sz="1450" dirty="0">
+              <a:rPr lang="en-US" sz="2000" dirty="0">
                 <a:solidFill>
                   <a:srgbClr val="CBD5E1"/>
                 </a:solidFill>
@@ -5399,7 +5401,7 @@
               </a:rPr>
               <a:t>The stack: Alteryx pipelines, a SQL Server datalake, and Qlik Sense dashboards</a:t>
             </a:r>
-            <a:endParaRPr lang="en-US" sz="1450" dirty="0"/>
+            <a:endParaRPr lang="en-US" sz="2000" dirty="0"/>
           </a:p>
         </p:txBody>
       </p:sp>
@@ -5411,8 +5413,8 @@
         </p:nvSpPr>
         <p:spPr>
           <a:xfrm>
-            <a:off x="868680" y="3977640"/>
-            <a:ext cx="420624" cy="420624"/>
+            <a:off x="868680" y="4261104"/>
+            <a:ext cx="457200" cy="457200"/>
           </a:xfrm>
           <a:prstGeom prst="ellipse">
             <a:avLst/>
@@ -5436,8 +5438,8 @@
         </p:nvSpPr>
         <p:spPr>
           <a:xfrm>
-            <a:off x="868680" y="3977640"/>
-            <a:ext cx="420624" cy="420624"/>
+            <a:off x="868680" y="4261104"/>
+            <a:ext cx="457200" cy="457200"/>
           </a:xfrm>
           <a:prstGeom prst="rect">
             <a:avLst/>
@@ -5453,7 +5455,7 @@
               <a:buNone/>
             </a:pPr>
             <a:r>
-              <a:rPr lang="en-US" sz="1300" b="1" dirty="0">
+              <a:rPr lang="en-US" sz="1800" b="1" dirty="0">
                 <a:solidFill>
                   <a:srgbClr val="3B82F6"/>
                 </a:solidFill>
@@ -5463,7 +5465,7 @@
               </a:rPr>
               <a:t>3</a:t>
             </a:r>
-            <a:endParaRPr lang="en-US" sz="1300" dirty="0"/>
+            <a:endParaRPr lang="en-US" sz="1800" dirty="0"/>
           </a:p>
         </p:txBody>
       </p:sp>
@@ -5475,8 +5477,8 @@
         </p:nvSpPr>
         <p:spPr>
           <a:xfrm>
-            <a:off x="1435608" y="3922776"/>
-            <a:ext cx="4480560" cy="822960"/>
+            <a:off x="1472184" y="4169664"/>
+            <a:ext cx="4443984" cy="960120"/>
           </a:xfrm>
           <a:prstGeom prst="rect">
             <a:avLst/>
@@ -5492,7 +5494,7 @@
               <a:buNone/>
             </a:pPr>
             <a:r>
-              <a:rPr lang="en-US" sz="1450" dirty="0">
+              <a:rPr lang="en-US" sz="2000" dirty="0">
                 <a:solidFill>
                   <a:srgbClr val="CBD5E1"/>
                 </a:solidFill>
@@ -5502,7 +5504,7 @@
               </a:rPr>
               <a:t>The quality playbook: reconciliation at every seam, alarms on every source</a:t>
             </a:r>
-            <a:endParaRPr lang="en-US" sz="1450" dirty="0"/>
+            <a:endParaRPr lang="en-US" sz="2000" dirty="0"/>
           </a:p>
         </p:txBody>
       </p:sp>
@@ -5514,8 +5516,8 @@
         </p:nvSpPr>
         <p:spPr>
           <a:xfrm>
-            <a:off x="6355080" y="2112264"/>
-            <a:ext cx="420624" cy="420624"/>
+            <a:off x="6355080" y="2103120"/>
+            <a:ext cx="457200" cy="457200"/>
           </a:xfrm>
           <a:prstGeom prst="ellipse">
             <a:avLst/>
@@ -5539,8 +5541,8 @@
         </p:nvSpPr>
         <p:spPr>
           <a:xfrm>
-            <a:off x="6355080" y="2112264"/>
-            <a:ext cx="420624" cy="420624"/>
+            <a:off x="6355080" y="2103120"/>
+            <a:ext cx="457200" cy="457200"/>
           </a:xfrm>
           <a:prstGeom prst="rect">
             <a:avLst/>
@@ -5556,7 +5558,7 @@
               <a:buNone/>
             </a:pPr>
             <a:r>
-              <a:rPr lang="en-US" sz="1300" b="1" dirty="0">
+              <a:rPr lang="en-US" sz="1800" b="1" dirty="0">
                 <a:solidFill>
                   <a:srgbClr val="06B6D4"/>
                 </a:solidFill>
@@ -5566,7 +5568,7 @@
               </a:rPr>
               <a:t>4</a:t>
             </a:r>
-            <a:endParaRPr lang="en-US" sz="1300" dirty="0"/>
+            <a:endParaRPr lang="en-US" sz="1800" dirty="0"/>
           </a:p>
         </p:txBody>
       </p:sp>
@@ -5578,8 +5580,8 @@
         </p:nvSpPr>
         <p:spPr>
           <a:xfrm>
-            <a:off x="6922008" y="2057400"/>
-            <a:ext cx="4480560" cy="822960"/>
+            <a:off x="6958584" y="2011680"/>
+            <a:ext cx="4443984" cy="960120"/>
           </a:xfrm>
           <a:prstGeom prst="rect">
             <a:avLst/>
@@ -5595,7 +5597,7 @@
               <a:buNone/>
             </a:pPr>
             <a:r>
-              <a:rPr lang="en-US" sz="1450" dirty="0">
+              <a:rPr lang="en-US" sz="2000" dirty="0">
                 <a:solidFill>
                   <a:srgbClr val="CBD5E1"/>
                 </a:solidFill>
@@ -5605,7 +5607,7 @@
               </a:rPr>
               <a:t>Governance: one number, one definition, one owner</a:t>
             </a:r>
-            <a:endParaRPr lang="en-US" sz="1450" dirty="0"/>
+            <a:endParaRPr lang="en-US" sz="2000" dirty="0"/>
           </a:p>
         </p:txBody>
       </p:sp>
@@ -5617,8 +5619,8 @@
         </p:nvSpPr>
         <p:spPr>
           <a:xfrm>
-            <a:off x="6355080" y="3044952"/>
-            <a:ext cx="420624" cy="420624"/>
+            <a:off x="6355080" y="3182112"/>
+            <a:ext cx="457200" cy="457200"/>
           </a:xfrm>
           <a:prstGeom prst="ellipse">
             <a:avLst/>
@@ -5642,8 +5644,8 @@
         </p:nvSpPr>
         <p:spPr>
           <a:xfrm>
-            <a:off x="6355080" y="3044952"/>
-            <a:ext cx="420624" cy="420624"/>
+            <a:off x="6355080" y="3182112"/>
+            <a:ext cx="457200" cy="457200"/>
           </a:xfrm>
           <a:prstGeom prst="rect">
             <a:avLst/>
@@ -5659,7 +5661,7 @@
               <a:buNone/>
             </a:pPr>
             <a:r>
-              <a:rPr lang="en-US" sz="1300" b="1" dirty="0">
+              <a:rPr lang="en-US" sz="1800" b="1" dirty="0">
                 <a:solidFill>
                   <a:srgbClr val="3B82F6"/>
                 </a:solidFill>
@@ -5669,7 +5671,7 @@
               </a:rPr>
               <a:t>5</a:t>
             </a:r>
-            <a:endParaRPr lang="en-US" sz="1300" dirty="0"/>
+            <a:endParaRPr lang="en-US" sz="1800" dirty="0"/>
           </a:p>
         </p:txBody>
       </p:sp>
@@ -5681,8 +5683,8 @@
         </p:nvSpPr>
         <p:spPr>
           <a:xfrm>
-            <a:off x="6922008" y="2990088"/>
-            <a:ext cx="4480560" cy="822960"/>
+            <a:off x="6958584" y="3090672"/>
+            <a:ext cx="4443984" cy="960120"/>
           </a:xfrm>
           <a:prstGeom prst="rect">
             <a:avLst/>
@@ -5698,7 +5700,7 @@
               <a:buNone/>
             </a:pPr>
             <a:r>
-              <a:rPr lang="en-US" sz="1450" dirty="0">
+              <a:rPr lang="en-US" sz="2000" dirty="0">
                 <a:solidFill>
                   <a:srgbClr val="CBD5E1"/>
                 </a:solidFill>
@@ -5708,7 +5710,7 @@
               </a:rPr>
               <a:t>What four countries teach about scale</a:t>
             </a:r>
-            <a:endParaRPr lang="en-US" sz="1450" dirty="0"/>
+            <a:endParaRPr lang="en-US" sz="2000" dirty="0"/>
           </a:p>
         </p:txBody>
       </p:sp>
@@ -5720,8 +5722,8 @@
         </p:nvSpPr>
         <p:spPr>
           <a:xfrm>
-            <a:off x="10698480" y="6382512"/>
-            <a:ext cx="1188720" cy="365760"/>
+            <a:off x="10698480" y="6309360"/>
+            <a:ext cx="1188720" cy="411480"/>
           </a:xfrm>
           <a:prstGeom prst="rect">
             <a:avLst/>
@@ -5737,9 +5739,9 @@
               <a:buNone/>
             </a:pPr>
             <a:r>
-              <a:rPr lang="en-US" sz="1000" dirty="0">
-                <a:solidFill>
-                  <a:srgbClr val="64748B"/>
+              <a:rPr lang="en-US" sz="1800" dirty="0">
+                <a:solidFill>
+                  <a:srgbClr val="8FA3BF"/>
                 </a:solidFill>
                 <a:latin typeface="Consolas" pitchFamily="34" charset="0"/>
                 <a:ea typeface="Consolas" pitchFamily="34" charset="-122"/>
@@ -5747,7 +5749,7 @@
               </a:rPr>
               <a:t>2 / 14</a:t>
             </a:r>
-            <a:endParaRPr lang="en-US" sz="1000" dirty="0"/>
+            <a:endParaRPr lang="en-US" sz="1800" dirty="0"/>
           </a:p>
         </p:txBody>
       </p:sp>
@@ -5831,8 +5833,8 @@
         </p:nvSpPr>
         <p:spPr>
           <a:xfrm>
-            <a:off x="822960" y="502920"/>
-            <a:ext cx="10515600" cy="365760"/>
+            <a:off x="822960" y="457200"/>
+            <a:ext cx="10515600" cy="411480"/>
           </a:xfrm>
           <a:prstGeom prst="rect">
             <a:avLst/>
@@ -5848,7 +5850,7 @@
               <a:buNone/>
             </a:pPr>
             <a:r>
-              <a:rPr lang="en-US" sz="1200" spc="300" kern="0" dirty="0">
+              <a:rPr lang="en-US" sz="1800" spc="300" kern="0" dirty="0">
                 <a:solidFill>
                   <a:srgbClr val="06B6D4"/>
                 </a:solidFill>
@@ -5858,7 +5860,7 @@
               </a:rPr>
               <a:t>THE OPERATION</a:t>
             </a:r>
-            <a:endParaRPr lang="en-US" sz="1200" dirty="0"/>
+            <a:endParaRPr lang="en-US" sz="1800" dirty="0"/>
           </a:p>
         </p:txBody>
       </p:sp>
@@ -5909,8 +5911,8 @@
         </p:nvSpPr>
         <p:spPr>
           <a:xfrm>
-            <a:off x="868680" y="2011680"/>
-            <a:ext cx="10424160" cy="3566160"/>
+            <a:off x="868680" y="1965960"/>
+            <a:ext cx="10424160" cy="3840480"/>
           </a:xfrm>
           <a:prstGeom prst="rect">
             <a:avLst/>
@@ -5933,7 +5935,7 @@
               <a:buChar char="▸"/>
             </a:pPr>
             <a:r>
-              <a:rPr lang="en-US" sz="1600" dirty="0">
+              <a:rPr lang="en-US" sz="2000" dirty="0">
                 <a:solidFill>
                   <a:srgbClr val="CBD5E1"/>
                 </a:solidFill>
@@ -5943,7 +5945,7 @@
               </a:rPr>
               <a:t>Regional BI operations across Indonesia, Taiwan, Hong Kong, and Macau</a:t>
             </a:r>
-            <a:endParaRPr lang="en-US" sz="1600" dirty="0"/>
+            <a:endParaRPr lang="en-US" sz="2000" dirty="0"/>
           </a:p>
           <a:p>
             <a:pPr marL="342900" indent="-342900">
@@ -5957,7 +5959,7 @@
               <a:buChar char="▸"/>
             </a:pPr>
             <a:r>
-              <a:rPr lang="en-US" sz="1600" dirty="0">
+              <a:rPr lang="en-US" sz="2000" dirty="0">
                 <a:solidFill>
                   <a:srgbClr val="CBD5E1"/>
                 </a:solidFill>
@@ -5967,7 +5969,7 @@
               </a:rPr>
               <a:t>Role: Regional Business Intelligence Specialist, Oct 2023 - Mar 2024, IKEA Indonesia (PT Rumah Mebel Nusantara)</a:t>
             </a:r>
-            <a:endParaRPr lang="en-US" sz="1600" dirty="0"/>
+            <a:endParaRPr lang="en-US" sz="2000" dirty="0"/>
           </a:p>
           <a:p>
             <a:pPr marL="342900" indent="-342900">
@@ -5981,7 +5983,7 @@
               <a:buChar char="▸"/>
             </a:pPr>
             <a:r>
-              <a:rPr lang="en-US" sz="1600" dirty="0">
+              <a:rPr lang="en-US" sz="2000" dirty="0">
                 <a:solidFill>
                   <a:srgbClr val="CBD5E1"/>
                 </a:solidFill>
@@ -5991,7 +5993,7 @@
               </a:rPr>
               <a:t>Audience: regional leadership, country teams, and store operations</a:t>
             </a:r>
-            <a:endParaRPr lang="en-US" sz="1600" dirty="0"/>
+            <a:endParaRPr lang="en-US" sz="2000" dirty="0"/>
           </a:p>
           <a:p>
             <a:pPr marL="342900" indent="-342900">
@@ -6005,7 +6007,7 @@
               <a:buChar char="▸"/>
             </a:pPr>
             <a:r>
-              <a:rPr lang="en-US" sz="1600" dirty="0">
+              <a:rPr lang="en-US" sz="2000" dirty="0">
                 <a:solidFill>
                   <a:srgbClr val="CBD5E1"/>
                 </a:solidFill>
@@ -6015,7 +6017,7 @@
               </a:rPr>
               <a:t>One datalake served every market - and every market argued with it</a:t>
             </a:r>
-            <a:endParaRPr lang="en-US" sz="1600" dirty="0"/>
+            <a:endParaRPr lang="en-US" sz="2000" dirty="0"/>
           </a:p>
         </p:txBody>
       </p:sp>
@@ -6027,8 +6029,8 @@
         </p:nvSpPr>
         <p:spPr>
           <a:xfrm>
-            <a:off x="10698480" y="6382512"/>
-            <a:ext cx="1188720" cy="365760"/>
+            <a:off x="10698480" y="6309360"/>
+            <a:ext cx="1188720" cy="411480"/>
           </a:xfrm>
           <a:prstGeom prst="rect">
             <a:avLst/>
@@ -6044,9 +6046,9 @@
               <a:buNone/>
             </a:pPr>
             <a:r>
-              <a:rPr lang="en-US" sz="1000" dirty="0">
-                <a:solidFill>
-                  <a:srgbClr val="64748B"/>
+              <a:rPr lang="en-US" sz="1800" dirty="0">
+                <a:solidFill>
+                  <a:srgbClr val="8FA3BF"/>
                 </a:solidFill>
                 <a:latin typeface="Consolas" pitchFamily="34" charset="0"/>
                 <a:ea typeface="Consolas" pitchFamily="34" charset="-122"/>
@@ -6054,7 +6056,7 @@
               </a:rPr>
               <a:t>3 / 14</a:t>
             </a:r>
-            <a:endParaRPr lang="en-US" sz="1000" dirty="0"/>
+            <a:endParaRPr lang="en-US" sz="1800" dirty="0"/>
           </a:p>
         </p:txBody>
       </p:sp>
@@ -6138,8 +6140,8 @@
         </p:nvSpPr>
         <p:spPr>
           <a:xfrm>
-            <a:off x="822960" y="502920"/>
-            <a:ext cx="10515600" cy="365760"/>
+            <a:off x="822960" y="457200"/>
+            <a:ext cx="10515600" cy="411480"/>
           </a:xfrm>
           <a:prstGeom prst="rect">
             <a:avLst/>
@@ -6155,7 +6157,7 @@
               <a:buNone/>
             </a:pPr>
             <a:r>
-              <a:rPr lang="en-US" sz="1200" spc="300" kern="0" dirty="0">
+              <a:rPr lang="en-US" sz="1800" spc="300" kern="0" dirty="0">
                 <a:solidFill>
                   <a:srgbClr val="06B6D4"/>
                 </a:solidFill>
@@ -6165,7 +6167,7 @@
               </a:rPr>
               <a:t>SCALE</a:t>
             </a:r>
-            <a:endParaRPr lang="en-US" sz="1200" dirty="0"/>
+            <a:endParaRPr lang="en-US" sz="1800" dirty="0"/>
           </a:p>
         </p:txBody>
       </p:sp>
@@ -6216,8 +6218,8 @@
         </p:nvSpPr>
         <p:spPr>
           <a:xfrm>
-            <a:off x="822960" y="2194560"/>
-            <a:ext cx="2423160" cy="2697480"/>
+            <a:off x="822960" y="1965960"/>
+            <a:ext cx="2423160" cy="3154680"/>
           </a:xfrm>
           <a:prstGeom prst="roundRect">
             <a:avLst>
@@ -6243,7 +6245,7 @@
         </p:nvSpPr>
         <p:spPr>
           <a:xfrm>
-            <a:off x="960120" y="2514600"/>
+            <a:off x="960120" y="2194560"/>
             <a:ext cx="2148840" cy="914400"/>
           </a:xfrm>
           <a:prstGeom prst="rect">
@@ -6282,8 +6284,8 @@
         </p:nvSpPr>
         <p:spPr>
           <a:xfrm>
-            <a:off x="960120" y="3520440"/>
-            <a:ext cx="2148840" cy="502920"/>
+            <a:off x="960120" y="3200400"/>
+            <a:ext cx="2148840" cy="868680"/>
           </a:xfrm>
           <a:prstGeom prst="rect">
             <a:avLst/>
@@ -6299,7 +6301,7 @@
               <a:buNone/>
             </a:pPr>
             <a:r>
-              <a:rPr lang="en-US" sz="1450" b="1" dirty="0">
+              <a:rPr lang="en-US" sz="1800" b="1" dirty="0">
                 <a:solidFill>
                   <a:srgbClr val="FFFFFF"/>
                 </a:solidFill>
@@ -6309,7 +6311,7 @@
               </a:rPr>
               <a:t>Markets served</a:t>
             </a:r>
-            <a:endParaRPr lang="en-US" sz="1450" dirty="0"/>
+            <a:endParaRPr lang="en-US" sz="1800" dirty="0"/>
           </a:p>
         </p:txBody>
       </p:sp>
@@ -6321,8 +6323,8 @@
         </p:nvSpPr>
         <p:spPr>
           <a:xfrm>
-            <a:off x="1005840" y="4069080"/>
-            <a:ext cx="2057400" cy="685800"/>
+            <a:off x="1005840" y="4114800"/>
+            <a:ext cx="2057400" cy="914400"/>
           </a:xfrm>
           <a:prstGeom prst="rect">
             <a:avLst/>
@@ -6338,7 +6340,7 @@
               <a:buNone/>
             </a:pPr>
             <a:r>
-              <a:rPr lang="en-US" sz="1050" dirty="0">
+              <a:rPr lang="en-US" sz="1800" dirty="0">
                 <a:solidFill>
                   <a:srgbClr val="94A3B8"/>
                 </a:solidFill>
@@ -6348,7 +6350,7 @@
               </a:rPr>
               <a:t>Indonesia, Taiwan, Hong Kong, and Macau reported from one shared datalake</a:t>
             </a:r>
-            <a:endParaRPr lang="en-US" sz="1050" dirty="0"/>
+            <a:endParaRPr lang="en-US" sz="1800" dirty="0"/>
           </a:p>
         </p:txBody>
       </p:sp>
@@ -6360,8 +6362,8 @@
         </p:nvSpPr>
         <p:spPr>
           <a:xfrm>
-            <a:off x="3520440" y="2194560"/>
-            <a:ext cx="2423160" cy="2697480"/>
+            <a:off x="3520440" y="1965960"/>
+            <a:ext cx="2423160" cy="3154680"/>
           </a:xfrm>
           <a:prstGeom prst="roundRect">
             <a:avLst>
@@ -6387,7 +6389,7 @@
         </p:nvSpPr>
         <p:spPr>
           <a:xfrm>
-            <a:off x="3657600" y="2514600"/>
+            <a:off x="3657600" y="2194560"/>
             <a:ext cx="2148840" cy="914400"/>
           </a:xfrm>
           <a:prstGeom prst="rect">
@@ -6426,8 +6428,8 @@
         </p:nvSpPr>
         <p:spPr>
           <a:xfrm>
-            <a:off x="3657600" y="3520440"/>
-            <a:ext cx="2148840" cy="502920"/>
+            <a:off x="3657600" y="3200400"/>
+            <a:ext cx="2148840" cy="868680"/>
           </a:xfrm>
           <a:prstGeom prst="rect">
             <a:avLst/>
@@ -6443,7 +6445,7 @@
               <a:buNone/>
             </a:pPr>
             <a:r>
-              <a:rPr lang="en-US" sz="1450" b="1" dirty="0">
+              <a:rPr lang="en-US" sz="1800" b="1" dirty="0">
                 <a:solidFill>
                   <a:srgbClr val="FFFFFF"/>
                 </a:solidFill>
@@ -6453,7 +6455,7 @@
               </a:rPr>
               <a:t>Core BI tools</a:t>
             </a:r>
-            <a:endParaRPr lang="en-US" sz="1450" dirty="0"/>
+            <a:endParaRPr lang="en-US" sz="1800" dirty="0"/>
           </a:p>
         </p:txBody>
       </p:sp>
@@ -6465,8 +6467,8 @@
         </p:nvSpPr>
         <p:spPr>
           <a:xfrm>
-            <a:off x="3703320" y="4069080"/>
-            <a:ext cx="2057400" cy="685800"/>
+            <a:off x="3703320" y="4114800"/>
+            <a:ext cx="2057400" cy="914400"/>
           </a:xfrm>
           <a:prstGeom prst="rect">
             <a:avLst/>
@@ -6482,7 +6484,7 @@
               <a:buNone/>
             </a:pPr>
             <a:r>
-              <a:rPr lang="en-US" sz="1050" dirty="0">
+              <a:rPr lang="en-US" sz="1800" dirty="0">
                 <a:solidFill>
                   <a:srgbClr val="94A3B8"/>
                 </a:solidFill>
@@ -6492,7 +6494,7 @@
               </a:rPr>
               <a:t>Qlik Sense, Alteryx, and MS SQL Server operated as one pipeline</a:t>
             </a:r>
-            <a:endParaRPr lang="en-US" sz="1050" dirty="0"/>
+            <a:endParaRPr lang="en-US" sz="1800" dirty="0"/>
           </a:p>
         </p:txBody>
       </p:sp>
@@ -6504,8 +6506,8 @@
         </p:nvSpPr>
         <p:spPr>
           <a:xfrm>
-            <a:off x="6217920" y="2194560"/>
-            <a:ext cx="2423160" cy="2697480"/>
+            <a:off x="6217920" y="1965960"/>
+            <a:ext cx="2423160" cy="3154680"/>
           </a:xfrm>
           <a:prstGeom prst="roundRect">
             <a:avLst>
@@ -6531,7 +6533,7 @@
         </p:nvSpPr>
         <p:spPr>
           <a:xfrm>
-            <a:off x="6355080" y="2514600"/>
+            <a:off x="6355080" y="2194560"/>
             <a:ext cx="2148840" cy="914400"/>
           </a:xfrm>
           <a:prstGeom prst="rect">
@@ -6570,8 +6572,8 @@
         </p:nvSpPr>
         <p:spPr>
           <a:xfrm>
-            <a:off x="6355080" y="3520440"/>
-            <a:ext cx="2148840" cy="502920"/>
+            <a:off x="6355080" y="3200400"/>
+            <a:ext cx="2148840" cy="868680"/>
           </a:xfrm>
           <a:prstGeom prst="rect">
             <a:avLst/>
@@ -6587,7 +6589,7 @@
               <a:buNone/>
             </a:pPr>
             <a:r>
-              <a:rPr lang="en-US" sz="1450" b="1" dirty="0">
+              <a:rPr lang="en-US" sz="1800" b="1" dirty="0">
                 <a:solidFill>
                   <a:srgbClr val="FFFFFF"/>
                 </a:solidFill>
@@ -6597,7 +6599,7 @@
               </a:rPr>
               <a:t>Loads reconciled</a:t>
             </a:r>
-            <a:endParaRPr lang="en-US" sz="1450" dirty="0"/>
+            <a:endParaRPr lang="en-US" sz="1800" dirty="0"/>
           </a:p>
         </p:txBody>
       </p:sp>
@@ -6609,8 +6611,8 @@
         </p:nvSpPr>
         <p:spPr>
           <a:xfrm>
-            <a:off x="6400800" y="4069080"/>
-            <a:ext cx="2057400" cy="685800"/>
+            <a:off x="6400800" y="4114800"/>
+            <a:ext cx="2057400" cy="914400"/>
           </a:xfrm>
           <a:prstGeom prst="rect">
             <a:avLst/>
@@ -6626,7 +6628,7 @@
               <a:buNone/>
             </a:pPr>
             <a:r>
-              <a:rPr lang="en-US" sz="1050" dirty="0">
+              <a:rPr lang="en-US" sz="1800" dirty="0">
                 <a:solidFill>
                   <a:srgbClr val="94A3B8"/>
                 </a:solidFill>
@@ -6636,7 +6638,7 @@
               </a:rPr>
               <a:t>Row counts, sum checks, and sampled comparisons on every load - not quarterly</a:t>
             </a:r>
-            <a:endParaRPr lang="en-US" sz="1050" dirty="0"/>
+            <a:endParaRPr lang="en-US" sz="1800" dirty="0"/>
           </a:p>
         </p:txBody>
       </p:sp>
@@ -6648,8 +6650,8 @@
         </p:nvSpPr>
         <p:spPr>
           <a:xfrm>
-            <a:off x="8915400" y="2194560"/>
-            <a:ext cx="2423160" cy="2697480"/>
+            <a:off x="8915400" y="1965960"/>
+            <a:ext cx="2423160" cy="3154680"/>
           </a:xfrm>
           <a:prstGeom prst="roundRect">
             <a:avLst>
@@ -6675,7 +6677,7 @@
         </p:nvSpPr>
         <p:spPr>
           <a:xfrm>
-            <a:off x="9052560" y="2514600"/>
+            <a:off x="9052560" y="2194560"/>
             <a:ext cx="2148840" cy="914400"/>
           </a:xfrm>
           <a:prstGeom prst="rect">
@@ -6714,8 +6716,8 @@
         </p:nvSpPr>
         <p:spPr>
           <a:xfrm>
-            <a:off x="9052560" y="3520440"/>
-            <a:ext cx="2148840" cy="502920"/>
+            <a:off x="9052560" y="3200400"/>
+            <a:ext cx="2148840" cy="868680"/>
           </a:xfrm>
           <a:prstGeom prst="rect">
             <a:avLst/>
@@ -6731,7 +6733,7 @@
               <a:buNone/>
             </a:pPr>
             <a:r>
-              <a:rPr lang="en-US" sz="1450" b="1" dirty="0">
+              <a:rPr lang="en-US" sz="1800" b="1" dirty="0">
                 <a:solidFill>
                   <a:srgbClr val="FFFFFF"/>
                 </a:solidFill>
@@ -6741,7 +6743,7 @@
               </a:rPr>
               <a:t>Silent failures tolerated</a:t>
             </a:r>
-            <a:endParaRPr lang="en-US" sz="1450" dirty="0"/>
+            <a:endParaRPr lang="en-US" sz="1800" dirty="0"/>
           </a:p>
         </p:txBody>
       </p:sp>
@@ -6753,8 +6755,8 @@
         </p:nvSpPr>
         <p:spPr>
           <a:xfrm>
-            <a:off x="9098280" y="4069080"/>
-            <a:ext cx="2057400" cy="685800"/>
+            <a:off x="9098280" y="4114800"/>
+            <a:ext cx="2057400" cy="914400"/>
           </a:xfrm>
           <a:prstGeom prst="rect">
             <a:avLst/>
@@ -6770,7 +6772,7 @@
               <a:buNone/>
             </a:pPr>
             <a:r>
-              <a:rPr lang="en-US" sz="1050" dirty="0">
+              <a:rPr lang="en-US" sz="1800" dirty="0">
                 <a:solidFill>
                   <a:srgbClr val="94A3B8"/>
                 </a:solidFill>
@@ -6780,7 +6782,7 @@
               </a:rPr>
               <a:t>Freshness alarms meant late data was escalated before it was reported</a:t>
             </a:r>
-            <a:endParaRPr lang="en-US" sz="1050" dirty="0"/>
+            <a:endParaRPr lang="en-US" sz="1800" dirty="0"/>
           </a:p>
         </p:txBody>
       </p:sp>
@@ -6792,7 +6794,7 @@
         </p:nvSpPr>
         <p:spPr>
           <a:xfrm>
-            <a:off x="822960" y="5413248"/>
+            <a:off x="822960" y="5321808"/>
             <a:ext cx="10515600" cy="0"/>
           </a:xfrm>
           <a:prstGeom prst="line">
@@ -6815,8 +6817,8 @@
         </p:nvSpPr>
         <p:spPr>
           <a:xfrm>
-            <a:off x="822960" y="5504688"/>
-            <a:ext cx="10424160" cy="411480"/>
+            <a:off x="822960" y="5394960"/>
+            <a:ext cx="10424160" cy="502920"/>
           </a:xfrm>
           <a:prstGeom prst="rect">
             <a:avLst/>
@@ -6832,7 +6834,7 @@
               <a:buNone/>
             </a:pPr>
             <a:r>
-              <a:rPr lang="en-US" sz="1300" i="1" dirty="0">
+              <a:rPr lang="en-US" sz="1800" i="1" dirty="0">
                 <a:solidFill>
                   <a:srgbClr val="06B6D4"/>
                 </a:solidFill>
@@ -6842,7 +6844,7 @@
               </a:rPr>
               <a:t>→  Regional BI at this scale is an operations discipline as much as a technology stack.</a:t>
             </a:r>
-            <a:endParaRPr lang="en-US" sz="1300" dirty="0"/>
+            <a:endParaRPr lang="en-US" sz="1800" dirty="0"/>
           </a:p>
         </p:txBody>
       </p:sp>
@@ -6854,8 +6856,8 @@
         </p:nvSpPr>
         <p:spPr>
           <a:xfrm>
-            <a:off x="10698480" y="6382512"/>
-            <a:ext cx="1188720" cy="365760"/>
+            <a:off x="10698480" y="6309360"/>
+            <a:ext cx="1188720" cy="411480"/>
           </a:xfrm>
           <a:prstGeom prst="rect">
             <a:avLst/>
@@ -6871,9 +6873,9 @@
               <a:buNone/>
             </a:pPr>
             <a:r>
-              <a:rPr lang="en-US" sz="1000" dirty="0">
-                <a:solidFill>
-                  <a:srgbClr val="64748B"/>
+              <a:rPr lang="en-US" sz="1800" dirty="0">
+                <a:solidFill>
+                  <a:srgbClr val="8FA3BF"/>
                 </a:solidFill>
                 <a:latin typeface="Consolas" pitchFamily="34" charset="0"/>
                 <a:ea typeface="Consolas" pitchFamily="34" charset="-122"/>
@@ -6881,7 +6883,7 @@
               </a:rPr>
               <a:t>4 / 14</a:t>
             </a:r>
-            <a:endParaRPr lang="en-US" sz="1000" dirty="0"/>
+            <a:endParaRPr lang="en-US" sz="1800" dirty="0"/>
           </a:p>
         </p:txBody>
       </p:sp>
@@ -6965,8 +6967,8 @@
         </p:nvSpPr>
         <p:spPr>
           <a:xfrm>
-            <a:off x="822960" y="502920"/>
-            <a:ext cx="10515600" cy="365760"/>
+            <a:off x="822960" y="457200"/>
+            <a:ext cx="10515600" cy="411480"/>
           </a:xfrm>
           <a:prstGeom prst="rect">
             <a:avLst/>
@@ -6982,7 +6984,7 @@
               <a:buNone/>
             </a:pPr>
             <a:r>
-              <a:rPr lang="en-US" sz="1200" spc="300" kern="0" dirty="0">
+              <a:rPr lang="en-US" sz="1800" spc="300" kern="0" dirty="0">
                 <a:solidFill>
                   <a:srgbClr val="06B6D4"/>
                 </a:solidFill>
@@ -6992,7 +6994,7 @@
               </a:rPr>
               <a:t>THE STACK</a:t>
             </a:r>
-            <a:endParaRPr lang="en-US" sz="1200" dirty="0"/>
+            <a:endParaRPr lang="en-US" sz="1800" dirty="0"/>
           </a:p>
         </p:txBody>
       </p:sp>
@@ -7043,8 +7045,8 @@
         </p:nvSpPr>
         <p:spPr>
           <a:xfrm>
-            <a:off x="774040" y="2514600"/>
-            <a:ext cx="1938528" cy="2103120"/>
+            <a:off x="774040" y="2331720"/>
+            <a:ext cx="1938528" cy="2697480"/>
           </a:xfrm>
           <a:prstGeom prst="roundRect">
             <a:avLst>
@@ -7070,8 +7072,8 @@
         </p:nvSpPr>
         <p:spPr>
           <a:xfrm>
-            <a:off x="902056" y="2633472"/>
-            <a:ext cx="1682496" cy="310896"/>
+            <a:off x="902056" y="2450592"/>
+            <a:ext cx="1682496" cy="365760"/>
           </a:xfrm>
           <a:prstGeom prst="rect">
             <a:avLst/>
@@ -7087,7 +7089,7 @@
               <a:buNone/>
             </a:pPr>
             <a:r>
-              <a:rPr lang="en-US" sz="1100" b="1" dirty="0">
+              <a:rPr lang="en-US" sz="1800" b="1" dirty="0">
                 <a:solidFill>
                   <a:srgbClr val="3B82F6"/>
                 </a:solidFill>
@@ -7097,7 +7099,7 @@
               </a:rPr>
               <a:t>01</a:t>
             </a:r>
-            <a:endParaRPr lang="en-US" sz="1100" dirty="0"/>
+            <a:endParaRPr lang="en-US" sz="1800" dirty="0"/>
           </a:p>
         </p:txBody>
       </p:sp>
@@ -7109,8 +7111,8 @@
         </p:nvSpPr>
         <p:spPr>
           <a:xfrm>
-            <a:off x="902056" y="2962656"/>
-            <a:ext cx="1682496" cy="566928"/>
+            <a:off x="902056" y="2834640"/>
+            <a:ext cx="1682496" cy="713232"/>
           </a:xfrm>
           <a:prstGeom prst="rect">
             <a:avLst/>
@@ -7126,7 +7128,7 @@
               <a:buNone/>
             </a:pPr>
             <a:r>
-              <a:rPr lang="en-US" sz="1350" b="1" dirty="0">
+              <a:rPr lang="en-US" sz="1800" b="1" dirty="0">
                 <a:solidFill>
                   <a:srgbClr val="FFFFFF"/>
                 </a:solidFill>
@@ -7136,7 +7138,7 @@
               </a:rPr>
               <a:t>Source systems</a:t>
             </a:r>
-            <a:endParaRPr lang="en-US" sz="1350" dirty="0"/>
+            <a:endParaRPr lang="en-US" sz="1800" dirty="0"/>
           </a:p>
         </p:txBody>
       </p:sp>
@@ -7148,8 +7150,8 @@
         </p:nvSpPr>
         <p:spPr>
           <a:xfrm>
-            <a:off x="902056" y="3566160"/>
-            <a:ext cx="1682496" cy="960120"/>
+            <a:off x="902056" y="3584448"/>
+            <a:ext cx="1682496" cy="1371600"/>
           </a:xfrm>
           <a:prstGeom prst="rect">
             <a:avLst/>
@@ -7165,7 +7167,7 @@
               <a:buNone/>
             </a:pPr>
             <a:r>
-              <a:rPr lang="en-US" sz="980" dirty="0">
+              <a:rPr lang="en-US" sz="1800" dirty="0">
                 <a:solidFill>
                   <a:srgbClr val="CBD5E1"/>
                 </a:solidFill>
@@ -7175,7 +7177,7 @@
               </a:rPr>
               <a:t>Regional store and business systems generated country-level data on their own cadences and quirks.</a:t>
             </a:r>
-            <a:endParaRPr lang="en-US" sz="980" dirty="0"/>
+            <a:endParaRPr lang="en-US" sz="1800" dirty="0"/>
           </a:p>
         </p:txBody>
       </p:sp>
@@ -7187,7 +7189,7 @@
         </p:nvSpPr>
         <p:spPr>
           <a:xfrm>
-            <a:off x="2726284" y="3419856"/>
+            <a:off x="2726284" y="3566160"/>
             <a:ext cx="210312" cy="274320"/>
           </a:xfrm>
           <a:prstGeom prst="rightArrow">
@@ -7207,8 +7209,8 @@
         </p:nvSpPr>
         <p:spPr>
           <a:xfrm>
-            <a:off x="2950312" y="2514600"/>
-            <a:ext cx="1938528" cy="2103120"/>
+            <a:off x="2950312" y="2331720"/>
+            <a:ext cx="1938528" cy="2697480"/>
           </a:xfrm>
           <a:prstGeom prst="roundRect">
             <a:avLst>
@@ -7234,8 +7236,8 @@
         </p:nvSpPr>
         <p:spPr>
           <a:xfrm>
-            <a:off x="3078328" y="2633472"/>
-            <a:ext cx="1682496" cy="310896"/>
+            <a:off x="3078328" y="2450592"/>
+            <a:ext cx="1682496" cy="365760"/>
           </a:xfrm>
           <a:prstGeom prst="rect">
             <a:avLst/>
@@ -7251,7 +7253,7 @@
               <a:buNone/>
             </a:pPr>
             <a:r>
-              <a:rPr lang="en-US" sz="1100" b="1" dirty="0">
+              <a:rPr lang="en-US" sz="1800" b="1" dirty="0">
                 <a:solidFill>
                   <a:srgbClr val="06B6D4"/>
                 </a:solidFill>
@@ -7261,7 +7263,7 @@
               </a:rPr>
               <a:t>02</a:t>
             </a:r>
-            <a:endParaRPr lang="en-US" sz="1100" dirty="0"/>
+            <a:endParaRPr lang="en-US" sz="1800" dirty="0"/>
           </a:p>
         </p:txBody>
       </p:sp>
@@ -7273,8 +7275,8 @@
         </p:nvSpPr>
         <p:spPr>
           <a:xfrm>
-            <a:off x="3078328" y="2962656"/>
-            <a:ext cx="1682496" cy="566928"/>
+            <a:off x="3078328" y="2834640"/>
+            <a:ext cx="1682496" cy="713232"/>
           </a:xfrm>
           <a:prstGeom prst="rect">
             <a:avLst/>
@@ -7290,7 +7292,7 @@
               <a:buNone/>
             </a:pPr>
             <a:r>
-              <a:rPr lang="en-US" sz="1350" b="1" dirty="0">
+              <a:rPr lang="en-US" sz="1800" b="1" dirty="0">
                 <a:solidFill>
                   <a:srgbClr val="FFFFFF"/>
                 </a:solidFill>
@@ -7300,7 +7302,7 @@
               </a:rPr>
               <a:t>Alteryx pipelines</a:t>
             </a:r>
-            <a:endParaRPr lang="en-US" sz="1350" dirty="0"/>
+            <a:endParaRPr lang="en-US" sz="1800" dirty="0"/>
           </a:p>
         </p:txBody>
       </p:sp>
@@ -7312,8 +7314,8 @@
         </p:nvSpPr>
         <p:spPr>
           <a:xfrm>
-            <a:off x="3078328" y="3566160"/>
-            <a:ext cx="1682496" cy="960120"/>
+            <a:off x="3078328" y="3584448"/>
+            <a:ext cx="1682496" cy="1371600"/>
           </a:xfrm>
           <a:prstGeom prst="rect">
             <a:avLst/>
@@ -7329,7 +7331,7 @@
               <a:buNone/>
             </a:pPr>
             <a:r>
-              <a:rPr lang="en-US" sz="980" dirty="0">
+              <a:rPr lang="en-US" sz="1800" dirty="0">
                 <a:solidFill>
                   <a:srgbClr val="CBD5E1"/>
                 </a:solidFill>
@@ -7339,7 +7341,7 @@
               </a:rPr>
               <a:t>Scheduled Alteryx workflows extracted, transformed, and loaded data into the datalake.</a:t>
             </a:r>
-            <a:endParaRPr lang="en-US" sz="980" dirty="0"/>
+            <a:endParaRPr lang="en-US" sz="1800" dirty="0"/>
           </a:p>
         </p:txBody>
       </p:sp>
@@ -7351,7 +7353,7 @@
         </p:nvSpPr>
         <p:spPr>
           <a:xfrm>
-            <a:off x="4902556" y="3419856"/>
+            <a:off x="4902556" y="3566160"/>
             <a:ext cx="210312" cy="274320"/>
           </a:xfrm>
           <a:prstGeom prst="rightArrow">
@@ -7371,8 +7373,8 @@
         </p:nvSpPr>
         <p:spPr>
           <a:xfrm>
-            <a:off x="5126584" y="2514600"/>
-            <a:ext cx="1938528" cy="2103120"/>
+            <a:off x="5126584" y="2331720"/>
+            <a:ext cx="1938528" cy="2697480"/>
           </a:xfrm>
           <a:prstGeom prst="roundRect">
             <a:avLst>
@@ -7398,8 +7400,8 @@
         </p:nvSpPr>
         <p:spPr>
           <a:xfrm>
-            <a:off x="5254600" y="2633472"/>
-            <a:ext cx="1682496" cy="310896"/>
+            <a:off x="5254600" y="2450592"/>
+            <a:ext cx="1682496" cy="365760"/>
           </a:xfrm>
           <a:prstGeom prst="rect">
             <a:avLst/>
@@ -7415,7 +7417,7 @@
               <a:buNone/>
             </a:pPr>
             <a:r>
-              <a:rPr lang="en-US" sz="1100" b="1" dirty="0">
+              <a:rPr lang="en-US" sz="1800" b="1" dirty="0">
                 <a:solidFill>
                   <a:srgbClr val="3B82F6"/>
                 </a:solidFill>
@@ -7425,7 +7427,7 @@
               </a:rPr>
               <a:t>03</a:t>
             </a:r>
-            <a:endParaRPr lang="en-US" sz="1100" dirty="0"/>
+            <a:endParaRPr lang="en-US" sz="1800" dirty="0"/>
           </a:p>
         </p:txBody>
       </p:sp>
@@ -7437,8 +7439,8 @@
         </p:nvSpPr>
         <p:spPr>
           <a:xfrm>
-            <a:off x="5254600" y="2962656"/>
-            <a:ext cx="1682496" cy="566928"/>
+            <a:off x="5254600" y="2834640"/>
+            <a:ext cx="1682496" cy="713232"/>
           </a:xfrm>
           <a:prstGeom prst="rect">
             <a:avLst/>
@@ -7454,7 +7456,7 @@
               <a:buNone/>
             </a:pPr>
             <a:r>
-              <a:rPr lang="en-US" sz="1350" b="1" dirty="0">
+              <a:rPr lang="en-US" sz="1800" b="1" dirty="0">
                 <a:solidFill>
                   <a:srgbClr val="FFFFFF"/>
                 </a:solidFill>
@@ -7464,7 +7466,7 @@
               </a:rPr>
               <a:t>Datalake on SQL Server</a:t>
             </a:r>
-            <a:endParaRPr lang="en-US" sz="1350" dirty="0"/>
+            <a:endParaRPr lang="en-US" sz="1800" dirty="0"/>
           </a:p>
         </p:txBody>
       </p:sp>
@@ -7476,8 +7478,8 @@
         </p:nvSpPr>
         <p:spPr>
           <a:xfrm>
-            <a:off x="5254600" y="3566160"/>
-            <a:ext cx="1682496" cy="960120"/>
+            <a:off x="5254600" y="3584448"/>
+            <a:ext cx="1682496" cy="1371600"/>
           </a:xfrm>
           <a:prstGeom prst="rect">
             <a:avLst/>
@@ -7493,7 +7495,7 @@
               <a:buNone/>
             </a:pPr>
             <a:r>
-              <a:rPr lang="en-US" sz="980" dirty="0">
+              <a:rPr lang="en-US" sz="1800" dirty="0">
                 <a:solidFill>
                   <a:srgbClr val="CBD5E1"/>
                 </a:solidFill>
@@ -7503,7 +7505,7 @@
               </a:rPr>
               <a:t>MS SQL Server served as the shared foundation and single source for regional reporting.</a:t>
             </a:r>
-            <a:endParaRPr lang="en-US" sz="980" dirty="0"/>
+            <a:endParaRPr lang="en-US" sz="1800" dirty="0"/>
           </a:p>
         </p:txBody>
       </p:sp>
@@ -7515,7 +7517,7 @@
         </p:nvSpPr>
         <p:spPr>
           <a:xfrm>
-            <a:off x="7078828" y="3419856"/>
+            <a:off x="7078828" y="3566160"/>
             <a:ext cx="210312" cy="274320"/>
           </a:xfrm>
           <a:prstGeom prst="rightArrow">
@@ -7535,8 +7537,8 @@
         </p:nvSpPr>
         <p:spPr>
           <a:xfrm>
-            <a:off x="7302856" y="2514600"/>
-            <a:ext cx="1938528" cy="2103120"/>
+            <a:off x="7302856" y="2331720"/>
+            <a:ext cx="1938528" cy="2697480"/>
           </a:xfrm>
           <a:prstGeom prst="roundRect">
             <a:avLst>
@@ -7562,8 +7564,8 @@
         </p:nvSpPr>
         <p:spPr>
           <a:xfrm>
-            <a:off x="7430872" y="2633472"/>
-            <a:ext cx="1682496" cy="310896"/>
+            <a:off x="7430872" y="2450592"/>
+            <a:ext cx="1682496" cy="365760"/>
           </a:xfrm>
           <a:prstGeom prst="rect">
             <a:avLst/>
@@ -7579,7 +7581,7 @@
               <a:buNone/>
             </a:pPr>
             <a:r>
-              <a:rPr lang="en-US" sz="1100" b="1" dirty="0">
+              <a:rPr lang="en-US" sz="1800" b="1" dirty="0">
                 <a:solidFill>
                   <a:srgbClr val="06B6D4"/>
                 </a:solidFill>
@@ -7589,7 +7591,7 @@
               </a:rPr>
               <a:t>04</a:t>
             </a:r>
-            <a:endParaRPr lang="en-US" sz="1100" dirty="0"/>
+            <a:endParaRPr lang="en-US" sz="1800" dirty="0"/>
           </a:p>
         </p:txBody>
       </p:sp>
@@ -7601,8 +7603,8 @@
         </p:nvSpPr>
         <p:spPr>
           <a:xfrm>
-            <a:off x="7430872" y="2962656"/>
-            <a:ext cx="1682496" cy="566928"/>
+            <a:off x="7430872" y="2834640"/>
+            <a:ext cx="1682496" cy="713232"/>
           </a:xfrm>
           <a:prstGeom prst="rect">
             <a:avLst/>
@@ -7618,7 +7620,7 @@
               <a:buNone/>
             </a:pPr>
             <a:r>
-              <a:rPr lang="en-US" sz="1350" b="1" dirty="0">
+              <a:rPr lang="en-US" sz="1800" b="1" dirty="0">
                 <a:solidFill>
                   <a:srgbClr val="FFFFFF"/>
                 </a:solidFill>
@@ -7628,7 +7630,7 @@
               </a:rPr>
               <a:t>Qlik Sense dashboards</a:t>
             </a:r>
-            <a:endParaRPr lang="en-US" sz="1350" dirty="0"/>
+            <a:endParaRPr lang="en-US" sz="1800" dirty="0"/>
           </a:p>
         </p:txBody>
       </p:sp>
@@ -7640,8 +7642,8 @@
         </p:nvSpPr>
         <p:spPr>
           <a:xfrm>
-            <a:off x="7430872" y="3566160"/>
-            <a:ext cx="1682496" cy="960120"/>
+            <a:off x="7430872" y="3584448"/>
+            <a:ext cx="1682496" cy="1371600"/>
           </a:xfrm>
           <a:prstGeom prst="rect">
             <a:avLst/>
@@ -7657,7 +7659,7 @@
               <a:buNone/>
             </a:pPr>
             <a:r>
-              <a:rPr lang="en-US" sz="980" dirty="0">
+              <a:rPr lang="en-US" sz="1800" dirty="0">
                 <a:solidFill>
                   <a:srgbClr val="CBD5E1"/>
                 </a:solidFill>
@@ -7667,7 +7669,7 @@
               </a:rPr>
               <a:t>Regional dashboards, administered through the Qlik Management Console, served all four markets.</a:t>
             </a:r>
-            <a:endParaRPr lang="en-US" sz="980" dirty="0"/>
+            <a:endParaRPr lang="en-US" sz="1800" dirty="0"/>
           </a:p>
         </p:txBody>
       </p:sp>
@@ -7679,7 +7681,7 @@
         </p:nvSpPr>
         <p:spPr>
           <a:xfrm>
-            <a:off x="9255100" y="3419856"/>
+            <a:off x="9255100" y="3566160"/>
             <a:ext cx="210312" cy="274320"/>
           </a:xfrm>
           <a:prstGeom prst="rightArrow">
@@ -7699,8 +7701,8 @@
         </p:nvSpPr>
         <p:spPr>
           <a:xfrm>
-            <a:off x="9479128" y="2514600"/>
-            <a:ext cx="1938528" cy="2103120"/>
+            <a:off x="9479128" y="2331720"/>
+            <a:ext cx="1938528" cy="2697480"/>
           </a:xfrm>
           <a:prstGeom prst="roundRect">
             <a:avLst>
@@ -7726,8 +7728,8 @@
         </p:nvSpPr>
         <p:spPr>
           <a:xfrm>
-            <a:off x="9607144" y="2633472"/>
-            <a:ext cx="1682496" cy="310896"/>
+            <a:off x="9607144" y="2450592"/>
+            <a:ext cx="1682496" cy="365760"/>
           </a:xfrm>
           <a:prstGeom prst="rect">
             <a:avLst/>
@@ -7743,7 +7745,7 @@
               <a:buNone/>
             </a:pPr>
             <a:r>
-              <a:rPr lang="en-US" sz="1100" b="1" dirty="0">
+              <a:rPr lang="en-US" sz="1800" b="1" dirty="0">
                 <a:solidFill>
                   <a:srgbClr val="3B82F6"/>
                 </a:solidFill>
@@ -7753,7 +7755,7 @@
               </a:rPr>
               <a:t>05</a:t>
             </a:r>
-            <a:endParaRPr lang="en-US" sz="1100" dirty="0"/>
+            <a:endParaRPr lang="en-US" sz="1800" dirty="0"/>
           </a:p>
         </p:txBody>
       </p:sp>
@@ -7765,8 +7767,8 @@
         </p:nvSpPr>
         <p:spPr>
           <a:xfrm>
-            <a:off x="9607144" y="2962656"/>
-            <a:ext cx="1682496" cy="566928"/>
+            <a:off x="9607144" y="2834640"/>
+            <a:ext cx="1682496" cy="713232"/>
           </a:xfrm>
           <a:prstGeom prst="rect">
             <a:avLst/>
@@ -7782,7 +7784,7 @@
               <a:buNone/>
             </a:pPr>
             <a:r>
-              <a:rPr lang="en-US" sz="1350" b="1" dirty="0">
+              <a:rPr lang="en-US" sz="1800" b="1" dirty="0">
                 <a:solidFill>
                   <a:srgbClr val="FFFFFF"/>
                 </a:solidFill>
@@ -7792,7 +7794,7 @@
               </a:rPr>
               <a:t>Decisions</a:t>
             </a:r>
-            <a:endParaRPr lang="en-US" sz="1350" dirty="0"/>
+            <a:endParaRPr lang="en-US" sz="1800" dirty="0"/>
           </a:p>
         </p:txBody>
       </p:sp>
@@ -7804,8 +7806,8 @@
         </p:nvSpPr>
         <p:spPr>
           <a:xfrm>
-            <a:off x="9607144" y="3566160"/>
-            <a:ext cx="1682496" cy="960120"/>
+            <a:off x="9607144" y="3584448"/>
+            <a:ext cx="1682496" cy="1371600"/>
           </a:xfrm>
           <a:prstGeom prst="rect">
             <a:avLst/>
@@ -7821,7 +7823,7 @@
               <a:buNone/>
             </a:pPr>
             <a:r>
-              <a:rPr lang="en-US" sz="980" dirty="0">
+              <a:rPr lang="en-US" sz="1800" dirty="0">
                 <a:solidFill>
                   <a:srgbClr val="CBD5E1"/>
                 </a:solidFill>
@@ -7831,7 +7833,7 @@
               </a:rPr>
               <a:t>Regional leadership and country teams acted on the numbers - or challenged them.</a:t>
             </a:r>
-            <a:endParaRPr lang="en-US" sz="980" dirty="0"/>
+            <a:endParaRPr lang="en-US" sz="1800" dirty="0"/>
           </a:p>
         </p:txBody>
       </p:sp>
@@ -7866,8 +7868,8 @@
         </p:nvSpPr>
         <p:spPr>
           <a:xfrm>
-            <a:off x="822960" y="6053328"/>
-            <a:ext cx="9692640" cy="457200"/>
+            <a:off x="822960" y="6035040"/>
+            <a:ext cx="10424160" cy="566928"/>
           </a:xfrm>
           <a:prstGeom prst="rect">
             <a:avLst/>
@@ -7883,9 +7885,9 @@
               <a:buNone/>
             </a:pPr>
             <a:r>
-              <a:rPr lang="en-US" sz="1150" dirty="0">
-                <a:solidFill>
-                  <a:srgbClr val="64748B"/>
+              <a:rPr lang="en-US" sz="1800" dirty="0">
+                <a:solidFill>
+                  <a:srgbClr val="8FA3BF"/>
                 </a:solidFill>
                 <a:latin typeface="Segoe UI" pitchFamily="34" charset="0"/>
                 <a:ea typeface="Segoe UI" pitchFamily="34" charset="-122"/>
@@ -7893,7 +7895,7 @@
               </a:rPr>
               <a:t>Every seam between layers was a reconciliation point, not a leap of faith.</a:t>
             </a:r>
-            <a:endParaRPr lang="en-US" sz="1150" dirty="0"/>
+            <a:endParaRPr lang="en-US" sz="1800" dirty="0"/>
           </a:p>
         </p:txBody>
       </p:sp>
@@ -7905,8 +7907,8 @@
         </p:nvSpPr>
         <p:spPr>
           <a:xfrm>
-            <a:off x="10698480" y="6382512"/>
-            <a:ext cx="1188720" cy="365760"/>
+            <a:off x="10698480" y="6309360"/>
+            <a:ext cx="1188720" cy="411480"/>
           </a:xfrm>
           <a:prstGeom prst="rect">
             <a:avLst/>
@@ -7922,9 +7924,9 @@
               <a:buNone/>
             </a:pPr>
             <a:r>
-              <a:rPr lang="en-US" sz="1000" dirty="0">
-                <a:solidFill>
-                  <a:srgbClr val="64748B"/>
+              <a:rPr lang="en-US" sz="1800" dirty="0">
+                <a:solidFill>
+                  <a:srgbClr val="8FA3BF"/>
                 </a:solidFill>
                 <a:latin typeface="Consolas" pitchFamily="34" charset="0"/>
                 <a:ea typeface="Consolas" pitchFamily="34" charset="-122"/>
@@ -7932,7 +7934,7 @@
               </a:rPr>
               <a:t>5 / 14</a:t>
             </a:r>
-            <a:endParaRPr lang="en-US" sz="1000" dirty="0"/>
+            <a:endParaRPr lang="en-US" sz="1800" dirty="0"/>
           </a:p>
         </p:txBody>
       </p:sp>
@@ -8016,8 +8018,8 @@
         </p:nvSpPr>
         <p:spPr>
           <a:xfrm>
-            <a:off x="822960" y="502920"/>
-            <a:ext cx="10515600" cy="365760"/>
+            <a:off x="822960" y="457200"/>
+            <a:ext cx="10515600" cy="411480"/>
           </a:xfrm>
           <a:prstGeom prst="rect">
             <a:avLst/>
@@ -8033,7 +8035,7 @@
               <a:buNone/>
             </a:pPr>
             <a:r>
-              <a:rPr lang="en-US" sz="1200" spc="300" kern="0" dirty="0">
+              <a:rPr lang="en-US" sz="1800" spc="300" kern="0" dirty="0">
                 <a:solidFill>
                   <a:srgbClr val="06B6D4"/>
                 </a:solidFill>
@@ -8043,7 +8045,7 @@
               </a:rPr>
               <a:t>RESPONSIBILITIES</a:t>
             </a:r>
-            <a:endParaRPr lang="en-US" sz="1200" dirty="0"/>
+            <a:endParaRPr lang="en-US" sz="1800" dirty="0"/>
           </a:p>
         </p:txBody>
       </p:sp>
@@ -8101,7 +8103,7 @@
           </p:nvPr>
         </p:nvGraphicFramePr>
         <p:xfrm>
-          <a:off x="822960" y="2011680"/>
+          <a:off x="822960" y="1828800"/>
           <a:ext cx="10515600" cy="914400"/>
         </p:xfrm>
         <a:graphic>
@@ -8113,7 +8115,7 @@
                 <a:gridCol w="3505200"/>
                 <a:gridCol w="3505200"/>
               </a:tblGrid>
-              <a:tr h="402336">
+              <a:tr h="457200">
                 <a:tc>
                   <a:txBody>
                     <a:bodyPr/>
@@ -8123,7 +8125,7 @@
                         <a:buNone/>
                       </a:pPr>
                       <a:r>
-                        <a:rPr lang="en-US" sz="1150" b="1" dirty="0">
+                        <a:rPr lang="en-US" sz="1800" b="1" dirty="0">
                           <a:solidFill>
                             <a:srgbClr val="FFFFFF"/>
                           </a:solidFill>
@@ -8133,14 +8135,14 @@
                         </a:rPr>
                         <a:t>Area</a:t>
                       </a:r>
-                      <a:endParaRPr lang="en-US" sz="1150" dirty="0">
+                      <a:endParaRPr lang="en-US" sz="1800" dirty="0">
                         <a:latin typeface="Segoe UI" charset="0"/>
                         <a:ea typeface="Segoe UI" charset="0"/>
                         <a:cs typeface="Segoe UI" charset="0"/>
                       </a:endParaRPr>
                     </a:p>
                   </a:txBody>
-                  <a:tcPr marL="64008" marR="64008" marT="64008" marB="64008" anchor="ctr">
+                  <a:tcPr marL="36576" marR="36576" marT="36576" marB="36576" anchor="ctr">
                     <a:lnL w="6350" cap="flat" cmpd="sng" algn="ctr">
                       <a:solidFill>
                         <a:srgbClr val="24365A"/>
@@ -8191,7 +8193,7 @@
                         <a:buNone/>
                       </a:pPr>
                       <a:r>
-                        <a:rPr lang="en-US" sz="1150" b="1" dirty="0">
+                        <a:rPr lang="en-US" sz="1800" b="1" dirty="0">
                           <a:solidFill>
                             <a:srgbClr val="FFFFFF"/>
                           </a:solidFill>
@@ -8201,14 +8203,14 @@
                         </a:rPr>
                         <a:t>Tooling</a:t>
                       </a:r>
-                      <a:endParaRPr lang="en-US" sz="1150" dirty="0">
+                      <a:endParaRPr lang="en-US" sz="1800" dirty="0">
                         <a:latin typeface="Segoe UI" charset="0"/>
                         <a:ea typeface="Segoe UI" charset="0"/>
                         <a:cs typeface="Segoe UI" charset="0"/>
                       </a:endParaRPr>
                     </a:p>
                   </a:txBody>
-                  <a:tcPr marL="64008" marR="64008" marT="64008" marB="64008" anchor="ctr">
+                  <a:tcPr marL="36576" marR="36576" marT="36576" marB="36576" anchor="ctr">
                     <a:lnL w="6350" cap="flat" cmpd="sng" algn="ctr">
                       <a:solidFill>
                         <a:srgbClr val="24365A"/>
@@ -8259,7 +8261,7 @@
                         <a:buNone/>
                       </a:pPr>
                       <a:r>
-                        <a:rPr lang="en-US" sz="1150" b="1" dirty="0">
+                        <a:rPr lang="en-US" sz="1800" b="1" dirty="0">
                           <a:solidFill>
                             <a:srgbClr val="FFFFFF"/>
                           </a:solidFill>
@@ -8269,14 +8271,14 @@
                         </a:rPr>
                         <a:t>What it meant in practice</a:t>
                       </a:r>
-                      <a:endParaRPr lang="en-US" sz="1150" dirty="0">
+                      <a:endParaRPr lang="en-US" sz="1800" dirty="0">
                         <a:latin typeface="Segoe UI" charset="0"/>
                         <a:ea typeface="Segoe UI" charset="0"/>
                         <a:cs typeface="Segoe UI" charset="0"/>
                       </a:endParaRPr>
                     </a:p>
                   </a:txBody>
-                  <a:tcPr marL="64008" marR="64008" marT="64008" marB="64008" anchor="ctr">
+                  <a:tcPr marL="36576" marR="36576" marT="36576" marB="36576" anchor="ctr">
                     <a:lnL w="6350" cap="flat" cmpd="sng" algn="ctr">
                       <a:solidFill>
                         <a:srgbClr val="24365A"/>
@@ -8319,7 +8321,7 @@
                   </a:tcPr>
                 </a:tc>
               </a:tr>
-              <a:tr h="402336">
+              <a:tr h="457200">
                 <a:tc>
                   <a:txBody>
                     <a:bodyPr/>
@@ -8329,7 +8331,7 @@
                         <a:buNone/>
                       </a:pPr>
                       <a:r>
-                        <a:rPr lang="en-US" sz="1080" dirty="0">
+                        <a:rPr lang="en-US" sz="1800" dirty="0">
                           <a:solidFill>
                             <a:srgbClr val="CBD5E1"/>
                           </a:solidFill>
@@ -8339,14 +8341,14 @@
                         </a:rPr>
                         <a:t>Pipeline scheduling</a:t>
                       </a:r>
-                      <a:endParaRPr lang="en-US" sz="1080" dirty="0">
+                      <a:endParaRPr lang="en-US" sz="1800" dirty="0">
                         <a:latin typeface="Segoe UI" charset="0"/>
                         <a:ea typeface="Segoe UI" charset="0"/>
                         <a:cs typeface="Segoe UI" charset="0"/>
                       </a:endParaRPr>
                     </a:p>
                   </a:txBody>
-                  <a:tcPr marL="64008" marR="64008" marT="64008" marB="64008" anchor="ctr">
+                  <a:tcPr marL="36576" marR="36576" marT="36576" marB="36576" anchor="ctr">
                     <a:lnL w="6350" cap="flat" cmpd="sng" algn="ctr">
                       <a:solidFill>
                         <a:srgbClr val="24365A"/>
@@ -8397,7 +8399,7 @@
                         <a:buNone/>
                       </a:pPr>
                       <a:r>
-                        <a:rPr lang="en-US" sz="1080" dirty="0">
+                        <a:rPr lang="en-US" sz="1800" dirty="0">
                           <a:solidFill>
                             <a:srgbClr val="CBD5E1"/>
                           </a:solidFill>
@@ -8407,14 +8409,14 @@
                         </a:rPr>
                         <a:t>Alteryx</a:t>
                       </a:r>
-                      <a:endParaRPr lang="en-US" sz="1080" dirty="0">
+                      <a:endParaRPr lang="en-US" sz="1800" dirty="0">
                         <a:latin typeface="Segoe UI" charset="0"/>
                         <a:ea typeface="Segoe UI" charset="0"/>
                         <a:cs typeface="Segoe UI" charset="0"/>
                       </a:endParaRPr>
                     </a:p>
                   </a:txBody>
-                  <a:tcPr marL="64008" marR="64008" marT="64008" marB="64008" anchor="ctr">
+                  <a:tcPr marL="36576" marR="36576" marT="36576" marB="36576" anchor="ctr">
                     <a:lnL w="6350" cap="flat" cmpd="sng" algn="ctr">
                       <a:solidFill>
                         <a:srgbClr val="24365A"/>
@@ -8465,7 +8467,7 @@
                         <a:buNone/>
                       </a:pPr>
                       <a:r>
-                        <a:rPr lang="en-US" sz="1080" dirty="0">
+                        <a:rPr lang="en-US" sz="1800" dirty="0">
                           <a:solidFill>
                             <a:srgbClr val="CBD5E1"/>
                           </a:solidFill>
@@ -8475,14 +8477,14 @@
                         </a:rPr>
                         <a:t>Owned the scheduled workflows feeding the datalake and their day-to-day health</a:t>
                       </a:r>
-                      <a:endParaRPr lang="en-US" sz="1080" dirty="0">
+                      <a:endParaRPr lang="en-US" sz="1800" dirty="0">
                         <a:latin typeface="Segoe UI" charset="0"/>
                         <a:ea typeface="Segoe UI" charset="0"/>
                         <a:cs typeface="Segoe UI" charset="0"/>
                       </a:endParaRPr>
                     </a:p>
                   </a:txBody>
-                  <a:tcPr marL="64008" marR="64008" marT="64008" marB="64008" anchor="ctr">
+                  <a:tcPr marL="36576" marR="36576" marT="36576" marB="36576" anchor="ctr">
                     <a:lnL w="6350" cap="flat" cmpd="sng" algn="ctr">
                       <a:solidFill>
                         <a:srgbClr val="24365A"/>
@@ -8525,7 +8527,7 @@
                   </a:tcPr>
                 </a:tc>
               </a:tr>
-              <a:tr h="402336">
+              <a:tr h="457200">
                 <a:tc>
                   <a:txBody>
                     <a:bodyPr/>
@@ -8535,7 +8537,7 @@
                         <a:buNone/>
                       </a:pPr>
                       <a:r>
-                        <a:rPr lang="en-US" sz="1080" dirty="0">
+                        <a:rPr lang="en-US" sz="1800" dirty="0">
                           <a:solidFill>
                             <a:srgbClr val="CBD5E1"/>
                           </a:solidFill>
@@ -8545,14 +8547,14 @@
                         </a:rPr>
                         <a:t>Dashboard platform</a:t>
                       </a:r>
-                      <a:endParaRPr lang="en-US" sz="1080" dirty="0">
+                      <a:endParaRPr lang="en-US" sz="1800" dirty="0">
                         <a:latin typeface="Segoe UI" charset="0"/>
                         <a:ea typeface="Segoe UI" charset="0"/>
                         <a:cs typeface="Segoe UI" charset="0"/>
                       </a:endParaRPr>
                     </a:p>
                   </a:txBody>
-                  <a:tcPr marL="64008" marR="64008" marT="64008" marB="64008" anchor="ctr">
+                  <a:tcPr marL="36576" marR="36576" marT="36576" marB="36576" anchor="ctr">
                     <a:lnL w="6350" cap="flat" cmpd="sng" algn="ctr">
                       <a:solidFill>
                         <a:srgbClr val="24365A"/>
@@ -8603,7 +8605,7 @@
                         <a:buNone/>
                       </a:pPr>
                       <a:r>
-                        <a:rPr lang="en-US" sz="1080" dirty="0">
+                        <a:rPr lang="en-US" sz="1800" dirty="0">
                           <a:solidFill>
                             <a:srgbClr val="CBD5E1"/>
                           </a:solidFill>
@@ -8613,14 +8615,14 @@
                         </a:rPr>
                         <a:t>Qlik Sense</a:t>
                       </a:r>
-                      <a:endParaRPr lang="en-US" sz="1080" dirty="0">
+                      <a:endParaRPr lang="en-US" sz="1800" dirty="0">
                         <a:latin typeface="Segoe UI" charset="0"/>
                         <a:ea typeface="Segoe UI" charset="0"/>
                         <a:cs typeface="Segoe UI" charset="0"/>
                       </a:endParaRPr>
                     </a:p>
                   </a:txBody>
-                  <a:tcPr marL="64008" marR="64008" marT="64008" marB="64008" anchor="ctr">
+                  <a:tcPr marL="36576" marR="36576" marT="36576" marB="36576" anchor="ctr">
                     <a:lnL w="6350" cap="flat" cmpd="sng" algn="ctr">
                       <a:solidFill>
                         <a:srgbClr val="24365A"/>
@@ -8671,7 +8673,7 @@
                         <a:buNone/>
                       </a:pPr>
                       <a:r>
-                        <a:rPr lang="en-US" sz="1080" dirty="0">
+                        <a:rPr lang="en-US" sz="1800" dirty="0">
                           <a:solidFill>
                             <a:srgbClr val="CBD5E1"/>
                           </a:solidFill>
@@ -8681,14 +8683,14 @@
                         </a:rPr>
                         <a:t>Administered the Management Console behind regional dashboards in four markets</a:t>
                       </a:r>
-                      <a:endParaRPr lang="en-US" sz="1080" dirty="0">
+                      <a:endParaRPr lang="en-US" sz="1800" dirty="0">
                         <a:latin typeface="Segoe UI" charset="0"/>
                         <a:ea typeface="Segoe UI" charset="0"/>
                         <a:cs typeface="Segoe UI" charset="0"/>
                       </a:endParaRPr>
                     </a:p>
                   </a:txBody>
-                  <a:tcPr marL="64008" marR="64008" marT="64008" marB="64008" anchor="ctr">
+                  <a:tcPr marL="36576" marR="36576" marT="36576" marB="36576" anchor="ctr">
                     <a:lnL w="6350" cap="flat" cmpd="sng" algn="ctr">
                       <a:solidFill>
                         <a:srgbClr val="24365A"/>
@@ -8731,7 +8733,7 @@
                   </a:tcPr>
                 </a:tc>
               </a:tr>
-              <a:tr h="402336">
+              <a:tr h="457200">
                 <a:tc>
                   <a:txBody>
                     <a:bodyPr/>
@@ -8741,7 +8743,7 @@
                         <a:buNone/>
                       </a:pPr>
                       <a:r>
-                        <a:rPr lang="en-US" sz="1080" dirty="0">
+                        <a:rPr lang="en-US" sz="1800" dirty="0">
                           <a:solidFill>
                             <a:srgbClr val="CBD5E1"/>
                           </a:solidFill>
@@ -8751,14 +8753,14 @@
                         </a:rPr>
                         <a:t>Data foundation</a:t>
                       </a:r>
-                      <a:endParaRPr lang="en-US" sz="1080" dirty="0">
+                      <a:endParaRPr lang="en-US" sz="1800" dirty="0">
                         <a:latin typeface="Segoe UI" charset="0"/>
                         <a:ea typeface="Segoe UI" charset="0"/>
                         <a:cs typeface="Segoe UI" charset="0"/>
                       </a:endParaRPr>
                     </a:p>
                   </a:txBody>
-                  <a:tcPr marL="64008" marR="64008" marT="64008" marB="64008" anchor="ctr">
+                  <a:tcPr marL="36576" marR="36576" marT="36576" marB="36576" anchor="ctr">
                     <a:lnL w="6350" cap="flat" cmpd="sng" algn="ctr">
                       <a:solidFill>
                         <a:srgbClr val="24365A"/>
@@ -8809,7 +8811,7 @@
                         <a:buNone/>
                       </a:pPr>
                       <a:r>
-                        <a:rPr lang="en-US" sz="1080" dirty="0">
+                        <a:rPr lang="en-US" sz="1800" dirty="0">
                           <a:solidFill>
                             <a:srgbClr val="CBD5E1"/>
                           </a:solidFill>
@@ -8819,14 +8821,14 @@
                         </a:rPr>
                         <a:t>MS SQL Server</a:t>
                       </a:r>
-                      <a:endParaRPr lang="en-US" sz="1080" dirty="0">
+                      <a:endParaRPr lang="en-US" sz="1800" dirty="0">
                         <a:latin typeface="Segoe UI" charset="0"/>
                         <a:ea typeface="Segoe UI" charset="0"/>
                         <a:cs typeface="Segoe UI" charset="0"/>
                       </a:endParaRPr>
                     </a:p>
                   </a:txBody>
-                  <a:tcPr marL="64008" marR="64008" marT="64008" marB="64008" anchor="ctr">
+                  <a:tcPr marL="36576" marR="36576" marT="36576" marB="36576" anchor="ctr">
                     <a:lnL w="6350" cap="flat" cmpd="sng" algn="ctr">
                       <a:solidFill>
                         <a:srgbClr val="24365A"/>
@@ -8877,7 +8879,7 @@
                         <a:buNone/>
                       </a:pPr>
                       <a:r>
-                        <a:rPr lang="en-US" sz="1080" dirty="0">
+                        <a:rPr lang="en-US" sz="1800" dirty="0">
                           <a:solidFill>
                             <a:srgbClr val="CBD5E1"/>
                           </a:solidFill>
@@ -8887,14 +8889,14 @@
                         </a:rPr>
                         <a:t>Kept the shared foundation dependable for every downstream report</a:t>
                       </a:r>
-                      <a:endParaRPr lang="en-US" sz="1080" dirty="0">
+                      <a:endParaRPr lang="en-US" sz="1800" dirty="0">
                         <a:latin typeface="Segoe UI" charset="0"/>
                         <a:ea typeface="Segoe UI" charset="0"/>
                         <a:cs typeface="Segoe UI" charset="0"/>
                       </a:endParaRPr>
                     </a:p>
                   </a:txBody>
-                  <a:tcPr marL="64008" marR="64008" marT="64008" marB="64008" anchor="ctr">
+                  <a:tcPr marL="36576" marR="36576" marT="36576" marB="36576" anchor="ctr">
                     <a:lnL w="6350" cap="flat" cmpd="sng" algn="ctr">
                       <a:solidFill>
                         <a:srgbClr val="24365A"/>
@@ -8937,7 +8939,7 @@
                   </a:tcPr>
                 </a:tc>
               </a:tr>
-              <a:tr h="402336">
+              <a:tr h="457200">
                 <a:tc>
                   <a:txBody>
                     <a:bodyPr/>
@@ -8947,7 +8949,7 @@
                         <a:buNone/>
                       </a:pPr>
                       <a:r>
-                        <a:rPr lang="en-US" sz="1080" dirty="0">
+                        <a:rPr lang="en-US" sz="1800" dirty="0">
                           <a:solidFill>
                             <a:srgbClr val="CBD5E1"/>
                           </a:solidFill>
@@ -8957,14 +8959,14 @@
                         </a:rPr>
                         <a:t>Data quality</a:t>
                       </a:r>
-                      <a:endParaRPr lang="en-US" sz="1080" dirty="0">
+                      <a:endParaRPr lang="en-US" sz="1800" dirty="0">
                         <a:latin typeface="Segoe UI" charset="0"/>
                         <a:ea typeface="Segoe UI" charset="0"/>
                         <a:cs typeface="Segoe UI" charset="0"/>
                       </a:endParaRPr>
                     </a:p>
                   </a:txBody>
-                  <a:tcPr marL="64008" marR="64008" marT="64008" marB="64008" anchor="ctr">
+                  <a:tcPr marL="36576" marR="36576" marT="36576" marB="36576" anchor="ctr">
                     <a:lnL w="6350" cap="flat" cmpd="sng" algn="ctr">
                       <a:solidFill>
                         <a:srgbClr val="24365A"/>
@@ -9015,7 +9017,7 @@
                         <a:buNone/>
                       </a:pPr>
                       <a:r>
-                        <a:rPr lang="en-US" sz="1080" dirty="0">
+                        <a:rPr lang="en-US" sz="1800" dirty="0">
                           <a:solidFill>
                             <a:srgbClr val="CBD5E1"/>
                           </a:solidFill>
@@ -9025,14 +9027,14 @@
                         </a:rPr>
                         <a:t>Datalake vs store systems</a:t>
                       </a:r>
-                      <a:endParaRPr lang="en-US" sz="1080" dirty="0">
+                      <a:endParaRPr lang="en-US" sz="1800" dirty="0">
                         <a:latin typeface="Segoe UI" charset="0"/>
                         <a:ea typeface="Segoe UI" charset="0"/>
                         <a:cs typeface="Segoe UI" charset="0"/>
                       </a:endParaRPr>
                     </a:p>
                   </a:txBody>
-                  <a:tcPr marL="64008" marR="64008" marT="64008" marB="64008" anchor="ctr">
+                  <a:tcPr marL="36576" marR="36576" marT="36576" marB="36576" anchor="ctr">
                     <a:lnL w="6350" cap="flat" cmpd="sng" algn="ctr">
                       <a:solidFill>
                         <a:srgbClr val="24365A"/>
@@ -9083,7 +9085,7 @@
                         <a:buNone/>
                       </a:pPr>
                       <a:r>
-                        <a:rPr lang="en-US" sz="1080" dirty="0">
+                        <a:rPr lang="en-US" sz="1800" dirty="0">
                           <a:solidFill>
                             <a:srgbClr val="CBD5E1"/>
                           </a:solidFill>
@@ -9093,14 +9095,14 @@
                         </a:rPr>
                         <a:t>Ran reconciliation checks and discrepancy hunting between lake and sources</a:t>
                       </a:r>
-                      <a:endParaRPr lang="en-US" sz="1080" dirty="0">
+                      <a:endParaRPr lang="en-US" sz="1800" dirty="0">
                         <a:latin typeface="Segoe UI" charset="0"/>
                         <a:ea typeface="Segoe UI" charset="0"/>
                         <a:cs typeface="Segoe UI" charset="0"/>
                       </a:endParaRPr>
                     </a:p>
                   </a:txBody>
-                  <a:tcPr marL="64008" marR="64008" marT="64008" marB="64008" anchor="ctr">
+                  <a:tcPr marL="36576" marR="36576" marT="36576" marB="36576" anchor="ctr">
                     <a:lnL w="6350" cap="flat" cmpd="sng" algn="ctr">
                       <a:solidFill>
                         <a:srgbClr val="24365A"/>
@@ -9143,7 +9145,7 @@
                   </a:tcPr>
                 </a:tc>
               </a:tr>
-              <a:tr h="402336">
+              <a:tr h="457200">
                 <a:tc>
                   <a:txBody>
                     <a:bodyPr/>
@@ -9153,7 +9155,7 @@
                         <a:buNone/>
                       </a:pPr>
                       <a:r>
-                        <a:rPr lang="en-US" sz="1080" dirty="0">
+                        <a:rPr lang="en-US" sz="1800" dirty="0">
                           <a:solidFill>
                             <a:srgbClr val="CBD5E1"/>
                           </a:solidFill>
@@ -9163,14 +9165,14 @@
                         </a:rPr>
                         <a:t>Alignment</a:t>
                       </a:r>
-                      <a:endParaRPr lang="en-US" sz="1080" dirty="0">
+                      <a:endParaRPr lang="en-US" sz="1800" dirty="0">
                         <a:latin typeface="Segoe UI" charset="0"/>
                         <a:ea typeface="Segoe UI" charset="0"/>
                         <a:cs typeface="Segoe UI" charset="0"/>
                       </a:endParaRPr>
                     </a:p>
                   </a:txBody>
-                  <a:tcPr marL="64008" marR="64008" marT="64008" marB="64008" anchor="ctr">
+                  <a:tcPr marL="36576" marR="36576" marT="36576" marB="36576" anchor="ctr">
                     <a:lnL w="6350" cap="flat" cmpd="sng" algn="ctr">
                       <a:solidFill>
                         <a:srgbClr val="24365A"/>
@@ -9221,7 +9223,7 @@
                         <a:buNone/>
                       </a:pPr>
                       <a:r>
-                        <a:rPr lang="en-US" sz="1080" dirty="0">
+                        <a:rPr lang="en-US" sz="1800" dirty="0">
                           <a:solidFill>
                             <a:srgbClr val="CBD5E1"/>
                           </a:solidFill>
@@ -9231,14 +9233,14 @@
                         </a:rPr>
                         <a:t>BI, Regional IT, business</a:t>
                       </a:r>
-                      <a:endParaRPr lang="en-US" sz="1080" dirty="0">
+                      <a:endParaRPr lang="en-US" sz="1800" dirty="0">
                         <a:latin typeface="Segoe UI" charset="0"/>
                         <a:ea typeface="Segoe UI" charset="0"/>
                         <a:cs typeface="Segoe UI" charset="0"/>
                       </a:endParaRPr>
                     </a:p>
                   </a:txBody>
-                  <a:tcPr marL="64008" marR="64008" marT="64008" marB="64008" anchor="ctr">
+                  <a:tcPr marL="36576" marR="36576" marT="36576" marB="36576" anchor="ctr">
                     <a:lnL w="6350" cap="flat" cmpd="sng" algn="ctr">
                       <a:solidFill>
                         <a:srgbClr val="24365A"/>
@@ -9289,7 +9291,7 @@
                         <a:buNone/>
                       </a:pPr>
                       <a:r>
-                        <a:rPr lang="en-US" sz="1080" dirty="0">
+                        <a:rPr lang="en-US" sz="1800" dirty="0">
                           <a:solidFill>
                             <a:srgbClr val="CBD5E1"/>
                           </a:solidFill>
@@ -9299,14 +9301,14 @@
                         </a:rPr>
                         <a:t>Turned every mismatch into a conversation with a named owner on both sides</a:t>
                       </a:r>
-                      <a:endParaRPr lang="en-US" sz="1080" dirty="0">
+                      <a:endParaRPr lang="en-US" sz="1800" dirty="0">
                         <a:latin typeface="Segoe UI" charset="0"/>
                         <a:ea typeface="Segoe UI" charset="0"/>
                         <a:cs typeface="Segoe UI" charset="0"/>
                       </a:endParaRPr>
                     </a:p>
                   </a:txBody>
-                  <a:tcPr marL="64008" marR="64008" marT="64008" marB="64008" anchor="ctr">
+                  <a:tcPr marL="36576" marR="36576" marT="36576" marB="36576" anchor="ctr">
                     <a:lnL w="6350" cap="flat" cmpd="sng" algn="ctr">
                       <a:solidFill>
                         <a:srgbClr val="24365A"/>
@@ -9384,8 +9386,8 @@
         </p:nvSpPr>
         <p:spPr>
           <a:xfrm>
-            <a:off x="822960" y="6053328"/>
-            <a:ext cx="9692640" cy="457200"/>
+            <a:off x="822960" y="6035040"/>
+            <a:ext cx="10424160" cy="566928"/>
           </a:xfrm>
           <a:prstGeom prst="rect">
             <a:avLst/>
@@ -9401,9 +9403,9 @@
               <a:buNone/>
             </a:pPr>
             <a:r>
-              <a:rPr lang="en-US" sz="1150" dirty="0">
-                <a:solidFill>
-                  <a:srgbClr val="64748B"/>
+              <a:rPr lang="en-US" sz="1800" dirty="0">
+                <a:solidFill>
+                  <a:srgbClr val="8FA3BF"/>
                 </a:solidFill>
                 <a:latin typeface="Segoe UI" pitchFamily="34" charset="0"/>
                 <a:ea typeface="Segoe UI" pitchFamily="34" charset="-122"/>
@@ -9411,7 +9413,7 @@
               </a:rPr>
               <a:t>Five ownership areas, one thread: nothing was allowed to fail quietly.</a:t>
             </a:r>
-            <a:endParaRPr lang="en-US" sz="1150" dirty="0"/>
+            <a:endParaRPr lang="en-US" sz="1800" dirty="0"/>
           </a:p>
         </p:txBody>
       </p:sp>
@@ -9423,8 +9425,8 @@
         </p:nvSpPr>
         <p:spPr>
           <a:xfrm>
-            <a:off x="10698480" y="6382512"/>
-            <a:ext cx="1188720" cy="365760"/>
+            <a:off x="10698480" y="6309360"/>
+            <a:ext cx="1188720" cy="411480"/>
           </a:xfrm>
           <a:prstGeom prst="rect">
             <a:avLst/>
@@ -9440,9 +9442,9 @@
               <a:buNone/>
             </a:pPr>
             <a:r>
-              <a:rPr lang="en-US" sz="1000" dirty="0">
-                <a:solidFill>
-                  <a:srgbClr val="64748B"/>
+              <a:rPr lang="en-US" sz="1800" dirty="0">
+                <a:solidFill>
+                  <a:srgbClr val="8FA3BF"/>
                 </a:solidFill>
                 <a:latin typeface="Consolas" pitchFamily="34" charset="0"/>
                 <a:ea typeface="Consolas" pitchFamily="34" charset="-122"/>
@@ -9450,7 +9452,7 @@
               </a:rPr>
               <a:t>6 / 14</a:t>
             </a:r>
-            <a:endParaRPr lang="en-US" sz="1000" dirty="0"/>
+            <a:endParaRPr lang="en-US" sz="1800" dirty="0"/>
           </a:p>
         </p:txBody>
       </p:sp>
@@ -9534,8 +9536,8 @@
         </p:nvSpPr>
         <p:spPr>
           <a:xfrm>
-            <a:off x="822960" y="502920"/>
-            <a:ext cx="10515600" cy="365760"/>
+            <a:off x="822960" y="457200"/>
+            <a:ext cx="10515600" cy="411480"/>
           </a:xfrm>
           <a:prstGeom prst="rect">
             <a:avLst/>
@@ -9551,7 +9553,7 @@
               <a:buNone/>
             </a:pPr>
             <a:r>
-              <a:rPr lang="en-US" sz="1200" spc="300" kern="0" dirty="0">
+              <a:rPr lang="en-US" sz="1800" spc="300" kern="0" dirty="0">
                 <a:solidFill>
                   <a:srgbClr val="06B6D4"/>
                 </a:solidFill>
@@ -9561,7 +9563,7 @@
               </a:rPr>
               <a:t>DATA QUALITY</a:t>
             </a:r>
-            <a:endParaRPr lang="en-US" sz="1200" dirty="0"/>
+            <a:endParaRPr lang="en-US" sz="1800" dirty="0"/>
           </a:p>
         </p:txBody>
       </p:sp>
@@ -9612,8 +9614,8 @@
         </p:nvSpPr>
         <p:spPr>
           <a:xfrm>
-            <a:off x="868680" y="2011680"/>
-            <a:ext cx="10424160" cy="3566160"/>
+            <a:off x="868680" y="1965960"/>
+            <a:ext cx="10424160" cy="3840480"/>
           </a:xfrm>
           <a:prstGeom prst="rect">
             <a:avLst/>
@@ -9636,7 +9638,7 @@
               <a:buChar char="▸"/>
             </a:pPr>
             <a:r>
-              <a:rPr lang="en-US" sz="1600" dirty="0">
+              <a:rPr lang="en-US" sz="2000" dirty="0">
                 <a:solidFill>
                   <a:srgbClr val="CBD5E1"/>
                 </a:solidFill>
@@ -9646,7 +9648,7 @@
               </a:rPr>
               <a:t>Reconciliation ran at every seam: row counts, sum checks, and sampled row-level comparisons</a:t>
             </a:r>
-            <a:endParaRPr lang="en-US" sz="1600" dirty="0"/>
+            <a:endParaRPr lang="en-US" sz="2000" dirty="0"/>
           </a:p>
           <a:p>
             <a:pPr marL="342900" indent="-342900">
@@ -9660,7 +9662,7 @@
               <a:buChar char="▸"/>
             </a:pPr>
             <a:r>
-              <a:rPr lang="en-US" sz="1600" dirty="0">
+              <a:rPr lang="en-US" sz="2000" dirty="0">
                 <a:solidFill>
                   <a:srgbClr val="CBD5E1"/>
                 </a:solidFill>
@@ -9670,7 +9672,7 @@
               </a:rPr>
               <a:t>Every source was profiled for expected row counts, key uniqueness, update cadence, and known quirks</a:t>
             </a:r>
-            <a:endParaRPr lang="en-US" sz="1600" dirty="0"/>
+            <a:endParaRPr lang="en-US" sz="2000" dirty="0"/>
           </a:p>
           <a:p>
             <a:pPr marL="342900" indent="-342900">
@@ -9684,7 +9686,7 @@
               <a:buChar char="▸"/>
             </a:pPr>
             <a:r>
-              <a:rPr lang="en-US" sz="1600" dirty="0">
+              <a:rPr lang="en-US" sz="2000" dirty="0">
                 <a:solidFill>
                   <a:srgbClr val="CBD5E1"/>
                 </a:solidFill>
@@ -9694,7 +9696,7 @@
               </a:rPr>
               <a:t>Freshness alarms covered every source, because silent schedule deaths are the default state</a:t>
             </a:r>
-            <a:endParaRPr lang="en-US" sz="1600" dirty="0"/>
+            <a:endParaRPr lang="en-US" sz="2000" dirty="0"/>
           </a:p>
           <a:p>
             <a:pPr marL="342900" indent="-342900">
@@ -9708,7 +9710,7 @@
               <a:buChar char="▸"/>
             </a:pPr>
             <a:r>
-              <a:rPr lang="en-US" sz="1600" dirty="0">
+              <a:rPr lang="en-US" sz="2000" dirty="0">
                 <a:solidFill>
                   <a:srgbClr val="CBD5E1"/>
                 </a:solidFill>
@@ -9718,7 +9720,7 @@
               </a:rPr>
               <a:t>Each discrepancy got a named owner on both sides, not just a ticket</a:t>
             </a:r>
-            <a:endParaRPr lang="en-US" sz="1600" dirty="0"/>
+            <a:endParaRPr lang="en-US" sz="2000" dirty="0"/>
           </a:p>
           <a:p>
             <a:pPr marL="342900" indent="-342900">
@@ -9732,7 +9734,7 @@
               <a:buChar char="▸"/>
             </a:pPr>
             <a:r>
-              <a:rPr lang="en-US" sz="1600" dirty="0">
+              <a:rPr lang="en-US" sz="2000" dirty="0">
                 <a:solidFill>
                   <a:srgbClr val="CBD5E1"/>
                 </a:solidFill>
@@ -9742,7 +9744,7 @@
               </a:rPr>
               <a:t>Runbooks lived next to the pipelines, not in a wiki nobody opens</a:t>
             </a:r>
-            <a:endParaRPr lang="en-US" sz="1600" dirty="0"/>
+            <a:endParaRPr lang="en-US" sz="2000" dirty="0"/>
           </a:p>
         </p:txBody>
       </p:sp>
@@ -9754,8 +9756,8 @@
         </p:nvSpPr>
         <p:spPr>
           <a:xfrm>
-            <a:off x="10698480" y="6382512"/>
-            <a:ext cx="1188720" cy="365760"/>
+            <a:off x="10698480" y="6309360"/>
+            <a:ext cx="1188720" cy="411480"/>
           </a:xfrm>
           <a:prstGeom prst="rect">
             <a:avLst/>
@@ -9771,9 +9773,9 @@
               <a:buNone/>
             </a:pPr>
             <a:r>
-              <a:rPr lang="en-US" sz="1000" dirty="0">
-                <a:solidFill>
-                  <a:srgbClr val="64748B"/>
+              <a:rPr lang="en-US" sz="1800" dirty="0">
+                <a:solidFill>
+                  <a:srgbClr val="8FA3BF"/>
                 </a:solidFill>
                 <a:latin typeface="Consolas" pitchFamily="34" charset="0"/>
                 <a:ea typeface="Consolas" pitchFamily="34" charset="-122"/>
@@ -9781,7 +9783,7 @@
               </a:rPr>
               <a:t>7 / 14</a:t>
             </a:r>
-            <a:endParaRPr lang="en-US" sz="1000" dirty="0"/>
+            <a:endParaRPr lang="en-US" sz="1800" dirty="0"/>
           </a:p>
         </p:txBody>
       </p:sp>
@@ -9865,8 +9867,8 @@
         </p:nvSpPr>
         <p:spPr>
           <a:xfrm>
-            <a:off x="822960" y="502920"/>
-            <a:ext cx="10515600" cy="365760"/>
+            <a:off x="822960" y="457200"/>
+            <a:ext cx="10515600" cy="411480"/>
           </a:xfrm>
           <a:prstGeom prst="rect">
             <a:avLst/>
@@ -9882,7 +9884,7 @@
               <a:buNone/>
             </a:pPr>
             <a:r>
-              <a:rPr lang="en-US" sz="1200" spc="300" kern="0" dirty="0">
+              <a:rPr lang="en-US" sz="1800" spc="300" kern="0" dirty="0">
                 <a:solidFill>
                   <a:srgbClr val="06B6D4"/>
                 </a:solidFill>
@@ -9892,7 +9894,7 @@
               </a:rPr>
               <a:t>INCIDENT SOURCES</a:t>
             </a:r>
-            <a:endParaRPr lang="en-US" sz="1200" dirty="0"/>
+            <a:endParaRPr lang="en-US" sz="1800" dirty="0"/>
           </a:p>
         </p:txBody>
       </p:sp>
@@ -9943,7 +9945,7 @@
         </p:nvGraphicFramePr>
         <p:xfrm>
           <a:off x="822960" y="1874520"/>
-          <a:ext cx="10515600" cy="3337560"/>
+          <a:ext cx="10515600" cy="3246120"/>
         </p:xfrm>
         <a:graphic xmlns:a="http://schemas.openxmlformats.org/drawingml/2006/main">
           <a:graphicData uri="http://schemas.openxmlformats.org/drawingml/2006/chart">
@@ -9959,7 +9961,7 @@
         </p:nvSpPr>
         <p:spPr>
           <a:xfrm>
-            <a:off x="822960" y="5413248"/>
+            <a:off x="822960" y="5321808"/>
             <a:ext cx="10515600" cy="0"/>
           </a:xfrm>
           <a:prstGeom prst="line">
@@ -9982,8 +9984,8 @@
         </p:nvSpPr>
         <p:spPr>
           <a:xfrm>
-            <a:off x="822960" y="5504688"/>
-            <a:ext cx="10424160" cy="411480"/>
+            <a:off x="822960" y="5394960"/>
+            <a:ext cx="10424160" cy="502920"/>
           </a:xfrm>
           <a:prstGeom prst="rect">
             <a:avLst/>
@@ -9999,7 +10001,7 @@
               <a:buNone/>
             </a:pPr>
             <a:r>
-              <a:rPr lang="en-US" sz="1300" i="1" dirty="0">
+              <a:rPr lang="en-US" sz="1800" i="1" dirty="0">
                 <a:solidFill>
                   <a:srgbClr val="06B6D4"/>
                 </a:solidFill>
@@ -10009,7 +10011,7 @@
               </a:rPr>
               <a:t>→  Instrumenting schedules and definitions prevented more incidents than fixing code ever did.</a:t>
             </a:r>
-            <a:endParaRPr lang="en-US" sz="1300" dirty="0"/>
+            <a:endParaRPr lang="en-US" sz="1800" dirty="0"/>
           </a:p>
         </p:txBody>
       </p:sp>
@@ -10044,8 +10046,8 @@
         </p:nvSpPr>
         <p:spPr>
           <a:xfrm>
-            <a:off x="822960" y="6053328"/>
-            <a:ext cx="9692640" cy="457200"/>
+            <a:off x="822960" y="6035040"/>
+            <a:ext cx="10424160" cy="566928"/>
           </a:xfrm>
           <a:prstGeom prst="rect">
             <a:avLst/>
@@ -10061,9 +10063,9 @@
               <a:buNone/>
             </a:pPr>
             <a:r>
-              <a:rPr lang="en-US" sz="1150" dirty="0">
-                <a:solidFill>
-                  <a:srgbClr val="64748B"/>
+              <a:rPr lang="en-US" sz="1800" dirty="0">
+                <a:solidFill>
+                  <a:srgbClr val="8FA3BF"/>
                 </a:solidFill>
                 <a:latin typeface="Segoe UI" pitchFamily="34" charset="0"/>
                 <a:ea typeface="Segoe UI" pitchFamily="34" charset="-122"/>
@@ -10071,7 +10073,7 @@
               </a:rPr>
               <a:t>Illustrative distribution of reporting-incident causes across the operation.</a:t>
             </a:r>
-            <a:endParaRPr lang="en-US" sz="1150" dirty="0"/>
+            <a:endParaRPr lang="en-US" sz="1800" dirty="0"/>
           </a:p>
         </p:txBody>
       </p:sp>
@@ -10083,8 +10085,8 @@
         </p:nvSpPr>
         <p:spPr>
           <a:xfrm>
-            <a:off x="10698480" y="6382512"/>
-            <a:ext cx="1188720" cy="365760"/>
+            <a:off x="10698480" y="6309360"/>
+            <a:ext cx="1188720" cy="411480"/>
           </a:xfrm>
           <a:prstGeom prst="rect">
             <a:avLst/>
@@ -10100,9 +10102,9 @@
               <a:buNone/>
             </a:pPr>
             <a:r>
-              <a:rPr lang="en-US" sz="1000" dirty="0">
-                <a:solidFill>
-                  <a:srgbClr val="64748B"/>
+              <a:rPr lang="en-US" sz="1800" dirty="0">
+                <a:solidFill>
+                  <a:srgbClr val="8FA3BF"/>
                 </a:solidFill>
                 <a:latin typeface="Consolas" pitchFamily="34" charset="0"/>
                 <a:ea typeface="Consolas" pitchFamily="34" charset="-122"/>
@@ -10110,7 +10112,7 @@
               </a:rPr>
               <a:t>8 / 14</a:t>
             </a:r>
-            <a:endParaRPr lang="en-US" sz="1000" dirty="0"/>
+            <a:endParaRPr lang="en-US" sz="1800" dirty="0"/>
           </a:p>
         </p:txBody>
       </p:sp>
@@ -10194,8 +10196,8 @@
         </p:nvSpPr>
         <p:spPr>
           <a:xfrm>
-            <a:off x="822960" y="502920"/>
-            <a:ext cx="10515600" cy="365760"/>
+            <a:off x="822960" y="457200"/>
+            <a:ext cx="10515600" cy="411480"/>
           </a:xfrm>
           <a:prstGeom prst="rect">
             <a:avLst/>
@@ -10211,7 +10213,7 @@
               <a:buNone/>
             </a:pPr>
             <a:r>
-              <a:rPr lang="en-US" sz="1200" spc="300" kern="0" dirty="0">
+              <a:rPr lang="en-US" sz="1800" spc="300" kern="0" dirty="0">
                 <a:solidFill>
                   <a:srgbClr val="06B6D4"/>
                 </a:solidFill>
@@ -10221,7 +10223,7 @@
               </a:rPr>
               <a:t>GOVERNANCE</a:t>
             </a:r>
-            <a:endParaRPr lang="en-US" sz="1200" dirty="0"/>
+            <a:endParaRPr lang="en-US" sz="1800" dirty="0"/>
           </a:p>
         </p:txBody>
       </p:sp>
@@ -10272,8 +10274,8 @@
         </p:nvSpPr>
         <p:spPr>
           <a:xfrm>
-            <a:off x="868680" y="2011680"/>
-            <a:ext cx="10424160" cy="3566160"/>
+            <a:off x="868680" y="1965960"/>
+            <a:ext cx="10424160" cy="3840480"/>
           </a:xfrm>
           <a:prstGeom prst="rect">
             <a:avLst/>
@@ -10296,7 +10298,7 @@
               <a:buChar char="▸"/>
             </a:pPr>
             <a:r>
-              <a:rPr lang="en-US" sz="1600" dirty="0">
+              <a:rPr lang="en-US" sz="2000" dirty="0">
                 <a:solidFill>
                   <a:srgbClr val="CBD5E1"/>
                 </a:solidFill>
@@ -10306,7 +10308,7 @@
               </a:rPr>
               <a:t>The definition registry was the most-used document: every KPI, its formula, its scope, its owner</a:t>
             </a:r>
-            <a:endParaRPr lang="en-US" sz="1600" dirty="0"/>
+            <a:endParaRPr lang="en-US" sz="2000" dirty="0"/>
           </a:p>
           <a:p>
             <a:pPr marL="342900" indent="-342900">
@@ -10320,7 +10322,7 @@
               <a:buChar char="▸"/>
             </a:pPr>
             <a:r>
-              <a:rPr lang="en-US" sz="1600" dirty="0">
+              <a:rPr lang="en-US" sz="2000" dirty="0">
                 <a:solidFill>
                   <a:srgbClr val="CBD5E1"/>
                 </a:solidFill>
@@ -10330,7 +10332,7 @@
               </a:rPr>
               <a:t>When two markets disagreed on a returns figure, the fix was almost never technical</a:t>
             </a:r>
-            <a:endParaRPr lang="en-US" sz="1600" dirty="0"/>
+            <a:endParaRPr lang="en-US" sz="2000" dirty="0"/>
           </a:p>
           <a:p>
             <a:pPr marL="342900" indent="-342900">
@@ -10344,7 +10346,7 @@
               <a:buChar char="▸"/>
             </a:pPr>
             <a:r>
-              <a:rPr lang="en-US" sz="1600" dirty="0">
+              <a:rPr lang="en-US" sz="2000" dirty="0">
                 <a:solidFill>
                   <a:srgbClr val="CBD5E1"/>
                 </a:solidFill>
@@ -10354,7 +10356,7 @@
               </a:rPr>
               <a:t>Most cross-country disputes were definitions wearing the costume of data problems</a:t>
             </a:r>
-            <a:endParaRPr lang="en-US" sz="1600" dirty="0"/>
+            <a:endParaRPr lang="en-US" sz="2000" dirty="0"/>
           </a:p>
           <a:p>
             <a:pPr marL="342900" indent="-342900">
@@ -10368,7 +10370,7 @@
               <a:buChar char="▸"/>
             </a:pPr>
             <a:r>
-              <a:rPr lang="en-US" sz="1600" dirty="0">
+              <a:rPr lang="en-US" sz="2000" dirty="0">
                 <a:solidFill>
                   <a:srgbClr val="CBD5E1"/>
                 </a:solidFill>
@@ -10378,7 +10380,7 @@
               </a:rPr>
               <a:t>Local context matters per market - standardize definitions, never cultures</a:t>
             </a:r>
-            <a:endParaRPr lang="en-US" sz="1600" dirty="0"/>
+            <a:endParaRPr lang="en-US" sz="2000" dirty="0"/>
           </a:p>
           <a:p>
             <a:pPr marL="342900" indent="-342900">
@@ -10392,7 +10394,7 @@
               <a:buChar char="▸"/>
             </a:pPr>
             <a:r>
-              <a:rPr lang="en-US" sz="1600" dirty="0">
+              <a:rPr lang="en-US" sz="2000" dirty="0">
                 <a:solidFill>
                   <a:srgbClr val="CBD5E1"/>
                 </a:solidFill>
@@ -10402,7 +10404,7 @@
               </a:rPr>
               <a:t>Trust in the numbers is earned row by row and destroyed by one unexplained figure</a:t>
             </a:r>
-            <a:endParaRPr lang="en-US" sz="1600" dirty="0"/>
+            <a:endParaRPr lang="en-US" sz="2000" dirty="0"/>
           </a:p>
         </p:txBody>
       </p:sp>
@@ -10414,8 +10416,8 @@
         </p:nvSpPr>
         <p:spPr>
           <a:xfrm>
-            <a:off x="10698480" y="6382512"/>
-            <a:ext cx="1188720" cy="365760"/>
+            <a:off x="10698480" y="6309360"/>
+            <a:ext cx="1188720" cy="411480"/>
           </a:xfrm>
           <a:prstGeom prst="rect">
             <a:avLst/>
@@ -10431,9 +10433,9 @@
               <a:buNone/>
             </a:pPr>
             <a:r>
-              <a:rPr lang="en-US" sz="1000" dirty="0">
-                <a:solidFill>
-                  <a:srgbClr val="64748B"/>
+              <a:rPr lang="en-US" sz="1800" dirty="0">
+                <a:solidFill>
+                  <a:srgbClr val="8FA3BF"/>
                 </a:solidFill>
                 <a:latin typeface="Consolas" pitchFamily="34" charset="0"/>
                 <a:ea typeface="Consolas" pitchFamily="34" charset="-122"/>
@@ -10441,7 +10443,7 @@
               </a:rPr>
               <a:t>9 / 14</a:t>
             </a:r>
-            <a:endParaRPr lang="en-US" sz="1000" dirty="0"/>
+            <a:endParaRPr lang="en-US" sz="1800" dirty="0"/>
           </a:p>
         </p:txBody>
       </p:sp>
